--- a/ADG/08장/8장_Primary구조변경의Standby반영.pptx
+++ b/ADG/08장/8장_Primary구조변경의Standby반영.pptx
@@ -5816,7 +5816,26 @@
                 </a:solidFill>
                 <a:latin typeface="맑은 고딕"/>
               </a:rPr>
-              <a:t>•  Standby에 `$ORACLE_HOME/dbs/UNNAMED00016` (0바이트)</a:t>
+              <a:t>•  Standby에 </a:t>
+            </a:r>
+            <a:r>
+              <a:rPr sz="1700" b="0">
+                <a:solidFill>
+                  <a:srgbClr val="222222"/>
+                </a:solidFill>
+                <a:latin typeface="Consolas"/>
+                <a:cs typeface="Consolas"/>
+              </a:rPr>
+              <a:t>$ORACLE_HOME/dbs/UNNAMED00016</a:t>
+            </a:r>
+            <a:r>
+              <a:rPr sz="1700" b="0">
+                <a:solidFill>
+                  <a:srgbClr val="222222"/>
+                </a:solidFill>
+                <a:latin typeface="맑은 고딕"/>
+              </a:rPr>
+              <a:t> (0바이트)</a:t>
             </a:r>
           </a:p>
           <a:p>
@@ -5832,7 +5851,26 @@
                 </a:solidFill>
                 <a:latin typeface="맑은 고딕"/>
               </a:rPr>
-              <a:t>•  이름 규칙 : `UNNAMED` + 파일 번호 5자리</a:t>
+              <a:t>•  이름 규칙 : </a:t>
+            </a:r>
+            <a:r>
+              <a:rPr sz="1700" b="0">
+                <a:solidFill>
+                  <a:srgbClr val="222222"/>
+                </a:solidFill>
+                <a:latin typeface="Consolas"/>
+                <a:cs typeface="Consolas"/>
+              </a:rPr>
+              <a:t>UNNAMED</a:t>
+            </a:r>
+            <a:r>
+              <a:rPr sz="1700" b="0">
+                <a:solidFill>
+                  <a:srgbClr val="222222"/>
+                </a:solidFill>
+                <a:latin typeface="맑은 고딕"/>
+              </a:rPr>
+              <a:t> + 파일 번호 5자리</a:t>
             </a:r>
           </a:p>
           <a:p>
@@ -5848,7 +5886,25 @@
                 </a:solidFill>
                 <a:latin typeface="맑은 고딕"/>
               </a:rPr>
-              <a:t>•  **MRP0이 사라진다** — 적용이 죽었다</a:t>
+              <a:t>•  </a:t>
+            </a:r>
+            <a:r>
+              <a:rPr sz="1700" b="1">
+                <a:solidFill>
+                  <a:srgbClr val="222222"/>
+                </a:solidFill>
+                <a:latin typeface="맑은 고딕"/>
+              </a:rPr>
+              <a:t>MRP0이 사라진다</a:t>
+            </a:r>
+            <a:r>
+              <a:rPr sz="1700" b="0">
+                <a:solidFill>
+                  <a:srgbClr val="222222"/>
+                </a:solidFill>
+                <a:latin typeface="맑은 고딕"/>
+              </a:rPr>
+              <a:t> — 적용이 죽었다</a:t>
             </a:r>
           </a:p>
         </p:txBody>
@@ -6027,7 +6083,17 @@
                 </a:solidFill>
                 <a:latin typeface="맑은 고딕"/>
               </a:rPr>
-              <a:t>•  `MRP0: Background Media Recovery terminated with error 1274`</a:t>
+              <a:t>•  </a:t>
+            </a:r>
+            <a:r>
+              <a:rPr sz="1700" b="0">
+                <a:solidFill>
+                  <a:srgbClr val="222222"/>
+                </a:solidFill>
+                <a:latin typeface="Consolas"/>
+                <a:cs typeface="Consolas"/>
+              </a:rPr>
+              <a:t>MRP0: Background Media Recovery terminated with error 1274</a:t>
             </a:r>
           </a:p>
           <a:p>
@@ -6043,7 +6109,25 @@
                 </a:solidFill>
                 <a:latin typeface="맑은 고딕"/>
               </a:rPr>
-              <a:t>•  Primary 쪽 목적지는 계속 **VALID**, ERROR 열도 비어 있다</a:t>
+              <a:t>•  Primary 쪽 목적지는 계속 </a:t>
+            </a:r>
+            <a:r>
+              <a:rPr sz="1700" b="1">
+                <a:solidFill>
+                  <a:srgbClr val="222222"/>
+                </a:solidFill>
+                <a:latin typeface="맑은 고딕"/>
+              </a:rPr>
+              <a:t>VALID</a:t>
+            </a:r>
+            <a:r>
+              <a:rPr sz="1700" b="0">
+                <a:solidFill>
+                  <a:srgbClr val="222222"/>
+                </a:solidFill>
+                <a:latin typeface="맑은 고딕"/>
+              </a:rPr>
+              <a:t>, ERROR 열도 비어 있다</a:t>
             </a:r>
           </a:p>
           <a:p>
@@ -6059,7 +6143,16 @@
                 </a:solidFill>
                 <a:latin typeface="맑은 고딕"/>
               </a:rPr>
-              <a:t>•  전송은 정상이고 **적용만 안 되기 때문**</a:t>
+              <a:t>•  전송은 정상이고 </a:t>
+            </a:r>
+            <a:r>
+              <a:rPr sz="1700" b="1">
+                <a:solidFill>
+                  <a:srgbClr val="222222"/>
+                </a:solidFill>
+                <a:latin typeface="맑은 고딕"/>
+              </a:rPr>
+              <a:t>적용만 안 되기 때문</a:t>
             </a:r>
           </a:p>
           <a:p>
@@ -6254,7 +6347,16 @@
                 </a:solidFill>
                 <a:latin typeface="맑은 고딕"/>
               </a:rPr>
-              <a:t>•  파라미터를 AUTO로, MRP 재기동 → **또 죽는다**</a:t>
+              <a:t>•  파라미터를 AUTO로, MRP 재기동 → </a:t>
+            </a:r>
+            <a:r>
+              <a:rPr sz="1700" b="1">
+                <a:solidFill>
+                  <a:srgbClr val="222222"/>
+                </a:solidFill>
+                <a:latin typeface="맑은 고딕"/>
+              </a:rPr>
+              <a:t>또 죽는다</a:t>
             </a:r>
           </a:p>
           <a:p>
@@ -6270,7 +6372,16 @@
                 </a:solidFill>
                 <a:latin typeface="맑은 고딕"/>
               </a:rPr>
-              <a:t>•  오류가 **1274에서 1111로 바뀐다**</a:t>
+              <a:t>•  오류가 </a:t>
+            </a:r>
+            <a:r>
+              <a:rPr sz="1700" b="1">
+                <a:solidFill>
+                  <a:srgbClr val="222222"/>
+                </a:solidFill>
+                <a:latin typeface="맑은 고딕"/>
+              </a:rPr>
+              <a:t>1274에서 1111로 바뀐다</a:t>
             </a:r>
           </a:p>
           <a:p>
@@ -6481,7 +6592,35 @@
                 </a:solidFill>
                 <a:latin typeface="맑은 고딕"/>
               </a:rPr>
-              <a:t>•  `V$DATAFILE.STATUS` = **RECOVER**</a:t>
+              <a:t>•  </a:t>
+            </a:r>
+            <a:r>
+              <a:rPr sz="1700" b="0">
+                <a:solidFill>
+                  <a:srgbClr val="222222"/>
+                </a:solidFill>
+                <a:latin typeface="Consolas"/>
+                <a:cs typeface="Consolas"/>
+              </a:rPr>
+              <a:t>V$DATAFILE.STATUS</a:t>
+            </a:r>
+            <a:r>
+              <a:rPr sz="1700" b="0">
+                <a:solidFill>
+                  <a:srgbClr val="222222"/>
+                </a:solidFill>
+                <a:latin typeface="맑은 고딕"/>
+              </a:rPr>
+              <a:t> = </a:t>
+            </a:r>
+            <a:r>
+              <a:rPr sz="1700" b="1">
+                <a:solidFill>
+                  <a:srgbClr val="222222"/>
+                </a:solidFill>
+                <a:latin typeface="맑은 고딕"/>
+              </a:rPr>
+              <a:t>RECOVER</a:t>
             </a:r>
           </a:p>
           <a:p>
@@ -6497,7 +6636,35 @@
                 </a:solidFill>
                 <a:latin typeface="맑은 고딕"/>
               </a:rPr>
-              <a:t>•  `V$DATAFILE_HEADER.ERROR` = **FILE MISSING**</a:t>
+              <a:t>•  </a:t>
+            </a:r>
+            <a:r>
+              <a:rPr sz="1700" b="0">
+                <a:solidFill>
+                  <a:srgbClr val="222222"/>
+                </a:solidFill>
+                <a:latin typeface="Consolas"/>
+                <a:cs typeface="Consolas"/>
+              </a:rPr>
+              <a:t>V$DATAFILE_HEADER.ERROR</a:t>
+            </a:r>
+            <a:r>
+              <a:rPr sz="1700" b="0">
+                <a:solidFill>
+                  <a:srgbClr val="222222"/>
+                </a:solidFill>
+                <a:latin typeface="맑은 고딕"/>
+              </a:rPr>
+              <a:t> = </a:t>
+            </a:r>
+            <a:r>
+              <a:rPr sz="1700" b="1">
+                <a:solidFill>
+                  <a:srgbClr val="222222"/>
+                </a:solidFill>
+                <a:latin typeface="맑은 고딕"/>
+              </a:rPr>
+              <a:t>FILE MISSING</a:t>
             </a:r>
           </a:p>
           <a:p>
@@ -6513,7 +6680,35 @@
                 </a:solidFill>
                 <a:latin typeface="맑은 고딕"/>
               </a:rPr>
-              <a:t>•  `V$RECOVER_FILE` → **no rows selected**</a:t>
+              <a:t>•  </a:t>
+            </a:r>
+            <a:r>
+              <a:rPr sz="1700" b="0">
+                <a:solidFill>
+                  <a:srgbClr val="222222"/>
+                </a:solidFill>
+                <a:latin typeface="Consolas"/>
+                <a:cs typeface="Consolas"/>
+              </a:rPr>
+              <a:t>V$RECOVER_FILE</a:t>
+            </a:r>
+            <a:r>
+              <a:rPr sz="1700" b="0">
+                <a:solidFill>
+                  <a:srgbClr val="222222"/>
+                </a:solidFill>
+                <a:latin typeface="맑은 고딕"/>
+              </a:rPr>
+              <a:t> → </a:t>
+            </a:r>
+            <a:r>
+              <a:rPr sz="1700" b="1">
+                <a:solidFill>
+                  <a:srgbClr val="222222"/>
+                </a:solidFill>
+                <a:latin typeface="맑은 고딕"/>
+              </a:rPr>
+              <a:t>no rows selected</a:t>
             </a:r>
           </a:p>
           <a:p>
@@ -6963,7 +7158,26 @@
                 </a:solidFill>
                 <a:latin typeface="맑은 고딕"/>
               </a:rPr>
-              <a:t>•  ① `STANDBY_FILE_MANAGEMENT` = MANUAL</a:t>
+              <a:t>•  ① </a:t>
+            </a:r>
+            <a:r>
+              <a:rPr sz="1700" b="0">
+                <a:solidFill>
+                  <a:srgbClr val="222222"/>
+                </a:solidFill>
+                <a:latin typeface="Consolas"/>
+                <a:cs typeface="Consolas"/>
+              </a:rPr>
+              <a:t>STANDBY_FILE_MANAGEMENT</a:t>
+            </a:r>
+            <a:r>
+              <a:rPr sz="1700" b="0">
+                <a:solidFill>
+                  <a:srgbClr val="222222"/>
+                </a:solidFill>
+                <a:latin typeface="맑은 고딕"/>
+              </a:rPr>
+              <a:t> = MANUAL</a:t>
             </a:r>
           </a:p>
           <a:p>
@@ -6979,7 +7193,17 @@
                 </a:solidFill>
                 <a:latin typeface="맑은 고딕"/>
               </a:rPr>
-              <a:t>•  ② `ALTER DATABASE CREATE DATAFILE '&lt;UNNAMED&gt;' AS NEW`</a:t>
+              <a:t>•  ② </a:t>
+            </a:r>
+            <a:r>
+              <a:rPr sz="1700" b="0">
+                <a:solidFill>
+                  <a:srgbClr val="222222"/>
+                </a:solidFill>
+                <a:latin typeface="Consolas"/>
+                <a:cs typeface="Consolas"/>
+              </a:rPr>
+              <a:t>ALTER DATABASE CREATE DATAFILE '&lt;UNNAMED&gt;' AS NEW</a:t>
             </a:r>
           </a:p>
           <a:p>
@@ -7190,7 +7414,35 @@
                 </a:solidFill>
                 <a:latin typeface="맑은 고딕"/>
               </a:rPr>
-              <a:t>•  실측 결과 : `o1_mf_dg_ts2_o8z81hpl_.dbf`, **10MB**</a:t>
+              <a:t>•  실측 결과 : </a:t>
+            </a:r>
+            <a:r>
+              <a:rPr sz="1700" b="0">
+                <a:solidFill>
+                  <a:srgbClr val="222222"/>
+                </a:solidFill>
+                <a:latin typeface="Consolas"/>
+                <a:cs typeface="Consolas"/>
+              </a:rPr>
+              <a:t>o1_mf_dg_ts2_o8z81hpl_.dbf</a:t>
+            </a:r>
+            <a:r>
+              <a:rPr sz="1700" b="0">
+                <a:solidFill>
+                  <a:srgbClr val="222222"/>
+                </a:solidFill>
+                <a:latin typeface="맑은 고딕"/>
+              </a:rPr>
+              <a:t>, </a:t>
+            </a:r>
+            <a:r>
+              <a:rPr sz="1700" b="1">
+                <a:solidFill>
+                  <a:srgbClr val="222222"/>
+                </a:solidFill>
+                <a:latin typeface="맑은 고딕"/>
+              </a:rPr>
+              <a:t>10MB</a:t>
             </a:r>
           </a:p>
           <a:p>
@@ -7206,7 +7458,26 @@
                 </a:solidFill>
                 <a:latin typeface="맑은 고딕"/>
               </a:rPr>
-              <a:t>•  테이블스페이스 이름 `dg_ts2`가 이름에 들어갔다</a:t>
+              <a:t>•  테이블스페이스 이름 </a:t>
+            </a:r>
+            <a:r>
+              <a:rPr sz="1700" b="0">
+                <a:solidFill>
+                  <a:srgbClr val="222222"/>
+                </a:solidFill>
+                <a:latin typeface="Consolas"/>
+                <a:cs typeface="Consolas"/>
+              </a:rPr>
+              <a:t>dg_ts2</a:t>
+            </a:r>
+            <a:r>
+              <a:rPr sz="1700" b="0">
+                <a:solidFill>
+                  <a:srgbClr val="222222"/>
+                </a:solidFill>
+                <a:latin typeface="맑은 고딕"/>
+              </a:rPr>
+              <a:t>가 이름에 들어갔다</a:t>
             </a:r>
           </a:p>
           <a:p>
@@ -7417,7 +7688,26 @@
                 </a:solidFill>
                 <a:latin typeface="맑은 고딕"/>
               </a:rPr>
-              <a:t>•  `AS NEW`로 만든 파일은 빈 껍데기</a:t>
+              <a:t>•  </a:t>
+            </a:r>
+            <a:r>
+              <a:rPr sz="1700" b="0">
+                <a:solidFill>
+                  <a:srgbClr val="222222"/>
+                </a:solidFill>
+                <a:latin typeface="Consolas"/>
+                <a:cs typeface="Consolas"/>
+              </a:rPr>
+              <a:t>AS NEW</a:t>
+            </a:r>
+            <a:r>
+              <a:rPr sz="1700" b="0">
+                <a:solidFill>
+                  <a:srgbClr val="222222"/>
+                </a:solidFill>
+                <a:latin typeface="맑은 고딕"/>
+              </a:rPr>
+              <a:t>로 만든 파일은 빈 껍데기</a:t>
             </a:r>
           </a:p>
           <a:p>
@@ -7465,7 +7755,16 @@
                 </a:solidFill>
                 <a:latin typeface="맑은 고딕"/>
               </a:rPr>
-              <a:t>•  Standby에서 **100행 그대로 조회됨**</a:t>
+              <a:t>•  Standby에서 </a:t>
+            </a:r>
+            <a:r>
+              <a:rPr sz="1700" b="1">
+                <a:solidFill>
+                  <a:srgbClr val="222222"/>
+                </a:solidFill>
+                <a:latin typeface="맑은 고딕"/>
+              </a:rPr>
+              <a:t>100행 그대로 조회됨</a:t>
             </a:r>
           </a:p>
         </p:txBody>
@@ -7860,7 +8159,26 @@
                 </a:solidFill>
                 <a:latin typeface="맑은 고딕"/>
               </a:rPr>
-              <a:t>•  `STANDBY_FILE_MANAGEMENT`가 자동화하는 범위와 하지 않는 범위를 구분한다.</a:t>
+              <a:t>•  </a:t>
+            </a:r>
+            <a:r>
+              <a:rPr sz="1600" b="0">
+                <a:solidFill>
+                  <a:srgbClr val="222222"/>
+                </a:solidFill>
+                <a:latin typeface="Consolas"/>
+                <a:cs typeface="Consolas"/>
+              </a:rPr>
+              <a:t>STANDBY_FILE_MANAGEMENT</a:t>
+            </a:r>
+            <a:r>
+              <a:rPr sz="1600" b="0">
+                <a:solidFill>
+                  <a:srgbClr val="222222"/>
+                </a:solidFill>
+                <a:latin typeface="맑은 고딕"/>
+              </a:rPr>
+              <a:t>가 자동화하는 범위와 하지 않는 범위를 구분한다.</a:t>
             </a:r>
           </a:p>
           <a:p>
@@ -7892,7 +8210,45 @@
                 </a:solidFill>
                 <a:latin typeface="맑은 고딕"/>
               </a:rPr>
-              <a:t>•  `MANUAL` 상태의 `UNNAMED` 파일과 ORA-1274·ORA-1111을 진단한다.</a:t>
+              <a:t>•  </a:t>
+            </a:r>
+            <a:r>
+              <a:rPr sz="1600" b="0">
+                <a:solidFill>
+                  <a:srgbClr val="222222"/>
+                </a:solidFill>
+                <a:latin typeface="Consolas"/>
+                <a:cs typeface="Consolas"/>
+              </a:rPr>
+              <a:t>MANUAL</a:t>
+            </a:r>
+            <a:r>
+              <a:rPr sz="1600" b="0">
+                <a:solidFill>
+                  <a:srgbClr val="222222"/>
+                </a:solidFill>
+                <a:latin typeface="맑은 고딕"/>
+              </a:rPr>
+              <a:t> 상태의 </a:t>
+            </a:r>
+            <a:r>
+              <a:rPr sz="1600" b="0">
+                <a:solidFill>
+                  <a:srgbClr val="222222"/>
+                </a:solidFill>
+                <a:latin typeface="Consolas"/>
+                <a:cs typeface="Consolas"/>
+              </a:rPr>
+              <a:t>UNNAMED</a:t>
+            </a:r>
+            <a:r>
+              <a:rPr sz="1600" b="0">
+                <a:solidFill>
+                  <a:srgbClr val="222222"/>
+                </a:solidFill>
+                <a:latin typeface="맑은 고딕"/>
+              </a:rPr>
+              <a:t> 파일과 ORA-1274·ORA-1111을 진단한다.</a:t>
             </a:r>
           </a:p>
           <a:p>
@@ -7908,7 +8264,26 @@
                 </a:solidFill>
                 <a:latin typeface="맑은 고딕"/>
               </a:rPr>
-              <a:t>•  `ALTER DATABASE CREATE DATAFILE ... AS NEW`로 복구한다.</a:t>
+              <a:t>•  </a:t>
+            </a:r>
+            <a:r>
+              <a:rPr sz="1600" b="0">
+                <a:solidFill>
+                  <a:srgbClr val="222222"/>
+                </a:solidFill>
+                <a:latin typeface="Consolas"/>
+                <a:cs typeface="Consolas"/>
+              </a:rPr>
+              <a:t>ALTER DATABASE CREATE DATAFILE ... AS NEW</a:t>
+            </a:r>
+            <a:r>
+              <a:rPr sz="1600" b="0">
+                <a:solidFill>
+                  <a:srgbClr val="222222"/>
+                </a:solidFill>
+                <a:latin typeface="맑은 고딕"/>
+              </a:rPr>
+              <a:t>로 복구한다.</a:t>
             </a:r>
           </a:p>
           <a:p>
@@ -8135,7 +8510,25 @@
                 </a:solidFill>
                 <a:latin typeface="맑은 고딕"/>
               </a:rPr>
-              <a:t>•  Standby에 PDB 등록, **GUID 동일**, 데이터 파일 3개</a:t>
+              <a:t>•  Standby에 PDB 등록, </a:t>
+            </a:r>
+            <a:r>
+              <a:rPr sz="1700" b="1">
+                <a:solidFill>
+                  <a:srgbClr val="222222"/>
+                </a:solidFill>
+                <a:latin typeface="맑은 고딕"/>
+              </a:rPr>
+              <a:t>GUID 동일</a:t>
+            </a:r>
+            <a:r>
+              <a:rPr sz="1700" b="0">
+                <a:solidFill>
+                  <a:srgbClr val="222222"/>
+                </a:solidFill>
+                <a:latin typeface="맑은 고딕"/>
+              </a:rPr>
+              <a:t>, 데이터 파일 3개</a:t>
             </a:r>
           </a:p>
           <a:p>
@@ -8151,7 +8544,45 @@
                 </a:solidFill>
                 <a:latin typeface="맑은 고딕"/>
               </a:rPr>
-              <a:t>•  `mkdir` 없이 `59FF1704.../datafile` 생성</a:t>
+              <a:t>•  </a:t>
+            </a:r>
+            <a:r>
+              <a:rPr sz="1700" b="0">
+                <a:solidFill>
+                  <a:srgbClr val="222222"/>
+                </a:solidFill>
+                <a:latin typeface="Consolas"/>
+                <a:cs typeface="Consolas"/>
+              </a:rPr>
+              <a:t>mkdir</a:t>
+            </a:r>
+            <a:r>
+              <a:rPr sz="1700" b="0">
+                <a:solidFill>
+                  <a:srgbClr val="222222"/>
+                </a:solidFill>
+                <a:latin typeface="맑은 고딕"/>
+              </a:rPr>
+              <a:t> 없이 </a:t>
+            </a:r>
+            <a:r>
+              <a:rPr sz="1700" b="0">
+                <a:solidFill>
+                  <a:srgbClr val="222222"/>
+                </a:solidFill>
+                <a:latin typeface="Consolas"/>
+                <a:cs typeface="Consolas"/>
+              </a:rPr>
+              <a:t>59FF1704.../datafile</a:t>
+            </a:r>
+            <a:r>
+              <a:rPr sz="1700" b="0">
+                <a:solidFill>
+                  <a:srgbClr val="222222"/>
+                </a:solidFill>
+                <a:latin typeface="맑은 고딕"/>
+              </a:rPr>
+              <a:t> 생성</a:t>
             </a:r>
           </a:p>
           <a:p>
@@ -8183,7 +8614,16 @@
                 </a:solidFill>
                 <a:latin typeface="맑은 고딕"/>
               </a:rPr>
-              <a:t>•  **PDB를 자주 추가하는 환경에서 OMF를 권하는 이유**</a:t>
+              <a:t>•  </a:t>
+            </a:r>
+            <a:r>
+              <a:rPr sz="1700" b="1">
+                <a:solidFill>
+                  <a:srgbClr val="222222"/>
+                </a:solidFill>
+                <a:latin typeface="맑은 고딕"/>
+              </a:rPr>
+              <a:t>PDB를 자주 추가하는 환경에서 OMF를 권하는 이유</a:t>
             </a:r>
           </a:p>
         </p:txBody>
@@ -8362,7 +8802,16 @@
                 </a:solidFill>
                 <a:latin typeface="맑은 고딕"/>
               </a:rPr>
-              <a:t>•  Standby에서 새 PDB의 OPEN_MODE는 **MOUNTED**</a:t>
+              <a:t>•  Standby에서 새 PDB의 OPEN_MODE는 </a:t>
+            </a:r>
+            <a:r>
+              <a:rPr sz="1700" b="1">
+                <a:solidFill>
+                  <a:srgbClr val="222222"/>
+                </a:solidFill>
+                <a:latin typeface="맑은 고딕"/>
+              </a:rPr>
+              <a:t>MOUNTED</a:t>
             </a:r>
           </a:p>
           <a:p>
@@ -8378,7 +8827,17 @@
                 </a:solidFill>
                 <a:latin typeface="맑은 고딕"/>
               </a:rPr>
-              <a:t>•  조회하면 `ORA-01219: ... queries allowed on fixed tables or views only`</a:t>
+              <a:t>•  조회하면 </a:t>
+            </a:r>
+            <a:r>
+              <a:rPr sz="1700" b="0">
+                <a:solidFill>
+                  <a:srgbClr val="222222"/>
+                </a:solidFill>
+                <a:latin typeface="Consolas"/>
+                <a:cs typeface="Consolas"/>
+              </a:rPr>
+              <a:t>ORA-01219: ... queries allowed on fixed tables or views only</a:t>
             </a:r>
           </a:p>
           <a:p>
@@ -8394,7 +8853,16 @@
                 </a:solidFill>
                 <a:latin typeface="맑은 고딕"/>
               </a:rPr>
-              <a:t>•  기존 PDB는 구축 때 열어 두었지만 **새 PDB는 아무도 열지 않는다**</a:t>
+              <a:t>•  기존 PDB는 구축 때 열어 두었지만 </a:t>
+            </a:r>
+            <a:r>
+              <a:rPr sz="1700" b="1">
+                <a:solidFill>
+                  <a:srgbClr val="222222"/>
+                </a:solidFill>
+                <a:latin typeface="맑은 고딕"/>
+              </a:rPr>
+              <a:t>새 PDB는 아무도 열지 않는다</a:t>
             </a:r>
           </a:p>
           <a:p>
@@ -8410,7 +8878,17 @@
                 </a:solidFill>
                 <a:latin typeface="맑은 고딕"/>
               </a:rPr>
-              <a:t>•  기동 스크립트에 `ALTER PLUGGABLE DATABASE ALL OPEN READ ONLY`</a:t>
+              <a:t>•  기동 스크립트에 </a:t>
+            </a:r>
+            <a:r>
+              <a:rPr sz="1700" b="0">
+                <a:solidFill>
+                  <a:srgbClr val="222222"/>
+                </a:solidFill>
+                <a:latin typeface="Consolas"/>
+                <a:cs typeface="Consolas"/>
+              </a:rPr>
+              <a:t>ALTER PLUGGABLE DATABASE ALL OPEN READ ONLY</a:t>
             </a:r>
           </a:p>
         </p:txBody>
@@ -8605,7 +9083,16 @@
                 </a:solidFill>
                 <a:latin typeface="맑은 고딕"/>
               </a:rPr>
-              <a:t>•  그런데 **빈 GUID 디렉터리는 남는다**</a:t>
+              <a:t>•  그런데 </a:t>
+            </a:r>
+            <a:r>
+              <a:rPr sz="1700" b="1">
+                <a:solidFill>
+                  <a:srgbClr val="222222"/>
+                </a:solidFill>
+                <a:latin typeface="맑은 고딕"/>
+              </a:rPr>
+              <a:t>빈 GUID 디렉터리는 남는다</a:t>
             </a:r>
           </a:p>
           <a:p>
@@ -8637,7 +9124,45 @@
                 </a:solidFill>
                 <a:latin typeface="맑은 고딕"/>
               </a:rPr>
-              <a:t>•  정리는 `V$PDBS.GUID`와 대조해 **`rmdir`**로</a:t>
+              <a:t>•  정리는 </a:t>
+            </a:r>
+            <a:r>
+              <a:rPr sz="1700" b="0">
+                <a:solidFill>
+                  <a:srgbClr val="222222"/>
+                </a:solidFill>
+                <a:latin typeface="Consolas"/>
+                <a:cs typeface="Consolas"/>
+              </a:rPr>
+              <a:t>V$PDBS.GUID</a:t>
+            </a:r>
+            <a:r>
+              <a:rPr sz="1700" b="0">
+                <a:solidFill>
+                  <a:srgbClr val="222222"/>
+                </a:solidFill>
+                <a:latin typeface="맑은 고딕"/>
+              </a:rPr>
+              <a:t>와 대조해 </a:t>
+            </a:r>
+            <a:r>
+              <a:rPr sz="1700" b="1">
+                <a:solidFill>
+                  <a:srgbClr val="222222"/>
+                </a:solidFill>
+                <a:latin typeface="Consolas"/>
+                <a:cs typeface="Consolas"/>
+              </a:rPr>
+              <a:t>rmdir</a:t>
+            </a:r>
+            <a:r>
+              <a:rPr sz="1700" b="0">
+                <a:solidFill>
+                  <a:srgbClr val="222222"/>
+                </a:solidFill>
+                <a:latin typeface="맑은 고딕"/>
+              </a:rPr>
+              <a:t>로</a:t>
             </a:r>
           </a:p>
         </p:txBody>
@@ -9087,7 +9612,16 @@
                 </a:solidFill>
                 <a:latin typeface="맑은 고딕"/>
               </a:rPr>
-              <a:t>•  45초 뒤 Standby : **세 그룹 그대로**</a:t>
+              <a:t>•  45초 뒤 Standby : </a:t>
+            </a:r>
+            <a:r>
+              <a:rPr sz="1700" b="1">
+                <a:solidFill>
+                  <a:srgbClr val="222222"/>
+                </a:solidFill>
+                <a:latin typeface="맑은 고딕"/>
+              </a:rPr>
+              <a:t>세 그룹 그대로</a:t>
             </a:r>
           </a:p>
           <a:p>
@@ -9330,7 +9864,16 @@
                 </a:solidFill>
                 <a:latin typeface="맑은 고딕"/>
               </a:rPr>
-              <a:t>•  **양쪽에 사람이 같이 적용해야 한다**</a:t>
+              <a:t>•  </a:t>
+            </a:r>
+            <a:r>
+              <a:rPr sz="1700" b="1">
+                <a:solidFill>
+                  <a:srgbClr val="222222"/>
+                </a:solidFill>
+                <a:latin typeface="맑은 고딕"/>
+              </a:rPr>
+              <a:t>양쪽에 사람이 같이 적용해야 한다</a:t>
             </a:r>
           </a:p>
           <a:p>
@@ -9525,7 +10068,45 @@
                 </a:solidFill>
                 <a:latin typeface="맑은 고딕"/>
               </a:rPr>
-              <a:t>•  `ORA-00301` + `ORA-27038` — 파일이 이미 있다</a:t>
+              <a:t>•  </a:t>
+            </a:r>
+            <a:r>
+              <a:rPr sz="1700" b="0">
+                <a:solidFill>
+                  <a:srgbClr val="222222"/>
+                </a:solidFill>
+                <a:latin typeface="Consolas"/>
+                <a:cs typeface="Consolas"/>
+              </a:rPr>
+              <a:t>ORA-00301</a:t>
+            </a:r>
+            <a:r>
+              <a:rPr sz="1700" b="0">
+                <a:solidFill>
+                  <a:srgbClr val="222222"/>
+                </a:solidFill>
+                <a:latin typeface="맑은 고딕"/>
+              </a:rPr>
+              <a:t> + </a:t>
+            </a:r>
+            <a:r>
+              <a:rPr sz="1700" b="0">
+                <a:solidFill>
+                  <a:srgbClr val="222222"/>
+                </a:solidFill>
+                <a:latin typeface="Consolas"/>
+                <a:cs typeface="Consolas"/>
+              </a:rPr>
+              <a:t>ORA-27038</a:t>
+            </a:r>
+            <a:r>
+              <a:rPr sz="1700" b="0">
+                <a:solidFill>
+                  <a:srgbClr val="222222"/>
+                </a:solidFill>
+                <a:latin typeface="맑은 고딕"/>
+              </a:rPr>
+              <a:t> — 파일이 이미 있다</a:t>
             </a:r>
           </a:p>
           <a:p>
@@ -9541,7 +10122,26 @@
                 </a:solidFill>
                 <a:latin typeface="맑은 고딕"/>
               </a:rPr>
-              <a:t>•  `ORA-00359` — 그룹이 없다</a:t>
+              <a:t>•  </a:t>
+            </a:r>
+            <a:r>
+              <a:rPr sz="1700" b="0">
+                <a:solidFill>
+                  <a:srgbClr val="222222"/>
+                </a:solidFill>
+                <a:latin typeface="Consolas"/>
+                <a:cs typeface="Consolas"/>
+              </a:rPr>
+              <a:t>ORA-00359</a:t>
+            </a:r>
+            <a:r>
+              <a:rPr sz="1700" b="0">
+                <a:solidFill>
+                  <a:srgbClr val="222222"/>
+                </a:solidFill>
+                <a:latin typeface="맑은 고딕"/>
+              </a:rPr>
+              <a:t> — 그룹이 없다</a:t>
             </a:r>
           </a:p>
           <a:p>
@@ -9557,7 +10157,26 @@
                 </a:solidFill>
                 <a:latin typeface="맑은 고딕"/>
               </a:rPr>
-              <a:t>•  `ORA-01623` — CURRENT 그룹은 지울 수 없다</a:t>
+              <a:t>•  </a:t>
+            </a:r>
+            <a:r>
+              <a:rPr sz="1700" b="0">
+                <a:solidFill>
+                  <a:srgbClr val="222222"/>
+                </a:solidFill>
+                <a:latin typeface="Consolas"/>
+                <a:cs typeface="Consolas"/>
+              </a:rPr>
+              <a:t>ORA-01623</a:t>
+            </a:r>
+            <a:r>
+              <a:rPr sz="1700" b="0">
+                <a:solidFill>
+                  <a:srgbClr val="222222"/>
+                </a:solidFill>
+                <a:latin typeface="맑은 고딕"/>
+              </a:rPr>
+              <a:t> — CURRENT 그룹은 지울 수 없다</a:t>
             </a:r>
           </a:p>
           <a:p>
@@ -9573,7 +10192,26 @@
                 </a:solidFill>
                 <a:latin typeface="맑은 고딕"/>
               </a:rPr>
-              <a:t>•  `ORA-00904` — V$LOG에 TYPE 열이 없다</a:t>
+              <a:t>•  </a:t>
+            </a:r>
+            <a:r>
+              <a:rPr sz="1700" b="0">
+                <a:solidFill>
+                  <a:srgbClr val="222222"/>
+                </a:solidFill>
+                <a:latin typeface="Consolas"/>
+                <a:cs typeface="Consolas"/>
+              </a:rPr>
+              <a:t>ORA-00904</a:t>
+            </a:r>
+            <a:r>
+              <a:rPr sz="1700" b="0">
+                <a:solidFill>
+                  <a:srgbClr val="222222"/>
+                </a:solidFill>
+                <a:latin typeface="맑은 고딕"/>
+              </a:rPr>
+              <a:t> — V$LOG에 TYPE 열이 없다</a:t>
             </a:r>
           </a:p>
         </p:txBody>
@@ -10007,7 +10645,26 @@
                 </a:solidFill>
                 <a:latin typeface="맑은 고딕"/>
               </a:rPr>
-              <a:t>•  `ORA-01623`으로 그룹 삭제가 거부됐다</a:t>
+              <a:t>•  </a:t>
+            </a:r>
+            <a:r>
+              <a:rPr sz="1700" b="0">
+                <a:solidFill>
+                  <a:srgbClr val="222222"/>
+                </a:solidFill>
+                <a:latin typeface="Consolas"/>
+                <a:cs typeface="Consolas"/>
+              </a:rPr>
+              <a:t>ORA-01623</a:t>
+            </a:r>
+            <a:r>
+              <a:rPr sz="1700" b="0">
+                <a:solidFill>
+                  <a:srgbClr val="222222"/>
+                </a:solidFill>
+                <a:latin typeface="맑은 고딕"/>
+              </a:rPr>
+              <a:t>으로 그룹 삭제가 거부됐다</a:t>
             </a:r>
           </a:p>
           <a:p>
@@ -10023,7 +10680,26 @@
                 </a:solidFill>
                 <a:latin typeface="맑은 고딕"/>
               </a:rPr>
-              <a:t>•  그 직후 `rm -f`로 CURRENT 리두 파일을 지웠다</a:t>
+              <a:t>•  그 직후 </a:t>
+            </a:r>
+            <a:r>
+              <a:rPr sz="1700" b="0">
+                <a:solidFill>
+                  <a:srgbClr val="222222"/>
+                </a:solidFill>
+                <a:latin typeface="Consolas"/>
+                <a:cs typeface="Consolas"/>
+              </a:rPr>
+              <a:t>rm -f</a:t>
+            </a:r>
+            <a:r>
+              <a:rPr sz="1700" b="0">
+                <a:solidFill>
+                  <a:srgbClr val="222222"/>
+                </a:solidFill>
+                <a:latin typeface="맑은 고딕"/>
+              </a:rPr>
+              <a:t>로 CURRENT 리두 파일을 지웠다</a:t>
             </a:r>
           </a:p>
           <a:p>
@@ -10039,7 +10715,16 @@
                 </a:solidFill>
                 <a:latin typeface="맑은 고딕"/>
               </a:rPr>
-              <a:t>•  **직후에는 아무 일도 일어나지 않았다**</a:t>
+              <a:t>•  </a:t>
+            </a:r>
+            <a:r>
+              <a:rPr sz="1700" b="1">
+                <a:solidFill>
+                  <a:srgbClr val="222222"/>
+                </a:solidFill>
+                <a:latin typeface="맑은 고딕"/>
+              </a:rPr>
+              <a:t>직후에는 아무 일도 일어나지 않았다</a:t>
             </a:r>
           </a:p>
           <a:p>
@@ -10234,7 +10919,26 @@
                 </a:solidFill>
                 <a:latin typeface="맑은 고딕"/>
               </a:rPr>
-              <a:t>•  `ORA-27041: unable to open file` (Linux Error 2)</a:t>
+              <a:t>•  </a:t>
+            </a:r>
+            <a:r>
+              <a:rPr sz="1700" b="0">
+                <a:solidFill>
+                  <a:srgbClr val="222222"/>
+                </a:solidFill>
+                <a:latin typeface="Consolas"/>
+                <a:cs typeface="Consolas"/>
+              </a:rPr>
+              <a:t>ORA-27041: unable to open file</a:t>
+            </a:r>
+            <a:r>
+              <a:rPr sz="1700" b="0">
+                <a:solidFill>
+                  <a:srgbClr val="222222"/>
+                </a:solidFill>
+                <a:latin typeface="맑은 고딕"/>
+              </a:rPr>
+              <a:t> (Linux Error 2)</a:t>
             </a:r>
           </a:p>
           <a:p>
@@ -10250,7 +10954,17 @@
                 </a:solidFill>
                 <a:latin typeface="맑은 고딕"/>
               </a:rPr>
-              <a:t>•  `ORA-00313: open failed for members of log group 8`</a:t>
+              <a:t>•  </a:t>
+            </a:r>
+            <a:r>
+              <a:rPr sz="1700" b="0">
+                <a:solidFill>
+                  <a:srgbClr val="222222"/>
+                </a:solidFill>
+                <a:latin typeface="Consolas"/>
+                <a:cs typeface="Consolas"/>
+              </a:rPr>
+              <a:t>ORA-00313: open failed for members of log group 8</a:t>
             </a:r>
           </a:p>
           <a:p>
@@ -10282,7 +10996,35 @@
                 </a:solidFill>
                 <a:latin typeface="맑은 고딕"/>
               </a:rPr>
-              <a:t>•  **PMON이 인스턴스를 종료** → 세션에는 `ORA-03113`</a:t>
+              <a:t>•  </a:t>
+            </a:r>
+            <a:r>
+              <a:rPr sz="1700" b="1">
+                <a:solidFill>
+                  <a:srgbClr val="222222"/>
+                </a:solidFill>
+                <a:latin typeface="맑은 고딕"/>
+              </a:rPr>
+              <a:t>PMON이 인스턴스를 종료</a:t>
+            </a:r>
+            <a:r>
+              <a:rPr sz="1700" b="0">
+                <a:solidFill>
+                  <a:srgbClr val="222222"/>
+                </a:solidFill>
+                <a:latin typeface="맑은 고딕"/>
+              </a:rPr>
+              <a:t> → 세션에는 </a:t>
+            </a:r>
+            <a:r>
+              <a:rPr sz="1700" b="0">
+                <a:solidFill>
+                  <a:srgbClr val="222222"/>
+                </a:solidFill>
+                <a:latin typeface="Consolas"/>
+                <a:cs typeface="Consolas"/>
+              </a:rPr>
+              <a:t>ORA-03113</a:t>
             </a:r>
           </a:p>
         </p:txBody>
@@ -10713,7 +11455,45 @@
                 </a:solidFill>
                 <a:latin typeface="맑은 고딕"/>
               </a:rPr>
-              <a:t>•  `CLEAR UNARCHIVED LOGFILE` → `ORA-01624` (크래시 복구에 필요)</a:t>
+              <a:t>•  </a:t>
+            </a:r>
+            <a:r>
+              <a:rPr sz="1700" b="0">
+                <a:solidFill>
+                  <a:srgbClr val="222222"/>
+                </a:solidFill>
+                <a:latin typeface="Consolas"/>
+                <a:cs typeface="Consolas"/>
+              </a:rPr>
+              <a:t>CLEAR UNARCHIVED LOGFILE</a:t>
+            </a:r>
+            <a:r>
+              <a:rPr sz="1700" b="0">
+                <a:solidFill>
+                  <a:srgbClr val="222222"/>
+                </a:solidFill>
+                <a:latin typeface="맑은 고딕"/>
+              </a:rPr>
+              <a:t> → </a:t>
+            </a:r>
+            <a:r>
+              <a:rPr sz="1700" b="0">
+                <a:solidFill>
+                  <a:srgbClr val="222222"/>
+                </a:solidFill>
+                <a:latin typeface="Consolas"/>
+                <a:cs typeface="Consolas"/>
+              </a:rPr>
+              <a:t>ORA-01624</a:t>
+            </a:r>
+            <a:r>
+              <a:rPr sz="1700" b="0">
+                <a:solidFill>
+                  <a:srgbClr val="222222"/>
+                </a:solidFill>
+                <a:latin typeface="맑은 고딕"/>
+              </a:rPr>
+              <a:t> (크래시 복구에 필요)</a:t>
             </a:r>
           </a:p>
           <a:p>
@@ -10729,7 +11509,16 @@
                 </a:solidFill>
                 <a:latin typeface="맑은 고딕"/>
               </a:rPr>
-              <a:t>•  Standby의 SRL을 가져와 적용 → 필요 SCN **2513532 → 2513652 전진**</a:t>
+              <a:t>•  Standby의 SRL을 가져와 적용 → 필요 SCN </a:t>
+            </a:r>
+            <a:r>
+              <a:rPr sz="1700" b="1">
+                <a:solidFill>
+                  <a:srgbClr val="222222"/>
+                </a:solidFill>
+                <a:latin typeface="맑은 고딕"/>
+              </a:rPr>
+              <a:t>2513532 → 2513652 전진</a:t>
             </a:r>
           </a:p>
           <a:p>
@@ -10761,7 +11550,25 @@
                 </a:solidFill>
                 <a:latin typeface="맑은 고딕"/>
               </a:rPr>
-              <a:t>•  **MAXIMUM PERFORMANCE = ASYNC** — 보내지 못한 리두 꼬리가 있었다</a:t>
+              <a:t>•  </a:t>
+            </a:r>
+            <a:r>
+              <a:rPr sz="1700" b="1">
+                <a:solidFill>
+                  <a:srgbClr val="222222"/>
+                </a:solidFill>
+                <a:latin typeface="맑은 고딕"/>
+              </a:rPr>
+              <a:t>MAXIMUM PERFORMANCE = ASYNC</a:t>
+            </a:r>
+            <a:r>
+              <a:rPr sz="1700" b="0">
+                <a:solidFill>
+                  <a:srgbClr val="222222"/>
+                </a:solidFill>
+                <a:latin typeface="맑은 고딕"/>
+              </a:rPr>
+              <a:t> — 보내지 못한 리두 꼬리가 있었다</a:t>
             </a:r>
           </a:p>
         </p:txBody>
@@ -10940,7 +11747,25 @@
                 </a:solidFill>
                 <a:latin typeface="맑은 고딕"/>
               </a:rPr>
-              <a:t>•  **① DB에서 먼저 제거** — 실패하면 원인을 해결한다. 우회하지 않는다</a:t>
+              <a:t>•  </a:t>
+            </a:r>
+            <a:r>
+              <a:rPr sz="1700" b="1">
+                <a:solidFill>
+                  <a:srgbClr val="222222"/>
+                </a:solidFill>
+                <a:latin typeface="맑은 고딕"/>
+              </a:rPr>
+              <a:t>① DB에서 먼저 제거</a:t>
+            </a:r>
+            <a:r>
+              <a:rPr sz="1700" b="0">
+                <a:solidFill>
+                  <a:srgbClr val="222222"/>
+                </a:solidFill>
+                <a:latin typeface="맑은 고딕"/>
+              </a:rPr>
+              <a:t> — 실패하면 원인을 해결한다. 우회하지 않는다</a:t>
             </a:r>
           </a:p>
           <a:p>
@@ -10956,7 +11781,44 @@
                 </a:solidFill>
                 <a:latin typeface="맑은 고딕"/>
               </a:rPr>
-              <a:t>•  **② 조회로 확인** — `no rows selected`를 눈으로 본다</a:t>
+              <a:t>•  </a:t>
+            </a:r>
+            <a:r>
+              <a:rPr sz="1700" b="1">
+                <a:solidFill>
+                  <a:srgbClr val="222222"/>
+                </a:solidFill>
+                <a:latin typeface="맑은 고딕"/>
+              </a:rPr>
+              <a:t>② 조회로 확인</a:t>
+            </a:r>
+            <a:r>
+              <a:rPr sz="1700" b="0">
+                <a:solidFill>
+                  <a:srgbClr val="222222"/>
+                </a:solidFill>
+                <a:latin typeface="맑은 고딕"/>
+              </a:rPr>
+              <a:t> — </a:t>
+            </a:r>
+            <a:r>
+              <a:rPr sz="1700" b="0">
+                <a:solidFill>
+                  <a:srgbClr val="222222"/>
+                </a:solidFill>
+                <a:latin typeface="Consolas"/>
+                <a:cs typeface="Consolas"/>
+              </a:rPr>
+              <a:t>no rows selected</a:t>
+            </a:r>
+            <a:r>
+              <a:rPr sz="1700" b="0">
+                <a:solidFill>
+                  <a:srgbClr val="222222"/>
+                </a:solidFill>
+                <a:latin typeface="맑은 고딕"/>
+              </a:rPr>
+              <a:t>를 눈으로 본다</a:t>
             </a:r>
           </a:p>
           <a:p>
@@ -10972,7 +11834,44 @@
                 </a:solidFill>
                 <a:latin typeface="맑은 고딕"/>
               </a:rPr>
-              <a:t>•  **③ 파일은 `mv`로 정리** — 며칠 뒤 지운다</a:t>
+              <a:t>•  </a:t>
+            </a:r>
+            <a:r>
+              <a:rPr sz="1700" b="1">
+                <a:solidFill>
+                  <a:srgbClr val="222222"/>
+                </a:solidFill>
+                <a:latin typeface="맑은 고딕"/>
+              </a:rPr>
+              <a:t>③ 파일은 </a:t>
+            </a:r>
+            <a:r>
+              <a:rPr sz="1700" b="1">
+                <a:solidFill>
+                  <a:srgbClr val="222222"/>
+                </a:solidFill>
+                <a:latin typeface="Consolas"/>
+                <a:cs typeface="Consolas"/>
+              </a:rPr>
+              <a:t>mv</a:t>
+            </a:r>
+            <a:r>
+              <a:rPr sz="1700" b="1">
+                <a:solidFill>
+                  <a:srgbClr val="222222"/>
+                </a:solidFill>
+                <a:latin typeface="맑은 고딕"/>
+              </a:rPr>
+              <a:t>로 정리</a:t>
+            </a:r>
+            <a:r>
+              <a:rPr sz="1700" b="0">
+                <a:solidFill>
+                  <a:srgbClr val="222222"/>
+                </a:solidFill>
+                <a:latin typeface="맑은 고딕"/>
+              </a:rPr>
+              <a:t> — 며칠 뒤 지운다</a:t>
             </a:r>
           </a:p>
           <a:p>
@@ -10988,7 +11887,26 @@
                 </a:solidFill>
                 <a:latin typeface="맑은 고딕"/>
               </a:rPr>
-              <a:t>•  실습 05의 `rmdir`도 같은 원칙</a:t>
+              <a:t>•  실습 05의 </a:t>
+            </a:r>
+            <a:r>
+              <a:rPr sz="1700" b="0">
+                <a:solidFill>
+                  <a:srgbClr val="222222"/>
+                </a:solidFill>
+                <a:latin typeface="Consolas"/>
+                <a:cs typeface="Consolas"/>
+              </a:rPr>
+              <a:t>rmdir</a:t>
+            </a:r>
+            <a:r>
+              <a:rPr sz="1700" b="0">
+                <a:solidFill>
+                  <a:srgbClr val="222222"/>
+                </a:solidFill>
+                <a:latin typeface="맑은 고딕"/>
+              </a:rPr>
+              <a:t>도 같은 원칙</a:t>
             </a:r>
           </a:p>
         </p:txBody>
@@ -11215,7 +12133,26 @@
                 </a:solidFill>
                 <a:latin typeface="맑은 고딕"/>
               </a:rPr>
-              <a:t>•  조건 : Standby의 `STANDBY_FILE_MANAGEMENT` = AUTO</a:t>
+              <a:t>•  조건 : Standby의 </a:t>
+            </a:r>
+            <a:r>
+              <a:rPr sz="1700" b="0">
+                <a:solidFill>
+                  <a:srgbClr val="222222"/>
+                </a:solidFill>
+                <a:latin typeface="Consolas"/>
+                <a:cs typeface="Consolas"/>
+              </a:rPr>
+              <a:t>STANDBY_FILE_MANAGEMENT</a:t>
+            </a:r>
+            <a:r>
+              <a:rPr sz="1700" b="0">
+                <a:solidFill>
+                  <a:srgbClr val="222222"/>
+                </a:solidFill>
+                <a:latin typeface="맑은 고딕"/>
+              </a:rPr>
+              <a:t> = AUTO</a:t>
             </a:r>
           </a:p>
         </p:txBody>
@@ -11394,7 +12331,25 @@
                 </a:solidFill>
                 <a:latin typeface="맑은 고딕"/>
               </a:rPr>
-              <a:t>•  확인은 **Standby에서** 한다 — 파라미터도 상태도</a:t>
+              <a:t>•  확인은 </a:t>
+            </a:r>
+            <a:r>
+              <a:rPr sz="1700" b="1">
+                <a:solidFill>
+                  <a:srgbClr val="222222"/>
+                </a:solidFill>
+                <a:latin typeface="맑은 고딕"/>
+              </a:rPr>
+              <a:t>Standby에서</a:t>
+            </a:r>
+            <a:r>
+              <a:rPr sz="1700" b="0">
+                <a:solidFill>
+                  <a:srgbClr val="222222"/>
+                </a:solidFill>
+                <a:latin typeface="맑은 고딕"/>
+              </a:rPr>
+              <a:t> 한다 — 파라미터도 상태도</a:t>
             </a:r>
           </a:p>
           <a:p>
@@ -11410,7 +12365,25 @@
                 </a:solidFill>
                 <a:latin typeface="맑은 고딕"/>
               </a:rPr>
-              <a:t>•  오류를 **우회하지 않는다** — 오류는 위험 신호다</a:t>
+              <a:t>•  오류를 </a:t>
+            </a:r>
+            <a:r>
+              <a:rPr sz="1700" b="1">
+                <a:solidFill>
+                  <a:srgbClr val="222222"/>
+                </a:solidFill>
+                <a:latin typeface="맑은 고딕"/>
+              </a:rPr>
+              <a:t>우회하지 않는다</a:t>
+            </a:r>
+            <a:r>
+              <a:rPr sz="1700" b="0">
+                <a:solidFill>
+                  <a:srgbClr val="222222"/>
+                </a:solidFill>
+                <a:latin typeface="맑은 고딕"/>
+              </a:rPr>
+              <a:t> — 오류는 위험 신호다</a:t>
             </a:r>
           </a:p>
           <a:p>
@@ -11426,7 +12399,54 @@
                 </a:solidFill>
                 <a:latin typeface="맑은 고딕"/>
               </a:rPr>
-              <a:t>•  지울 때는 **되돌릴 수 있게** — `mv`와 `rmdir`</a:t>
+              <a:t>•  지울 때는 </a:t>
+            </a:r>
+            <a:r>
+              <a:rPr sz="1700" b="1">
+                <a:solidFill>
+                  <a:srgbClr val="222222"/>
+                </a:solidFill>
+                <a:latin typeface="맑은 고딕"/>
+              </a:rPr>
+              <a:t>되돌릴 수 있게</a:t>
+            </a:r>
+            <a:r>
+              <a:rPr sz="1700" b="0">
+                <a:solidFill>
+                  <a:srgbClr val="222222"/>
+                </a:solidFill>
+                <a:latin typeface="맑은 고딕"/>
+              </a:rPr>
+              <a:t> — </a:t>
+            </a:r>
+            <a:r>
+              <a:rPr sz="1700" b="0">
+                <a:solidFill>
+                  <a:srgbClr val="222222"/>
+                </a:solidFill>
+                <a:latin typeface="Consolas"/>
+                <a:cs typeface="Consolas"/>
+              </a:rPr>
+              <a:t>mv</a:t>
+            </a:r>
+            <a:r>
+              <a:rPr sz="1700" b="0">
+                <a:solidFill>
+                  <a:srgbClr val="222222"/>
+                </a:solidFill>
+                <a:latin typeface="맑은 고딕"/>
+              </a:rPr>
+              <a:t>와 </a:t>
+            </a:r>
+            <a:r>
+              <a:rPr sz="1700" b="0">
+                <a:solidFill>
+                  <a:srgbClr val="222222"/>
+                </a:solidFill>
+                <a:latin typeface="Consolas"/>
+                <a:cs typeface="Consolas"/>
+              </a:rPr>
+              <a:t>rmdir</a:t>
             </a:r>
           </a:p>
         </p:txBody>
@@ -11566,7 +12586,26 @@
                 </a:solidFill>
                 <a:latin typeface="맑은 고딕"/>
               </a:rPr>
-              <a:t>•  Q1. `STANDBY_FILE_MANAGEMENT`를 확인할 때 어느 쪽에서 조회해야 하며 그 이유는?</a:t>
+              <a:t>•  Q1. </a:t>
+            </a:r>
+            <a:r>
+              <a:rPr sz="1600" b="0">
+                <a:solidFill>
+                  <a:srgbClr val="222222"/>
+                </a:solidFill>
+                <a:latin typeface="Consolas"/>
+                <a:cs typeface="Consolas"/>
+              </a:rPr>
+              <a:t>STANDBY_FILE_MANAGEMENT</a:t>
+            </a:r>
+            <a:r>
+              <a:rPr sz="1600" b="0">
+                <a:solidFill>
+                  <a:srgbClr val="222222"/>
+                </a:solidFill>
+                <a:latin typeface="맑은 고딕"/>
+              </a:rPr>
+              <a:t>를 확인할 때 어느 쪽에서 조회해야 하며 그 이유는?</a:t>
             </a:r>
           </a:p>
           <a:p>
@@ -11598,7 +12637,26 @@
                 </a:solidFill>
                 <a:latin typeface="맑은 고딕"/>
               </a:rPr>
-              <a:t>•  Q3. `UNNAMED00016`이 만들어지는 조건과 ORA-1274가 ORA-1111로 바뀌는 것의 의미는?</a:t>
+              <a:t>•  Q3. </a:t>
+            </a:r>
+            <a:r>
+              <a:rPr sz="1600" b="0">
+                <a:solidFill>
+                  <a:srgbClr val="222222"/>
+                </a:solidFill>
+                <a:latin typeface="Consolas"/>
+                <a:cs typeface="Consolas"/>
+              </a:rPr>
+              <a:t>UNNAMED00016</a:t>
+            </a:r>
+            <a:r>
+              <a:rPr sz="1600" b="0">
+                <a:solidFill>
+                  <a:srgbClr val="222222"/>
+                </a:solidFill>
+                <a:latin typeface="맑은 고딕"/>
+              </a:rPr>
+              <a:t>이 만들어지는 조건과 ORA-1274가 ORA-1111로 바뀌는 것의 의미는?</a:t>
             </a:r>
           </a:p>
           <a:p>
@@ -11614,7 +12672,26 @@
                 </a:solidFill>
                 <a:latin typeface="맑은 고딕"/>
               </a:rPr>
-              <a:t>•  Q4. `AS NEW`가 올바른 이름과 크기의 파일을 만들 수 있는 근거는?</a:t>
+              <a:t>•  Q4. </a:t>
+            </a:r>
+            <a:r>
+              <a:rPr sz="1600" b="0">
+                <a:solidFill>
+                  <a:srgbClr val="222222"/>
+                </a:solidFill>
+                <a:latin typeface="Consolas"/>
+                <a:cs typeface="Consolas"/>
+              </a:rPr>
+              <a:t>AS NEW</a:t>
+            </a:r>
+            <a:r>
+              <a:rPr sz="1600" b="0">
+                <a:solidFill>
+                  <a:srgbClr val="222222"/>
+                </a:solidFill>
+                <a:latin typeface="맑은 고딕"/>
+              </a:rPr>
+              <a:t>가 올바른 이름과 크기의 파일을 만들 수 있는 근거는?</a:t>
             </a:r>
           </a:p>
           <a:p>
@@ -11786,7 +12863,26 @@
                 </a:solidFill>
                 <a:latin typeface="맑은 고딕"/>
               </a:rPr>
-              <a:t>•  `STANDBY_FILE_MANAGEMENT`는 Standby 쪽 값이 동작을 결정한다. Primary에서 확인하고 안심하면 안 된다.</a:t>
+              <a:t>•  </a:t>
+            </a:r>
+            <a:r>
+              <a:rPr sz="1600" b="0">
+                <a:solidFill>
+                  <a:srgbClr val="222222"/>
+                </a:solidFill>
+                <a:latin typeface="Consolas"/>
+                <a:cs typeface="Consolas"/>
+              </a:rPr>
+              <a:t>STANDBY_FILE_MANAGEMENT</a:t>
+            </a:r>
+            <a:r>
+              <a:rPr sz="1600" b="0">
+                <a:solidFill>
+                  <a:srgbClr val="222222"/>
+                </a:solidFill>
+                <a:latin typeface="맑은 고딕"/>
+              </a:rPr>
+              <a:t>는 Standby 쪽 값이 동작을 결정한다. Primary에서 확인하고 안심하면 안 된다.</a:t>
             </a:r>
           </a:p>
           <a:p>
@@ -11818,7 +12914,45 @@
                 </a:solidFill>
                 <a:latin typeface="맑은 고딕"/>
               </a:rPr>
-              <a:t>•  비대칭 구성에서 이름은 각자 규칙을 따른다. Primary `dg_ts1_01.dbf` / Standby `o1_mf_dg_ts1_o8z7v7lh_.dbf`.</a:t>
+              <a:t>•  비대칭 구성에서 이름은 각자 규칙을 따른다. Primary </a:t>
+            </a:r>
+            <a:r>
+              <a:rPr sz="1600" b="0">
+                <a:solidFill>
+                  <a:srgbClr val="222222"/>
+                </a:solidFill>
+                <a:latin typeface="Consolas"/>
+                <a:cs typeface="Consolas"/>
+              </a:rPr>
+              <a:t>dg_ts1_01.dbf</a:t>
+            </a:r>
+            <a:r>
+              <a:rPr sz="1600" b="0">
+                <a:solidFill>
+                  <a:srgbClr val="222222"/>
+                </a:solidFill>
+                <a:latin typeface="맑은 고딕"/>
+              </a:rPr>
+              <a:t> / Standby </a:t>
+            </a:r>
+            <a:r>
+              <a:rPr sz="1600" b="0">
+                <a:solidFill>
+                  <a:srgbClr val="222222"/>
+                </a:solidFill>
+                <a:latin typeface="Consolas"/>
+                <a:cs typeface="Consolas"/>
+              </a:rPr>
+              <a:t>o1_mf_dg_ts1_o8z7v7lh_.dbf</a:t>
+            </a:r>
+            <a:r>
+              <a:rPr sz="1600" b="0">
+                <a:solidFill>
+                  <a:srgbClr val="222222"/>
+                </a:solidFill>
+                <a:latin typeface="맑은 고딕"/>
+              </a:rPr>
+              <a:t>.</a:t>
             </a:r>
           </a:p>
           <a:p>
@@ -11866,7 +13000,44 @@
                 </a:solidFill>
                 <a:latin typeface="맑은 고딕"/>
               </a:rPr>
-              <a:t>•  MANUAL이면 `$ORACLE_HOME/dbs/UNNAMED00016`(0바이트)이 만들어지고 MRP가 죽는다. 오류는 **ORA-1274**.</a:t>
+              <a:t>•  MANUAL이면 </a:t>
+            </a:r>
+            <a:r>
+              <a:rPr sz="1600" b="0">
+                <a:solidFill>
+                  <a:srgbClr val="222222"/>
+                </a:solidFill>
+                <a:latin typeface="Consolas"/>
+                <a:cs typeface="Consolas"/>
+              </a:rPr>
+              <a:t>$ORACLE_HOME/dbs/UNNAMED00016</a:t>
+            </a:r>
+            <a:r>
+              <a:rPr sz="1600" b="0">
+                <a:solidFill>
+                  <a:srgbClr val="222222"/>
+                </a:solidFill>
+                <a:latin typeface="맑은 고딕"/>
+              </a:rPr>
+              <a:t>(0바이트)이 만들어지고 MRP가 죽는다. 오류는 </a:t>
+            </a:r>
+            <a:r>
+              <a:rPr sz="1600" b="1">
+                <a:solidFill>
+                  <a:srgbClr val="222222"/>
+                </a:solidFill>
+                <a:latin typeface="맑은 고딕"/>
+              </a:rPr>
+              <a:t>ORA-1274</a:t>
+            </a:r>
+            <a:r>
+              <a:rPr sz="1600" b="0">
+                <a:solidFill>
+                  <a:srgbClr val="222222"/>
+                </a:solidFill>
+                <a:latin typeface="맑은 고딕"/>
+              </a:rPr>
+              <a:t>.</a:t>
             </a:r>
           </a:p>
           <a:p>
@@ -11898,7 +13069,25 @@
                 </a:solidFill>
                 <a:latin typeface="맑은 고딕"/>
               </a:rPr>
-              <a:t>•  AUTO로 되돌려도 저절로 고쳐지지 않는다. 오류가 **ORA-1111**로 바뀔 뿐이다.</a:t>
+              <a:t>•  AUTO로 되돌려도 저절로 고쳐지지 않는다. 오류가 </a:t>
+            </a:r>
+            <a:r>
+              <a:rPr sz="1600" b="1">
+                <a:solidFill>
+                  <a:srgbClr val="222222"/>
+                </a:solidFill>
+                <a:latin typeface="맑은 고딕"/>
+              </a:rPr>
+              <a:t>ORA-1111</a:t>
+            </a:r>
+            <a:r>
+              <a:rPr sz="1600" b="0">
+                <a:solidFill>
+                  <a:srgbClr val="222222"/>
+                </a:solidFill>
+                <a:latin typeface="맑은 고딕"/>
+              </a:rPr>
+              <a:t>로 바뀔 뿐이다.</a:t>
             </a:r>
           </a:p>
           <a:p>
@@ -11914,7 +13103,64 @@
                 </a:solidFill>
                 <a:latin typeface="맑은 고딕"/>
               </a:rPr>
-              <a:t>•  증거는 `V$DATAFILE.STATUS=RECOVER`와 `V$DATAFILE_HEADER.ERROR=FILE MISSING`. `V$RECOVER_FILE`은 비어 있다.</a:t>
+              <a:t>•  증거는 </a:t>
+            </a:r>
+            <a:r>
+              <a:rPr sz="1600" b="0">
+                <a:solidFill>
+                  <a:srgbClr val="222222"/>
+                </a:solidFill>
+                <a:latin typeface="Consolas"/>
+                <a:cs typeface="Consolas"/>
+              </a:rPr>
+              <a:t>V$DATAFILE.STATUS=RECOVER</a:t>
+            </a:r>
+            <a:r>
+              <a:rPr sz="1600" b="0">
+                <a:solidFill>
+                  <a:srgbClr val="222222"/>
+                </a:solidFill>
+                <a:latin typeface="맑은 고딕"/>
+              </a:rPr>
+              <a:t>와 </a:t>
+            </a:r>
+            <a:r>
+              <a:rPr sz="1600" b="0">
+                <a:solidFill>
+                  <a:srgbClr val="222222"/>
+                </a:solidFill>
+                <a:latin typeface="Consolas"/>
+                <a:cs typeface="Consolas"/>
+              </a:rPr>
+              <a:t>V$DATAFILE_HEADER.ERROR=FILE MISSING</a:t>
+            </a:r>
+            <a:r>
+              <a:rPr sz="1600" b="0">
+                <a:solidFill>
+                  <a:srgbClr val="222222"/>
+                </a:solidFill>
+                <a:latin typeface="맑은 고딕"/>
+              </a:rPr>
+              <a:t>. </a:t>
+            </a:r>
+            <a:r>
+              <a:rPr sz="1600" b="0">
+                <a:solidFill>
+                  <a:srgbClr val="222222"/>
+                </a:solidFill>
+                <a:latin typeface="Consolas"/>
+                <a:cs typeface="Consolas"/>
+              </a:rPr>
+              <a:t>V$RECOVER_FILE</a:t>
+            </a:r>
+            <a:r>
+              <a:rPr sz="1600" b="0">
+                <a:solidFill>
+                  <a:srgbClr val="222222"/>
+                </a:solidFill>
+                <a:latin typeface="맑은 고딕"/>
+              </a:rPr>
+              <a:t>은 비어 있다.</a:t>
             </a:r>
           </a:p>
           <a:p>
@@ -11930,7 +13176,26 @@
                 </a:solidFill>
                 <a:latin typeface="맑은 고딕"/>
               </a:rPr>
-              <a:t>•  복구는 MANUAL → `CREATE DATAFILE ... AS NEW` → AUTO → MRP 재기동 순서다.</a:t>
+              <a:t>•  복구는 MANUAL → </a:t>
+            </a:r>
+            <a:r>
+              <a:rPr sz="1600" b="0">
+                <a:solidFill>
+                  <a:srgbClr val="222222"/>
+                </a:solidFill>
+                <a:latin typeface="Consolas"/>
+                <a:cs typeface="Consolas"/>
+              </a:rPr>
+              <a:t>CREATE DATAFILE ... AS NEW</a:t>
+            </a:r>
+            <a:r>
+              <a:rPr sz="1600" b="0">
+                <a:solidFill>
+                  <a:srgbClr val="222222"/>
+                </a:solidFill>
+                <a:latin typeface="맑은 고딕"/>
+              </a:rPr>
+              <a:t> → AUTO → MRP 재기동 순서다.</a:t>
             </a:r>
           </a:p>
           <a:p>
@@ -11946,7 +13211,45 @@
                 </a:solidFill>
                 <a:latin typeface="맑은 고딕"/>
               </a:rPr>
-              <a:t>•  `AS NEW`는 리두에서 정보를 읽어 이름·크기를 맞춘다. 실측 `o1_mf_dg_ts2_o8z81hpl_.dbf` 10MB.</a:t>
+              <a:t>•  </a:t>
+            </a:r>
+            <a:r>
+              <a:rPr sz="1600" b="0">
+                <a:solidFill>
+                  <a:srgbClr val="222222"/>
+                </a:solidFill>
+                <a:latin typeface="Consolas"/>
+                <a:cs typeface="Consolas"/>
+              </a:rPr>
+              <a:t>AS NEW</a:t>
+            </a:r>
+            <a:r>
+              <a:rPr sz="1600" b="0">
+                <a:solidFill>
+                  <a:srgbClr val="222222"/>
+                </a:solidFill>
+                <a:latin typeface="맑은 고딕"/>
+              </a:rPr>
+              <a:t>는 리두에서 정보를 읽어 이름·크기를 맞춘다. 실측 </a:t>
+            </a:r>
+            <a:r>
+              <a:rPr sz="1600" b="0">
+                <a:solidFill>
+                  <a:srgbClr val="222222"/>
+                </a:solidFill>
+                <a:latin typeface="Consolas"/>
+                <a:cs typeface="Consolas"/>
+              </a:rPr>
+              <a:t>o1_mf_dg_ts2_o8z81hpl_.dbf</a:t>
+            </a:r>
+            <a:r>
+              <a:rPr sz="1600" b="0">
+                <a:solidFill>
+                  <a:srgbClr val="222222"/>
+                </a:solidFill>
+                <a:latin typeface="맑은 고딕"/>
+              </a:rPr>
+              <a:t> 10MB.</a:t>
             </a:r>
           </a:p>
           <a:p>
@@ -11994,7 +13297,25 @@
                 </a:solidFill>
                 <a:latin typeface="맑은 고딕"/>
               </a:rPr>
-              <a:t>•  새 PDB는 Standby에서 MOUNTED다. 열지 않으면 **ORA-01219**. 기동 스크립트에 ALL 옵션을 넣는다.</a:t>
+              <a:t>•  새 PDB는 Standby에서 MOUNTED다. 열지 않으면 </a:t>
+            </a:r>
+            <a:r>
+              <a:rPr sz="1600" b="1">
+                <a:solidFill>
+                  <a:srgbClr val="222222"/>
+                </a:solidFill>
+                <a:latin typeface="맑은 고딕"/>
+              </a:rPr>
+              <a:t>ORA-01219</a:t>
+            </a:r>
+            <a:r>
+              <a:rPr sz="1600" b="0">
+                <a:solidFill>
+                  <a:srgbClr val="222222"/>
+                </a:solidFill>
+                <a:latin typeface="맑은 고딕"/>
+              </a:rPr>
+              <a:t>. 기동 스크립트에 ALL 옵션을 넣는다.</a:t>
             </a:r>
           </a:p>
           <a:p>
@@ -12010,7 +13331,63 @@
                 </a:solidFill>
                 <a:latin typeface="맑은 고딕"/>
               </a:rPr>
-              <a:t>•  PDB를 지우면 파일은 사라지지만 **빈 GUID 디렉터리는 남는다.** `V$PDBS`와 대조해 `rmdir`로 정리한다.</a:t>
+              <a:t>•  PDB를 지우면 파일은 사라지지만 </a:t>
+            </a:r>
+            <a:r>
+              <a:rPr sz="1600" b="1">
+                <a:solidFill>
+                  <a:srgbClr val="222222"/>
+                </a:solidFill>
+                <a:latin typeface="맑은 고딕"/>
+              </a:rPr>
+              <a:t>빈 GUID 디렉터리는 남는다.</a:t>
+            </a:r>
+            <a:r>
+              <a:rPr sz="1600" b="0">
+                <a:solidFill>
+                  <a:srgbClr val="222222"/>
+                </a:solidFill>
+                <a:latin typeface="맑은 고딕"/>
+              </a:rPr>
+              <a:t> </a:t>
+            </a:r>
+            <a:r>
+              <a:rPr sz="1600" b="0">
+                <a:solidFill>
+                  <a:srgbClr val="222222"/>
+                </a:solidFill>
+                <a:latin typeface="Consolas"/>
+                <a:cs typeface="Consolas"/>
+              </a:rPr>
+              <a:t>V$PDBS</a:t>
+            </a:r>
+            <a:r>
+              <a:rPr sz="1600" b="0">
+                <a:solidFill>
+                  <a:srgbClr val="222222"/>
+                </a:solidFill>
+                <a:latin typeface="맑은 고딕"/>
+              </a:rPr>
+              <a:t>와 대조해 </a:t>
+            </a:r>
+            <a:r>
+              <a:rPr sz="1600" b="0">
+                <a:solidFill>
+                  <a:srgbClr val="222222"/>
+                </a:solidFill>
+                <a:latin typeface="Consolas"/>
+                <a:cs typeface="Consolas"/>
+              </a:rPr>
+              <a:t>rmdir</a:t>
+            </a:r>
+            <a:r>
+              <a:rPr sz="1600" b="0">
+                <a:solidFill>
+                  <a:srgbClr val="222222"/>
+                </a:solidFill>
+                <a:latin typeface="맑은 고딕"/>
+              </a:rPr>
+              <a:t>로 정리한다.</a:t>
             </a:r>
           </a:p>
           <a:p>
@@ -12026,7 +13403,25 @@
                 </a:solidFill>
                 <a:latin typeface="맑은 고딕"/>
               </a:rPr>
-              <a:t>•  **온라인 리두 로그 그룹 추가는 반영되지 않는다.** 오류도 경고도 없다. 역할 전환 때 구성 차이로 드러난다.</a:t>
+              <a:t>•  </a:t>
+            </a:r>
+            <a:r>
+              <a:rPr sz="1600" b="1">
+                <a:solidFill>
+                  <a:srgbClr val="222222"/>
+                </a:solidFill>
+                <a:latin typeface="맑은 고딕"/>
+              </a:rPr>
+              <a:t>온라인 리두 로그 그룹 추가는 반영되지 않는다.</a:t>
+            </a:r>
+            <a:r>
+              <a:rPr sz="1600" b="0">
+                <a:solidFill>
+                  <a:srgbClr val="222222"/>
+                </a:solidFill>
+                <a:latin typeface="맑은 고딕"/>
+              </a:rPr>
+              <a:t> 오류도 경고도 없다. 역할 전환 때 구성 차이로 드러난다.</a:t>
             </a:r>
           </a:p>
           <a:p>
@@ -12090,7 +13485,45 @@
                 </a:solidFill>
                 <a:latin typeface="맑은 고딕"/>
               </a:rPr>
-              <a:t>•  구조 변경 표준 순서: DB에서 제거 → 조회로 확인 → 파일은 `mv`로 정리. `rm`은 되돌릴 수 없다.</a:t>
+              <a:t>•  구조 변경 표준 순서: DB에서 제거 → 조회로 확인 → 파일은 </a:t>
+            </a:r>
+            <a:r>
+              <a:rPr sz="1600" b="0">
+                <a:solidFill>
+                  <a:srgbClr val="222222"/>
+                </a:solidFill>
+                <a:latin typeface="Consolas"/>
+                <a:cs typeface="Consolas"/>
+              </a:rPr>
+              <a:t>mv</a:t>
+            </a:r>
+            <a:r>
+              <a:rPr sz="1600" b="0">
+                <a:solidFill>
+                  <a:srgbClr val="222222"/>
+                </a:solidFill>
+                <a:latin typeface="맑은 고딕"/>
+              </a:rPr>
+              <a:t>로 정리. </a:t>
+            </a:r>
+            <a:r>
+              <a:rPr sz="1600" b="0">
+                <a:solidFill>
+                  <a:srgbClr val="222222"/>
+                </a:solidFill>
+                <a:latin typeface="Consolas"/>
+                <a:cs typeface="Consolas"/>
+              </a:rPr>
+              <a:t>rm</a:t>
+            </a:r>
+            <a:r>
+              <a:rPr sz="1600" b="0">
+                <a:solidFill>
+                  <a:srgbClr val="222222"/>
+                </a:solidFill>
+                <a:latin typeface="맑은 고딕"/>
+              </a:rPr>
+              <a:t>은 되돌릴 수 없다.</a:t>
             </a:r>
           </a:p>
         </p:txBody>
@@ -12262,7 +13695,26 @@
                 </a:solidFill>
                 <a:latin typeface="맑은 고딕"/>
               </a:rPr>
-              <a:t>•  실습 03 — MANUAL 재현: `UNNAMED00016`과 ORA-1274·ORA-1111을 재현하고 진단한다.</a:t>
+              <a:t>•  실습 03 — MANUAL 재현: </a:t>
+            </a:r>
+            <a:r>
+              <a:rPr sz="1600" b="0">
+                <a:solidFill>
+                  <a:srgbClr val="222222"/>
+                </a:solidFill>
+                <a:latin typeface="Consolas"/>
+                <a:cs typeface="Consolas"/>
+              </a:rPr>
+              <a:t>UNNAMED00016</a:t>
+            </a:r>
+            <a:r>
+              <a:rPr sz="1600" b="0">
+                <a:solidFill>
+                  <a:srgbClr val="222222"/>
+                </a:solidFill>
+                <a:latin typeface="맑은 고딕"/>
+              </a:rPr>
+              <a:t>과 ORA-1274·ORA-1111을 재현하고 진단한다.</a:t>
             </a:r>
           </a:p>
           <a:p>
@@ -12278,7 +13730,26 @@
                 </a:solidFill>
                 <a:latin typeface="맑은 고딕"/>
               </a:rPr>
-              <a:t>•  실습 04 — UNNAMED 복구: `CREATE DATAFILE ... AS NEW`로 복구하고 데이터까지 검증한다.</a:t>
+              <a:t>•  실습 04 — UNNAMED 복구: </a:t>
+            </a:r>
+            <a:r>
+              <a:rPr sz="1600" b="0">
+                <a:solidFill>
+                  <a:srgbClr val="222222"/>
+                </a:solidFill>
+                <a:latin typeface="Consolas"/>
+                <a:cs typeface="Consolas"/>
+              </a:rPr>
+              <a:t>CREATE DATAFILE ... AS NEW</a:t>
+            </a:r>
+            <a:r>
+              <a:rPr sz="1600" b="0">
+                <a:solidFill>
+                  <a:srgbClr val="222222"/>
+                </a:solidFill>
+                <a:latin typeface="맑은 고딕"/>
+              </a:rPr>
+              <a:t>로 복구하고 데이터까지 검증한다.</a:t>
             </a:r>
           </a:p>
           <a:p>
@@ -12326,7 +13797,16 @@
                 </a:solidFill>
                 <a:latin typeface="맑은 고딕"/>
               </a:rPr>
-              <a:t>•  실습 07 — 사고 분석: CURRENT 리두 파일 삭제 사고의 오류 스택과 복구 시도를 따라간다. **재현하지 않는다.**</a:t>
+              <a:t>•  실습 07 — 사고 분석: CURRENT 리두 파일 삭제 사고의 오류 스택과 복구 시도를 따라간다. </a:t>
+            </a:r>
+            <a:r>
+              <a:rPr sz="1600" b="1">
+                <a:solidFill>
+                  <a:srgbClr val="222222"/>
+                </a:solidFill>
+                <a:latin typeface="맑은 고딕"/>
+              </a:rPr>
+              <a:t>재현하지 않는다.</a:t>
             </a:r>
           </a:p>
           <a:p>
@@ -12824,7 +14304,17 @@
                 </a:solidFill>
                 <a:latin typeface="맑은 고딕"/>
               </a:rPr>
-              <a:t>•  답의 핵심은 파라미터 하나 — `STANDBY_FILE_MANAGEMENT`</a:t>
+              <a:t>•  답의 핵심은 파라미터 하나 — </a:t>
+            </a:r>
+            <a:r>
+              <a:rPr sz="1700" b="0">
+                <a:solidFill>
+                  <a:srgbClr val="222222"/>
+                </a:solidFill>
+                <a:latin typeface="Consolas"/>
+                <a:cs typeface="Consolas"/>
+              </a:rPr>
+              <a:t>STANDBY_FILE_MANAGEMENT</a:t>
             </a:r>
           </a:p>
         </p:txBody>
@@ -13019,7 +14509,16 @@
                 </a:solidFill>
                 <a:latin typeface="맑은 고딕"/>
               </a:rPr>
-              <a:t>•  실측 : Standby만 MANUAL, Primary는 AUTO → **문제 발생**</a:t>
+              <a:t>•  실측 : Standby만 MANUAL, Primary는 AUTO → </a:t>
+            </a:r>
+            <a:r>
+              <a:rPr sz="1700" b="1">
+                <a:solidFill>
+                  <a:srgbClr val="222222"/>
+                </a:solidFill>
+                <a:latin typeface="맑은 고딕"/>
+              </a:rPr>
+              <a:t>문제 발생</a:t>
             </a:r>
           </a:p>
           <a:p>
@@ -13051,7 +14550,16 @@
                 </a:solidFill>
                 <a:latin typeface="맑은 고딕"/>
               </a:rPr>
-              <a:t>•  **확인은 반드시 Standby에서**</a:t>
+              <a:t>•  </a:t>
+            </a:r>
+            <a:r>
+              <a:rPr sz="1700" b="1">
+                <a:solidFill>
+                  <a:srgbClr val="222222"/>
+                </a:solidFill>
+                <a:latin typeface="맑은 고딕"/>
+              </a:rPr>
+              <a:t>확인은 반드시 Standby에서</a:t>
             </a:r>
           </a:p>
         </p:txBody>
@@ -13712,7 +15220,26 @@
                 </a:solidFill>
                 <a:latin typeface="맑은 고딕"/>
               </a:rPr>
-              <a:t>•  Primary : `dg_ts1_01.dbf` (비OMF, 사람이 지정)</a:t>
+              <a:t>•  Primary : </a:t>
+            </a:r>
+            <a:r>
+              <a:rPr sz="1700" b="0">
+                <a:solidFill>
+                  <a:srgbClr val="222222"/>
+                </a:solidFill>
+                <a:latin typeface="Consolas"/>
+                <a:cs typeface="Consolas"/>
+              </a:rPr>
+              <a:t>dg_ts1_01.dbf</a:t>
+            </a:r>
+            <a:r>
+              <a:rPr sz="1700" b="0">
+                <a:solidFill>
+                  <a:srgbClr val="222222"/>
+                </a:solidFill>
+                <a:latin typeface="맑은 고딕"/>
+              </a:rPr>
+              <a:t> (비OMF, 사람이 지정)</a:t>
             </a:r>
           </a:p>
           <a:p>
@@ -13728,7 +15255,26 @@
                 </a:solidFill>
                 <a:latin typeface="맑은 고딕"/>
               </a:rPr>
-              <a:t>•  Standby : `o1_mf_dg_ts1_o8z7v7lh_.dbf` (OMF, 오라클이 지정)</a:t>
+              <a:t>•  Standby : </a:t>
+            </a:r>
+            <a:r>
+              <a:rPr sz="1700" b="0">
+                <a:solidFill>
+                  <a:srgbClr val="222222"/>
+                </a:solidFill>
+                <a:latin typeface="Consolas"/>
+                <a:cs typeface="Consolas"/>
+              </a:rPr>
+              <a:t>o1_mf_dg_ts1_o8z7v7lh_.dbf</a:t>
+            </a:r>
+            <a:r>
+              <a:rPr sz="1700" b="0">
+                <a:solidFill>
+                  <a:srgbClr val="222222"/>
+                </a:solidFill>
+                <a:latin typeface="맑은 고딕"/>
+              </a:rPr>
+              <a:t> (OMF, 오라클이 지정)</a:t>
             </a:r>
           </a:p>
           <a:p>
@@ -13744,7 +15290,25 @@
                 </a:solidFill>
                 <a:latin typeface="맑은 고딕"/>
               </a:rPr>
-              <a:t>•  파일 번호는 양쪽 모두 **14**, 크기도 20MB로 같다</a:t>
+              <a:t>•  파일 번호는 양쪽 모두 </a:t>
+            </a:r>
+            <a:r>
+              <a:rPr sz="1700" b="1">
+                <a:solidFill>
+                  <a:srgbClr val="222222"/>
+                </a:solidFill>
+                <a:latin typeface="맑은 고딕"/>
+              </a:rPr>
+              <a:t>14</a:t>
+            </a:r>
+            <a:r>
+              <a:rPr sz="1700" b="0">
+                <a:solidFill>
+                  <a:srgbClr val="222222"/>
+                </a:solidFill>
+                <a:latin typeface="맑은 고딕"/>
+              </a:rPr>
+              <a:t>, 크기도 20MB로 같다</a:t>
             </a:r>
           </a:p>
           <a:p>
@@ -13760,7 +15324,16 @@
                 </a:solidFill>
                 <a:latin typeface="맑은 고딕"/>
               </a:rPr>
-              <a:t>•  **대응을 유지하는 것은 이름이 아니라 파일 번호**</a:t>
+              <a:t>•  </a:t>
+            </a:r>
+            <a:r>
+              <a:rPr sz="1700" b="1">
+                <a:solidFill>
+                  <a:srgbClr val="222222"/>
+                </a:solidFill>
+                <a:latin typeface="맑은 고딕"/>
+              </a:rPr>
+              <a:t>대응을 유지하는 것은 이름이 아니라 파일 번호</a:t>
             </a:r>
           </a:p>
         </p:txBody>

--- a/ADG/08장/8장_Primary구조변경의Standby반영.pptx
+++ b/ADG/08장/8장_Primary구조변경의Standby반영.pptx
@@ -41,6 +41,22 @@
     <p:sldId id="289" r:id="rId41"/>
     <p:sldId id="290" r:id="rId42"/>
     <p:sldId id="291" r:id="rId43"/>
+    <p:sldId id="292" r:id="rId44"/>
+    <p:sldId id="293" r:id="rId45"/>
+    <p:sldId id="294" r:id="rId46"/>
+    <p:sldId id="295" r:id="rId47"/>
+    <p:sldId id="296" r:id="rId48"/>
+    <p:sldId id="297" r:id="rId49"/>
+    <p:sldId id="298" r:id="rId50"/>
+    <p:sldId id="299" r:id="rId51"/>
+    <p:sldId id="300" r:id="rId52"/>
+    <p:sldId id="301" r:id="rId53"/>
+    <p:sldId id="302" r:id="rId54"/>
+    <p:sldId id="303" r:id="rId55"/>
+    <p:sldId id="304" r:id="rId56"/>
+    <p:sldId id="305" r:id="rId57"/>
+    <p:sldId id="306" r:id="rId58"/>
+    <p:sldId id="307" r:id="rId59"/>
   </p:sldIdLst>
   <p:sldSz cx="12191695" cy="6858000" type="screen4x3"/>
   <p:notesSz cx="6858000" cy="9144000"/>
@@ -537,7 +553,7 @@
           <a:lstStyle/>
           <a:p>
             <a:r>
-              <a:t>7장까지는 정지된 그림을 봤습니다. Standby를 만들고 리두가 흐르는 것을 확인했습니다. 그런데 실제 운영은 정지 상태가 아닙니다. 이 장은 움직이는 구조를 다룹니다. 문서에 적힌 답은 간단합니다. AUTO면 자동, MANUAL이면 수동. 이 장이 다루는 것은 그 다음입니다. 반영되지 않으면 정확히 무슨 일이 일어나는가. 실측 결과는 "그냥 반영이 안 되는" 정도가 아니었습니다. 적용 자체가 죽습니다.</a:t>
+              <a:t>Redo Apply가 데이터 블록만 바꾼다고 생각하기 쉬운데, 리두에는 테이블스페이스를 만들거나 파일 크기를 바꾸는 기록도 함께 들어 있습니다. MRP0는 이런 기록을 만나면 Standby 컨트롤 파일을 고치고 서버에 실제 파일까지 만듭니다. 데이터 사전 쪽 변경은 일반 블록처럼 적용되니 신경 쓸 일이 없습니다. 걸리는 부분은 운영체제 파일의 경로입니다. 리두는 몇 번 파일을 얼마 크기로 만들라는 지시만 담고 있어서, Standby 서버의 어느 디렉터리에 둘지는 Standby가 자기 설정을 보고 정해야 합니다. 이 장의 상당 부분이 그 결정을 다룹니다.</a:t>
             </a:r>
           </a:p>
         </p:txBody>
@@ -607,7 +623,7 @@
           <a:lstStyle/>
           <a:p>
             <a:r>
-              <a:t>어떻게 알았을까요. 리두에 그 정보가 들어 있기 때문입니다. 파일 추가 작업의 리두에는 어느 테이블스페이스의 몇 번 파일이 얼마 크기로 만들어졌는지가 기록되어 있고, 오라클이 그것을 읽어 재현합니다. 경로도 UNNAMED가 있던 dbs가 아니라 정상 위치로 갔습니다. DB_CREATE_FILE_DEST가 설정되어 있기 때문입니다. 경로 지정 방식이라면 AS NEW 대신 AS '&lt;경로&gt;'로 직접 주어야 하고, 그 디렉터리가 미리 있어야 합니다.</a:t>
+              <a:t>삭제는 컨트롤 파일 항목과 운영체제 파일을 나눠서 생각해야 합니다. 항목은 리두로 항상 사라지지만, 파일까지 지워지는지는 OMF 여부와 삭제 문장의 절에 달려 있습니다. 비OMF 구성에서 절 없이 DROP TABLESPACE만 했다면 Standby 서버에 파일이 그대로 남아 공간을 차지합니다. 이 파일을 정리할 때 바로 지우기보다 다른 위치로 옮겨 두고 며칠 지켜보는 편이 안전합니다. 아직 쓰이는 파일을 잘못 옮겼다면 되돌리면 되지만, 지운 파일은 되돌릴 방법이 없습니다.</a:t>
             </a:r>
           </a:p>
         </p:txBody>
@@ -677,7 +693,7 @@
           <a:lstStyle/>
           <a:p>
             <a:r>
-              <a:t>파일을 "새로" 만들었으니 그 안의 내용이 걱정될 수 있습니다. 실측으로 확인했습니다. 이것이 물리 복제의 원리를 보여 줍니다. 파일 자체를 복사하는 것이 아니라 변경 기록을 적용해 같은 상태를 만듭니다. 그래서 파일을 새로 만들어도 데이터가 사라지지 않습니다. 검증은 네 가지로 합니다. 두 지연이 0인가, MRP0이 존재하는가, 파일 개수가 Primary와 같은가, V$RECOVER_FILE이 0건인가.</a:t>
+              <a:t>Primary와 Standby의 경로가 처음부터 다를 수 있으니 오라클은 Standby 쪽 이름을 건드리지 않습니다. 이름이 어긋나도 적용은 파일 번호로 대상을 찾으므로 멈추지 않습니다. 같은 배치를 유지하려면 Standby에서 따로 옮기는데, 오프라인 방식은 정지 시간이 필요하지만 라이선스 제약이 없습니다. 온라인 이동은 마운트 상태에서는 실행되지 않고 데이터베이스가 열려 있어야 합니다. 적용을 멈추고 READ ONLY로 열어 작업하면 기본 기능이고, 실시간 조회 상태에서 적용을 켠 채 옮기는 것은 Active Data Guard 옵션 영역입니다.</a:t>
             </a:r>
           </a:p>
         </p:txBody>
@@ -747,7 +763,7 @@
           <a:lstStyle/>
           <a:p>
             <a:r>
-              <a:t>6장에서 OMF의 장점으로 예고했던 것이 여기서 실현됩니다. GUID 디렉터리와 그 아래 datafile 디렉터리가 자동으로 만들어지고 데이터 파일 세 개가 생깁니다. GUID가 Primary와 같다는 것도 확인됩니다. 물리 복제본이므로 GUID까지 따라오는 것이죠. 경로 지정 방식이었다면 이 시점에 Standby에 디렉터리를 만들어 주어야 했고, 잊으면 5장에서 만난 ORA-19505를 다시 만났을 것입니다.</a:t>
+              <a:t>TTS로 가져온 데이터 파일은 다른 데이터베이스에서 만들어진 것이라 Primary 리두 어디에도 그 내용이 없습니다. 플러그인 순간의 리두는 이 파일을 이제 데이터베이스의 일부로 쓴다는 선언일 뿐이어서, Standby는 자기 쪽에 같은 파일이 이미 있어야 연결할 수 있습니다. 파일 사본을 Primary와 Standby 양쪽에 먼저 놓고 플러그인합니다. 경로를 맞추지 못했다면 적용이 실패한 뒤 MANUAL로 내리고 RENAME FILE로 실제 위치를 알려 준 다음 재기동합니다. 원격 클론과 플러그인으로 만드는 PDB도 같은 구조의 문제를 가집니다.</a:t>
             </a:r>
           </a:p>
         </p:txBody>
@@ -817,7 +833,7 @@
           <a:lstStyle/>
           <a:p>
             <a:r>
-              <a:t>1장과 5장에서 확인한 규칙이 그대로입니다. CDB를 READ ONLY로 열어도 PDB는 따로 열어야 합니다. 새로 추가된 PDB는 오히려 더 주의해야 합니다. Primary에서 열었다고 Standby에서도 열리는 것이 아니니까요. 그리고 재기동할 때마다 반복되는 일입니다. 기동 스크립트에 ALL 옵션으로 한 줄 넣어 두면 PDB 개수가 늘어나도 스크립트를 고칠 필요가 없습니다. 설치 가이드가 이 줄을 빠뜨렸던 것과 같은 뿌리의 문제입니다.</a:t>
+              <a:t>이 사례는 이름 변경이 전달되지 않는다는 규칙이 몇 달 뒤 어떤 모습으로 돌아오는지 보여 줍니다. 작업 당일에는 모든 것이 정상이었고, 문제는 Standby 쪽 디스크가 원래 계획보다 빨리 차면서 드러났습니다. Primary에서는 공간 문제가 이미 해결된 상태라 운영자는 Standby를 의심하지 않았습니다. 교훈은 파일 배치를 바꾸는 작업 계획서에 Standby 이동과 용량 점검을 함께 넣는 것입니다. 수강생에게 자기 조직의 디스크 증설 절차서에 Standby 항목이 있는지 떠올려 보게 하면 이야기가 잘 이어집니다.</a:t>
             </a:r>
           </a:p>
         </p:txBody>
@@ -887,7 +903,7 @@
           <a:lstStyle/>
           <a:p>
             <a:r>
-              <a:t>동작에는 아무 지장이 없습니다. 그러나 PDB를 자주 만들고 지우는 환경이라면 빈 디렉터리가 쌓이고, 어느 것이 살아 있는 PDB의 것인지 이름만 봐서는 알 수 없습니다. 정리할 때 rmdir을 쓰는 것이 중요합니다. rmdir은 비어 있지 않으면 실패하므로, 그 실패가 "살아 있는 PDB의 디렉터리를 지우려 한다"는 경고가 됩니다. rm -rf에는 그 보호가 없습니다. 이 원칙을 어기면 어떻게 되는지는 8.9절에서 봅니다.</a:t>
+              <a:t>UNNAMED라는 이름 때문에 디스크 어딘가에 그런 파일이 있을 거라 생각하고 찾아다니는 경우가 있는데, 이 이름은 컨트롤 파일 안의 표시일 뿐 실제 파일은 없습니다. 원인은 설정 실수인 MANUAL과, 환경 차이인 경로 문제와 공간 문제로 나뉩니다. 증상과 복구 절차는 원인과 상관없이 같으므로 먼저 복구하고 나서 원인별로 재발 방지책을 세우면 됩니다. 실습 03에서 일부러 MANUAL로 내려 이 상태를 만들어 보고, 실습 04에서 이어서 복구합니다.</a:t>
             </a:r>
           </a:p>
         </p:txBody>
@@ -957,7 +973,7 @@
           <a:lstStyle/>
           <a:p>
             <a:r>
-              <a:t>지금까지는 전부 자동이었는데 여기서 예외가 나옵니다. 그리고 이 예외는 조용합니다. 오류가 나면 알아채기라도 할 텐데 아무 신호가 없습니다. 이유는 자원의 성격에 있습니다. 온라인 리두 로그는 그 데이터베이스가 Primary로서 쓰는 자원입니다. Standby는 자신의 온라인 리두를 쓰지 않고 받은 리두는 SRL에 씁니다. 지금 당장 필요 없는 것을 오라클은 미리 만들지 않습니다.</a:t>
+              <a:t>처음 적용이 멈출 때는 ORA-01274가 나고, AUTO로 바꾸고 다시 기동하면 ORA-01111로 바뀝니다. 번호가 바뀌었다고 상황이 나아진 것은 아니고, 이미 컨트롤 파일에 잘못된 자리가 생겨서 다른 단계의 오류가 보이는 것입니다. 이 상태에서 전송은 정상이라 Primary 쪽 목적지 상태는 VALID로 남고 transport lag도 작습니다. 7장에서 본 apply lag만 커지는 패턴이 이 모습이며, 이런 패턴을 보면 MRP0가 살아 있는지와 Standby alert log를 먼저 확인합니다.</a:t>
             </a:r>
           </a:p>
         </p:txBody>
@@ -1027,7 +1043,7 @@
           <a:lstStyle/>
           <a:p>
             <a:r>
-              <a:t>자동화되지 않는 몇 안 되는 항목이므로 절차서에 명시해 두어야 합니다. 함께 검토할 것이 SRL입니다. 4장의 규칙에 따르면 온라인을 넷으로 늘렸다면 SRL도 다섯이 되어야 합니다. 점검은 양쪽에서 V$LOGFILE을 TYPE으로 묶어 세어 비교하면 됩니다. 참고로 V$LOG에는 TYPE 열이 없습니다. 그룹 단위 뷰라 온라인만 보여 주기 때문이고, 멤버 정보는 V$LOGFILE에 있습니다.</a:t>
+              <a:t>문제의 원인이 MANUAL이었는데 복구하려고 다시 MANUAL로 내리는 순서가 처음에는 어색하게 느껴집니다. CREATE DATAFILE은 사람이 파일 구성을 바꾸는 명령이라 AUTO에서는 ORA-01275로 막히기 때문입니다. 새로 만든 파일은 비어 있지만 파일이 추가된 시점의 상태로 시작하므로, 적용이 그 시점부터의 리두를 채워 Primary와 같아집니다. 공식 교재는 Primary 파일을 복사하는 방법도 소개하지만, Active Data Guard로 운영 중인 Standby에서는 이 명령을 쓰라고 안내합니다. 복구 뒤에는 이름과 상태, apply lag 감소를 확인합니다.</a:t>
             </a:r>
           </a:p>
         </p:txBody>
@@ -1097,7 +1113,7 @@
           <a:lstStyle/>
           <a:p>
             <a:r>
-              <a:t>ORA-00301이 특히 중요합니다. 오라클은 로그 그룹을 지울 때 운영체제 파일을 지우지 않기 때문입니다. 데이터 파일과 다른 점이고, DROP TABLESPACE의 INCLUDING DATAFILES에 해당하는 옵션이 DROP LOGFILE에는 없습니다. 해법은 REUSE를 쓰거나 파일을 정리하는 것인데, REUSE는 그 파일이 정말 쓰이지 않는지 확인하지 않고 덮어쓰므로 위험합니다. 조회로 확인한 뒤 mv로 옮기는 편이 안전합니다.</a:t>
+              <a:t>재발 방지책 가운데 효과가 가장 큰 것은 Standby를 OMF로 운영하는 것입니다. 디렉터리를 오라클이 만들어 주므로 경로 차이로 생기는 실패가 거의 사라집니다. 6장에서 OMF 방식을 권한 이유도 여기에 있습니다. 경로 방식을 유지한다면 Primary에 새 디렉터리가 생길 때마다 Standby 쪽 준비를 먼저 끝내야 합니다. 마지막 줄의 확인 루틴은 작업자가 그 자리에서 몇 분이면 끝낼 수 있는 일이고, 문제를 며칠 뒤가 아니라 작업 직후에 발견하게 해 줍니다.</a:t>
             </a:r>
           </a:p>
         </p:txBody>
@@ -1167,7 +1183,7 @@
           <a:lstStyle/>
           <a:p>
             <a:r>
-              <a:t>교재용으로 꾸민 사례가 아니라 실제 기록입니다. 그래서 남겼습니다. 주목할 것은 세 번째 줄입니다. 리눅스는 열려 있는 파일을 지워도 그 파일을 연 프로세스가 계속 쓸 수 있게 합니다. LGWR은 이미 열어 둔 파일 기술자로 계속 기록했습니다. 그래서 지운 직후에는 아무 일도 일어나지 않고, 다음 전환에서 터집니다. 시차가 있어 원인과 결과를 연결하기 어렵다는 것이 이 사고를 특히 위험하게 만듭니다.</a:t>
+              <a:t>Standby의 V$LOG를 처음 조회하면 CLEARING 같은 낯선 상태가 보여 이상하게 여기는 수강생이 많습니다. Standby 역할에서 온라인 리두 로그는 쓰이지 않고 대기만 하는 상태라 이런 값이 정상입니다. 파일이 아직 디스크에 없고 처음 필요할 때 초기화되는 경우도 있습니다. 하지만 쓰이지 않는다고 구성을 소홀히 하면 안 됩니다. Switchover가 끝나는 순간 새 Primary는 이 구성 그대로 리두를 만들기 시작하므로, 그룹 수와 크기는 Primary와 같아야 합니다.</a:t>
             </a:r>
           </a:p>
         </p:txBody>
@@ -1237,7 +1253,7 @@
           <a:lstStyle/>
           <a:p>
             <a:r>
-              <a:t>alert 로그는 시간 순 기록이므로 위에서 아래로 사건 순서대로 읽습니다. 오류 스택을 아래에서 위로 읽는 것과 반대입니다. 운영체제 수준의 원인이 먼저 나오고, 오라클이 그것을 로그 그룹 문제로 번역하고, 리두를 쓸 수 없게 된 LG01이 죽고, 필수 프로세스가 죽었으므로 PMON이 인스턴스를 내립니다. 데이터베이스가 죽는 것이 아니라 PMON이 죽이는 것입니다. 세션에서는 ORA-03113으로 보이고 이후 모든 접속이 ORA-01034가 됩니다.</a:t>
+              <a:t>로그 그룹 변경은 전달되지 않아도 당장 드러나는 문제가 없습니다. 예를 들어 Primary를 네 그룹으로 늘렸는데 Standby가 세 그룹이면, 전환 뒤 새 Primary는 세 그룹으로 운영되고 바쁜 시간대에 로그 전환 대기가 늘어납니다. 크기를 바꾼 경우는 더 조용히 문제를 만듭니다. 들어오는 로그보다 작은 SRL은 쓰이지 못해 실시간 적용이 아카이브 기반으로 떨어지고, 오류 메시지는 나오지 않습니다. 로그 구성 변경은 Primary와 Standby의 ORL, SRL 네 가지를 한 작업으로 묶어 다룹니다.</a:t>
             </a:r>
           </a:p>
         </p:txBody>
@@ -1307,7 +1323,7 @@
           <a:lstStyle/>
           <a:p>
             <a:r>
-              <a:t>흔한 실수가 Primary에서 AUTO를 확인하고 안심하는 것입니다. 실습에서 Standby만 MANUAL로 바꿨는데 UNNAMED 파일이 만들어지고 MRP가 죽었습니다. Primary는 계속 AUTO였지만 아무 영향이 없었습니다. 그렇다고 Primary 쪽 값이 무의미한 것은 아닙니다. 그 데이터베이스가 역할 전환으로 Standby가 되었을 때를 위한 준비입니다. 그래서 양쪽을 같게 두는 것이 원칙이고, 확인은 Standby에서 합니다.</a:t>
+              <a:t>리두는 데이터베이스 안에서 일어난 변경의 기록이라 데이터베이스 바깥 파일은 모릅니다. spfile, 키스토어, tnsnames.ora 같은 것이 대표적입니다. 한편 리두에 기록은 되지만 Standby가 그대로 재현하지 못하는 경우도 있습니다. 파일 이름 변경은 Primary 컨트롤 파일만 고치고 Standby 이름은 그대로 두며, NOLOGGING 작업은 블록 내용이 없으니 복구 불가라는 표시만 남깁니다. 패스워드 파일은 12.2부터 예외적으로 리두에 실려 갱신되는데, 이 내용은 8.9절에서 Far Sync 예외와 함께 다시 봅니다.</a:t>
             </a:r>
           </a:p>
         </p:txBody>
@@ -1377,7 +1393,7 @@
           <a:lstStyle/>
           <a:p>
             <a:r>
-              <a:t>SCN이 전진했다는 것은 SRL의 리두가 실제로 적용됐다는 뜻입니다. 절반은 성공한 것이죠. 그러나 여전히 부족했습니다. ASYNC에서는 LGWR이 로그 파일에 쓴 리두와 Standby로 전송된 리두 사이에 시차가 있습니다. 마지막 순간에 Primary가 쓰고 아직 보내지 못한 리두는 그 파일에만 있었고, 그 파일을 지웠습니다. 2장에서 보호 모드를 성능과 보호의 교환으로 설명했는데, 이 사고는 또 다른 대가를 보여 줍니다. 보호 모드는 사고 시 복구 가능성까지 결정합니다.</a:t>
+              <a:t>추가는 데이터 파일 작업과 같은 틀이라 어렵지 않습니다. 삭제에는 Standby만의 단계가 하나 더 있는데, 지우기 전에 CLEAR LOGFILE GROUP으로 그룹을 먼저 초기화해야 합니다. 상태가 CURRENT나 CLEARING_CURRENT인 그룹은 Standby에서 지울 수 없으며, 공식 교재는 이런 그룹을 역할 전환 뒤에 지우라고 안내합니다. 크기를 바꾸는 작업이라면 새 크기의 그룹을 먼저 만들고 옛 그룹이 INACTIVE가 된 뒤 지우는 순서가 안전합니다. SRL도 같은 시점에 함께 손봅니다.</a:t>
             </a:r>
           </a:p>
         </p:txBody>
@@ -1447,7 +1463,7 @@
           <a:lstStyle/>
           <a:p>
             <a:r>
-              <a:t>이 사고의 본질은 기술 부족이 아니라 오류를 우회한 것입니다. ORA-01623은 "지금은 지울 수 없다"는 뜻이지 "다른 방법으로 지워라"는 뜻이 아니었습니다. 오류 메시지는 방금 하려던 일이 위험하다고 알려 주고 있었습니다. 세 단계 중 특히 세 번째가 중요합니다. mv는 되돌릴 수 있지만 rm은 되돌릴 수 없습니다. 빈 디렉터리를 지울 때 rmdir을 쓰는 것도 같은 원칙입니다. 비어 있지 않으면 실패한다는 것이 보호 장치가 됩니다.</a:t>
+              <a:t>이 오류들은 대부분 지금 상태에서는 할 수 없다는 알림이고 데이터에는 영향이 없습니다. Primary에서 그룹을 지울 때 ORA-01623을 만나면 로그 전환으로 다른 그룹으로 넘기는데, 전환 직후 그룹은 아직 ACTIVE라 ORA-01624가 이어질 수 있습니다. 이때 체크포인트를 강제하고 V$LOG에서 INACTIVE를 확인한 뒤 다시 시도합니다. ORA-00359는 스크립트를 두 번 돌렸을 때 흔히 보이며 이미 원하는 상태로 보고 넘어가면 됩니다. 7장의 ORA-16136과 같은 성격입니다.</a:t>
             </a:r>
           </a:p>
         </p:txBody>
@@ -1517,7 +1533,7 @@
           <a:lstStyle/>
           <a:p>
             <a:r>
-              <a:t>이 경계를 외워 두는 것이 이 장의 실용적 결론입니다. 자동인 것은 신경 쓰지 않아도 되고, 수동인 것은 절차서에 명시해야 하며, 불가능한 것은 시도조차 하지 않습니다. 경계가 나뉘는 기준도 일관됩니다. Standby가 지금 필요로 하는 자원은 자동으로 만들어지고, 역할 전환 후에야 필요해지는 자원은 만들어지지 않습니다. 온라인 리두가 후자입니다. 이 기준을 이해하면 새로운 상황에서도 어느 쪽인지 추론할 수 있습니다.</a:t>
+              <a:t>실습 07은 이 순서를 어겨 실제로 일어난 사고를 읽는 자료입니다. 그룹 삭제가 ORA-01623으로 거부됐는데 운영체제에서 파일부터 지운 경우였고, 다음 로그 전환에서 LGWR이 파일을 열지 못해 인스턴스가 내려갔습니다. CURRENT 그룹의 리두는 아카이브되지 않았기 때문에 Primary만으로는 복구할 수 없었습니다. 이때 SYNC로 마지막 리두까지 받은 Standby가 있었다면 Failover가 현실적인 길이었을 것입니다. 데이터베이스에서 먼저 제거하고, 조회로 확인하고, 파일은 지우지 말고 옮겨 두는 순서를 몸에 익혀야 합니다.</a:t>
             </a:r>
           </a:p>
         </p:txBody>
@@ -1587,7 +1603,427 @@
           <a:lstStyle/>
           <a:p>
             <a:r>
-              <a:t>세 습관이 이 장의 실측에서 모두 검증됐습니다. 첫 번째는 STANDBY_FILE_MANAGEMENT를 Primary에서 확인하고 안심했다면 문제를 놓쳤을 상황입니다. 두 번째는 ORA-01623을 우회해 rm을 쓴 결과 인스턴스가 죽은 사고입니다. 세 번째는 그 사고의 직접적 원인이자, 빈 디렉터리를 rmdir로 지우는 이유이기도 합니다. 기술적으로 어려운 내용은 없습니다. 어려운 것은 급할 때도 이 순서를 지키는 것입니다.</a:t>
+              <a:t>PDB 생성 리두를 받은 Standby는 Primary와 같은 GUID로 PDB를 등록합니다. 시드에서 만드는 경우가 가장 단순한데, Standby도 자기 PDB$SEED를 가지고 있어서 그 파일을 복사하면 됩니다. Standby가 OMF라면 GUID 이름의 디렉터리까지 자동으로 생깁니다. 원격 클론과 플러그인은 원본 파일이 다른 데이터베이스에 있으니 TTS와 같은 문제가 생깁니다. 새 PDB는 Standby에서 MOUNTED 상태로 시작하므로 Active Data Guard로 조회하려면 Standby에서 따로 열어야 합니다.</a:t>
+            </a:r>
+          </a:p>
+        </p:txBody>
+      </p:sp>
+      <p:sp>
+        <p:nvSpPr>
+          <p:cNvPr id="4" name="Slide Number Placeholder 3"/>
+          <p:cNvSpPr>
+            <a:spLocks noGrp="1"/>
+          </p:cNvSpPr>
+          <p:nvPr>
+            <p:ph type="sldNum" idx="5" sz="quarter"/>
+          </p:nvPr>
+        </p:nvSpPr>
+        <p:spPr/>
+      </p:sp>
+    </p:spTree>
+  </p:cSld>
+  <p:clrMapOvr>
+    <a:masterClrMapping/>
+  </p:clrMapOvr>
+</p:notes>
+</file>
+
+<file path=ppt/notesSlides/notesSlide24.xml><?xml version="1.0" encoding="utf-8"?>
+<p:notes xmlns:a="http://schemas.openxmlformats.org/drawingml/2006/main" xmlns:p="http://schemas.openxmlformats.org/presentationml/2006/main" xmlns:r="http://schemas.openxmlformats.org/officeDocument/2006/relationships">
+  <p:cSld>
+    <p:spTree>
+      <p:nvGrpSpPr>
+        <p:cNvPr id="1" name=""/>
+        <p:cNvGrpSpPr/>
+        <p:nvPr/>
+      </p:nvGrpSpPr>
+      <p:grpSpPr>
+        <a:xfrm>
+          <a:off x="0" y="0"/>
+          <a:ext cx="0" cy="0"/>
+          <a:chOff x="0" y="0"/>
+          <a:chExt cx="0" cy="0"/>
+        </a:xfrm>
+      </p:grpSpPr>
+      <p:sp>
+        <p:nvSpPr>
+          <p:cNvPr id="2" name="Slide Image Placeholder 1"/>
+          <p:cNvSpPr>
+            <a:spLocks noGrp="1"/>
+          </p:cNvSpPr>
+          <p:nvPr>
+            <p:ph type="sldImg" idx="2"/>
+          </p:nvPr>
+        </p:nvSpPr>
+        <p:spPr/>
+      </p:sp>
+      <p:sp>
+        <p:nvSpPr>
+          <p:cNvPr id="3" name="Notes Placeholder 2"/>
+          <p:cNvSpPr>
+            <a:spLocks noGrp="1"/>
+          </p:cNvSpPr>
+          <p:nvPr>
+            <p:ph type="body" idx="3" sz="quarter"/>
+          </p:nvPr>
+        </p:nvSpPr>
+        <p:spPr/>
+        <p:txBody>
+          <a:bodyPr/>
+          <a:lstStyle/>
+          <a:p>
+            <a:r>
+              <a:t>12c까지는 원격 클론이나 플러그인을 하기 전에 Standby의 정해진 위치에 파일을 미리 복사해 두어야 했고, 잊으면 적용이 멈췄습니다. 18c부터 두 파라미터가 이 복사를 대신합니다. 공식 교재 퀴즈에서 원격 클론 때 파일 복사가 더 이상 필요 없다는 문장을 참으로 처리하는 것도 이 기능을 전제로 한 것입니다. 다만 DB 링크 방식은 링크가 원본 PDB를 직접 가리키고 그 원본이 READ ONLY로 열려 있을 때만 동작합니다. 원본을 읽기 전용으로 둘 수 없는 운영이라면 수동 복사 절차를 남겨 두어야 합니다.</a:t>
+            </a:r>
+          </a:p>
+        </p:txBody>
+      </p:sp>
+      <p:sp>
+        <p:nvSpPr>
+          <p:cNvPr id="4" name="Slide Number Placeholder 3"/>
+          <p:cNvSpPr>
+            <a:spLocks noGrp="1"/>
+          </p:cNvSpPr>
+          <p:nvPr>
+            <p:ph type="sldNum" idx="5" sz="quarter"/>
+          </p:nvPr>
+        </p:nvSpPr>
+        <p:spPr/>
+      </p:sp>
+    </p:spTree>
+  </p:cSld>
+  <p:clrMapOvr>
+    <a:masterClrMapping/>
+  </p:clrMapOvr>
+</p:notes>
+</file>
+
+<file path=ppt/notesSlides/notesSlide25.xml><?xml version="1.0" encoding="utf-8"?>
+<p:notes xmlns:a="http://schemas.openxmlformats.org/drawingml/2006/main" xmlns:p="http://schemas.openxmlformats.org/presentationml/2006/main" xmlns:r="http://schemas.openxmlformats.org/officeDocument/2006/relationships">
+  <p:cSld>
+    <p:spTree>
+      <p:nvGrpSpPr>
+        <p:cNvPr id="1" name=""/>
+        <p:cNvGrpSpPr/>
+        <p:nvPr/>
+      </p:nvGrpSpPr>
+      <p:grpSpPr>
+        <a:xfrm>
+          <a:off x="0" y="0"/>
+          <a:ext cx="0" cy="0"/>
+          <a:chOff x="0" y="0"/>
+          <a:chExt cx="0" cy="0"/>
+        </a:xfrm>
+      </p:grpSpPr>
+      <p:sp>
+        <p:nvSpPr>
+          <p:cNvPr id="2" name="Slide Image Placeholder 1"/>
+          <p:cNvSpPr>
+            <a:spLocks noGrp="1"/>
+          </p:cNvSpPr>
+          <p:nvPr>
+            <p:ph type="sldImg" idx="2"/>
+          </p:nvPr>
+        </p:nvSpPr>
+        <p:spPr/>
+      </p:sp>
+      <p:sp>
+        <p:nvSpPr>
+          <p:cNvPr id="3" name="Notes Placeholder 2"/>
+          <p:cNvSpPr>
+            <a:spLocks noGrp="1"/>
+          </p:cNvSpPr>
+          <p:nvPr>
+            <p:ph type="body" idx="3" sz="quarter"/>
+          </p:nvPr>
+        </p:nvSpPr>
+        <p:spPr/>
+        <p:txBody>
+          <a:bodyPr/>
+          <a:lstStyle/>
+          <a:p>
+            <a:r>
+              <a:t>12.2 이전에는 모든 PDB를 복제하거나 하나도 안 하거나 둘 중 하나였습니다. 지금은 개발용이나 임시 PDB를 빼서 Standby 공간과 적용 부담을 줄일 수 있습니다. 패턴 해석에서 가장 많이 틀리는 부분이 우선순위입니다. 예를 들어 별표, 마이너스 PDB별A, PDB2A 순서로 적으면 A로 끝나는 PDB를 뺐다가 맨 오른쪽 패턴이 PDB2A를 다시 넣습니다. STANDBYS 절은 PDB를 만드는 순간에 대상 Standby를 정하는 방식이라, 파라미터는 Standby별 정책으로, STANDBYS 절은 PDB별 판단으로 나눠 쓰면 깔끔합니다.</a:t>
+            </a:r>
+          </a:p>
+        </p:txBody>
+      </p:sp>
+      <p:sp>
+        <p:nvSpPr>
+          <p:cNvPr id="4" name="Slide Number Placeholder 3"/>
+          <p:cNvSpPr>
+            <a:spLocks noGrp="1"/>
+          </p:cNvSpPr>
+          <p:nvPr>
+            <p:ph type="sldNum" idx="5" sz="quarter"/>
+          </p:nvPr>
+        </p:nvSpPr>
+        <p:spPr/>
+      </p:sp>
+    </p:spTree>
+  </p:cSld>
+  <p:clrMapOvr>
+    <a:masterClrMapping/>
+  </p:clrMapOvr>
+</p:notes>
+</file>
+
+<file path=ppt/notesSlides/notesSlide26.xml><?xml version="1.0" encoding="utf-8"?>
+<p:notes xmlns:a="http://schemas.openxmlformats.org/drawingml/2006/main" xmlns:p="http://schemas.openxmlformats.org/presentationml/2006/main" xmlns:r="http://schemas.openxmlformats.org/officeDocument/2006/relationships">
+  <p:cSld>
+    <p:spTree>
+      <p:nvGrpSpPr>
+        <p:cNvPr id="1" name=""/>
+        <p:cNvGrpSpPr/>
+        <p:nvPr/>
+      </p:nvGrpSpPr>
+      <p:grpSpPr>
+        <a:xfrm>
+          <a:off x="0" y="0"/>
+          <a:ext cx="0" cy="0"/>
+          <a:chOff x="0" y="0"/>
+          <a:chExt cx="0" cy="0"/>
+        </a:xfrm>
+      </p:grpSpPr>
+      <p:sp>
+        <p:nvSpPr>
+          <p:cNvPr id="2" name="Slide Image Placeholder 1"/>
+          <p:cNvSpPr>
+            <a:spLocks noGrp="1"/>
+          </p:cNvSpPr>
+          <p:nvPr>
+            <p:ph type="sldImg" idx="2"/>
+          </p:nvPr>
+        </p:nvSpPr>
+        <p:spPr/>
+      </p:sp>
+      <p:sp>
+        <p:nvSpPr>
+          <p:cNvPr id="3" name="Notes Placeholder 2"/>
+          <p:cNvSpPr>
+            <a:spLocks noGrp="1"/>
+          </p:cNvSpPr>
+          <p:nvPr>
+            <p:ph type="body" idx="3" sz="quarter"/>
+          </p:nvPr>
+        </p:nvSpPr>
+        <p:spPr/>
+        <p:txBody>
+          <a:bodyPr/>
+          <a:lstStyle/>
+          <a:p>
+            <a:r>
+              <a:t>제외했다고 Standby에서 PDB가 아예 보이지 않는 것은 아닙니다. 이름과 메타데이터는 등록되고 데이터 파일만 없는 상태로 남습니다. 나중에 이 PDB를 포함하려면 Standby에서 RMAN으로 Primary 서비스에서 해당 PDB 파일을 복원하고, 그 PDB에 대해 ENABLE RECOVERY를 실행한 뒤 적용을 재기동합니다. 결정할 때 따져 볼 것은 마지막 줄입니다. 제외된 PDB는 Failover 뒤 새 Primary에서 열 수 없으므로, 장애 때 잃어도 되는 PDB인지 업무 담당자와 합의하고 제외해야 합니다.</a:t>
+            </a:r>
+          </a:p>
+        </p:txBody>
+      </p:sp>
+      <p:sp>
+        <p:nvSpPr>
+          <p:cNvPr id="4" name="Slide Number Placeholder 3"/>
+          <p:cNvSpPr>
+            <a:spLocks noGrp="1"/>
+          </p:cNvSpPr>
+          <p:nvPr>
+            <p:ph type="sldNum" idx="5" sz="quarter"/>
+          </p:nvPr>
+        </p:nvSpPr>
+        <p:spPr/>
+      </p:sp>
+    </p:spTree>
+  </p:cSld>
+  <p:clrMapOvr>
+    <a:masterClrMapping/>
+  </p:clrMapOvr>
+</p:notes>
+</file>
+
+<file path=ppt/notesSlides/notesSlide27.xml><?xml version="1.0" encoding="utf-8"?>
+<p:notes xmlns:a="http://schemas.openxmlformats.org/drawingml/2006/main" xmlns:p="http://schemas.openxmlformats.org/presentationml/2006/main" xmlns:r="http://schemas.openxmlformats.org/officeDocument/2006/relationships">
+  <p:cSld>
+    <p:spTree>
+      <p:nvGrpSpPr>
+        <p:cNvPr id="1" name=""/>
+        <p:cNvGrpSpPr/>
+        <p:nvPr/>
+      </p:nvGrpSpPr>
+      <p:grpSpPr>
+        <a:xfrm>
+          <a:off x="0" y="0"/>
+          <a:ext cx="0" cy="0"/>
+          <a:chOff x="0" y="0"/>
+          <a:chExt cx="0" cy="0"/>
+        </a:xfrm>
+      </p:grpSpPr>
+      <p:sp>
+        <p:nvSpPr>
+          <p:cNvPr id="2" name="Slide Image Placeholder 1"/>
+          <p:cNvSpPr>
+            <a:spLocks noGrp="1"/>
+          </p:cNvSpPr>
+          <p:nvPr>
+            <p:ph type="sldImg" idx="2"/>
+          </p:nvPr>
+        </p:nvSpPr>
+        <p:spPr/>
+      </p:sp>
+      <p:sp>
+        <p:nvSpPr>
+          <p:cNvPr id="3" name="Notes Placeholder 2"/>
+          <p:cNvSpPr>
+            <a:spLocks noGrp="1"/>
+          </p:cNvSpPr>
+          <p:nvPr>
+            <p:ph type="body" idx="3" sz="quarter"/>
+          </p:nvPr>
+        </p:nvSpPr>
+        <p:spPr/>
+        <p:txBody>
+          <a:bodyPr/>
+          <a:lstStyle/>
+          <a:p>
+            <a:r>
+              <a:t>PDB 삭제는 자동으로 따라가지만 OMF에서는 빈 GUID 디렉터리가 남는 경우가 있습니다. 정리할 때 빈 디렉터리만 지우는 rmdir을 쓰면, 비어 있지 않을 때 실패하므로 그 자체가 안전장치가 됩니다. 시나리오는 개발팀이 원격 클론으로 PDB를 자주 만드는 CDB에서 복제 대상을 고르지 않아 생긴 일입니다. 원본이 Standby에 없으니 적용이 멈췄고, 해당 PDB를 복구 제외로 돌린 뒤 재기동했습니다. 이후 개발 PDB 이름을 DEV로 시작하게 정하고 Standby에서 그 패턴을 빼는 방식으로 정리했습니다.</a:t>
+            </a:r>
+          </a:p>
+        </p:txBody>
+      </p:sp>
+      <p:sp>
+        <p:nvSpPr>
+          <p:cNvPr id="4" name="Slide Number Placeholder 3"/>
+          <p:cNvSpPr>
+            <a:spLocks noGrp="1"/>
+          </p:cNvSpPr>
+          <p:nvPr>
+            <p:ph type="sldNum" idx="5" sz="quarter"/>
+          </p:nvPr>
+        </p:nvSpPr>
+        <p:spPr/>
+      </p:sp>
+    </p:spTree>
+  </p:cSld>
+  <p:clrMapOvr>
+    <a:masterClrMapping/>
+  </p:clrMapOvr>
+</p:notes>
+</file>
+
+<file path=ppt/notesSlides/notesSlide28.xml><?xml version="1.0" encoding="utf-8"?>
+<p:notes xmlns:a="http://schemas.openxmlformats.org/drawingml/2006/main" xmlns:p="http://schemas.openxmlformats.org/presentationml/2006/main" xmlns:r="http://schemas.openxmlformats.org/officeDocument/2006/relationships">
+  <p:cSld>
+    <p:spTree>
+      <p:nvGrpSpPr>
+        <p:cNvPr id="1" name=""/>
+        <p:cNvGrpSpPr/>
+        <p:nvPr/>
+      </p:nvGrpSpPr>
+      <p:grpSpPr>
+        <a:xfrm>
+          <a:off x="0" y="0"/>
+          <a:ext cx="0" cy="0"/>
+          <a:chOff x="0" y="0"/>
+          <a:chExt cx="0" cy="0"/>
+        </a:xfrm>
+      </p:grpSpPr>
+      <p:sp>
+        <p:nvSpPr>
+          <p:cNvPr id="2" name="Slide Image Placeholder 1"/>
+          <p:cNvSpPr>
+            <a:spLocks noGrp="1"/>
+          </p:cNvSpPr>
+          <p:nvPr>
+            <p:ph type="sldImg" idx="2"/>
+          </p:nvPr>
+        </p:nvSpPr>
+        <p:spPr/>
+      </p:sp>
+      <p:sp>
+        <p:nvSpPr>
+          <p:cNvPr id="3" name="Notes Placeholder 2"/>
+          <p:cNvSpPr>
+            <a:spLocks noGrp="1"/>
+          </p:cNvSpPr>
+          <p:nvPr>
+            <p:ph type="body" idx="3" sz="quarter"/>
+          </p:nvPr>
+        </p:nvSpPr>
+        <p:spPr/>
+        <p:txBody>
+          <a:bodyPr/>
+          <a:lstStyle/>
+          <a:p>
+            <a:r>
+              <a:t>NOLOGGING 작업이 무서운 이유는 적용 단계에서 아무 오류도 나지 않는다는 데 있습니다. Standby는 이 범위가 복구 불가라는 표시만 받아 기록하고 넘어가므로, 적용 상태와 lag 지표는 모두 정상으로 보입니다. 문제는 누군가 그 블록을 읽을 때 드러납니다. ORA-01578만 보면 저장 장치 손상으로 오해하기 쉬운데 ORA-26040이 함께 나오면 NOLOGGING 적재의 흔적입니다. Failover 뒤에 처음 발견하면 원본이 있던 Primary가 사라진 상태라 손쓸 방법이 거의 없습니다.</a:t>
+            </a:r>
+          </a:p>
+        </p:txBody>
+      </p:sp>
+      <p:sp>
+        <p:nvSpPr>
+          <p:cNvPr id="4" name="Slide Number Placeholder 3"/>
+          <p:cNvSpPr>
+            <a:spLocks noGrp="1"/>
+          </p:cNvSpPr>
+          <p:nvPr>
+            <p:ph type="sldNum" idx="5" sz="quarter"/>
+          </p:nvPr>
+        </p:nvSpPr>
+        <p:spPr/>
+      </p:sp>
+    </p:spTree>
+  </p:cSld>
+  <p:clrMapOvr>
+    <a:masterClrMapping/>
+  </p:clrMapOvr>
+</p:notes>
+</file>
+
+<file path=ppt/notesSlides/notesSlide29.xml><?xml version="1.0" encoding="utf-8"?>
+<p:notes xmlns:a="http://schemas.openxmlformats.org/drawingml/2006/main" xmlns:p="http://schemas.openxmlformats.org/presentationml/2006/main" xmlns:r="http://schemas.openxmlformats.org/officeDocument/2006/relationships">
+  <p:cSld>
+    <p:spTree>
+      <p:nvGrpSpPr>
+        <p:cNvPr id="1" name=""/>
+        <p:cNvGrpSpPr/>
+        <p:nvPr/>
+      </p:nvGrpSpPr>
+      <p:grpSpPr>
+        <a:xfrm>
+          <a:off x="0" y="0"/>
+          <a:ext cx="0" cy="0"/>
+          <a:chOff x="0" y="0"/>
+          <a:chExt cx="0" cy="0"/>
+        </a:xfrm>
+      </p:grpSpPr>
+      <p:sp>
+        <p:nvSpPr>
+          <p:cNvPr id="2" name="Slide Image Placeholder 1"/>
+          <p:cNvSpPr>
+            <a:spLocks noGrp="1"/>
+          </p:cNvSpPr>
+          <p:nvPr>
+            <p:ph type="sldImg" idx="2"/>
+          </p:nvPr>
+        </p:nvSpPr>
+        <p:spPr/>
+      </p:sp>
+      <p:sp>
+        <p:nvSpPr>
+          <p:cNvPr id="3" name="Notes Placeholder 2"/>
+          <p:cNvSpPr>
+            <a:spLocks noGrp="1"/>
+          </p:cNvSpPr>
+          <p:nvPr>
+            <p:ph type="body" idx="3" sz="quarter"/>
+          </p:nvPr>
+        </p:nvSpPr>
+        <p:spPr/>
+        <p:txBody>
+          <a:bodyPr/>
+          <a:lstStyle/>
+          <a:p>
+            <a:r>
+              <a:t>UNRECOVERABLE_CHANGE#는 그 파일에서 마지막으로 NOLOGGING 작업이 일어난 SCN입니다. Primary와 Standby의 값을 파일별로 나란히 놓고 Primary 쪽이 더 큰 파일을 찾으면 그것이 복구 대상입니다. 12.2부터는 Standby에서 V$NONLOGGED_BLOCK으로 블록 범위까지 직접 볼 수 있어 범위가 작은지 큰지 판단하기 쉬워졌습니다. 이 비교를 정기 점검 스크립트에 넣어 두면, 누군가 FORCE LOGGING을 잠시 해제하고 작업한 흔적도 함께 잡힙니다.</a:t>
             </a:r>
           </a:p>
         </p:txBody>
@@ -1657,7 +2093,497 @@
           <a:lstStyle/>
           <a:p>
             <a:r>
-              <a:t>사람이 할 일이 없습니다. Primary에서 명령을 내리면 리두를 통해 Standby가 따라 만듭니다. resize도 반영되는데, 이때 파일 이름은 바뀌지 않습니다. 파일을 다시 만든 것이 아니라 크기만 늘린 것이니까요. 삭제도 반영됩니다. DROP TABLESPACE에 INCLUDING DATAFILES를 붙이면 Standby의 운영체제 파일까지 사라집니다. 붙이지 않으면 양쪽 모두 파일이 남고, Standby 쪽은 OMF 이름이라 사람이 짐작하기 어려우므로 붙이는 편이 낫습니다.</a:t>
+              <a:t>실습 첫 단계에서 Standby에 직접 데이터 파일을 추가해 보면 ORA-16000이 납니다. STANDBY_FILE_MANAGEMENT 값과는 상관없는 오류이고, 물리 Standby가 원래 쓰기를 받지 않기 때문에 나는 것입니다. 물리 Standby의 데이터 파일은 Primary와 블록 단위로 같아야 하므로 구조 변경은 항상 Primary에서 하고 Standby는 리두로 따라갑니다. 다만 온라인 리두 로그 그룹이나 Standby Redo Log, 파일 이름처럼 Standby 컨트롤 파일에만 존재하는 항목은 리두가 대신해 주지 못하니 Standby에서 사람이 직접 바꿉니다.</a:t>
+            </a:r>
+          </a:p>
+        </p:txBody>
+      </p:sp>
+      <p:sp>
+        <p:nvSpPr>
+          <p:cNvPr id="4" name="Slide Number Placeholder 3"/>
+          <p:cNvSpPr>
+            <a:spLocks noGrp="1"/>
+          </p:cNvSpPr>
+          <p:nvPr>
+            <p:ph type="sldNum" idx="5" sz="quarter"/>
+          </p:nvPr>
+        </p:nvSpPr>
+        <p:spPr/>
+      </p:sp>
+    </p:spTree>
+  </p:cSld>
+  <p:clrMapOvr>
+    <a:masterClrMapping/>
+  </p:clrMapOvr>
+</p:notes>
+</file>
+
+<file path=ppt/notesSlides/notesSlide30.xml><?xml version="1.0" encoding="utf-8"?>
+<p:notes xmlns:a="http://schemas.openxmlformats.org/drawingml/2006/main" xmlns:p="http://schemas.openxmlformats.org/presentationml/2006/main" xmlns:r="http://schemas.openxmlformats.org/officeDocument/2006/relationships">
+  <p:cSld>
+    <p:spTree>
+      <p:nvGrpSpPr>
+        <p:cNvPr id="1" name=""/>
+        <p:cNvGrpSpPr/>
+        <p:nvPr/>
+      </p:nvGrpSpPr>
+      <p:grpSpPr>
+        <a:xfrm>
+          <a:off x="0" y="0"/>
+          <a:ext cx="0" cy="0"/>
+          <a:chOff x="0" y="0"/>
+          <a:chExt cx="0" cy="0"/>
+        </a:xfrm>
+      </p:grpSpPr>
+      <p:sp>
+        <p:nvSpPr>
+          <p:cNvPr id="2" name="Slide Image Placeholder 1"/>
+          <p:cNvSpPr>
+            <a:spLocks noGrp="1"/>
+          </p:cNvSpPr>
+          <p:nvPr>
+            <p:ph type="sldImg" idx="2"/>
+          </p:nvPr>
+        </p:nvSpPr>
+        <p:spPr/>
+      </p:sp>
+      <p:sp>
+        <p:nvSpPr>
+          <p:cNvPr id="3" name="Notes Placeholder 2"/>
+          <p:cNvSpPr>
+            <a:spLocks noGrp="1"/>
+          </p:cNvSpPr>
+          <p:nvPr>
+            <p:ph type="body" idx="3" sz="quarter"/>
+          </p:nvPr>
+        </p:nvSpPr>
+        <p:spPr/>
+        <p:txBody>
+          <a:bodyPr/>
+          <a:lstStyle/>
+          <a:p>
+            <a:r>
+              <a:t>공식 교재는 BEGIN BACKUP으로 Primary 파일을 복사하는 오래된 방법을 보여 주지만, 19c에서는 RMAN의 FROM SERVICE로 네트워크를 통해 파일을 바로 가져오는 방법이 간단합니다. 12.2부터는 복구 불가로 표시된 블록만 골라 Primary에서 가져오는 NONLOGGED BLOCK 복구도 있어서, 큰 파일의 일부만 문제인 경우 훨씬 가볍습니다. 파일 복사 방식에서는 복사 시점 이후의 아카이브 로그가 Standby에 모두 있어야 하며, 재기동 때 ORA-00308이 보이면 7장의 갭 해소부터 진행합니다.</a:t>
+            </a:r>
+          </a:p>
+        </p:txBody>
+      </p:sp>
+      <p:sp>
+        <p:nvSpPr>
+          <p:cNvPr id="4" name="Slide Number Placeholder 3"/>
+          <p:cNvSpPr>
+            <a:spLocks noGrp="1"/>
+          </p:cNvSpPr>
+          <p:nvPr>
+            <p:ph type="sldNum" idx="5" sz="quarter"/>
+          </p:nvPr>
+        </p:nvSpPr>
+        <p:spPr/>
+      </p:sp>
+    </p:spTree>
+  </p:cSld>
+  <p:clrMapOvr>
+    <a:masterClrMapping/>
+  </p:clrMapOvr>
+</p:notes>
+</file>
+
+<file path=ppt/notesSlides/notesSlide31.xml><?xml version="1.0" encoding="utf-8"?>
+<p:notes xmlns:a="http://schemas.openxmlformats.org/drawingml/2006/main" xmlns:p="http://schemas.openxmlformats.org/presentationml/2006/main" xmlns:r="http://schemas.openxmlformats.org/officeDocument/2006/relationships">
+  <p:cSld>
+    <p:spTree>
+      <p:nvGrpSpPr>
+        <p:cNvPr id="1" name=""/>
+        <p:cNvGrpSpPr/>
+        <p:nvPr/>
+      </p:nvGrpSpPr>
+      <p:grpSpPr>
+        <a:xfrm>
+          <a:off x="0" y="0"/>
+          <a:ext cx="0" cy="0"/>
+          <a:chOff x="0" y="0"/>
+          <a:chExt cx="0" cy="0"/>
+        </a:xfrm>
+      </p:grpSpPr>
+      <p:sp>
+        <p:nvSpPr>
+          <p:cNvPr id="2" name="Slide Image Placeholder 1"/>
+          <p:cNvSpPr>
+            <a:spLocks noGrp="1"/>
+          </p:cNvSpPr>
+          <p:nvPr>
+            <p:ph type="sldImg" idx="2"/>
+          </p:nvPr>
+        </p:nvSpPr>
+        <p:spPr/>
+      </p:sp>
+      <p:sp>
+        <p:nvSpPr>
+          <p:cNvPr id="3" name="Notes Placeholder 2"/>
+          <p:cNvSpPr>
+            <a:spLocks noGrp="1"/>
+          </p:cNvSpPr>
+          <p:nvPr>
+            <p:ph type="body" idx="3" sz="quarter"/>
+          </p:nvPr>
+        </p:nvSpPr>
+        <p:spPr/>
+        <p:txBody>
+          <a:bodyPr/>
+          <a:lstStyle/>
+          <a:p>
+            <a:r>
+              <a:t>FORCE LOGGING은 4장에서 Primary를 준비할 때 이미 켰던 설정입니다. 여기서 덧붙일 내용은 켜기 전에 생긴 흔적은 그대로 남는다는 것입니다. 공식 교재 시나리오도 FORCE LOGGING 없이 운영하다 NOLOGGING 작업이 있었고 그 뒤에 켠 상황을 가정합니다. 대량 적재 성능이 꼭 필요한 시스템이라면 18c의 Standby nologging 모드를 검토할 수 있는데, 리두 대신 적재된 블록을 Standby로 보내는 방식이며 Active Data Guard 옵션이 필요합니다. 19c CDB에서는 PDB 설정보다 CDB 수준의 FORCE LOGGING이 기준입니다.</a:t>
+            </a:r>
+          </a:p>
+        </p:txBody>
+      </p:sp>
+      <p:sp>
+        <p:nvSpPr>
+          <p:cNvPr id="4" name="Slide Number Placeholder 3"/>
+          <p:cNvSpPr>
+            <a:spLocks noGrp="1"/>
+          </p:cNvSpPr>
+          <p:nvPr>
+            <p:ph type="sldNum" idx="5" sz="quarter"/>
+          </p:nvPr>
+        </p:nvSpPr>
+        <p:spPr/>
+      </p:sp>
+    </p:spTree>
+  </p:cSld>
+  <p:clrMapOvr>
+    <a:masterClrMapping/>
+  </p:clrMapOvr>
+</p:notes>
+</file>
+
+<file path=ppt/notesSlides/notesSlide32.xml><?xml version="1.0" encoding="utf-8"?>
+<p:notes xmlns:a="http://schemas.openxmlformats.org/drawingml/2006/main" xmlns:p="http://schemas.openxmlformats.org/presentationml/2006/main" xmlns:r="http://schemas.openxmlformats.org/officeDocument/2006/relationships">
+  <p:cSld>
+    <p:spTree>
+      <p:nvGrpSpPr>
+        <p:cNvPr id="1" name=""/>
+        <p:cNvGrpSpPr/>
+        <p:nvPr/>
+      </p:nvGrpSpPr>
+      <p:grpSpPr>
+        <a:xfrm>
+          <a:off x="0" y="0"/>
+          <a:ext cx="0" cy="0"/>
+          <a:chOff x="0" y="0"/>
+          <a:chExt cx="0" cy="0"/>
+        </a:xfrm>
+      </p:grpSpPr>
+      <p:sp>
+        <p:nvSpPr>
+          <p:cNvPr id="2" name="Slide Image Placeholder 1"/>
+          <p:cNvSpPr>
+            <a:spLocks noGrp="1"/>
+          </p:cNvSpPr>
+          <p:nvPr>
+            <p:ph type="sldImg" idx="2"/>
+          </p:nvPr>
+        </p:nvSpPr>
+        <p:spPr/>
+      </p:sp>
+      <p:sp>
+        <p:nvSpPr>
+          <p:cNvPr id="3" name="Notes Placeholder 2"/>
+          <p:cNvSpPr>
+            <a:spLocks noGrp="1"/>
+          </p:cNvSpPr>
+          <p:nvPr>
+            <p:ph type="body" idx="3" sz="quarter"/>
+          </p:nvPr>
+        </p:nvSpPr>
+        <p:spPr/>
+        <p:txBody>
+          <a:bodyPr/>
+          <a:lstStyle/>
+          <a:p>
+            <a:r>
+              <a:t>성능 관련 파라미터를 Primary에서만 바꿔 두면 평소에는 아무 문제가 없다가 Switchover 뒤 새 Primary의 성능이 갑자기 떨어지는 일이 생깁니다. 메모리 크기나 프로세스 수처럼 역할이 바뀌어도 같은 성능을 내야 하는 값은 양쪽에 함께 넣습니다. 반대로 DB_UNIQUE_NAME이나 목적지 설정은 처음부터 다르게 설계된 값이라 맞추면 오히려 고장이 납니다. COMPATIBLE은 순서가 중요합니다. Primary를 먼저 올리면 그 이후 리두를 Standby가 처리하지 못할 수 있으므로 Standby부터 올립니다.</a:t>
+            </a:r>
+          </a:p>
+        </p:txBody>
+      </p:sp>
+      <p:sp>
+        <p:nvSpPr>
+          <p:cNvPr id="4" name="Slide Number Placeholder 3"/>
+          <p:cNvSpPr>
+            <a:spLocks noGrp="1"/>
+          </p:cNvSpPr>
+          <p:nvPr>
+            <p:ph type="sldNum" idx="5" sz="quarter"/>
+          </p:nvPr>
+        </p:nvSpPr>
+        <p:spPr/>
+      </p:sp>
+    </p:spTree>
+  </p:cSld>
+  <p:clrMapOvr>
+    <a:masterClrMapping/>
+  </p:clrMapOvr>
+</p:notes>
+</file>
+
+<file path=ppt/notesSlides/notesSlide33.xml><?xml version="1.0" encoding="utf-8"?>
+<p:notes xmlns:a="http://schemas.openxmlformats.org/drawingml/2006/main" xmlns:p="http://schemas.openxmlformats.org/presentationml/2006/main" xmlns:r="http://schemas.openxmlformats.org/officeDocument/2006/relationships">
+  <p:cSld>
+    <p:spTree>
+      <p:nvGrpSpPr>
+        <p:cNvPr id="1" name=""/>
+        <p:cNvGrpSpPr/>
+        <p:nvPr/>
+      </p:nvGrpSpPr>
+      <p:grpSpPr>
+        <a:xfrm>
+          <a:off x="0" y="0"/>
+          <a:ext cx="0" cy="0"/>
+          <a:chOff x="0" y="0"/>
+          <a:chExt cx="0" cy="0"/>
+        </a:xfrm>
+      </p:grpSpPr>
+      <p:sp>
+        <p:nvSpPr>
+          <p:cNvPr id="2" name="Slide Image Placeholder 1"/>
+          <p:cNvSpPr>
+            <a:spLocks noGrp="1"/>
+          </p:cNvSpPr>
+          <p:nvPr>
+            <p:ph type="sldImg" idx="2"/>
+          </p:nvPr>
+        </p:nvSpPr>
+        <p:spPr/>
+      </p:sp>
+      <p:sp>
+        <p:nvSpPr>
+          <p:cNvPr id="3" name="Notes Placeholder 2"/>
+          <p:cNvSpPr>
+            <a:spLocks noGrp="1"/>
+          </p:cNvSpPr>
+          <p:nvPr>
+            <p:ph type="body" idx="3" sz="quarter"/>
+          </p:nvPr>
+        </p:nvSpPr>
+        <p:spPr/>
+        <p:txBody>
+          <a:bodyPr/>
+          <a:lstStyle/>
+          <a:p>
+            <a:r>
+              <a:t>예전 자료에는 SYS 암호를 바꾸거나 SYSDG 권한을 줄 때마다 패스워드 파일을 Standby에 복사하라고 적혀 있습니다. 12.2부터는 이 변경이 리두에 실려 Standby가 적용할 때 패스워드 파일도 갱신되므로 복사가 필요 없습니다. 예외는 Far Sync 인스턴스입니다. Far Sync는 리두를 넘겨주기만 하고 적용하지 않으니 패스워드 파일이 바뀌지 않아 직접 복사해야 합니다. 그리고 이 갱신은 적용이 돌아야 일어납니다. 적용이 멈춘 Standby로 전환하면 바뀐 암호를 모르는 상태일 수 있습니다.</a:t>
+            </a:r>
+          </a:p>
+        </p:txBody>
+      </p:sp>
+      <p:sp>
+        <p:nvSpPr>
+          <p:cNvPr id="4" name="Slide Number Placeholder 3"/>
+          <p:cNvSpPr>
+            <a:spLocks noGrp="1"/>
+          </p:cNvSpPr>
+          <p:nvPr>
+            <p:ph type="sldNum" idx="5" sz="quarter"/>
+          </p:nvPr>
+        </p:nvSpPr>
+        <p:spPr/>
+      </p:sp>
+    </p:spTree>
+  </p:cSld>
+  <p:clrMapOvr>
+    <a:masterClrMapping/>
+  </p:clrMapOvr>
+</p:notes>
+</file>
+
+<file path=ppt/notesSlides/notesSlide34.xml><?xml version="1.0" encoding="utf-8"?>
+<p:notes xmlns:a="http://schemas.openxmlformats.org/drawingml/2006/main" xmlns:p="http://schemas.openxmlformats.org/presentationml/2006/main" xmlns:r="http://schemas.openxmlformats.org/officeDocument/2006/relationships">
+  <p:cSld>
+    <p:spTree>
+      <p:nvGrpSpPr>
+        <p:cNvPr id="1" name=""/>
+        <p:cNvGrpSpPr/>
+        <p:nvPr/>
+      </p:nvGrpSpPr>
+      <p:grpSpPr>
+        <a:xfrm>
+          <a:off x="0" y="0"/>
+          <a:ext cx="0" cy="0"/>
+          <a:chOff x="0" y="0"/>
+          <a:chExt cx="0" cy="0"/>
+        </a:xfrm>
+      </p:grpSpPr>
+      <p:sp>
+        <p:nvSpPr>
+          <p:cNvPr id="2" name="Slide Image Placeholder 1"/>
+          <p:cNvSpPr>
+            <a:spLocks noGrp="1"/>
+          </p:cNvSpPr>
+          <p:nvPr>
+            <p:ph type="sldImg" idx="2"/>
+          </p:nvPr>
+        </p:nvSpPr>
+        <p:spPr/>
+      </p:sp>
+      <p:sp>
+        <p:nvSpPr>
+          <p:cNvPr id="3" name="Notes Placeholder 2"/>
+          <p:cNvSpPr>
+            <a:spLocks noGrp="1"/>
+          </p:cNvSpPr>
+          <p:nvPr>
+            <p:ph type="body" idx="3" sz="quarter"/>
+          </p:nvPr>
+        </p:nvSpPr>
+        <p:spPr/>
+        <p:txBody>
+          <a:bodyPr/>
+          <a:lstStyle/>
+          <a:p>
+            <a:r>
+              <a:t>TDE를 쓰는 구성에서는 Primary에서 마스터 키를 재설정할 때마다 키스토어 파일을 Standby에 복사해야 합니다. 이 복사를 잊으면 키 재설정 이후 암호화된 데이터를 Standby가 다루지 못합니다. 공식 교재의 시나리오는 키스토어 암호 변경 명령을 예로 들고 있는데, 키 재설정과 암호 변경 모두 Primary 키스토어 파일을 바꾸는 작업이니 어느 쪽이든 복사해 두는 것이 안전합니다. Oracle Key Vault처럼 외부 키 관리 시스템을 쓰면 양쪽이 같은 저장소를 바라보므로 이 문제가 사라집니다.</a:t>
+            </a:r>
+          </a:p>
+        </p:txBody>
+      </p:sp>
+      <p:sp>
+        <p:nvSpPr>
+          <p:cNvPr id="4" name="Slide Number Placeholder 3"/>
+          <p:cNvSpPr>
+            <a:spLocks noGrp="1"/>
+          </p:cNvSpPr>
+          <p:nvPr>
+            <p:ph type="sldNum" idx="5" sz="quarter"/>
+          </p:nvPr>
+        </p:nvSpPr>
+        <p:spPr/>
+      </p:sp>
+    </p:spTree>
+  </p:cSld>
+  <p:clrMapOvr>
+    <a:masterClrMapping/>
+  </p:clrMapOvr>
+</p:notes>
+</file>
+
+<file path=ppt/notesSlides/notesSlide35.xml><?xml version="1.0" encoding="utf-8"?>
+<p:notes xmlns:a="http://schemas.openxmlformats.org/drawingml/2006/main" xmlns:p="http://schemas.openxmlformats.org/presentationml/2006/main" xmlns:r="http://schemas.openxmlformats.org/officeDocument/2006/relationships">
+  <p:cSld>
+    <p:spTree>
+      <p:nvGrpSpPr>
+        <p:cNvPr id="1" name=""/>
+        <p:cNvGrpSpPr/>
+        <p:nvPr/>
+      </p:nvGrpSpPr>
+      <p:grpSpPr>
+        <a:xfrm>
+          <a:off x="0" y="0"/>
+          <a:ext cx="0" cy="0"/>
+          <a:chOff x="0" y="0"/>
+          <a:chExt cx="0" cy="0"/>
+        </a:xfrm>
+      </p:grpSpPr>
+      <p:sp>
+        <p:nvSpPr>
+          <p:cNvPr id="2" name="Slide Image Placeholder 1"/>
+          <p:cNvSpPr>
+            <a:spLocks noGrp="1"/>
+          </p:cNvSpPr>
+          <p:nvPr>
+            <p:ph type="sldImg" idx="2"/>
+          </p:nvPr>
+        </p:nvSpPr>
+        <p:spPr/>
+      </p:sp>
+      <p:sp>
+        <p:nvSpPr>
+          <p:cNvPr id="3" name="Notes Placeholder 2"/>
+          <p:cNvSpPr>
+            <a:spLocks noGrp="1"/>
+          </p:cNvSpPr>
+          <p:nvPr>
+            <p:ph type="body" idx="3" sz="quarter"/>
+          </p:nvPr>
+        </p:nvSpPr>
+        <p:spPr/>
+        <p:txBody>
+          <a:bodyPr/>
+          <a:lstStyle/>
+          <a:p>
+            <a:r>
+              <a:t>Primary 컨트롤 파일을 CREATE CONTROLFILE로 다시 만드는 일은 드물지만, 그렇게 하면 Standby와의 연결이 끊어지므로 Standby용 컨트롤 파일을 새로 만들어 배치해야 합니다. Oracle Net 설정과 운영체제 계정도 리두와 무관합니다. 점검표는 Switchover 연습 전후로 양쪽 서버를 나란히 놓고 비교하는 용도입니다. Switchover가 성공하면 다 됐다고 여기기 쉽지만, 이 항목들의 차이는 보통 며칠 뒤 업무 중에 드러납니다. 연습 결과 보고서에 이 비교 결과를 함께 남기면 다음 연습의 기준이 됩니다.</a:t>
+            </a:r>
+          </a:p>
+        </p:txBody>
+      </p:sp>
+      <p:sp>
+        <p:nvSpPr>
+          <p:cNvPr id="4" name="Slide Number Placeholder 3"/>
+          <p:cNvSpPr>
+            <a:spLocks noGrp="1"/>
+          </p:cNvSpPr>
+          <p:nvPr>
+            <p:ph type="sldNum" idx="5" sz="quarter"/>
+          </p:nvPr>
+        </p:nvSpPr>
+        <p:spPr/>
+      </p:sp>
+    </p:spTree>
+  </p:cSld>
+  <p:clrMapOvr>
+    <a:masterClrMapping/>
+  </p:clrMapOvr>
+</p:notes>
+</file>
+
+<file path=ppt/notesSlides/notesSlide36.xml><?xml version="1.0" encoding="utf-8"?>
+<p:notes xmlns:a="http://schemas.openxmlformats.org/drawingml/2006/main" xmlns:p="http://schemas.openxmlformats.org/presentationml/2006/main" xmlns:r="http://schemas.openxmlformats.org/officeDocument/2006/relationships">
+  <p:cSld>
+    <p:spTree>
+      <p:nvGrpSpPr>
+        <p:cNvPr id="1" name=""/>
+        <p:cNvGrpSpPr/>
+        <p:nvPr/>
+      </p:nvGrpSpPr>
+      <p:grpSpPr>
+        <a:xfrm>
+          <a:off x="0" y="0"/>
+          <a:ext cx="0" cy="0"/>
+          <a:chOff x="0" y="0"/>
+          <a:chExt cx="0" cy="0"/>
+        </a:xfrm>
+      </p:grpSpPr>
+      <p:sp>
+        <p:nvSpPr>
+          <p:cNvPr id="2" name="Slide Image Placeholder 1"/>
+          <p:cNvSpPr>
+            <a:spLocks noGrp="1"/>
+          </p:cNvSpPr>
+          <p:nvPr>
+            <p:ph type="sldImg" idx="2"/>
+          </p:nvPr>
+        </p:nvSpPr>
+        <p:spPr/>
+      </p:sp>
+      <p:sp>
+        <p:nvSpPr>
+          <p:cNvPr id="3" name="Notes Placeholder 2"/>
+          <p:cNvSpPr>
+            <a:spLocks noGrp="1"/>
+          </p:cNvSpPr>
+          <p:nvPr>
+            <p:ph type="body" idx="3" sz="quarter"/>
+          </p:nvPr>
+        </p:nvSpPr>
+        <p:spPr/>
+        <p:txBody>
+          <a:bodyPr/>
+          <a:lstStyle/>
+          <a:p>
+            <a:r>
+              <a:t>이 장에서 본 문제들은 대부분 작업 당일에는 보이지 않다가 나중에 드러납니다. MANUAL로 둔 값은 다음 파일 추가 때, 옮기지 않은 Standby 파일은 디스크가 찰 때, 맞추지 않은 로그 구성과 파라미터는 역할 전환 뒤에 문제가 됩니다. 대책도 작업 계획서와 정기 점검에 들어가야 합니다. 경로 방식 Standby를 운영한다면 PDB를 자주 만들거나 파일 배치가 바뀌는 환경일수록 OMF로 옮기는 것을 진지하게 검토할 만합니다. NOLOGGING 흔적은 Failover 뒤에 발견되면 되돌릴 수 없으니 정기 점검 목록의 앞쪽에 둡니다.</a:t>
             </a:r>
           </a:p>
         </p:txBody>
@@ -1727,7 +2653,7 @@
           <a:lstStyle/>
           <a:p>
             <a:r>
-              <a:t>6장에서 만든 비대칭 구성의 결과입니다. 각자 자기 규칙을 따릅니다. 불안하게 느껴질 수 있지만 근거가 있습니다. Data Guard가 파일을 짝지을 때 쓰는 것은 파일 번호입니다. convert 파라미터나 DB_CREATE_FILE_DEST는 "어디에 어떤 이름으로 둘 것인가"만 정합니다. 오히려 이름이 다른 편이 나을 때가 있습니다. 두 노드의 목록을 나란히 볼 때 구분이 되니까요. 대조도 이름이 아니라 번호와 크기로 합니다.</a:t>
+              <a:t>본문 8.2.4의 표를 여기서 한 번 훑고 지나가면 뒤의 절들이 어디에 놓이는지 보입니다. 자동 반영 항목은 대부분 파일을 새로 만들거나 크기를 바꾸는 변경입니다. 수동 항목은 원본 파일이 다른 데이터베이스에서 오거나, Standby 쪽 이름과 구성을 오라클이 함부로 바꾸면 안 되는 경우입니다. 그리고 자동이라는 말에는 Redo Apply가 정상적으로 돌고 있다는 전제가 붙습니다. 적용이 멈춘 Standby는 어떤 변경도 따라가지 못하고, 그 상태로 시간이 지나면 밀린 구조 변경이 한꺼번에 몰려옵니다.</a:t>
             </a:r>
           </a:p>
         </p:txBody>
@@ -1797,7 +2723,7 @@
           <a:lstStyle/>
           <a:p>
             <a:r>
-              <a:t>파일을 만들지 못했으므로 오라클이 자리만 잡아 둔 것입니다. 컨트롤 파일에는 16번 항목이 있지만 실체가 없습니다. 경로가 $ORACLE_HOME/dbs라는 것 자체가 비정상 신호입니다. 데이터 파일이 있을 자리가 아니니까요. 더 중요한 것은 MRP0이 사라졌다는 사실입니다. 적용이 죽었고, transport lag은 0인데 apply lag만 벌어지기 시작합니다. 7장에서 배운 대로 두 지연을 나눠 보면 병목이 어디인지 바로 드러납니다.</a:t>
+              <a:t>기본값이 MANUAL이라 Standby를 만들 때 AUTO로 바꿔 두지 않으면 첫 테이블스페이스 추가에서 적용이 멈춥니다. 자주 나오는 실수는 Primary에서 이 값을 조회해 AUTO인 것을 보고 안심하는 경우입니다. 실제 동작을 정하는 쪽은 리두를 적용하는 Standby이므로 확인도 Standby에서 해야 합니다. 그렇다고 Primary 값이 쓸모없지는 않습니다. Switchover로 옛 Primary가 Standby가 되는 순간부터 그 값을 읽기 때문에 양쪽 모두 AUTO로 두는 것이 관례입니다.</a:t>
             </a:r>
           </a:p>
         </p:txBody>
@@ -1867,7 +2793,7 @@
           <a:lstStyle/>
           <a:p>
             <a:r>
-              <a:t>7장에서 Standby 쪽 MRP0 존재를 확인해야 한다고 강조했는데, 그 이유가 여기서 다시 확인됩니다. 시간이 지나면 apply lag이 계속 벌어져 결국 드러나기는 합니다. 실측에서 30초였던 값이 곧 1분 18초가 되었습니다. 그러나 그때는 이미 밀린 리두를 따라잡는 작업이 남습니다. 한 가지 더. V$DATAGUARD_STATUS에는 오류와 정상 기록이 섞여 있습니다. Warning 16037은 사람이 CANCEL을 냈을 때 남는 정상 기록입니다. SEVERITY와 시각을 함께 봐야 오판하지 않습니다.</a:t>
+              <a:t>Primary가 OMF인지와 Standby가 OMF인지는 서로 독립입니다. 과정 실습 구성처럼 Primary는 경로 지정, Standby는 OMF인 비대칭 구성도 흔합니다. Standby가 OMF면 오라클이 디렉터리까지 만들어 주므로 경로 문제로 실패할 일이 거의 없습니다. 경로 방식이면 변환 규칙이 새 경로를 덮는지가 관건이고, 규칙에 걸리지 않은 경로는 Primary 경로 그대로 만들려다 디렉터리가 없어 실패합니다. 새 구성을 만든 뒤에는 시험용 테이블스페이스 하나로 실제 생성 위치를 확인해 두면 나중에 당황할 일이 줄어듭니다.</a:t>
             </a:r>
           </a:p>
         </p:txBody>
@@ -1937,7 +2863,7 @@
           <a:lstStyle/>
           <a:p>
             <a:r>
-              <a:t>오류 번호의 변화가 진행을 말해 줍니다. 원인이 "만들 수 없다"에서 "이미 만들어진 자리가 잘못됐다"로 옮겨 간 것입니다. 진단할 때 이 변화 자체를 정보로 읽으십시오. 같은 오류가 반복되면 조치가 효과 없었다는 뜻이고, 번호가 바뀌면 한 단계 나아갔다는 뜻입니다. 실무적 결론은 분명합니다. 파라미터를 고치는 것으로 끝나지 않고 사람이 파일을 직접 만들어 주어야 합니다.</a:t>
+              <a:t>이 파라미터는 경로를 해석하지 않고 문자열을 그대로 치환합니다. 끝의 슬래시를 빼먹으면 디렉터리 이름 일부가 겹치는 다른 경로까지 바뀌는 일이 생깁니다. 대소문자도 그대로 비교하므로 Primary 경로가 Chicago인데 규칙에 CHICAGO를 적으면 일치하지 않고 원래 경로가 쓰입니다. 정적 파라미터라 값을 고친 뒤에는 Standby 인스턴스를 재기동해야 적용되는데, 운영 중인 Standby를 재기동하는 일정이 필요하니 처음 구성할 때 넉넉하게 규칙을 잡아 두는 편이 낫습니다. LOG_FILE_NAME_CONVERT도 같은 방식입니다.</a:t>
             </a:r>
           </a:p>
         </p:txBody>
@@ -2007,7 +2933,7 @@
           <a:lstStyle/>
           <a:p>
             <a:r>
-              <a:t>두 뷰가 같은 사실을 다른 말로 알려 줍니다. 이 둘이 확실한 증거입니다. 문제는 세 번째입니다. V$RECOVER_FILE은 복구가 필요한 파일을 나열하는 뷰인데, 16번이 분명히 문제인데도 나오지 않습니다. UNNAMED 파일은 아직 "복구할 대상"으로 등록되지도 못한 상태이기 때문으로 보입니다. 진단에서 이 뷰만 믿으면 문제를 놓칩니다. 운영체제에서 ls를 해 보면 파일이 실제로 없다는 것도 확인됩니다.</a:t>
+              <a:t>AUTO가 켜져 있으면 Standby의 파일 구성은 오라클이 관리한다고 보고, 사람이 같은 대상에 손대는 명령을 ORA-01275로 막습니다. 이 장의 수동 절차 대부분이 적용을 멈추고 MANUAL로 내렸다가 작업 뒤에 AUTO로 되돌리는 같은 틀을 씁니다. 가장 위험한 것은 마지막 복귀를 잊는 경우입니다. MANUAL인 채로 두면 당장은 아무 일도 없다가 며칠 뒤 Primary에서 파일이 추가될 때 적용이 멈춥니다. Broker 구성이라도 19c에서는 이 값을 파라미터로 직접 다루며, 예전 Broker 속성은 디프리케이트됐습니다.</a:t>
             </a:r>
           </a:p>
         </p:txBody>
@@ -2077,7 +3003,7 @@
           <a:lstStyle/>
           <a:p>
             <a:r>
-              <a:t>①이 의아할 수 있습니다. MANUAL 때문에 생긴 문제인데 다시 MANUAL로 두라니. 이유가 있습니다. AUTO 상태에서는 파일 생성을 오라클이 관리하므로 사람이 CREATE DATAFILE로 개입하는 것과 충돌합니다. 작업하는 동안만 MANUAL로 두고 끝나면 되돌립니다. 복구 도중 ORA-01153을 자주 만나는데, 여러 번 시도하다 보면 어느 시점에 MRP를 기동했는지 놓치기 때문입니다. 명령을 내리기 전에 MRP0 존재를 먼저 조회하는 습관이 이것을 막습니다.</a:t>
+              <a:t>생성과 크기 변경은 가장 흔한 구조 변경이고 AUTO에서는 손댈 것이 없습니다. 양쪽을 비교할 때는 파일 개수만 세지 말고 FILE# 기준으로 맞춰 보는 습관을 들이면 좋습니다. 예전에 쓰였다 지워진 번호를 건너뛰는 일이 있어서 개수만으로는 어긋남을 놓칠 수 있습니다. 운영에서 실제로 문제를 일으키는 것은 Standby 디스크입니다. Primary에는 여유가 있는데 Standby가 가득 차 있으면 파일 추가나 자동 확장이 Standby에서만 실패하고 적용이 멈춥니다. 용량 감시 기준을 양쪽에 똑같이 거는 이유입니다.</a:t>
             </a:r>
           </a:p>
         </p:txBody>
@@ -5327,7 +6253,7 @@
                 </a:solidFill>
                 <a:latin typeface="맑은 고딕"/>
               </a:rPr>
-              <a:t>무엇이 자동이고 무엇이 아닌가</a:t>
+              <a:t>리두가 따라가는 변경, 사람이 따라가야 하는 변경</a:t>
             </a:r>
           </a:p>
         </p:txBody>
@@ -5366,7 +6292,7 @@
                 </a:solidFill>
                 <a:latin typeface="맑은 고딕"/>
               </a:rPr>
-              <a:t>UNNAMED 파일 · PDB · 그리고 하나의 사고</a:t>
+              <a:t>제8장</a:t>
             </a:r>
           </a:p>
         </p:txBody>
@@ -5398,7 +6324,7 @@
         <p:spPr>
           <a:xfrm>
             <a:off x="0" y="0"/>
-            <a:ext cx="12191695" cy="6858000"/>
+            <a:ext cx="12191695" cy="1005840"/>
           </a:xfrm>
           <a:prstGeom prst="rect">
             <a:avLst/>
@@ -5441,8 +6367,8 @@
         </p:nvSpPr>
         <p:spPr>
           <a:xfrm>
-            <a:off x="822960" y="2011680"/>
-            <a:ext cx="10515600" cy="1097280"/>
+            <a:off x="548640" y="91440"/>
+            <a:ext cx="10972800" cy="777240"/>
           </a:xfrm>
           <a:prstGeom prst="rect">
             <a:avLst/>
@@ -5461,13 +6387,13 @@
               </a:spcAft>
             </a:pPr>
             <a:r>
-              <a:rPr sz="4000" b="1">
+              <a:rPr sz="2600" b="1">
                 <a:solidFill>
                   <a:srgbClr val="FFFFFF"/>
                 </a:solidFill>
                 <a:latin typeface="맑은 고딕"/>
               </a:rPr>
-              <a:t>8.4</a:t>
+              <a:t>AUTO와 MANUAL</a:t>
             </a:r>
           </a:p>
         </p:txBody>
@@ -5480,8 +6406,8 @@
         </p:nvSpPr>
         <p:spPr>
           <a:xfrm>
-            <a:off x="822960" y="3017520"/>
-            <a:ext cx="10515600" cy="914400"/>
+            <a:off x="640080" y="1078992"/>
+            <a:ext cx="10881360" cy="457200"/>
           </a:xfrm>
           <a:prstGeom prst="rect">
             <a:avLst/>
@@ -5500,71 +6426,27 @@
               </a:spcAft>
             </a:pPr>
             <a:r>
-              <a:rPr sz="2800" b="1">
-                <a:solidFill>
-                  <a:srgbClr val="FFFFFF"/>
-                </a:solidFill>
-                <a:latin typeface="맑은 고딕"/>
-              </a:rPr>
-              <a:t>MANUAL이면</a:t>
-            </a:r>
-          </a:p>
-        </p:txBody>
-      </p:sp>
-      <p:sp>
-        <p:nvSpPr>
-          <p:cNvPr id="5" name="Rectangle 4"/>
-          <p:cNvSpPr/>
-          <p:nvPr/>
-        </p:nvSpPr>
-        <p:spPr>
-          <a:xfrm>
-            <a:off x="822960" y="4114800"/>
-            <a:ext cx="5486400" cy="54864"/>
-          </a:xfrm>
-          <a:prstGeom prst="rect">
-            <a:avLst/>
-          </a:prstGeom>
-          <a:solidFill>
-            <a:srgbClr val="FFFFFF"/>
-          </a:solidFill>
-          <a:ln>
-            <a:noFill/>
-          </a:ln>
-          <a:effectLst/>
-        </p:spPr>
-        <p:style>
-          <a:lnRef idx="1">
-            <a:schemeClr val="accent1"/>
-          </a:lnRef>
-          <a:fillRef idx="3">
-            <a:schemeClr val="accent1"/>
-          </a:fillRef>
-          <a:effectRef idx="2">
-            <a:schemeClr val="accent1"/>
-          </a:effectRef>
-          <a:fontRef idx="minor">
-            <a:schemeClr val="lt1"/>
-          </a:fontRef>
-        </p:style>
-        <p:txBody>
-          <a:bodyPr rtlCol="0" anchor="ctr"/>
-          <a:lstStyle/>
-          <a:p>
-            <a:pPr algn="ctr"/>
-          </a:p>
-        </p:txBody>
-      </p:sp>
-      <p:sp>
-        <p:nvSpPr>
-          <p:cNvPr id="6" name="TextBox 5"/>
+              <a:rPr sz="1500" b="0">
+                <a:solidFill>
+                  <a:srgbClr val="5A6672"/>
+                </a:solidFill>
+                <a:latin typeface="맑은 고딕"/>
+              </a:rPr>
+              <a:t>동작을 정하는 것은 Standby 쪽 값</a:t>
+            </a:r>
+          </a:p>
+        </p:txBody>
+      </p:sp>
+      <p:sp>
+        <p:nvSpPr>
+          <p:cNvPr id="5" name="TextBox 4"/>
           <p:cNvSpPr txBox="1"/>
           <p:nvPr/>
         </p:nvSpPr>
         <p:spPr>
           <a:xfrm>
-            <a:off x="822960" y="4297680"/>
-            <a:ext cx="10058400" cy="2011680"/>
+            <a:off x="640080" y="1737360"/>
+            <a:ext cx="10881360" cy="4754880"/>
           </a:xfrm>
           <a:prstGeom prst="rect">
             <a:avLst/>
@@ -5579,49 +6461,65 @@
           <a:p>
             <a:pPr algn="l">
               <a:spcAft>
-                <a:spcPts val="800"/>
-              </a:spcAft>
-            </a:pPr>
-            <a:r>
-              <a:rPr sz="1600" b="0">
-                <a:solidFill>
-                  <a:srgbClr val="FFFFFF"/>
-                </a:solidFill>
-                <a:latin typeface="맑은 고딕"/>
-              </a:rPr>
-              <a:t>•  UNNAMED 파일</a:t>
-            </a:r>
-          </a:p>
-          <a:p>
-            <a:pPr algn="l">
-              <a:spcAft>
-                <a:spcPts val="800"/>
-              </a:spcAft>
-            </a:pPr>
-            <a:r>
-              <a:rPr sz="1600" b="0">
-                <a:solidFill>
-                  <a:srgbClr val="FFFFFF"/>
-                </a:solidFill>
-                <a:latin typeface="맑은 고딕"/>
-              </a:rPr>
-              <a:t>•  MRP가 죽는다</a:t>
-            </a:r>
-          </a:p>
-          <a:p>
-            <a:pPr algn="l">
-              <a:spcAft>
-                <a:spcPts val="800"/>
-              </a:spcAft>
-            </a:pPr>
-            <a:r>
-              <a:rPr sz="1600" b="0">
-                <a:solidFill>
-                  <a:srgbClr val="FFFFFF"/>
-                </a:solidFill>
-                <a:latin typeface="맑은 고딕"/>
-              </a:rPr>
-              <a:t>•  Primary는 모른다</a:t>
+                <a:spcPts val="1000"/>
+              </a:spcAft>
+            </a:pPr>
+            <a:r>
+              <a:rPr sz="1700" b="0">
+                <a:solidFill>
+                  <a:srgbClr val="222222"/>
+                </a:solidFill>
+                <a:latin typeface="맑은 고딕"/>
+              </a:rPr>
+              <a:t>•  AUTO: Standby가 파일을 만들고 적용을 계속</a:t>
+            </a:r>
+          </a:p>
+          <a:p>
+            <a:pPr algn="l">
+              <a:spcAft>
+                <a:spcPts val="1000"/>
+              </a:spcAft>
+            </a:pPr>
+            <a:r>
+              <a:rPr sz="1700" b="0">
+                <a:solidFill>
+                  <a:srgbClr val="222222"/>
+                </a:solidFill>
+                <a:latin typeface="맑은 고딕"/>
+              </a:rPr>
+              <a:t>•  MANUAL(기본값): UNNAMED 항목만 남기고 적용 중지</a:t>
+            </a:r>
+          </a:p>
+          <a:p>
+            <a:pPr algn="l">
+              <a:spcAft>
+                <a:spcPts val="1000"/>
+              </a:spcAft>
+            </a:pPr>
+            <a:r>
+              <a:rPr sz="1700" b="0">
+                <a:solidFill>
+                  <a:srgbClr val="222222"/>
+                </a:solidFill>
+                <a:latin typeface="맑은 고딕"/>
+              </a:rPr>
+              <a:t>•  Standby 역할일 때만 의미, Primary 값은 전환 대비</a:t>
+            </a:r>
+          </a:p>
+          <a:p>
+            <a:pPr algn="l">
+              <a:spcAft>
+                <a:spcPts val="1000"/>
+              </a:spcAft>
+            </a:pPr>
+            <a:r>
+              <a:rPr sz="1700" b="0">
+                <a:solidFill>
+                  <a:srgbClr val="222222"/>
+                </a:solidFill>
+                <a:latin typeface="맑은 고딕"/>
+              </a:rPr>
+              <a:t>•  동적 파라미터, SCOPE=BOTH로 즉시 변경</a:t>
             </a:r>
           </a:p>
         </p:txBody>
@@ -5722,7 +6620,7 @@
                 </a:solidFill>
                 <a:latin typeface="맑은 고딕"/>
               </a:rPr>
-              <a:t>UNNAMED00016</a:t>
+              <a:t>새 파일 이름이 정해지는 순서</a:t>
             </a:r>
           </a:p>
         </p:txBody>
@@ -5761,7 +6659,7 @@
                 </a:solidFill>
                 <a:latin typeface="맑은 고딕"/>
               </a:rPr>
-              <a:t>0바이트, dbs 아래</a:t>
+              <a:t>Standby 설정만 보고 결정</a:t>
             </a:r>
           </a:p>
         </p:txBody>
@@ -5800,7 +6698,7 @@
                 </a:solidFill>
                 <a:latin typeface="맑은 고딕"/>
               </a:rPr>
-              <a:t>•  Primary는 아무 일 없이 성공한다</a:t>
+              <a:t>•  DB_CREATE_FILE_DEST 있음: OMF 이름, PDB는 GUID 디렉터리</a:t>
             </a:r>
           </a:p>
           <a:p>
@@ -5816,7 +6714,7 @@
                 </a:solidFill>
                 <a:latin typeface="맑은 고딕"/>
               </a:rPr>
-              <a:t>•  Standby에 `$ORACLE_HOME/dbs/UNNAMED00016` (0바이트)</a:t>
+              <a:t>•  없으면 DB_FILE_NAME_CONVERT로 경로 변환</a:t>
             </a:r>
           </a:p>
           <a:p>
@@ -5832,7 +6730,7 @@
                 </a:solidFill>
                 <a:latin typeface="맑은 고딕"/>
               </a:rPr>
-              <a:t>•  이름 규칙 : `UNNAMED` + 파일 번호 5자리</a:t>
+              <a:t>•  둘 다 없으면 Primary와 같은 경로 시도</a:t>
             </a:r>
           </a:p>
           <a:p>
@@ -5848,7 +6746,23 @@
                 </a:solidFill>
                 <a:latin typeface="맑은 고딕"/>
               </a:rPr>
-              <a:t>•  **MRP0이 사라진다** — 적용이 죽었다</a:t>
+              <a:t>•  디렉터리가 없으면 생성 실패, UNNAMED로</a:t>
+            </a:r>
+          </a:p>
+          <a:p>
+            <a:pPr algn="l">
+              <a:spcAft>
+                <a:spcPts val="1000"/>
+              </a:spcAft>
+            </a:pPr>
+            <a:r>
+              <a:rPr sz="1700" b="0">
+                <a:solidFill>
+                  <a:srgbClr val="222222"/>
+                </a:solidFill>
+                <a:latin typeface="맑은 고딕"/>
+              </a:rPr>
+              <a:t>•  두 방식을 섞지 말고 한쪽으로 통일</a:t>
             </a:r>
           </a:p>
         </p:txBody>
@@ -5949,7 +6863,7 @@
                 </a:solidFill>
                 <a:latin typeface="맑은 고딕"/>
               </a:rPr>
-              <a:t>ORA-1274</a:t>
+              <a:t>DB_FILE_NAME_CONVERT 작성 요령</a:t>
             </a:r>
           </a:p>
         </p:txBody>
@@ -5988,7 +6902,7 @@
                 </a:solidFill>
                 <a:latin typeface="맑은 고딕"/>
               </a:rPr>
-              <a:t>그리고 조용한 Primary</a:t>
+              <a:t>정적 파라미터, 문자열 치환</a:t>
             </a:r>
           </a:p>
         </p:txBody>
@@ -6027,7 +6941,7 @@
                 </a:solidFill>
                 <a:latin typeface="맑은 고딕"/>
               </a:rPr>
-              <a:t>•  `MRP0: Background Media Recovery terminated with error 1274`</a:t>
+              <a:t>•  왼쪽 문자열을 찾아 오른쪽으로 바꿈</a:t>
             </a:r>
           </a:p>
           <a:p>
@@ -6043,7 +6957,7 @@
                 </a:solidFill>
                 <a:latin typeface="맑은 고딕"/>
               </a:rPr>
-              <a:t>•  Primary 쪽 목적지는 계속 **VALID**, ERROR 열도 비어 있다</a:t>
+              <a:t>•  여러 쌍 나열 가능, 처음 일치한 쌍 사용</a:t>
             </a:r>
           </a:p>
           <a:p>
@@ -6059,7 +6973,7 @@
                 </a:solidFill>
                 <a:latin typeface="맑은 고딕"/>
               </a:rPr>
-              <a:t>•  전송은 정상이고 **적용만 안 되기 때문**</a:t>
+              <a:t>•  디렉터리 끝 슬래시까지 맞춰 적기</a:t>
             </a:r>
           </a:p>
           <a:p>
@@ -6075,7 +6989,23 @@
                 </a:solidFill>
                 <a:latin typeface="맑은 고딕"/>
               </a:rPr>
-              <a:t>•  Primary만 감시하는 모니터링은 이 상태를 잡지 못한다</a:t>
+              <a:t>•  대소문자 그대로 비교</a:t>
+            </a:r>
+          </a:p>
+          <a:p>
+            <a:pPr algn="l">
+              <a:spcAft>
+                <a:spcPts val="1000"/>
+              </a:spcAft>
+            </a:pPr>
+            <a:r>
+              <a:rPr sz="1700" b="0">
+                <a:solidFill>
+                  <a:srgbClr val="222222"/>
+                </a:solidFill>
+                <a:latin typeface="맑은 고딕"/>
+              </a:rPr>
+              <a:t>•  변경 후 Standby 재기동 필요</a:t>
             </a:r>
           </a:p>
         </p:txBody>
@@ -6176,7 +7106,7 @@
                 </a:solidFill>
                 <a:latin typeface="맑은 고딕"/>
               </a:rPr>
-              <a:t>AUTO로 되돌려도 안 된다</a:t>
+              <a:t>AUTO에서 막히는 명령</a:t>
             </a:r>
           </a:p>
         </p:txBody>
@@ -6215,7 +7145,7 @@
                 </a:solidFill>
                 <a:latin typeface="맑은 고딕"/>
               </a:rPr>
-              <a:t>ORA-1274 → ORA-1111</a:t>
+              <a:t>자동 관리와 사람의 개입이 부딪히지 않게</a:t>
             </a:r>
           </a:p>
         </p:txBody>
@@ -6254,7 +7184,7 @@
                 </a:solidFill>
                 <a:latin typeface="맑은 고딕"/>
               </a:rPr>
-              <a:t>•  파라미터를 AUTO로, MRP 재기동 → **또 죽는다**</a:t>
+              <a:t>•  RENAME FILE, ADD/DROP LOGFILE, CREATE DATAFILE</a:t>
             </a:r>
           </a:p>
           <a:p>
@@ -6270,7 +7200,7 @@
                 </a:solidFill>
                 <a:latin typeface="맑은 고딕"/>
               </a:rPr>
-              <a:t>•  오류가 **1274에서 1111로 바뀐다**</a:t>
+              <a:t>•  AUTO 상태에서는 ORA-01275로 거부</a:t>
             </a:r>
           </a:p>
           <a:p>
@@ -6286,7 +7216,7 @@
                 </a:solidFill>
                 <a:latin typeface="맑은 고딕"/>
               </a:rPr>
-              <a:t>•  1274 : 만들 수 없다 / 1111 : 자리가 잘못됐다</a:t>
+              <a:t>•  적용 중지 → MANUAL → 작업 → AUTO → 적용 기동</a:t>
             </a:r>
           </a:p>
           <a:p>
@@ -6302,7 +7232,7 @@
                 </a:solidFill>
                 <a:latin typeface="맑은 고딕"/>
               </a:rPr>
-              <a:t>•  이미 생긴 UNNAMED 항목은 저절로 고쳐지지 않는다</a:t>
+              <a:t>•  19c Broker: StandbyFileManagement 속성 디프리케이트</a:t>
             </a:r>
           </a:p>
         </p:txBody>
@@ -6334,7 +7264,7 @@
         <p:spPr>
           <a:xfrm>
             <a:off x="0" y="0"/>
-            <a:ext cx="12191695" cy="1005840"/>
+            <a:ext cx="12191695" cy="6858000"/>
           </a:xfrm>
           <a:prstGeom prst="rect">
             <a:avLst/>
@@ -6377,8 +7307,8 @@
         </p:nvSpPr>
         <p:spPr>
           <a:xfrm>
-            <a:off x="548640" y="91440"/>
-            <a:ext cx="10972800" cy="777240"/>
+            <a:off x="822960" y="2011680"/>
+            <a:ext cx="10515600" cy="1097280"/>
           </a:xfrm>
           <a:prstGeom prst="rect">
             <a:avLst/>
@@ -6397,13 +7327,13 @@
               </a:spcAft>
             </a:pPr>
             <a:r>
-              <a:rPr sz="2600" b="1">
+              <a:rPr sz="4000" b="1">
                 <a:solidFill>
                   <a:srgbClr val="FFFFFF"/>
                 </a:solidFill>
                 <a:latin typeface="맑은 고딕"/>
               </a:rPr>
-              <a:t>증거 두 가지</a:t>
+              <a:t>8.4</a:t>
             </a:r>
           </a:p>
         </p:txBody>
@@ -6416,8 +7346,8 @@
         </p:nvSpPr>
         <p:spPr>
           <a:xfrm>
-            <a:off x="640080" y="1078992"/>
-            <a:ext cx="10881360" cy="457200"/>
+            <a:off x="822960" y="3017520"/>
+            <a:ext cx="10515600" cy="914400"/>
           </a:xfrm>
           <a:prstGeom prst="rect">
             <a:avLst/>
@@ -6436,27 +7366,71 @@
               </a:spcAft>
             </a:pPr>
             <a:r>
-              <a:rPr sz="1500" b="0">
-                <a:solidFill>
-                  <a:srgbClr val="5A6672"/>
-                </a:solidFill>
-                <a:latin typeface="맑은 고딕"/>
-              </a:rPr>
-              <a:t>그리고 믿으면 안 되는 뷰 하나</a:t>
-            </a:r>
-          </a:p>
-        </p:txBody>
-      </p:sp>
-      <p:sp>
-        <p:nvSpPr>
-          <p:cNvPr id="5" name="TextBox 4"/>
+              <a:rPr sz="2800" b="1">
+                <a:solidFill>
+                  <a:srgbClr val="FFFFFF"/>
+                </a:solidFill>
+                <a:latin typeface="맑은 고딕"/>
+              </a:rPr>
+              <a:t>테이블스페이스와 데이터 파일 변경</a:t>
+            </a:r>
+          </a:p>
+        </p:txBody>
+      </p:sp>
+      <p:sp>
+        <p:nvSpPr>
+          <p:cNvPr id="5" name="Rectangle 4"/>
+          <p:cNvSpPr/>
+          <p:nvPr/>
+        </p:nvSpPr>
+        <p:spPr>
+          <a:xfrm>
+            <a:off x="822960" y="4114800"/>
+            <a:ext cx="5486400" cy="54864"/>
+          </a:xfrm>
+          <a:prstGeom prst="rect">
+            <a:avLst/>
+          </a:prstGeom>
+          <a:solidFill>
+            <a:srgbClr val="FFFFFF"/>
+          </a:solidFill>
+          <a:ln>
+            <a:noFill/>
+          </a:ln>
+          <a:effectLst/>
+        </p:spPr>
+        <p:style>
+          <a:lnRef idx="1">
+            <a:schemeClr val="accent1"/>
+          </a:lnRef>
+          <a:fillRef idx="3">
+            <a:schemeClr val="accent1"/>
+          </a:fillRef>
+          <a:effectRef idx="2">
+            <a:schemeClr val="accent1"/>
+          </a:effectRef>
+          <a:fontRef idx="minor">
+            <a:schemeClr val="lt1"/>
+          </a:fontRef>
+        </p:style>
+        <p:txBody>
+          <a:bodyPr rtlCol="0" anchor="ctr"/>
+          <a:lstStyle/>
+          <a:p>
+            <a:pPr algn="ctr"/>
+          </a:p>
+        </p:txBody>
+      </p:sp>
+      <p:sp>
+        <p:nvSpPr>
+          <p:cNvPr id="6" name="TextBox 5"/>
           <p:cNvSpPr txBox="1"/>
           <p:nvPr/>
         </p:nvSpPr>
         <p:spPr>
           <a:xfrm>
-            <a:off x="640080" y="1737360"/>
-            <a:ext cx="10881360" cy="4754880"/>
+            <a:off x="822960" y="4297680"/>
+            <a:ext cx="10058400" cy="2011680"/>
           </a:xfrm>
           <a:prstGeom prst="rect">
             <a:avLst/>
@@ -6471,65 +7445,49 @@
           <a:p>
             <a:pPr algn="l">
               <a:spcAft>
-                <a:spcPts val="1000"/>
-              </a:spcAft>
-            </a:pPr>
-            <a:r>
-              <a:rPr sz="1700" b="0">
-                <a:solidFill>
-                  <a:srgbClr val="222222"/>
-                </a:solidFill>
-                <a:latin typeface="맑은 고딕"/>
-              </a:rPr>
-              <a:t>•  `V$DATAFILE.STATUS` = **RECOVER**</a:t>
-            </a:r>
-          </a:p>
-          <a:p>
-            <a:pPr algn="l">
-              <a:spcAft>
-                <a:spcPts val="1000"/>
-              </a:spcAft>
-            </a:pPr>
-            <a:r>
-              <a:rPr sz="1700" b="0">
-                <a:solidFill>
-                  <a:srgbClr val="222222"/>
-                </a:solidFill>
-                <a:latin typeface="맑은 고딕"/>
-              </a:rPr>
-              <a:t>•  `V$DATAFILE_HEADER.ERROR` = **FILE MISSING**</a:t>
-            </a:r>
-          </a:p>
-          <a:p>
-            <a:pPr algn="l">
-              <a:spcAft>
-                <a:spcPts val="1000"/>
-              </a:spcAft>
-            </a:pPr>
-            <a:r>
-              <a:rPr sz="1700" b="0">
-                <a:solidFill>
-                  <a:srgbClr val="222222"/>
-                </a:solidFill>
-                <a:latin typeface="맑은 고딕"/>
-              </a:rPr>
-              <a:t>•  `V$RECOVER_FILE` → **no rows selected**</a:t>
-            </a:r>
-          </a:p>
-          <a:p>
-            <a:pPr algn="l">
-              <a:spcAft>
-                <a:spcPts val="1000"/>
-              </a:spcAft>
-            </a:pPr>
-            <a:r>
-              <a:rPr sz="1700" b="0">
-                <a:solidFill>
-                  <a:srgbClr val="222222"/>
-                </a:solidFill>
-                <a:latin typeface="맑은 고딕"/>
-              </a:rPr>
-              <a:t>•  복구가 필요한 파일을 보여 주는 뷰인데 비어 있다</a:t>
+                <a:spcPts val="800"/>
+              </a:spcAft>
+            </a:pPr>
+            <a:r>
+              <a:rPr sz="1600" b="0">
+                <a:solidFill>
+                  <a:srgbClr val="FFFFFF"/>
+                </a:solidFill>
+                <a:latin typeface="맑은 고딕"/>
+              </a:rPr>
+              <a:t>•  생성·추가·크기 변경은 자동</a:t>
+            </a:r>
+          </a:p>
+          <a:p>
+            <a:pPr algn="l">
+              <a:spcAft>
+                <a:spcPts val="800"/>
+              </a:spcAft>
+            </a:pPr>
+            <a:r>
+              <a:rPr sz="1600" b="0">
+                <a:solidFill>
+                  <a:srgbClr val="FFFFFF"/>
+                </a:solidFill>
+                <a:latin typeface="맑은 고딕"/>
+              </a:rPr>
+              <a:t>•  삭제 뒤의 운영체제 파일</a:t>
+            </a:r>
+          </a:p>
+          <a:p>
+            <a:pPr algn="l">
+              <a:spcAft>
+                <a:spcPts val="800"/>
+              </a:spcAft>
+            </a:pPr>
+            <a:r>
+              <a:rPr sz="1600" b="0">
+                <a:solidFill>
+                  <a:srgbClr val="FFFFFF"/>
+                </a:solidFill>
+                <a:latin typeface="맑은 고딕"/>
+              </a:rPr>
+              <a:t>•  이름 변경과 TTS는 수동</a:t>
             </a:r>
           </a:p>
         </p:txBody>
@@ -6561,7 +7519,7 @@
         <p:spPr>
           <a:xfrm>
             <a:off x="0" y="0"/>
-            <a:ext cx="12191695" cy="6858000"/>
+            <a:ext cx="12191695" cy="1005840"/>
           </a:xfrm>
           <a:prstGeom prst="rect">
             <a:avLst/>
@@ -6604,8 +7562,8 @@
         </p:nvSpPr>
         <p:spPr>
           <a:xfrm>
-            <a:off x="822960" y="2011680"/>
-            <a:ext cx="10515600" cy="1097280"/>
+            <a:off x="548640" y="91440"/>
+            <a:ext cx="10972800" cy="777240"/>
           </a:xfrm>
           <a:prstGeom prst="rect">
             <a:avLst/>
@@ -6624,13 +7582,13 @@
               </a:spcAft>
             </a:pPr>
             <a:r>
-              <a:rPr sz="4000" b="1">
+              <a:rPr sz="2600" b="1">
                 <a:solidFill>
                   <a:srgbClr val="FFFFFF"/>
                 </a:solidFill>
                 <a:latin typeface="맑은 고딕"/>
               </a:rPr>
-              <a:t>8.5</a:t>
+              <a:t>생성, 추가, 크기 변경</a:t>
             </a:r>
           </a:p>
         </p:txBody>
@@ -6643,8 +7601,8 @@
         </p:nvSpPr>
         <p:spPr>
           <a:xfrm>
-            <a:off x="822960" y="3017520"/>
-            <a:ext cx="10515600" cy="914400"/>
+            <a:off x="640080" y="1078992"/>
+            <a:ext cx="10881360" cy="457200"/>
           </a:xfrm>
           <a:prstGeom prst="rect">
             <a:avLst/>
@@ -6663,71 +7621,27 @@
               </a:spcAft>
             </a:pPr>
             <a:r>
-              <a:rPr sz="2800" b="1">
-                <a:solidFill>
-                  <a:srgbClr val="FFFFFF"/>
-                </a:solidFill>
-                <a:latin typeface="맑은 고딕"/>
-              </a:rPr>
-              <a:t>복구 절차</a:t>
-            </a:r>
-          </a:p>
-        </p:txBody>
-      </p:sp>
-      <p:sp>
-        <p:nvSpPr>
-          <p:cNvPr id="5" name="Rectangle 4"/>
-          <p:cNvSpPr/>
-          <p:nvPr/>
-        </p:nvSpPr>
-        <p:spPr>
-          <a:xfrm>
-            <a:off x="822960" y="4114800"/>
-            <a:ext cx="5486400" cy="54864"/>
-          </a:xfrm>
-          <a:prstGeom prst="rect">
-            <a:avLst/>
-          </a:prstGeom>
-          <a:solidFill>
-            <a:srgbClr val="FFFFFF"/>
-          </a:solidFill>
-          <a:ln>
-            <a:noFill/>
-          </a:ln>
-          <a:effectLst/>
-        </p:spPr>
-        <p:style>
-          <a:lnRef idx="1">
-            <a:schemeClr val="accent1"/>
-          </a:lnRef>
-          <a:fillRef idx="3">
-            <a:schemeClr val="accent1"/>
-          </a:fillRef>
-          <a:effectRef idx="2">
-            <a:schemeClr val="accent1"/>
-          </a:effectRef>
-          <a:fontRef idx="minor">
-            <a:schemeClr val="lt1"/>
-          </a:fontRef>
-        </p:style>
-        <p:txBody>
-          <a:bodyPr rtlCol="0" anchor="ctr"/>
-          <a:lstStyle/>
-          <a:p>
-            <a:pPr algn="ctr"/>
-          </a:p>
-        </p:txBody>
-      </p:sp>
-      <p:sp>
-        <p:nvSpPr>
-          <p:cNvPr id="6" name="TextBox 5"/>
+              <a:rPr sz="1500" b="0">
+                <a:solidFill>
+                  <a:srgbClr val="5A6672"/>
+                </a:solidFill>
+                <a:latin typeface="맑은 고딕"/>
+              </a:rPr>
+              <a:t>AUTO면 사람이 할 일이 없다</a:t>
+            </a:r>
+          </a:p>
+        </p:txBody>
+      </p:sp>
+      <p:sp>
+        <p:nvSpPr>
+          <p:cNvPr id="5" name="TextBox 4"/>
           <p:cNvSpPr txBox="1"/>
           <p:nvPr/>
         </p:nvSpPr>
         <p:spPr>
           <a:xfrm>
-            <a:off x="822960" y="4297680"/>
-            <a:ext cx="10058400" cy="2011680"/>
+            <a:off x="640080" y="1737360"/>
+            <a:ext cx="10881360" cy="4754880"/>
           </a:xfrm>
           <a:prstGeom prst="rect">
             <a:avLst/>
@@ -6742,49 +7656,81 @@
           <a:p>
             <a:pPr algn="l">
               <a:spcAft>
-                <a:spcPts val="800"/>
-              </a:spcAft>
-            </a:pPr>
-            <a:r>
-              <a:rPr sz="1600" b="0">
-                <a:solidFill>
-                  <a:srgbClr val="FFFFFF"/>
-                </a:solidFill>
-                <a:latin typeface="맑은 고딕"/>
-              </a:rPr>
-              <a:t>•  CREATE DATAFILE AS NEW</a:t>
-            </a:r>
-          </a:p>
-          <a:p>
-            <a:pPr algn="l">
-              <a:spcAft>
-                <a:spcPts val="800"/>
-              </a:spcAft>
-            </a:pPr>
-            <a:r>
-              <a:rPr sz="1600" b="0">
-                <a:solidFill>
-                  <a:srgbClr val="FFFFFF"/>
-                </a:solidFill>
-                <a:latin typeface="맑은 고딕"/>
-              </a:rPr>
-              <a:t>•  리두가 이름과 크기를 알려 준다</a:t>
-            </a:r>
-          </a:p>
-          <a:p>
-            <a:pPr algn="l">
-              <a:spcAft>
-                <a:spcPts val="800"/>
-              </a:spcAft>
-            </a:pPr>
-            <a:r>
-              <a:rPr sz="1600" b="0">
-                <a:solidFill>
-                  <a:srgbClr val="FFFFFF"/>
-                </a:solidFill>
-                <a:latin typeface="맑은 고딕"/>
-              </a:rPr>
-              <a:t>•  내용도 리두가 채운다</a:t>
+                <a:spcPts val="1000"/>
+              </a:spcAft>
+            </a:pPr>
+            <a:r>
+              <a:rPr sz="1700" b="0">
+                <a:solidFill>
+                  <a:srgbClr val="222222"/>
+                </a:solidFill>
+                <a:latin typeface="맑은 고딕"/>
+              </a:rPr>
+              <a:t>•  같은 파일 번호로, Standby 규칙의 이름으로 생성</a:t>
+            </a:r>
+          </a:p>
+          <a:p>
+            <a:pPr algn="l">
+              <a:spcAft>
+                <a:spcPts val="1000"/>
+              </a:spcAft>
+            </a:pPr>
+            <a:r>
+              <a:rPr sz="1700" b="0">
+                <a:solidFill>
+                  <a:srgbClr val="222222"/>
+                </a:solidFill>
+                <a:latin typeface="맑은 고딕"/>
+              </a:rPr>
+              <a:t>•  RESIZE, AUTOEXTEND로 늘어난 크기도 전달</a:t>
+            </a:r>
+          </a:p>
+          <a:p>
+            <a:pPr algn="l">
+              <a:spcAft>
+                <a:spcPts val="1000"/>
+              </a:spcAft>
+            </a:pPr>
+            <a:r>
+              <a:rPr sz="1700" b="0">
+                <a:solidFill>
+                  <a:srgbClr val="222222"/>
+                </a:solidFill>
+                <a:latin typeface="맑은 고딕"/>
+              </a:rPr>
+              <a:t>•  파일 번호는 연속 보장 없음, FILE#로 비교</a:t>
+            </a:r>
+          </a:p>
+          <a:p>
+            <a:pPr algn="l">
+              <a:spcAft>
+                <a:spcPts val="1000"/>
+              </a:spcAft>
+            </a:pPr>
+            <a:r>
+              <a:rPr sz="1700" b="0">
+                <a:solidFill>
+                  <a:srgbClr val="222222"/>
+                </a:solidFill>
+                <a:latin typeface="맑은 고딕"/>
+              </a:rPr>
+              <a:t>•  Standby 디스크 부족이면 Standby만 실패</a:t>
+            </a:r>
+          </a:p>
+          <a:p>
+            <a:pPr algn="l">
+              <a:spcAft>
+                <a:spcPts val="1000"/>
+              </a:spcAft>
+            </a:pPr>
+            <a:r>
+              <a:rPr sz="1700" b="0">
+                <a:solidFill>
+                  <a:srgbClr val="222222"/>
+                </a:solidFill>
+                <a:latin typeface="맑은 고딕"/>
+              </a:rPr>
+              <a:t>•  임시 파일은 리두로 만들어지지 않음</a:t>
             </a:r>
           </a:p>
         </p:txBody>
@@ -6885,7 +7831,7 @@
                 </a:solidFill>
                 <a:latin typeface="맑은 고딕"/>
               </a:rPr>
-              <a:t>복구 네 단계</a:t>
+              <a:t>삭제와 운영체제 파일</a:t>
             </a:r>
           </a:p>
         </p:txBody>
@@ -6924,7 +7870,7 @@
                 </a:solidFill>
                 <a:latin typeface="맑은 고딕"/>
               </a:rPr>
-              <a:t>작업 동안만 MANUAL</a:t>
+              <a:t>항목은 사라지지만 파일은 남을 수 있다</a:t>
             </a:r>
           </a:p>
         </p:txBody>
@@ -6963,7 +7909,7 @@
                 </a:solidFill>
                 <a:latin typeface="맑은 고딕"/>
               </a:rPr>
-              <a:t>•  ① `STANDBY_FILE_MANAGEMENT` = MANUAL</a:t>
+              <a:t>•  DROP TABLESPACE는 Standby 컨트롤 파일에서도 제거</a:t>
             </a:r>
           </a:p>
           <a:p>
@@ -6979,7 +7925,7 @@
                 </a:solidFill>
                 <a:latin typeface="맑은 고딕"/>
               </a:rPr>
-              <a:t>•  ② `ALTER DATABASE CREATE DATAFILE '&lt;UNNAMED&gt;' AS NEW`</a:t>
+              <a:t>•  OMF 파일은 함께 삭제</a:t>
             </a:r>
           </a:p>
           <a:p>
@@ -6995,7 +7941,7 @@
                 </a:solidFill>
                 <a:latin typeface="맑은 고딕"/>
               </a:rPr>
-              <a:t>•  ③ AUTO로 복귀</a:t>
+              <a:t>•  비OMF: INCLUDING CONTENTS AND DATAFILES + AUTO면 삭제</a:t>
             </a:r>
           </a:p>
           <a:p>
@@ -7011,7 +7957,23 @@
                 </a:solidFill>
                 <a:latin typeface="맑은 고딕"/>
               </a:rPr>
-              <a:t>•  ④ MRP 재기동</a:t>
+              <a:t>•  그 밖에는 Standby에 고아 파일이 남음</a:t>
+            </a:r>
+          </a:p>
+          <a:p>
+            <a:pPr algn="l">
+              <a:spcAft>
+                <a:spcPts val="1000"/>
+              </a:spcAft>
+            </a:pPr>
+            <a:r>
+              <a:rPr sz="1700" b="0">
+                <a:solidFill>
+                  <a:srgbClr val="222222"/>
+                </a:solidFill>
+                <a:latin typeface="맑은 고딕"/>
+              </a:rPr>
+              <a:t>•  정리는 삭제 확인 뒤, 지우지 말고 옮겨 두기</a:t>
             </a:r>
           </a:p>
         </p:txBody>
@@ -7112,7 +8074,7 @@
                 </a:solidFill>
                 <a:latin typeface="맑은 고딕"/>
               </a:rPr>
-              <a:t>AS NEW가 아는 것</a:t>
+              <a:t>이름 변경과 이동</a:t>
             </a:r>
           </a:p>
         </p:txBody>
@@ -7151,7 +8113,7 @@
                 </a:solidFill>
                 <a:latin typeface="맑은 고딕"/>
               </a:rPr>
-              <a:t>리두에 다 있다</a:t>
+              <a:t>AUTO여도 Standby에 전달되지 않음</a:t>
             </a:r>
           </a:p>
         </p:txBody>
@@ -7190,7 +8152,7 @@
                 </a:solidFill>
                 <a:latin typeface="맑은 고딕"/>
               </a:rPr>
-              <a:t>•  실측 결과 : `o1_mf_dg_ts2_o8z81hpl_.dbf`, **10MB**</a:t>
+              <a:t>•  MOVE DATAFILE, RENAME FILE은 Primary만 바꿈</a:t>
             </a:r>
           </a:p>
           <a:p>
@@ -7206,7 +8168,7 @@
                 </a:solidFill>
                 <a:latin typeface="맑은 고딕"/>
               </a:rPr>
-              <a:t>•  테이블스페이스 이름 `dg_ts2`가 이름에 들어갔다</a:t>
+              <a:t>•  적용은 파일 번호로 계속, 이름만 어긋남</a:t>
             </a:r>
           </a:p>
           <a:p>
@@ -7222,7 +8184,7 @@
                 </a:solidFill>
                 <a:latin typeface="맑은 고딕"/>
               </a:rPr>
-              <a:t>•  크기도 정확하다</a:t>
+              <a:t>•  오프라인: 마운트에서 OS 이동 후 RENAME FILE</a:t>
             </a:r>
           </a:p>
           <a:p>
@@ -7238,7 +8200,23 @@
                 </a:solidFill>
                 <a:latin typeface="맑은 고딕"/>
               </a:rPr>
-              <a:t>•  사람은 "새로 만들어라"라고만 했다</a:t>
+              <a:t>•  온라인: READ ONLY로 열고 MOVE DATAFILE</a:t>
+            </a:r>
+          </a:p>
+          <a:p>
+            <a:pPr algn="l">
+              <a:spcAft>
+                <a:spcPts val="1000"/>
+              </a:spcAft>
+            </a:pPr>
+            <a:r>
+              <a:rPr sz="1700" b="0">
+                <a:solidFill>
+                  <a:srgbClr val="222222"/>
+                </a:solidFill>
+                <a:latin typeface="맑은 고딕"/>
+              </a:rPr>
+              <a:t>•  적용을 켠 채 이동은 Active Data Guard 옵션 필요</a:t>
             </a:r>
           </a:p>
         </p:txBody>
@@ -7339,7 +8317,7 @@
                 </a:solidFill>
                 <a:latin typeface="맑은 고딕"/>
               </a:rPr>
-              <a:t>내용은 리두가 채운다</a:t>
+              <a:t>전송 가능 테이블스페이스</a:t>
             </a:r>
           </a:p>
         </p:txBody>
@@ -7378,7 +8356,7 @@
                 </a:solidFill>
                 <a:latin typeface="맑은 고딕"/>
               </a:rPr>
-              <a:t>100행 실측</a:t>
+              <a:t>파일 내용이 리두에서 오지 않는다</a:t>
             </a:r>
           </a:p>
         </p:txBody>
@@ -7417,7 +8395,7 @@
                 </a:solidFill>
                 <a:latin typeface="맑은 고딕"/>
               </a:rPr>
-              <a:t>•  `AS NEW`로 만든 파일은 빈 껍데기</a:t>
+              <a:t>•  플러그인 리두는 연결 선언만 담음</a:t>
             </a:r>
           </a:p>
           <a:p>
@@ -7433,7 +8411,7 @@
                 </a:solidFill>
                 <a:latin typeface="맑은 고딕"/>
               </a:rPr>
-              <a:t>•  MRP가 밀렸던 리두를 적용하며 채운다</a:t>
+              <a:t>•  적용 시점에 Standby에 같은 파일이 있어야 함</a:t>
             </a:r>
           </a:p>
           <a:p>
@@ -7449,7 +8427,7 @@
                 </a:solidFill>
                 <a:latin typeface="맑은 고딕"/>
               </a:rPr>
-              <a:t>•  문제가 있었던 그 테이블스페이스에 100행 입력</a:t>
+              <a:t>•  데이터 파일 사본을 양쪽에 놓고 impdp로 플러그인</a:t>
             </a:r>
           </a:p>
           <a:p>
@@ -7465,7 +8443,7 @@
                 </a:solidFill>
                 <a:latin typeface="맑은 고딕"/>
               </a:rPr>
-              <a:t>•  Standby에서 **100행 그대로 조회됨**</a:t>
+              <a:t>•  경로가 다르면 실패 후 MANUAL, RENAME FILE, 재기동</a:t>
             </a:r>
           </a:p>
         </p:txBody>
@@ -7497,7 +8475,7 @@
         <p:spPr>
           <a:xfrm>
             <a:off x="0" y="0"/>
-            <a:ext cx="12191695" cy="6858000"/>
+            <a:ext cx="12191695" cy="1005840"/>
           </a:xfrm>
           <a:prstGeom prst="rect">
             <a:avLst/>
@@ -7540,8 +8518,8 @@
         </p:nvSpPr>
         <p:spPr>
           <a:xfrm>
-            <a:off x="822960" y="2011680"/>
-            <a:ext cx="10515600" cy="1097280"/>
+            <a:off x="548640" y="91440"/>
+            <a:ext cx="10972800" cy="777240"/>
           </a:xfrm>
           <a:prstGeom prst="rect">
             <a:avLst/>
@@ -7560,13 +8538,13 @@
               </a:spcAft>
             </a:pPr>
             <a:r>
-              <a:rPr sz="4000" b="1">
+              <a:rPr sz="2600" b="1">
                 <a:solidFill>
                   <a:srgbClr val="FFFFFF"/>
                 </a:solidFill>
                 <a:latin typeface="맑은 고딕"/>
               </a:rPr>
-              <a:t>8.6</a:t>
+              <a:t>시나리오: 새 디스크로 옮긴 파일</a:t>
             </a:r>
           </a:p>
         </p:txBody>
@@ -7579,8 +8557,8 @@
         </p:nvSpPr>
         <p:spPr>
           <a:xfrm>
-            <a:off x="822960" y="3017520"/>
-            <a:ext cx="10515600" cy="914400"/>
+            <a:off x="640080" y="1078992"/>
+            <a:ext cx="10881360" cy="457200"/>
           </a:xfrm>
           <a:prstGeom prst="rect">
             <a:avLst/>
@@ -7599,71 +8577,27 @@
               </a:spcAft>
             </a:pPr>
             <a:r>
-              <a:rPr sz="2800" b="1">
-                <a:solidFill>
-                  <a:srgbClr val="FFFFFF"/>
-                </a:solidFill>
-                <a:latin typeface="맑은 고딕"/>
-              </a:rPr>
-              <a:t>PDB 추가와 삭제</a:t>
-            </a:r>
-          </a:p>
-        </p:txBody>
-      </p:sp>
-      <p:sp>
-        <p:nvSpPr>
-          <p:cNvPr id="5" name="Rectangle 4"/>
-          <p:cNvSpPr/>
-          <p:nvPr/>
-        </p:nvSpPr>
-        <p:spPr>
-          <a:xfrm>
-            <a:off x="822960" y="4114800"/>
-            <a:ext cx="5486400" cy="54864"/>
-          </a:xfrm>
-          <a:prstGeom prst="rect">
-            <a:avLst/>
-          </a:prstGeom>
-          <a:solidFill>
-            <a:srgbClr val="FFFFFF"/>
-          </a:solidFill>
-          <a:ln>
-            <a:noFill/>
-          </a:ln>
-          <a:effectLst/>
-        </p:spPr>
-        <p:style>
-          <a:lnRef idx="1">
-            <a:schemeClr val="accent1"/>
-          </a:lnRef>
-          <a:fillRef idx="3">
-            <a:schemeClr val="accent1"/>
-          </a:fillRef>
-          <a:effectRef idx="2">
-            <a:schemeClr val="accent1"/>
-          </a:effectRef>
-          <a:fontRef idx="minor">
-            <a:schemeClr val="lt1"/>
-          </a:fontRef>
-        </p:style>
-        <p:txBody>
-          <a:bodyPr rtlCol="0" anchor="ctr"/>
-          <a:lstStyle/>
-          <a:p>
-            <a:pPr algn="ctr"/>
-          </a:p>
-        </p:txBody>
-      </p:sp>
-      <p:sp>
-        <p:nvSpPr>
-          <p:cNvPr id="6" name="TextBox 5"/>
+              <a:rPr sz="1500" b="0">
+                <a:solidFill>
+                  <a:srgbClr val="5A6672"/>
+                </a:solidFill>
+                <a:latin typeface="맑은 고딕"/>
+              </a:rPr>
+              <a:t>Primary만 옮기고 잊은 Standby</a:t>
+            </a:r>
+          </a:p>
+        </p:txBody>
+      </p:sp>
+      <p:sp>
+        <p:nvSpPr>
+          <p:cNvPr id="5" name="TextBox 4"/>
           <p:cNvSpPr txBox="1"/>
           <p:nvPr/>
         </p:nvSpPr>
         <p:spPr>
           <a:xfrm>
-            <a:off x="822960" y="4297680"/>
-            <a:ext cx="10058400" cy="2011680"/>
+            <a:off x="640080" y="1737360"/>
+            <a:ext cx="10881360" cy="4754880"/>
           </a:xfrm>
           <a:prstGeom prst="rect">
             <a:avLst/>
@@ -7678,49 +8612,65 @@
           <a:p>
             <a:pPr algn="l">
               <a:spcAft>
-                <a:spcPts val="800"/>
-              </a:spcAft>
-            </a:pPr>
-            <a:r>
-              <a:rPr sz="1600" b="0">
-                <a:solidFill>
-                  <a:srgbClr val="FFFFFF"/>
-                </a:solidFill>
-                <a:latin typeface="맑은 고딕"/>
-              </a:rPr>
-              <a:t>•  완전 자동</a:t>
-            </a:r>
-          </a:p>
-          <a:p>
-            <a:pPr algn="l">
-              <a:spcAft>
-                <a:spcPts val="800"/>
-              </a:spcAft>
-            </a:pPr>
-            <a:r>
-              <a:rPr sz="1600" b="0">
-                <a:solidFill>
-                  <a:srgbClr val="FFFFFF"/>
-                </a:solidFill>
-                <a:latin typeface="맑은 고딕"/>
-              </a:rPr>
-              <a:t>•  GUID 디렉터리</a:t>
-            </a:r>
-          </a:p>
-          <a:p>
-            <a:pPr algn="l">
-              <a:spcAft>
-                <a:spcPts val="800"/>
-              </a:spcAft>
-            </a:pPr>
-            <a:r>
-              <a:rPr sz="1600" b="0">
-                <a:solidFill>
-                  <a:srgbClr val="FFFFFF"/>
-                </a:solidFill>
-                <a:latin typeface="맑은 고딕"/>
-              </a:rPr>
-              <a:t>•  삭제 후 남는 것</a:t>
+                <a:spcPts val="1000"/>
+              </a:spcAft>
+            </a:pPr>
+            <a:r>
+              <a:rPr sz="1700" b="0">
+                <a:solidFill>
+                  <a:srgbClr val="222222"/>
+                </a:solidFill>
+                <a:latin typeface="맑은 고딕"/>
+              </a:rPr>
+              <a:t>•  Primary에서 큰 파일을 /u02로 온라인 이동</a:t>
+            </a:r>
+          </a:p>
+          <a:p>
+            <a:pPr algn="l">
+              <a:spcAft>
+                <a:spcPts val="1000"/>
+              </a:spcAft>
+            </a:pPr>
+            <a:r>
+              <a:rPr sz="1700" b="0">
+                <a:solidFill>
+                  <a:srgbClr val="222222"/>
+                </a:solidFill>
+                <a:latin typeface="맑은 고딕"/>
+              </a:rPr>
+              <a:t>•  Standby 파일은 /u01에 그대로, 적용은 정상</a:t>
+            </a:r>
+          </a:p>
+          <a:p>
+            <a:pPr algn="l">
+              <a:spcAft>
+                <a:spcPts val="1000"/>
+              </a:spcAft>
+            </a:pPr>
+            <a:r>
+              <a:rPr sz="1700" b="0">
+                <a:solidFill>
+                  <a:srgbClr val="222222"/>
+                </a:solidFill>
+                <a:latin typeface="맑은 고딕"/>
+              </a:rPr>
+              <a:t>•  석 달 뒤 Standby /u01 가득 참, 자동 확장 실패</a:t>
+            </a:r>
+          </a:p>
+          <a:p>
+            <a:pPr algn="l">
+              <a:spcAft>
+                <a:spcPts val="1000"/>
+              </a:spcAft>
+            </a:pPr>
+            <a:r>
+              <a:rPr sz="1700" b="0">
+                <a:solidFill>
+                  <a:srgbClr val="222222"/>
+                </a:solidFill>
+                <a:latin typeface="맑은 고딕"/>
+              </a:rPr>
+              <a:t>•  적용 중지, Primary에는 아무 신호 없음</a:t>
             </a:r>
           </a:p>
         </p:txBody>
@@ -7821,7 +8771,7 @@
                 </a:solidFill>
                 <a:latin typeface="맑은 고딕"/>
               </a:rPr>
-              <a:t>학습 목표 (Objectives)</a:t>
+              <a:t>학습 목표</a:t>
             </a:r>
           </a:p>
         </p:txBody>
@@ -7860,7 +8810,7 @@
                 </a:solidFill>
                 <a:latin typeface="맑은 고딕"/>
               </a:rPr>
-              <a:t>•  `STANDBY_FILE_MANAGEMENT`가 자동화하는 범위와 하지 않는 범위를 구분한다.</a:t>
+              <a:t>•  구조 변경이 리두로 Standby에 전달되는 경로를 설명한다</a:t>
             </a:r>
           </a:p>
           <a:p>
@@ -7876,7 +8826,7 @@
                 </a:solidFill>
                 <a:latin typeface="맑은 고딕"/>
               </a:rPr>
-              <a:t>•  비대칭 구성에서 파일 이름이 어떻게 정해지고, 왜 문제가 없는지 설명한다.</a:t>
+              <a:t>•  STANDBY_FILE_MANAGEMENT와 파일 이름 결정 규칙을 안다</a:t>
             </a:r>
           </a:p>
           <a:p>
@@ -7892,7 +8842,7 @@
                 </a:solidFill>
                 <a:latin typeface="맑은 고딕"/>
               </a:rPr>
-              <a:t>•  `MANUAL` 상태의 `UNNAMED` 파일과 ORA-1274·ORA-1111을 진단한다.</a:t>
+              <a:t>•  파일 추가·삭제·크기·이름 변경의 수동 개입 여부를 판단한다</a:t>
             </a:r>
           </a:p>
           <a:p>
@@ -7908,7 +8858,7 @@
                 </a:solidFill>
                 <a:latin typeface="맑은 고딕"/>
               </a:rPr>
-              <a:t>•  `ALTER DATABASE CREATE DATAFILE ... AS NEW`로 복구한다.</a:t>
+              <a:t>•  UNNAMED 파일을 진단하고 CREATE DATAFILE로 복구한다</a:t>
             </a:r>
           </a:p>
           <a:p>
@@ -7924,7 +8874,7 @@
                 </a:solidFill>
                 <a:latin typeface="맑은 고딕"/>
               </a:rPr>
-              <a:t>•  PDB 추가·삭제의 반영과 삭제 후 남는 것을 안다.</a:t>
+              <a:t>•  리두 로그와 PDB 변경을 Standby에서 처리한다</a:t>
             </a:r>
           </a:p>
           <a:p>
@@ -7940,23 +8890,7 @@
                 </a:solidFill>
                 <a:latin typeface="맑은 고딕"/>
               </a:rPr>
-              <a:t>•  온라인 리두 로그 그룹이 반영되지 않는다는 사실과 그 함의를 안다.</a:t>
-            </a:r>
-          </a:p>
-          <a:p>
-            <a:pPr algn="l">
-              <a:spcAft>
-                <a:spcPts val="1000"/>
-              </a:spcAft>
-            </a:pPr>
-            <a:r>
-              <a:rPr sz="1600" b="0">
-                <a:solidFill>
-                  <a:srgbClr val="222222"/>
-                </a:solidFill>
-                <a:latin typeface="맑은 고딕"/>
-              </a:rPr>
-              <a:t>•  리두 파일 작업의 오류 네 가지를 구분하고, 구조 변경의 표준 순서를 익힌다.</a:t>
+              <a:t>•  NOLOGGING 흔적과 리두 밖 항목을 관리한다</a:t>
             </a:r>
           </a:p>
         </p:txBody>
@@ -7988,7 +8922,7 @@
         <p:spPr>
           <a:xfrm>
             <a:off x="0" y="0"/>
-            <a:ext cx="12191695" cy="1005840"/>
+            <a:ext cx="12191695" cy="6858000"/>
           </a:xfrm>
           <a:prstGeom prst="rect">
             <a:avLst/>
@@ -8031,8 +8965,8 @@
         </p:nvSpPr>
         <p:spPr>
           <a:xfrm>
-            <a:off x="548640" y="91440"/>
-            <a:ext cx="10972800" cy="777240"/>
+            <a:off x="822960" y="2011680"/>
+            <a:ext cx="10515600" cy="1097280"/>
           </a:xfrm>
           <a:prstGeom prst="rect">
             <a:avLst/>
@@ -8051,13 +8985,13 @@
               </a:spcAft>
             </a:pPr>
             <a:r>
-              <a:rPr sz="2600" b="1">
+              <a:rPr sz="4000" b="1">
                 <a:solidFill>
                   <a:srgbClr val="FFFFFF"/>
                 </a:solidFill>
                 <a:latin typeface="맑은 고딕"/>
               </a:rPr>
-              <a:t>PDB 추가는 완전 자동</a:t>
+              <a:t>8.5</a:t>
             </a:r>
           </a:p>
         </p:txBody>
@@ -8070,8 +9004,8 @@
         </p:nvSpPr>
         <p:spPr>
           <a:xfrm>
-            <a:off x="640080" y="1078992"/>
-            <a:ext cx="10881360" cy="457200"/>
+            <a:off x="822960" y="3017520"/>
+            <a:ext cx="10515600" cy="914400"/>
           </a:xfrm>
           <a:prstGeom prst="rect">
             <a:avLst/>
@@ -8090,27 +9024,71 @@
               </a:spcAft>
             </a:pPr>
             <a:r>
-              <a:rPr sz="1500" b="0">
-                <a:solidFill>
-                  <a:srgbClr val="5A6672"/>
-                </a:solidFill>
-                <a:latin typeface="맑은 고딕"/>
-              </a:rPr>
-              <a:t>디렉터리까지</a:t>
-            </a:r>
-          </a:p>
-        </p:txBody>
-      </p:sp>
-      <p:sp>
-        <p:nvSpPr>
-          <p:cNvPr id="5" name="TextBox 4"/>
+              <a:rPr sz="2800" b="1">
+                <a:solidFill>
+                  <a:srgbClr val="FFFFFF"/>
+                </a:solidFill>
+                <a:latin typeface="맑은 고딕"/>
+              </a:rPr>
+              <a:t>UNNAMED 파일과 복구</a:t>
+            </a:r>
+          </a:p>
+        </p:txBody>
+      </p:sp>
+      <p:sp>
+        <p:nvSpPr>
+          <p:cNvPr id="5" name="Rectangle 4"/>
+          <p:cNvSpPr/>
+          <p:nvPr/>
+        </p:nvSpPr>
+        <p:spPr>
+          <a:xfrm>
+            <a:off x="822960" y="4114800"/>
+            <a:ext cx="5486400" cy="54864"/>
+          </a:xfrm>
+          <a:prstGeom prst="rect">
+            <a:avLst/>
+          </a:prstGeom>
+          <a:solidFill>
+            <a:srgbClr val="FFFFFF"/>
+          </a:solidFill>
+          <a:ln>
+            <a:noFill/>
+          </a:ln>
+          <a:effectLst/>
+        </p:spPr>
+        <p:style>
+          <a:lnRef idx="1">
+            <a:schemeClr val="accent1"/>
+          </a:lnRef>
+          <a:fillRef idx="3">
+            <a:schemeClr val="accent1"/>
+          </a:fillRef>
+          <a:effectRef idx="2">
+            <a:schemeClr val="accent1"/>
+          </a:effectRef>
+          <a:fontRef idx="minor">
+            <a:schemeClr val="lt1"/>
+          </a:fontRef>
+        </p:style>
+        <p:txBody>
+          <a:bodyPr rtlCol="0" anchor="ctr"/>
+          <a:lstStyle/>
+          <a:p>
+            <a:pPr algn="ctr"/>
+          </a:p>
+        </p:txBody>
+      </p:sp>
+      <p:sp>
+        <p:nvSpPr>
+          <p:cNvPr id="6" name="TextBox 5"/>
           <p:cNvSpPr txBox="1"/>
           <p:nvPr/>
         </p:nvSpPr>
         <p:spPr>
           <a:xfrm>
-            <a:off x="640080" y="1737360"/>
-            <a:ext cx="10881360" cy="4754880"/>
+            <a:off x="822960" y="4297680"/>
+            <a:ext cx="10058400" cy="2011680"/>
           </a:xfrm>
           <a:prstGeom prst="rect">
             <a:avLst/>
@@ -8125,65 +9103,49 @@
           <a:p>
             <a:pPr algn="l">
               <a:spcAft>
-                <a:spcPts val="1000"/>
-              </a:spcAft>
-            </a:pPr>
-            <a:r>
-              <a:rPr sz="1700" b="0">
-                <a:solidFill>
-                  <a:srgbClr val="222222"/>
-                </a:solidFill>
-                <a:latin typeface="맑은 고딕"/>
-              </a:rPr>
-              <a:t>•  Standby에 PDB 등록, **GUID 동일**, 데이터 파일 3개</a:t>
-            </a:r>
-          </a:p>
-          <a:p>
-            <a:pPr algn="l">
-              <a:spcAft>
-                <a:spcPts val="1000"/>
-              </a:spcAft>
-            </a:pPr>
-            <a:r>
-              <a:rPr sz="1700" b="0">
-                <a:solidFill>
-                  <a:srgbClr val="222222"/>
-                </a:solidFill>
-                <a:latin typeface="맑은 고딕"/>
-              </a:rPr>
-              <a:t>•  `mkdir` 없이 `59FF1704.../datafile` 생성</a:t>
-            </a:r>
-          </a:p>
-          <a:p>
-            <a:pPr algn="l">
-              <a:spcAft>
-                <a:spcPts val="1000"/>
-              </a:spcAft>
-            </a:pPr>
-            <a:r>
-              <a:rPr sz="1700" b="0">
-                <a:solidFill>
-                  <a:srgbClr val="222222"/>
-                </a:solidFill>
-                <a:latin typeface="맑은 고딕"/>
-              </a:rPr>
-              <a:t>•  5장 방식이었다면 사람이 만들어야 했다 (ORA-19505)</a:t>
-            </a:r>
-          </a:p>
-          <a:p>
-            <a:pPr algn="l">
-              <a:spcAft>
-                <a:spcPts val="1000"/>
-              </a:spcAft>
-            </a:pPr>
-            <a:r>
-              <a:rPr sz="1700" b="0">
-                <a:solidFill>
-                  <a:srgbClr val="222222"/>
-                </a:solidFill>
-                <a:latin typeface="맑은 고딕"/>
-              </a:rPr>
-              <a:t>•  **PDB를 자주 추가하는 환경에서 OMF를 권하는 이유**</a:t>
+                <a:spcPts val="800"/>
+              </a:spcAft>
+            </a:pPr>
+            <a:r>
+              <a:rPr sz="1600" b="0">
+                <a:solidFill>
+                  <a:srgbClr val="FFFFFF"/>
+                </a:solidFill>
+                <a:latin typeface="맑은 고딕"/>
+              </a:rPr>
+              <a:t>•  UNNAMED가 생기는 경로</a:t>
+            </a:r>
+          </a:p>
+          <a:p>
+            <a:pPr algn="l">
+              <a:spcAft>
+                <a:spcPts val="800"/>
+              </a:spcAft>
+            </a:pPr>
+            <a:r>
+              <a:rPr sz="1600" b="0">
+                <a:solidFill>
+                  <a:srgbClr val="FFFFFF"/>
+                </a:solidFill>
+                <a:latin typeface="맑은 고딕"/>
+              </a:rPr>
+              <a:t>•  증상 읽기: ORA-01274, ORA-01111</a:t>
+            </a:r>
+          </a:p>
+          <a:p>
+            <a:pPr algn="l">
+              <a:spcAft>
+                <a:spcPts val="800"/>
+              </a:spcAft>
+            </a:pPr>
+            <a:r>
+              <a:rPr sz="1600" b="0">
+                <a:solidFill>
+                  <a:srgbClr val="FFFFFF"/>
+                </a:solidFill>
+                <a:latin typeface="맑은 고딕"/>
+              </a:rPr>
+              <a:t>•  CREATE DATAFILE로 복구</a:t>
             </a:r>
           </a:p>
         </p:txBody>
@@ -8284,7 +9246,7 @@
                 </a:solidFill>
                 <a:latin typeface="맑은 고딕"/>
               </a:rPr>
-              <a:t>새 PDB는 열어야 한다</a:t>
+              <a:t>UNNAMED 파일이 생기는 경로</a:t>
             </a:r>
           </a:p>
         </p:txBody>
@@ -8323,7 +9285,7 @@
                 </a:solidFill>
                 <a:latin typeface="맑은 고딕"/>
               </a:rPr>
-              <a:t>ORA-01219</a:t>
+              <a:t>파일을 만들지 못하면 자리만 남는다</a:t>
             </a:r>
           </a:p>
         </p:txBody>
@@ -8362,7 +9324,7 @@
                 </a:solidFill>
                 <a:latin typeface="맑은 고딕"/>
               </a:rPr>
-              <a:t>•  Standby에서 새 PDB의 OPEN_MODE는 **MOUNTED**</a:t>
+              <a:t>•  컨트롤 파일에 $ORACLE_HOME/dbs/UNNAMEDnnnnn 등록</a:t>
             </a:r>
           </a:p>
           <a:p>
@@ -8378,7 +9340,7 @@
                 </a:solidFill>
                 <a:latin typeface="맑은 고딕"/>
               </a:rPr>
-              <a:t>•  조회하면 `ORA-01219: ... queries allowed on fixed tables or views only`</a:t>
+              <a:t>•  실제 파일은 없음, nnnnn은 파일 번호</a:t>
             </a:r>
           </a:p>
           <a:p>
@@ -8394,7 +9356,7 @@
                 </a:solidFill>
                 <a:latin typeface="맑은 고딕"/>
               </a:rPr>
-              <a:t>•  기존 PDB는 구축 때 열어 두었지만 **새 PDB는 아무도 열지 않는다**</a:t>
+              <a:t>•  원인 ①: MANUAL 상태에서 파일 추가</a:t>
             </a:r>
           </a:p>
           <a:p>
@@ -8410,7 +9372,23 @@
                 </a:solidFill>
                 <a:latin typeface="맑은 고딕"/>
               </a:rPr>
-              <a:t>•  기동 스크립트에 `ALTER PLUGGABLE DATABASE ALL OPEN READ ONLY`</a:t>
+              <a:t>•  원인 ②: 디렉터리 없음, 변환 규칙 누락</a:t>
+            </a:r>
+          </a:p>
+          <a:p>
+            <a:pPr algn="l">
+              <a:spcAft>
+                <a:spcPts val="1000"/>
+              </a:spcAft>
+            </a:pPr>
+            <a:r>
+              <a:rPr sz="1700" b="0">
+                <a:solidFill>
+                  <a:srgbClr val="222222"/>
+                </a:solidFill>
+                <a:latin typeface="맑은 고딕"/>
+              </a:rPr>
+              <a:t>•  원인 ③: 공간 부족, 권한 문제</a:t>
             </a:r>
           </a:p>
         </p:txBody>
@@ -8511,7 +9489,7 @@
                 </a:solidFill>
                 <a:latin typeface="맑은 고딕"/>
               </a:rPr>
-              <a:t>삭제 후 남는 것</a:t>
+              <a:t>증상 읽기</a:t>
             </a:r>
           </a:p>
         </p:txBody>
@@ -8550,7 +9528,7 @@
                 </a:solidFill>
                 <a:latin typeface="맑은 고딕"/>
               </a:rPr>
-              <a:t>빈 GUID 디렉터리</a:t>
+              <a:t>오류 번호가 진행 단계를 알려 준다</a:t>
             </a:r>
           </a:p>
         </p:txBody>
@@ -8589,7 +9567,7 @@
                 </a:solidFill>
                 <a:latin typeface="맑은 고딕"/>
               </a:rPr>
-              <a:t>•  PDB도 데이터 파일도 사라진다</a:t>
+              <a:t>•  처음 멈출 때: ORA-01274 (만들 수 없었다)</a:t>
             </a:r>
           </a:p>
           <a:p>
@@ -8605,7 +9583,7 @@
                 </a:solidFill>
                 <a:latin typeface="맑은 고딕"/>
               </a:rPr>
-              <a:t>•  그런데 **빈 GUID 디렉터리는 남는다**</a:t>
+              <a:t>•  재기동 시: ORA-01111 (이름 모를 파일)</a:t>
             </a:r>
           </a:p>
           <a:p>
@@ -8621,7 +9599,7 @@
                 </a:solidFill>
                 <a:latin typeface="맑은 고딕"/>
               </a:rPr>
-              <a:t>•  자주 만들고 지우면 쌓인다. 이름만으로는 구분 불가</a:t>
+              <a:t>•  V$DATAFILE: UNNAMED, STATUS=RECOVER</a:t>
             </a:r>
           </a:p>
           <a:p>
@@ -8637,7 +9615,23 @@
                 </a:solidFill>
                 <a:latin typeface="맑은 고딕"/>
               </a:rPr>
-              <a:t>•  정리는 `V$PDBS.GUID`와 대조해 **`rmdir`**로</a:t>
+              <a:t>•  V$DATAFILE_HEADER.ERROR = FILE MISSING</a:t>
+            </a:r>
+          </a:p>
+          <a:p>
+            <a:pPr algn="l">
+              <a:spcAft>
+                <a:spcPts val="1000"/>
+              </a:spcAft>
+            </a:pPr>
+            <a:r>
+              <a:rPr sz="1700" b="0">
+                <a:solidFill>
+                  <a:srgbClr val="222222"/>
+                </a:solidFill>
+                <a:latin typeface="맑은 고딕"/>
+              </a:rPr>
+              <a:t>•  Primary 목적지는 VALID, apply lag만 증가</a:t>
             </a:r>
           </a:p>
         </p:txBody>
@@ -8669,7 +9663,7 @@
         <p:spPr>
           <a:xfrm>
             <a:off x="0" y="0"/>
-            <a:ext cx="12191695" cy="6858000"/>
+            <a:ext cx="12191695" cy="1005840"/>
           </a:xfrm>
           <a:prstGeom prst="rect">
             <a:avLst/>
@@ -8712,8 +9706,8 @@
         </p:nvSpPr>
         <p:spPr>
           <a:xfrm>
-            <a:off x="822960" y="2011680"/>
-            <a:ext cx="10515600" cy="1097280"/>
+            <a:off x="548640" y="91440"/>
+            <a:ext cx="10972800" cy="777240"/>
           </a:xfrm>
           <a:prstGeom prst="rect">
             <a:avLst/>
@@ -8732,13 +9726,13 @@
               </a:spcAft>
             </a:pPr>
             <a:r>
-              <a:rPr sz="4000" b="1">
+              <a:rPr sz="2600" b="1">
                 <a:solidFill>
                   <a:srgbClr val="FFFFFF"/>
                 </a:solidFill>
                 <a:latin typeface="맑은 고딕"/>
               </a:rPr>
-              <a:t>8.7</a:t>
+              <a:t>CREATE DATAFILE로 복구</a:t>
             </a:r>
           </a:p>
         </p:txBody>
@@ -8751,8 +9745,8 @@
         </p:nvSpPr>
         <p:spPr>
           <a:xfrm>
-            <a:off x="822960" y="3017520"/>
-            <a:ext cx="10515600" cy="914400"/>
+            <a:off x="640080" y="1078992"/>
+            <a:ext cx="10881360" cy="457200"/>
           </a:xfrm>
           <a:prstGeom prst="rect">
             <a:avLst/>
@@ -8771,71 +9765,27 @@
               </a:spcAft>
             </a:pPr>
             <a:r>
-              <a:rPr sz="2800" b="1">
-                <a:solidFill>
-                  <a:srgbClr val="FFFFFF"/>
-                </a:solidFill>
-                <a:latin typeface="맑은 고딕"/>
-              </a:rPr>
-              <a:t>반영되지 않는 것</a:t>
-            </a:r>
-          </a:p>
-        </p:txBody>
-      </p:sp>
-      <p:sp>
-        <p:nvSpPr>
-          <p:cNvPr id="5" name="Rectangle 4"/>
-          <p:cNvSpPr/>
-          <p:nvPr/>
-        </p:nvSpPr>
-        <p:spPr>
-          <a:xfrm>
-            <a:off x="822960" y="4114800"/>
-            <a:ext cx="5486400" cy="54864"/>
-          </a:xfrm>
-          <a:prstGeom prst="rect">
-            <a:avLst/>
-          </a:prstGeom>
-          <a:solidFill>
-            <a:srgbClr val="FFFFFF"/>
-          </a:solidFill>
-          <a:ln>
-            <a:noFill/>
-          </a:ln>
-          <a:effectLst/>
-        </p:spPr>
-        <p:style>
-          <a:lnRef idx="1">
-            <a:schemeClr val="accent1"/>
-          </a:lnRef>
-          <a:fillRef idx="3">
-            <a:schemeClr val="accent1"/>
-          </a:fillRef>
-          <a:effectRef idx="2">
-            <a:schemeClr val="accent1"/>
-          </a:effectRef>
-          <a:fontRef idx="minor">
-            <a:schemeClr val="lt1"/>
-          </a:fontRef>
-        </p:style>
-        <p:txBody>
-          <a:bodyPr rtlCol="0" anchor="ctr"/>
-          <a:lstStyle/>
-          <a:p>
-            <a:pPr algn="ctr"/>
-          </a:p>
-        </p:txBody>
-      </p:sp>
-      <p:sp>
-        <p:nvSpPr>
-          <p:cNvPr id="6" name="TextBox 5"/>
+              <a:rPr sz="1500" b="0">
+                <a:solidFill>
+                  <a:srgbClr val="5A6672"/>
+                </a:solidFill>
+                <a:latin typeface="맑은 고딕"/>
+              </a:rPr>
+              <a:t>빈 파일을 만들고 적용이 채운다</a:t>
+            </a:r>
+          </a:p>
+        </p:txBody>
+      </p:sp>
+      <p:sp>
+        <p:nvSpPr>
+          <p:cNvPr id="5" name="TextBox 4"/>
           <p:cNvSpPr txBox="1"/>
           <p:nvPr/>
         </p:nvSpPr>
         <p:spPr>
           <a:xfrm>
-            <a:off x="822960" y="4297680"/>
-            <a:ext cx="10058400" cy="2011680"/>
+            <a:off x="640080" y="1737360"/>
+            <a:ext cx="10881360" cy="4754880"/>
           </a:xfrm>
           <a:prstGeom prst="rect">
             <a:avLst/>
@@ -8850,49 +9800,65 @@
           <a:p>
             <a:pPr algn="l">
               <a:spcAft>
-                <a:spcPts val="800"/>
-              </a:spcAft>
-            </a:pPr>
-            <a:r>
-              <a:rPr sz="1600" b="0">
-                <a:solidFill>
-                  <a:srgbClr val="FFFFFF"/>
-                </a:solidFill>
-                <a:latin typeface="맑은 고딕"/>
-              </a:rPr>
-              <a:t>•  온라인 리두 로그</a:t>
-            </a:r>
-          </a:p>
-          <a:p>
-            <a:pPr algn="l">
-              <a:spcAft>
-                <a:spcPts val="800"/>
-              </a:spcAft>
-            </a:pPr>
-            <a:r>
-              <a:rPr sz="1600" b="0">
-                <a:solidFill>
-                  <a:srgbClr val="FFFFFF"/>
-                </a:solidFill>
-                <a:latin typeface="맑은 고딕"/>
-              </a:rPr>
-              <a:t>•  왜 그런가</a:t>
-            </a:r>
-          </a:p>
-          <a:p>
-            <a:pPr algn="l">
-              <a:spcAft>
-                <a:spcPts val="800"/>
-              </a:spcAft>
-            </a:pPr>
-            <a:r>
-              <a:rPr sz="1600" b="0">
-                <a:solidFill>
-                  <a:srgbClr val="FFFFFF"/>
-                </a:solidFill>
-                <a:latin typeface="맑은 고딕"/>
-              </a:rPr>
-              <a:t>•  언제 문제가 되는가</a:t>
+                <a:spcPts val="1000"/>
+              </a:spcAft>
+            </a:pPr>
+            <a:r>
+              <a:rPr sz="1700" b="0">
+                <a:solidFill>
+                  <a:srgbClr val="222222"/>
+                </a:solidFill>
+                <a:latin typeface="맑은 고딕"/>
+              </a:rPr>
+              <a:t>•  MANUAL로 내림 (AUTO면 ORA-01275)</a:t>
+            </a:r>
+          </a:p>
+          <a:p>
+            <a:pPr algn="l">
+              <a:spcAft>
+                <a:spcPts val="1000"/>
+              </a:spcAft>
+            </a:pPr>
+            <a:r>
+              <a:rPr sz="1700" b="0">
+                <a:solidFill>
+                  <a:srgbClr val="222222"/>
+                </a:solidFill>
+                <a:latin typeface="맑은 고딕"/>
+              </a:rPr>
+              <a:t>•  CREATE DATAFILE 'UNNAMED...' AS '실제 경로'</a:t>
+            </a:r>
+          </a:p>
+          <a:p>
+            <a:pPr algn="l">
+              <a:spcAft>
+                <a:spcPts val="1000"/>
+              </a:spcAft>
+            </a:pPr>
+            <a:r>
+              <a:rPr sz="1700" b="0">
+                <a:solidFill>
+                  <a:srgbClr val="222222"/>
+                </a:solidFill>
+                <a:latin typeface="맑은 고딕"/>
+              </a:rPr>
+              <a:t>•  OMF 구성은 CREATE DATAFILE n AS NEW</a:t>
+            </a:r>
+          </a:p>
+          <a:p>
+            <a:pPr algn="l">
+              <a:spcAft>
+                <a:spcPts val="1000"/>
+              </a:spcAft>
+            </a:pPr>
+            <a:r>
+              <a:rPr sz="1700" b="0">
+                <a:solidFill>
+                  <a:srgbClr val="222222"/>
+                </a:solidFill>
+                <a:latin typeface="맑은 고딕"/>
+              </a:rPr>
+              <a:t>•  AUTO 복귀, 적용 재기동, V$DATAFILE 확인</a:t>
             </a:r>
           </a:p>
         </p:txBody>
@@ -8993,7 +9959,7 @@
                 </a:solidFill>
                 <a:latin typeface="맑은 고딕"/>
               </a:rPr>
-              <a:t>조용히 반영되지 않는다</a:t>
+              <a:t>재발 방지와 확인 루틴</a:t>
             </a:r>
           </a:p>
         </p:txBody>
@@ -9032,7 +9998,7 @@
                 </a:solidFill>
                 <a:latin typeface="맑은 고딕"/>
               </a:rPr>
-              <a:t>온라인 리두 그룹</a:t>
+              <a:t>구조 변경 작업은 Standby 확인으로 닫는다</a:t>
             </a:r>
           </a:p>
         </p:txBody>
@@ -9071,7 +10037,7 @@
                 </a:solidFill>
                 <a:latin typeface="맑은 고딕"/>
               </a:rPr>
-              <a:t>•  Primary에 그룹 8 추가 → 네 그룹</a:t>
+              <a:t>•  MANUAL 원인: AUTO 고정, 복귀 확인을 절차서에</a:t>
             </a:r>
           </a:p>
           <a:p>
@@ -9087,7 +10053,7 @@
                 </a:solidFill>
                 <a:latin typeface="맑은 고딕"/>
               </a:rPr>
-              <a:t>•  45초 뒤 Standby : **세 그룹 그대로**</a:t>
+              <a:t>•  경로 원인: 변환 규칙 보완 또는 Standby OMF</a:t>
             </a:r>
           </a:p>
           <a:p>
@@ -9103,7 +10069,7 @@
                 </a:solidFill>
                 <a:latin typeface="맑은 고딕"/>
               </a:rPr>
-              <a:t>•  지연은 0 — 밀려서가 아니라 애초에 반영되지 않는다</a:t>
+              <a:t>•  공간 원인: 양쪽 같은 디스크 감시 기준</a:t>
             </a:r>
           </a:p>
           <a:p>
@@ -9119,7 +10085,7 @@
                 </a:solidFill>
                 <a:latin typeface="맑은 고딕"/>
               </a:rPr>
-              <a:t>•  오류도 경고도 없다</a:t>
+              <a:t>•  작업 후: 로그 전환 → FILE# 비교 → 적용 확인</a:t>
             </a:r>
           </a:p>
         </p:txBody>
@@ -9151,7 +10117,7 @@
         <p:spPr>
           <a:xfrm>
             <a:off x="0" y="0"/>
-            <a:ext cx="12191695" cy="1005840"/>
+            <a:ext cx="12191695" cy="6858000"/>
           </a:xfrm>
           <a:prstGeom prst="rect">
             <a:avLst/>
@@ -9194,8 +10160,8 @@
         </p:nvSpPr>
         <p:spPr>
           <a:xfrm>
-            <a:off x="548640" y="91440"/>
-            <a:ext cx="10972800" cy="777240"/>
+            <a:off x="822960" y="2011680"/>
+            <a:ext cx="10515600" cy="1097280"/>
           </a:xfrm>
           <a:prstGeom prst="rect">
             <a:avLst/>
@@ -9214,13 +10180,13 @@
               </a:spcAft>
             </a:pPr>
             <a:r>
-              <a:rPr sz="2600" b="1">
+              <a:rPr sz="4000" b="1">
                 <a:solidFill>
                   <a:srgbClr val="FFFFFF"/>
                 </a:solidFill>
                 <a:latin typeface="맑은 고딕"/>
               </a:rPr>
-              <a:t>역할 전환 때 드러난다</a:t>
+              <a:t>8.6</a:t>
             </a:r>
           </a:p>
         </p:txBody>
@@ -9233,8 +10199,8 @@
         </p:nvSpPr>
         <p:spPr>
           <a:xfrm>
-            <a:off x="640080" y="1078992"/>
-            <a:ext cx="10881360" cy="457200"/>
+            <a:off x="822960" y="3017520"/>
+            <a:ext cx="10515600" cy="914400"/>
           </a:xfrm>
           <a:prstGeom prst="rect">
             <a:avLst/>
@@ -9253,27 +10219,71 @@
               </a:spcAft>
             </a:pPr>
             <a:r>
-              <a:rPr sz="1500" b="0">
-                <a:solidFill>
-                  <a:srgbClr val="5A6672"/>
-                </a:solidFill>
-                <a:latin typeface="맑은 고딕"/>
-              </a:rPr>
-              <a:t>사람이 해야 한다</a:t>
-            </a:r>
-          </a:p>
-        </p:txBody>
-      </p:sp>
-      <p:sp>
-        <p:nvSpPr>
-          <p:cNvPr id="5" name="TextBox 4"/>
+              <a:rPr sz="2800" b="1">
+                <a:solidFill>
+                  <a:srgbClr val="FFFFFF"/>
+                </a:solidFill>
+                <a:latin typeface="맑은 고딕"/>
+              </a:rPr>
+              <a:t>온라인 리두 로그와 Standby Redo Log</a:t>
+            </a:r>
+          </a:p>
+        </p:txBody>
+      </p:sp>
+      <p:sp>
+        <p:nvSpPr>
+          <p:cNvPr id="5" name="Rectangle 4"/>
+          <p:cNvSpPr/>
+          <p:nvPr/>
+        </p:nvSpPr>
+        <p:spPr>
+          <a:xfrm>
+            <a:off x="822960" y="4114800"/>
+            <a:ext cx="5486400" cy="54864"/>
+          </a:xfrm>
+          <a:prstGeom prst="rect">
+            <a:avLst/>
+          </a:prstGeom>
+          <a:solidFill>
+            <a:srgbClr val="FFFFFF"/>
+          </a:solidFill>
+          <a:ln>
+            <a:noFill/>
+          </a:ln>
+          <a:effectLst/>
+        </p:spPr>
+        <p:style>
+          <a:lnRef idx="1">
+            <a:schemeClr val="accent1"/>
+          </a:lnRef>
+          <a:fillRef idx="3">
+            <a:schemeClr val="accent1"/>
+          </a:fillRef>
+          <a:effectRef idx="2">
+            <a:schemeClr val="accent1"/>
+          </a:effectRef>
+          <a:fontRef idx="minor">
+            <a:schemeClr val="lt1"/>
+          </a:fontRef>
+        </p:style>
+        <p:txBody>
+          <a:bodyPr rtlCol="0" anchor="ctr"/>
+          <a:lstStyle/>
+          <a:p>
+            <a:pPr algn="ctr"/>
+          </a:p>
+        </p:txBody>
+      </p:sp>
+      <p:sp>
+        <p:nvSpPr>
+          <p:cNvPr id="6" name="TextBox 5"/>
           <p:cNvSpPr txBox="1"/>
           <p:nvPr/>
         </p:nvSpPr>
         <p:spPr>
           <a:xfrm>
-            <a:off x="640080" y="1737360"/>
-            <a:ext cx="10881360" cy="4754880"/>
+            <a:off x="822960" y="4297680"/>
+            <a:ext cx="10058400" cy="2011680"/>
           </a:xfrm>
           <a:prstGeom prst="rect">
             <a:avLst/>
@@ -9288,65 +10298,49 @@
           <a:p>
             <a:pPr algn="l">
               <a:spcAft>
-                <a:spcPts val="1000"/>
-              </a:spcAft>
-            </a:pPr>
-            <a:r>
-              <a:rPr sz="1700" b="0">
-                <a:solidFill>
-                  <a:srgbClr val="222222"/>
-                </a:solidFill>
-                <a:latin typeface="맑은 고딕"/>
-              </a:rPr>
-              <a:t>•  boston이 Primary가 되면 그때 온라인 리두가 필요해진다</a:t>
-            </a:r>
-          </a:p>
-          <a:p>
-            <a:pPr algn="l">
-              <a:spcAft>
-                <a:spcPts val="1000"/>
-              </a:spcAft>
-            </a:pPr>
-            <a:r>
-              <a:rPr sz="1700" b="0">
-                <a:solidFill>
-                  <a:srgbClr val="222222"/>
-                </a:solidFill>
-                <a:latin typeface="맑은 고딕"/>
-              </a:rPr>
-              <a:t>•  chicago 4그룹 / boston 3그룹 → 전환 잦아져 성능 영향</a:t>
-            </a:r>
-          </a:p>
-          <a:p>
-            <a:pPr algn="l">
-              <a:spcAft>
-                <a:spcPts val="1000"/>
-              </a:spcAft>
-            </a:pPr>
-            <a:r>
-              <a:rPr sz="1700" b="0">
-                <a:solidFill>
-                  <a:srgbClr val="222222"/>
-                </a:solidFill>
-                <a:latin typeface="맑은 고딕"/>
-              </a:rPr>
-              <a:t>•  **양쪽에 사람이 같이 적용해야 한다**</a:t>
-            </a:r>
-          </a:p>
-          <a:p>
-            <a:pPr algn="l">
-              <a:spcAft>
-                <a:spcPts val="1000"/>
-              </a:spcAft>
-            </a:pPr>
-            <a:r>
-              <a:rPr sz="1700" b="0">
-                <a:solidFill>
-                  <a:srgbClr val="222222"/>
-                </a:solidFill>
-                <a:latin typeface="맑은 고딕"/>
-              </a:rPr>
-              <a:t>•  SRL 개수도 다시 계산한다 (온라인 + 1)</a:t>
+                <a:spcPts val="800"/>
+              </a:spcAft>
+            </a:pPr>
+            <a:r>
+              <a:rPr sz="1600" b="0">
+                <a:solidFill>
+                  <a:srgbClr val="FFFFFF"/>
+                </a:solidFill>
+                <a:latin typeface="맑은 고딕"/>
+              </a:rPr>
+              <a:t>•  Standby에 있는 두 종류의 로그</a:t>
+            </a:r>
+          </a:p>
+          <a:p>
+            <a:pPr algn="l">
+              <a:spcAft>
+                <a:spcPts val="800"/>
+              </a:spcAft>
+            </a:pPr>
+            <a:r>
+              <a:rPr sz="1600" b="0">
+                <a:solidFill>
+                  <a:srgbClr val="FFFFFF"/>
+                </a:solidFill>
+                <a:latin typeface="맑은 고딕"/>
+              </a:rPr>
+              <a:t>•  Primary 로그 변경은 전달되지 않음</a:t>
+            </a:r>
+          </a:p>
+          <a:p>
+            <a:pPr algn="l">
+              <a:spcAft>
+                <a:spcPts val="800"/>
+              </a:spcAft>
+            </a:pPr>
+            <a:r>
+              <a:rPr sz="1600" b="0">
+                <a:solidFill>
+                  <a:srgbClr val="FFFFFF"/>
+                </a:solidFill>
+                <a:latin typeface="맑은 고딕"/>
+              </a:rPr>
+              <a:t>•  Standby에서의 추가·삭제와 오류</a:t>
             </a:r>
           </a:p>
         </p:txBody>
@@ -9447,7 +10441,7 @@
                 </a:solidFill>
                 <a:latin typeface="맑은 고딕"/>
               </a:rPr>
-              <a:t>리두 파일 작업의 오류 넷</a:t>
+              <a:t>Standby에 있는 두 종류의 로그</a:t>
             </a:r>
           </a:p>
         </p:txBody>
@@ -9486,7 +10480,7 @@
                 </a:solidFill>
                 <a:latin typeface="맑은 고딕"/>
               </a:rPr>
-              <a:t>모두 자주 만난다</a:t>
+              <a:t>지금 쓰는 로그와 전환 뒤에 쓸 로그</a:t>
             </a:r>
           </a:p>
         </p:txBody>
@@ -9525,7 +10519,7 @@
                 </a:solidFill>
                 <a:latin typeface="맑은 고딕"/>
               </a:rPr>
-              <a:t>•  `ORA-00301` + `ORA-27038` — 파일이 이미 있다</a:t>
+              <a:t>•  SRL: Standby 역할에서 RFS가 쓰는 곳</a:t>
             </a:r>
           </a:p>
           <a:p>
@@ -9541,7 +10535,7 @@
                 </a:solidFill>
                 <a:latin typeface="맑은 고딕"/>
               </a:rPr>
-              <a:t>•  `ORA-00359` — 그룹이 없다</a:t>
+              <a:t>•  ORL: Standby 역할에서는 쓰이지 않음</a:t>
             </a:r>
           </a:p>
           <a:p>
@@ -9557,7 +10551,7 @@
                 </a:solidFill>
                 <a:latin typeface="맑은 고딕"/>
               </a:rPr>
-              <a:t>•  `ORA-01623` — CURRENT 그룹은 지울 수 없다</a:t>
+              <a:t>•  ORL은 역할 전환 뒤 LGWR이 쓰기 시작</a:t>
             </a:r>
           </a:p>
           <a:p>
@@ -9573,7 +10567,7 @@
                 </a:solidFill>
                 <a:latin typeface="맑은 고딕"/>
               </a:rPr>
-              <a:t>•  `ORA-00904` — V$LOG에 TYPE 열이 없다</a:t>
+              <a:t>•  V$LOG 상태: UNUSED, CLEARING, CLEARING_CURRENT</a:t>
             </a:r>
           </a:p>
         </p:txBody>
@@ -9605,7 +10599,7 @@
         <p:spPr>
           <a:xfrm>
             <a:off x="0" y="0"/>
-            <a:ext cx="12191695" cy="6858000"/>
+            <a:ext cx="12191695" cy="1005840"/>
           </a:xfrm>
           <a:prstGeom prst="rect">
             <a:avLst/>
@@ -9648,8 +10642,8 @@
         </p:nvSpPr>
         <p:spPr>
           <a:xfrm>
-            <a:off x="822960" y="2011680"/>
-            <a:ext cx="10515600" cy="1097280"/>
+            <a:off x="548640" y="91440"/>
+            <a:ext cx="10972800" cy="777240"/>
           </a:xfrm>
           <a:prstGeom prst="rect">
             <a:avLst/>
@@ -9668,13 +10662,13 @@
               </a:spcAft>
             </a:pPr>
             <a:r>
-              <a:rPr sz="4000" b="1">
+              <a:rPr sz="2600" b="1">
                 <a:solidFill>
                   <a:srgbClr val="FFFFFF"/>
                 </a:solidFill>
                 <a:latin typeface="맑은 고딕"/>
               </a:rPr>
-              <a:t>8.9</a:t>
+              <a:t>Primary 로그 변경은 전달되지 않는다</a:t>
             </a:r>
           </a:p>
         </p:txBody>
@@ -9687,8 +10681,8 @@
         </p:nvSpPr>
         <p:spPr>
           <a:xfrm>
-            <a:off x="822960" y="3017520"/>
-            <a:ext cx="10515600" cy="914400"/>
+            <a:off x="640080" y="1078992"/>
+            <a:ext cx="10881360" cy="457200"/>
           </a:xfrm>
           <a:prstGeom prst="rect">
             <a:avLst/>
@@ -9707,71 +10701,27 @@
               </a:spcAft>
             </a:pPr>
             <a:r>
-              <a:rPr sz="2800" b="1">
-                <a:solidFill>
-                  <a:srgbClr val="FFFFFF"/>
-                </a:solidFill>
-                <a:latin typeface="맑은 고딕"/>
-              </a:rPr>
-              <a:t>사고 사례</a:t>
-            </a:r>
-          </a:p>
-        </p:txBody>
-      </p:sp>
-      <p:sp>
-        <p:nvSpPr>
-          <p:cNvPr id="5" name="Rectangle 4"/>
-          <p:cNvSpPr/>
-          <p:nvPr/>
-        </p:nvSpPr>
-        <p:spPr>
-          <a:xfrm>
-            <a:off x="822960" y="4114800"/>
-            <a:ext cx="5486400" cy="54864"/>
-          </a:xfrm>
-          <a:prstGeom prst="rect">
-            <a:avLst/>
-          </a:prstGeom>
-          <a:solidFill>
-            <a:srgbClr val="FFFFFF"/>
-          </a:solidFill>
-          <a:ln>
-            <a:noFill/>
-          </a:ln>
-          <a:effectLst/>
-        </p:spPr>
-        <p:style>
-          <a:lnRef idx="1">
-            <a:schemeClr val="accent1"/>
-          </a:lnRef>
-          <a:fillRef idx="3">
-            <a:schemeClr val="accent1"/>
-          </a:fillRef>
-          <a:effectRef idx="2">
-            <a:schemeClr val="accent1"/>
-          </a:effectRef>
-          <a:fontRef idx="minor">
-            <a:schemeClr val="lt1"/>
-          </a:fontRef>
-        </p:style>
-        <p:txBody>
-          <a:bodyPr rtlCol="0" anchor="ctr"/>
-          <a:lstStyle/>
-          <a:p>
-            <a:pPr algn="ctr"/>
-          </a:p>
-        </p:txBody>
-      </p:sp>
-      <p:sp>
-        <p:nvSpPr>
-          <p:cNvPr id="6" name="TextBox 5"/>
+              <a:rPr sz="1500" b="0">
+                <a:solidFill>
+                  <a:srgbClr val="5A6672"/>
+                </a:solidFill>
+                <a:latin typeface="맑은 고딕"/>
+              </a:rPr>
+              <a:t>AUTO여도 마찬가지</a:t>
+            </a:r>
+          </a:p>
+        </p:txBody>
+      </p:sp>
+      <p:sp>
+        <p:nvSpPr>
+          <p:cNvPr id="5" name="TextBox 4"/>
           <p:cNvSpPr txBox="1"/>
           <p:nvPr/>
         </p:nvSpPr>
         <p:spPr>
           <a:xfrm>
-            <a:off x="822960" y="4297680"/>
-            <a:ext cx="10058400" cy="2011680"/>
+            <a:off x="640080" y="1737360"/>
+            <a:ext cx="10881360" cy="4754880"/>
           </a:xfrm>
           <a:prstGeom prst="rect">
             <a:avLst/>
@@ -9786,49 +10736,65 @@
           <a:p>
             <a:pPr algn="l">
               <a:spcAft>
-                <a:spcPts val="800"/>
-              </a:spcAft>
-            </a:pPr>
-            <a:r>
-              <a:rPr sz="1600" b="0">
-                <a:solidFill>
-                  <a:srgbClr val="FFFFFF"/>
-                </a:solidFill>
-                <a:latin typeface="맑은 고딕"/>
-              </a:rPr>
-              <a:t>•  무엇을 했는가</a:t>
-            </a:r>
-          </a:p>
-          <a:p>
-            <a:pPr algn="l">
-              <a:spcAft>
-                <a:spcPts val="800"/>
-              </a:spcAft>
-            </a:pPr>
-            <a:r>
-              <a:rPr sz="1600" b="0">
-                <a:solidFill>
-                  <a:srgbClr val="FFFFFF"/>
-                </a:solidFill>
-                <a:latin typeface="맑은 고딕"/>
-              </a:rPr>
-              <a:t>•  무엇이 일어났는가</a:t>
-            </a:r>
-          </a:p>
-          <a:p>
-            <a:pPr algn="l">
-              <a:spcAft>
-                <a:spcPts val="800"/>
-              </a:spcAft>
-            </a:pPr>
-            <a:r>
-              <a:rPr sz="1600" b="0">
-                <a:solidFill>
-                  <a:srgbClr val="FFFFFF"/>
-                </a:solidFill>
-                <a:latin typeface="맑은 고딕"/>
-              </a:rPr>
-              <a:t>•  왜 복구할 수 없었는가</a:t>
+                <a:spcPts val="1000"/>
+              </a:spcAft>
+            </a:pPr>
+            <a:r>
+              <a:rPr sz="1700" b="0">
+                <a:solidFill>
+                  <a:srgbClr val="222222"/>
+                </a:solidFill>
+                <a:latin typeface="맑은 고딕"/>
+              </a:rPr>
+              <a:t>•  ADD/DROP LOGFILE GROUP은 Standby ORL을 안 바꿈</a:t>
+            </a:r>
+          </a:p>
+          <a:p>
+            <a:pPr algn="l">
+              <a:spcAft>
+                <a:spcPts val="1000"/>
+              </a:spcAft>
+            </a:pPr>
+            <a:r>
+              <a:rPr sz="1700" b="0">
+                <a:solidFill>
+                  <a:srgbClr val="222222"/>
+                </a:solidFill>
+                <a:latin typeface="맑은 고딕"/>
+              </a:rPr>
+              <a:t>•  전환 뒤 그룹 수 부족 → 로그 전환 대기 증가</a:t>
+            </a:r>
+          </a:p>
+          <a:p>
+            <a:pPr algn="l">
+              <a:spcAft>
+                <a:spcPts val="1000"/>
+              </a:spcAft>
+            </a:pPr>
+            <a:r>
+              <a:rPr sz="1700" b="0">
+                <a:solidFill>
+                  <a:srgbClr val="222222"/>
+                </a:solidFill>
+                <a:latin typeface="맑은 고딕"/>
+              </a:rPr>
+              <a:t>•  ORL만 키우고 SRL을 두면 실시간 적용 강등</a:t>
+            </a:r>
+          </a:p>
+          <a:p>
+            <a:pPr algn="l">
+              <a:spcAft>
+                <a:spcPts val="1000"/>
+              </a:spcAft>
+            </a:pPr>
+            <a:r>
+              <a:rPr sz="1700" b="0">
+                <a:solidFill>
+                  <a:srgbClr val="222222"/>
+                </a:solidFill>
+                <a:latin typeface="맑은 고딕"/>
+              </a:rPr>
+              <a:t>•  함께 볼 대상 네 가지: 양쪽 ORL과 SRL</a:t>
             </a:r>
           </a:p>
         </p:txBody>
@@ -9929,7 +10895,7 @@
                 </a:solidFill>
                 <a:latin typeface="맑은 고딕"/>
               </a:rPr>
-              <a:t>이 장의 실측 중 실제로 일어난 일</a:t>
+              <a:t>Standby에서 로그 그룹 추가와 삭제</a:t>
             </a:r>
           </a:p>
         </p:txBody>
@@ -9968,7 +10934,7 @@
                 </a:solidFill>
                 <a:latin typeface="맑은 고딕"/>
               </a:rPr>
-              <a:t>재현하지 않는다</a:t>
+              <a:t>적용 중지와 MANUAL이 전제</a:t>
             </a:r>
           </a:p>
         </p:txBody>
@@ -10007,7 +10973,7 @@
                 </a:solidFill>
                 <a:latin typeface="맑은 고딕"/>
               </a:rPr>
-              <a:t>•  `ORA-01623`으로 그룹 삭제가 거부됐다</a:t>
+              <a:t>•  적용 중지 → MANUAL 전환</a:t>
             </a:r>
           </a:p>
           <a:p>
@@ -10023,7 +10989,7 @@
                 </a:solidFill>
                 <a:latin typeface="맑은 고딕"/>
               </a:rPr>
-              <a:t>•  그 직후 `rm -f`로 CURRENT 리두 파일을 지웠다</a:t>
+              <a:t>•  추가: Primary와 같은 크기로 ADD LOGFILE</a:t>
             </a:r>
           </a:p>
           <a:p>
@@ -10039,7 +11005,7 @@
                 </a:solidFill>
                 <a:latin typeface="맑은 고딕"/>
               </a:rPr>
-              <a:t>•  **직후에는 아무 일도 일어나지 않았다**</a:t>
+              <a:t>•  삭제: CLEAR LOGFILE GROUP n 후 DROP</a:t>
             </a:r>
           </a:p>
           <a:p>
@@ -10055,7 +11021,23 @@
                 </a:solidFill>
                 <a:latin typeface="맑은 고딕"/>
               </a:rPr>
-              <a:t>•  다음 로그 전환에서 인스턴스가 죽었다</a:t>
+              <a:t>•  CURRENT, CLEARING_CURRENT 그룹은 전환 뒤 삭제</a:t>
+            </a:r>
+          </a:p>
+          <a:p>
+            <a:pPr algn="l">
+              <a:spcAft>
+                <a:spcPts val="1000"/>
+              </a:spcAft>
+            </a:pPr>
+            <a:r>
+              <a:rPr sz="1700" b="0">
+                <a:solidFill>
+                  <a:srgbClr val="222222"/>
+                </a:solidFill>
+                <a:latin typeface="맑은 고딕"/>
+              </a:rPr>
+              <a:t>•  AUTO 복귀 → 적용 재기동</a:t>
             </a:r>
           </a:p>
         </p:txBody>
@@ -10156,7 +11138,7 @@
                 </a:solidFill>
                 <a:latin typeface="맑은 고딕"/>
               </a:rPr>
-              <a:t>죽는 순서</a:t>
+              <a:t>로그 작업에서 만나는 오류</a:t>
             </a:r>
           </a:p>
         </p:txBody>
@@ -10195,7 +11177,7 @@
                 </a:solidFill>
                 <a:latin typeface="맑은 고딕"/>
               </a:rPr>
-              <a:t>PMON이 인스턴스를 죽인다</a:t>
+              <a:t>대부분 상태를 알려 주는 오류</a:t>
             </a:r>
           </a:p>
         </p:txBody>
@@ -10234,7 +11216,7 @@
                 </a:solidFill>
                 <a:latin typeface="맑은 고딕"/>
               </a:rPr>
-              <a:t>•  `ORA-27041: unable to open file` (Linux Error 2)</a:t>
+              <a:t>•  ORA-01275: AUTO 상태에서 로그 작업</a:t>
             </a:r>
           </a:p>
           <a:p>
@@ -10250,7 +11232,7 @@
                 </a:solidFill>
                 <a:latin typeface="맑은 고딕"/>
               </a:rPr>
-              <a:t>•  `ORA-00313: open failed for members of log group 8`</a:t>
+              <a:t>•  ORA-01623: CURRENT 그룹 삭제 시도</a:t>
             </a:r>
           </a:p>
           <a:p>
@@ -10266,7 +11248,7 @@
                 </a:solidFill>
                 <a:latin typeface="맑은 고딕"/>
               </a:rPr>
-              <a:t>•  LG01 프로세스 사망</a:t>
+              <a:t>•  ORA-01624: ACTIVE 그룹, 체크포인트 후 재시도</a:t>
             </a:r>
           </a:p>
           <a:p>
@@ -10282,7 +11264,23 @@
                 </a:solidFill>
                 <a:latin typeface="맑은 고딕"/>
               </a:rPr>
-              <a:t>•  **PMON이 인스턴스를 종료** → 세션에는 `ORA-03113`</a:t>
+              <a:t>•  ORA-00359: 이미 없는 그룹, 조치 불필요</a:t>
+            </a:r>
+          </a:p>
+          <a:p>
+            <a:pPr algn="l">
+              <a:spcAft>
+                <a:spcPts val="1000"/>
+              </a:spcAft>
+            </a:pPr>
+            <a:r>
+              <a:rPr sz="1700" b="0">
+                <a:solidFill>
+                  <a:srgbClr val="222222"/>
+                </a:solidFill>
+                <a:latin typeface="맑은 고딕"/>
+              </a:rPr>
+              <a:t>•  ORA-01156: 적용이 도는 중에 로그 작업</a:t>
             </a:r>
           </a:p>
         </p:txBody>
@@ -10383,7 +11381,7 @@
                 </a:solidFill>
                 <a:latin typeface="맑은 고딕"/>
               </a:rPr>
-              <a:t>이 장의 구성 (Agenda)</a:t>
+              <a:t>Agenda</a:t>
             </a:r>
           </a:p>
         </p:txBody>
@@ -10422,7 +11420,7 @@
                 </a:solidFill>
                 <a:latin typeface="맑은 고딕"/>
               </a:rPr>
-              <a:t>•  8.2  STANDBY_FILE_MANAGEMENT</a:t>
+              <a:t>•  8.2  구조 변경이 Standby에 전달되는 원리</a:t>
             </a:r>
           </a:p>
           <a:p>
@@ -10438,7 +11436,7 @@
                 </a:solidFill>
                 <a:latin typeface="맑은 고딕"/>
               </a:rPr>
-              <a:t>•  8.3  자동 반영 — 무엇이 되는가</a:t>
+              <a:t>•  8.3  STANDBY_FILE_MANAGEMENT와 파일 이름 결정</a:t>
             </a:r>
           </a:p>
           <a:p>
@@ -10454,7 +11452,7 @@
                 </a:solidFill>
                 <a:latin typeface="맑은 고딕"/>
               </a:rPr>
-              <a:t>•  8.4  MANUAL이면 무슨 일이 일어나는가</a:t>
+              <a:t>•  8.4  테이블스페이스와 데이터 파일 변경  /  8.5  UNNAMED 파일과 복구</a:t>
             </a:r>
           </a:p>
           <a:p>
@@ -10470,7 +11468,7 @@
                 </a:solidFill>
                 <a:latin typeface="맑은 고딕"/>
               </a:rPr>
-              <a:t>•  8.5  복구 절차</a:t>
+              <a:t>•  8.6  온라인 리두 로그와 Standby Redo Log</a:t>
             </a:r>
           </a:p>
           <a:p>
@@ -10486,7 +11484,7 @@
                 </a:solidFill>
                 <a:latin typeface="맑은 고딕"/>
               </a:rPr>
-              <a:t>•  8.6  PDB 추가와 삭제</a:t>
+              <a:t>•  8.7  멀티테넌트 환경의 PDB 변경  /  8.8  NOLOGGING 작업</a:t>
             </a:r>
           </a:p>
           <a:p>
@@ -10502,39 +11500,7 @@
                 </a:solidFill>
                 <a:latin typeface="맑은 고딕"/>
               </a:rPr>
-              <a:t>•  8.7  반영되지 않는 것 — 온라인 리두 로그</a:t>
-            </a:r>
-          </a:p>
-          <a:p>
-            <a:pPr algn="l">
-              <a:spcAft>
-                <a:spcPts val="1000"/>
-              </a:spcAft>
-            </a:pPr>
-            <a:r>
-              <a:rPr sz="1600" b="0">
-                <a:solidFill>
-                  <a:srgbClr val="222222"/>
-                </a:solidFill>
-                <a:latin typeface="맑은 고딕"/>
-              </a:rPr>
-              <a:t>•  8.8  리두 파일 작업에서 만나는 오류</a:t>
-            </a:r>
-          </a:p>
-          <a:p>
-            <a:pPr algn="l">
-              <a:spcAft>
-                <a:spcPts val="1000"/>
-              </a:spcAft>
-            </a:pPr>
-            <a:r>
-              <a:rPr sz="1600" b="0">
-                <a:solidFill>
-                  <a:srgbClr val="222222"/>
-                </a:solidFill>
-                <a:latin typeface="맑은 고딕"/>
-              </a:rPr>
-              <a:t>•  8.9  사고 사례 — CURRENT 리두 파일 삭제</a:t>
+              <a:t>•  8.9  리두로 전달되지 않는 것  /  8.10  운영 시 주의점</a:t>
             </a:r>
           </a:p>
         </p:txBody>
@@ -10635,7 +11601,7 @@
                 </a:solidFill>
                 <a:latin typeface="맑은 고딕"/>
               </a:rPr>
-              <a:t>왜 복구할 수 없었나</a:t>
+              <a:t>로그 그룹을 지워도 파일은 남는다</a:t>
             </a:r>
           </a:p>
         </p:txBody>
@@ -10674,7 +11640,7 @@
                 </a:solidFill>
                 <a:latin typeface="맑은 고딕"/>
               </a:rPr>
-              <a:t>ASYNC의 대가</a:t>
+              <a:t>순서를 바꾸면 인스턴스가 내려간다</a:t>
             </a:r>
           </a:p>
         </p:txBody>
@@ -10713,7 +11679,7 @@
                 </a:solidFill>
                 <a:latin typeface="맑은 고딕"/>
               </a:rPr>
-              <a:t>•  `CLEAR UNARCHIVED LOGFILE` → `ORA-01624` (크래시 복구에 필요)</a:t>
+              <a:t>•  비OMF DROP LOGFILE은 OS 파일을 지우지 않음</a:t>
             </a:r>
           </a:p>
           <a:p>
@@ -10729,7 +11695,7 @@
                 </a:solidFill>
                 <a:latin typeface="맑은 고딕"/>
               </a:rPr>
-              <a:t>•  Standby의 SRL을 가져와 적용 → 필요 SCN **2513532 → 2513652 전진**</a:t>
+              <a:t>•  삭제 성공 확인 전에 OS 파일부터 지우면 위험</a:t>
             </a:r>
           </a:p>
           <a:p>
@@ -10745,7 +11711,7 @@
                 </a:solidFill>
                 <a:latin typeface="맑은 고딕"/>
               </a:rPr>
-              <a:t>•  그래도 부족하다</a:t>
+              <a:t>•  CURRENT 그룹 파일이면 다음 전환에서 인스턴스 종료</a:t>
             </a:r>
           </a:p>
           <a:p>
@@ -10761,7 +11727,7 @@
                 </a:solidFill>
                 <a:latin typeface="맑은 고딕"/>
               </a:rPr>
-              <a:t>•  **MAXIMUM PERFORMANCE = ASYNC** — 보내지 못한 리두 꼬리가 있었다</a:t>
+              <a:t>•  순서: DB에서 제거 → 조회 확인 → 옮겨 두기</a:t>
             </a:r>
           </a:p>
         </p:txBody>
@@ -10793,7 +11759,7 @@
         <p:spPr>
           <a:xfrm>
             <a:off x="0" y="0"/>
-            <a:ext cx="12191695" cy="1005840"/>
+            <a:ext cx="12191695" cy="6858000"/>
           </a:xfrm>
           <a:prstGeom prst="rect">
             <a:avLst/>
@@ -10836,8 +11802,8 @@
         </p:nvSpPr>
         <p:spPr>
           <a:xfrm>
-            <a:off x="548640" y="91440"/>
-            <a:ext cx="10972800" cy="777240"/>
+            <a:off x="822960" y="2011680"/>
+            <a:ext cx="10515600" cy="1097280"/>
           </a:xfrm>
           <a:prstGeom prst="rect">
             <a:avLst/>
@@ -10856,13 +11822,13 @@
               </a:spcAft>
             </a:pPr>
             <a:r>
-              <a:rPr sz="2600" b="1">
+              <a:rPr sz="4000" b="1">
                 <a:solidFill>
                   <a:srgbClr val="FFFFFF"/>
                 </a:solidFill>
                 <a:latin typeface="맑은 고딕"/>
               </a:rPr>
-              <a:t>교훈과 표준 순서</a:t>
+              <a:t>8.7</a:t>
             </a:r>
           </a:p>
         </p:txBody>
@@ -10875,8 +11841,8 @@
         </p:nvSpPr>
         <p:spPr>
           <a:xfrm>
-            <a:off x="640080" y="1078992"/>
-            <a:ext cx="10881360" cy="457200"/>
+            <a:off x="822960" y="3017520"/>
+            <a:ext cx="10515600" cy="914400"/>
           </a:xfrm>
           <a:prstGeom prst="rect">
             <a:avLst/>
@@ -10895,27 +11861,71 @@
               </a:spcAft>
             </a:pPr>
             <a:r>
-              <a:rPr sz="1500" b="0">
-                <a:solidFill>
-                  <a:srgbClr val="5A6672"/>
-                </a:solidFill>
-                <a:latin typeface="맑은 고딕"/>
-              </a:rPr>
-              <a:t>mv는 되돌릴 수 있다</a:t>
-            </a:r>
-          </a:p>
-        </p:txBody>
-      </p:sp>
-      <p:sp>
-        <p:nvSpPr>
-          <p:cNvPr id="5" name="TextBox 4"/>
+              <a:rPr sz="2800" b="1">
+                <a:solidFill>
+                  <a:srgbClr val="FFFFFF"/>
+                </a:solidFill>
+                <a:latin typeface="맑은 고딕"/>
+              </a:rPr>
+              <a:t>멀티테넌트 환경의 PDB 변경</a:t>
+            </a:r>
+          </a:p>
+        </p:txBody>
+      </p:sp>
+      <p:sp>
+        <p:nvSpPr>
+          <p:cNvPr id="5" name="Rectangle 4"/>
+          <p:cNvSpPr/>
+          <p:nvPr/>
+        </p:nvSpPr>
+        <p:spPr>
+          <a:xfrm>
+            <a:off x="822960" y="4114800"/>
+            <a:ext cx="5486400" cy="54864"/>
+          </a:xfrm>
+          <a:prstGeom prst="rect">
+            <a:avLst/>
+          </a:prstGeom>
+          <a:solidFill>
+            <a:srgbClr val="FFFFFF"/>
+          </a:solidFill>
+          <a:ln>
+            <a:noFill/>
+          </a:ln>
+          <a:effectLst/>
+        </p:spPr>
+        <p:style>
+          <a:lnRef idx="1">
+            <a:schemeClr val="accent1"/>
+          </a:lnRef>
+          <a:fillRef idx="3">
+            <a:schemeClr val="accent1"/>
+          </a:fillRef>
+          <a:effectRef idx="2">
+            <a:schemeClr val="accent1"/>
+          </a:effectRef>
+          <a:fontRef idx="minor">
+            <a:schemeClr val="lt1"/>
+          </a:fontRef>
+        </p:style>
+        <p:txBody>
+          <a:bodyPr rtlCol="0" anchor="ctr"/>
+          <a:lstStyle/>
+          <a:p>
+            <a:pPr algn="ctr"/>
+          </a:p>
+        </p:txBody>
+      </p:sp>
+      <p:sp>
+        <p:nvSpPr>
+          <p:cNvPr id="6" name="TextBox 5"/>
           <p:cNvSpPr txBox="1"/>
           <p:nvPr/>
         </p:nvSpPr>
         <p:spPr>
           <a:xfrm>
-            <a:off x="640080" y="1737360"/>
-            <a:ext cx="10881360" cy="4754880"/>
+            <a:off x="822960" y="4297680"/>
+            <a:ext cx="10058400" cy="2011680"/>
           </a:xfrm>
           <a:prstGeom prst="rect">
             <a:avLst/>
@@ -10930,65 +11940,49 @@
           <a:p>
             <a:pPr algn="l">
               <a:spcAft>
-                <a:spcPts val="1000"/>
-              </a:spcAft>
-            </a:pPr>
-            <a:r>
-              <a:rPr sz="1700" b="0">
-                <a:solidFill>
-                  <a:srgbClr val="222222"/>
-                </a:solidFill>
-                <a:latin typeface="맑은 고딕"/>
-              </a:rPr>
-              <a:t>•  **① DB에서 먼저 제거** — 실패하면 원인을 해결한다. 우회하지 않는다</a:t>
-            </a:r>
-          </a:p>
-          <a:p>
-            <a:pPr algn="l">
-              <a:spcAft>
-                <a:spcPts val="1000"/>
-              </a:spcAft>
-            </a:pPr>
-            <a:r>
-              <a:rPr sz="1700" b="0">
-                <a:solidFill>
-                  <a:srgbClr val="222222"/>
-                </a:solidFill>
-                <a:latin typeface="맑은 고딕"/>
-              </a:rPr>
-              <a:t>•  **② 조회로 확인** — `no rows selected`를 눈으로 본다</a:t>
-            </a:r>
-          </a:p>
-          <a:p>
-            <a:pPr algn="l">
-              <a:spcAft>
-                <a:spcPts val="1000"/>
-              </a:spcAft>
-            </a:pPr>
-            <a:r>
-              <a:rPr sz="1700" b="0">
-                <a:solidFill>
-                  <a:srgbClr val="222222"/>
-                </a:solidFill>
-                <a:latin typeface="맑은 고딕"/>
-              </a:rPr>
-              <a:t>•  **③ 파일은 `mv`로 정리** — 며칠 뒤 지운다</a:t>
-            </a:r>
-          </a:p>
-          <a:p>
-            <a:pPr algn="l">
-              <a:spcAft>
-                <a:spcPts val="1000"/>
-              </a:spcAft>
-            </a:pPr>
-            <a:r>
-              <a:rPr sz="1700" b="0">
-                <a:solidFill>
-                  <a:srgbClr val="222222"/>
-                </a:solidFill>
-                <a:latin typeface="맑은 고딕"/>
-              </a:rPr>
-              <a:t>•  실습 05의 `rmdir`도 같은 원칙</a:t>
+                <a:spcPts val="800"/>
+              </a:spcAft>
+            </a:pPr>
+            <a:r>
+              <a:rPr sz="1600" b="0">
+                <a:solidFill>
+                  <a:srgbClr val="FFFFFF"/>
+                </a:solidFill>
+                <a:latin typeface="맑은 고딕"/>
+              </a:rPr>
+              <a:t>•  PDB 생성 방법별 파일 확보</a:t>
+            </a:r>
+          </a:p>
+          <a:p>
+            <a:pPr algn="l">
+              <a:spcAft>
+                <a:spcPts val="800"/>
+              </a:spcAft>
+            </a:pPr>
+            <a:r>
+              <a:rPr sz="1600" b="0">
+                <a:solidFill>
+                  <a:srgbClr val="FFFFFF"/>
+                </a:solidFill>
+                <a:latin typeface="맑은 고딕"/>
+              </a:rPr>
+              <a:t>•  ENABLED_PDBS_ON_STANDBY와 STANDBYS 절</a:t>
+            </a:r>
+          </a:p>
+          <a:p>
+            <a:pPr algn="l">
+              <a:spcAft>
+                <a:spcPts val="800"/>
+              </a:spcAft>
+            </a:pPr>
+            <a:r>
+              <a:rPr sz="1600" b="0">
+                <a:solidFill>
+                  <a:srgbClr val="FFFFFF"/>
+                </a:solidFill>
+                <a:latin typeface="맑은 고딕"/>
+              </a:rPr>
+              <a:t>•  제외된 PDB와 PDB 삭제</a:t>
             </a:r>
           </a:p>
         </p:txBody>
@@ -11089,7 +12083,7 @@
                 </a:solidFill>
                 <a:latin typeface="맑은 고딕"/>
               </a:rPr>
-              <a:t>자동과 수동의 경계</a:t>
+              <a:t>PDB 생성이 전달되는 방식</a:t>
             </a:r>
           </a:p>
         </p:txBody>
@@ -11128,7 +12122,7 @@
                 </a:solidFill>
                 <a:latin typeface="맑은 고딕"/>
               </a:rPr>
-              <a:t>한 장으로 정리</a:t>
+              <a:t>파일을 어디서 얻느냐가 갈림길</a:t>
             </a:r>
           </a:p>
         </p:txBody>
@@ -11167,7 +12161,7 @@
                 </a:solidFill>
                 <a:latin typeface="맑은 고딕"/>
               </a:rPr>
-              <a:t>•  자동 : 테이블스페이스 · 데이터 파일 · resize · PDB (디렉터리 포함)</a:t>
+              <a:t>•  같은 CON_ID, 같은 GUID로 Standby에 등록</a:t>
             </a:r>
           </a:p>
           <a:p>
@@ -11183,7 +12177,7 @@
                 </a:solidFill>
                 <a:latin typeface="맑은 고딕"/>
               </a:rPr>
-              <a:t>•  수동 : 온라인 리두 로그 그룹 · SRL</a:t>
+              <a:t>•  시드에서 생성: Standby의 PDB$SEED 복사, 자동</a:t>
             </a:r>
           </a:p>
           <a:p>
@@ -11199,7 +12193,7 @@
                 </a:solidFill>
                 <a:latin typeface="맑은 고딕"/>
               </a:rPr>
-              <a:t>•  불가 : Standby에서 직접 만들기 (ORA-16000)</a:t>
+              <a:t>•  로컬 클론: Standby의 원본 PDB 복사</a:t>
             </a:r>
           </a:p>
           <a:p>
@@ -11215,7 +12209,23 @@
                 </a:solidFill>
                 <a:latin typeface="맑은 고딕"/>
               </a:rPr>
-              <a:t>•  조건 : Standby의 `STANDBY_FILE_MANAGEMENT` = AUTO</a:t>
+              <a:t>•  원격 클론, XML 플러그인: 원본이 Standby에 없음</a:t>
+            </a:r>
+          </a:p>
+          <a:p>
+            <a:pPr algn="l">
+              <a:spcAft>
+                <a:spcPts val="1000"/>
+              </a:spcAft>
+            </a:pPr>
+            <a:r>
+              <a:rPr sz="1700" b="0">
+                <a:solidFill>
+                  <a:srgbClr val="222222"/>
+                </a:solidFill>
+                <a:latin typeface="맑은 고딕"/>
+              </a:rPr>
+              <a:t>•  새 PDB는 Standby에서 MOUNTED로 시작</a:t>
             </a:r>
           </a:p>
         </p:txBody>
@@ -11316,7 +12326,7 @@
                 </a:solidFill>
                 <a:latin typeface="맑은 고딕"/>
               </a:rPr>
-              <a:t>이 장이 남기는 습관</a:t>
+              <a:t>18c의 자동 복사 파라미터</a:t>
             </a:r>
           </a:p>
         </p:txBody>
@@ -11355,7 +12365,7 @@
                 </a:solidFill>
                 <a:latin typeface="맑은 고딕"/>
               </a:rPr>
-              <a:t>세 가지</a:t>
+              <a:t>원격 클론과 플러그인의 수작업 줄이기</a:t>
             </a:r>
           </a:p>
         </p:txBody>
@@ -11394,7 +12404,7 @@
                 </a:solidFill>
                 <a:latin typeface="맑은 고딕"/>
               </a:rPr>
-              <a:t>•  확인은 **Standby에서** 한다 — 파라미터도 상태도</a:t>
+              <a:t>•  12c: Primary 생성 전에 Standby에 파일 직접 복사</a:t>
             </a:r>
           </a:p>
           <a:p>
@@ -11410,7 +12420,7 @@
                 </a:solidFill>
                 <a:latin typeface="맑은 고딕"/>
               </a:rPr>
-              <a:t>•  오류를 **우회하지 않는다** — 오류는 위험 신호다</a:t>
+              <a:t>•  STANDBY_PDB_SOURCE_FILE_DIRECTORY: 플러그인 파일 위치</a:t>
             </a:r>
           </a:p>
           <a:p>
@@ -11426,7 +12436,39 @@
                 </a:solidFill>
                 <a:latin typeface="맑은 고딕"/>
               </a:rPr>
-              <a:t>•  지울 때는 **되돌릴 수 있게** — `mv`와 `rmdir`</a:t>
+              <a:t>•  STANDBY_PDB_SOURCE_FILE_DBLINK: 원격 클론 원본 링크</a:t>
+            </a:r>
+          </a:p>
+          <a:p>
+            <a:pPr algn="l">
+              <a:spcAft>
+                <a:spcPts val="1000"/>
+              </a:spcAft>
+            </a:pPr>
+            <a:r>
+              <a:rPr sz="1700" b="0">
+                <a:solidFill>
+                  <a:srgbClr val="222222"/>
+                </a:solidFill>
+                <a:latin typeface="맑은 고딕"/>
+              </a:rPr>
+              <a:t>•  DB 링크는 원본 PDB를 가리키고 원본이 READ ONLY여야 함</a:t>
+            </a:r>
+          </a:p>
+          <a:p>
+            <a:pPr algn="l">
+              <a:spcAft>
+                <a:spcPts val="1000"/>
+              </a:spcAft>
+            </a:pPr>
+            <a:r>
+              <a:rPr sz="1700" b="0">
+                <a:solidFill>
+                  <a:srgbClr val="222222"/>
+                </a:solidFill>
+                <a:latin typeface="맑은 고딕"/>
+              </a:rPr>
+              <a:t>•  조건이 안 맞으면 여전히 수동 복사</a:t>
             </a:r>
           </a:p>
         </p:txBody>
@@ -11527,7 +12569,7 @@
                 </a:solidFill>
                 <a:latin typeface="맑은 고딕"/>
               </a:rPr>
-              <a:t>퀴즈 (Quiz)</a:t>
+              <a:t>ENABLED_PDBS_ON_STANDBY</a:t>
             </a:r>
           </a:p>
         </p:txBody>
@@ -11540,8 +12582,8 @@
         </p:nvSpPr>
         <p:spPr>
           <a:xfrm>
-            <a:off x="640080" y="1371600"/>
-            <a:ext cx="10881360" cy="5120640"/>
+            <a:off x="640080" y="1078992"/>
+            <a:ext cx="10881360" cy="457200"/>
           </a:xfrm>
           <a:prstGeom prst="rect">
             <a:avLst/>
@@ -11556,97 +12598,120 @@
           <a:p>
             <a:pPr algn="l">
               <a:spcAft>
-                <a:spcPts val="1000"/>
-              </a:spcAft>
-            </a:pPr>
-            <a:r>
-              <a:rPr sz="1600" b="0">
-                <a:solidFill>
-                  <a:srgbClr val="222222"/>
-                </a:solidFill>
-                <a:latin typeface="맑은 고딕"/>
-              </a:rPr>
-              <a:t>•  Q1. `STANDBY_FILE_MANAGEMENT`를 확인할 때 어느 쪽에서 조회해야 하며 그 이유는?</a:t>
-            </a:r>
-          </a:p>
-          <a:p>
-            <a:pPr algn="l">
-              <a:spcAft>
-                <a:spcPts val="1000"/>
-              </a:spcAft>
-            </a:pPr>
-            <a:r>
-              <a:rPr sz="1600" b="0">
-                <a:solidFill>
-                  <a:srgbClr val="222222"/>
-                </a:solidFill>
-                <a:latin typeface="맑은 고딕"/>
-              </a:rPr>
-              <a:t>•  Q2. Primary와 Standby의 파일 이름이 다른데도 문제가 없는 이유는?</a:t>
-            </a:r>
-          </a:p>
-          <a:p>
-            <a:pPr algn="l">
-              <a:spcAft>
-                <a:spcPts val="1000"/>
-              </a:spcAft>
-            </a:pPr>
-            <a:r>
-              <a:rPr sz="1600" b="0">
-                <a:solidFill>
-                  <a:srgbClr val="222222"/>
-                </a:solidFill>
-                <a:latin typeface="맑은 고딕"/>
-              </a:rPr>
-              <a:t>•  Q3. `UNNAMED00016`이 만들어지는 조건과 ORA-1274가 ORA-1111로 바뀌는 것의 의미는?</a:t>
-            </a:r>
-          </a:p>
-          <a:p>
-            <a:pPr algn="l">
-              <a:spcAft>
-                <a:spcPts val="1000"/>
-              </a:spcAft>
-            </a:pPr>
-            <a:r>
-              <a:rPr sz="1600" b="0">
-                <a:solidFill>
-                  <a:srgbClr val="222222"/>
-                </a:solidFill>
-                <a:latin typeface="맑은 고딕"/>
-              </a:rPr>
-              <a:t>•  Q4. `AS NEW`가 올바른 이름과 크기의 파일을 만들 수 있는 근거는?</a:t>
-            </a:r>
-          </a:p>
-          <a:p>
-            <a:pPr algn="l">
-              <a:spcAft>
-                <a:spcPts val="1000"/>
-              </a:spcAft>
-            </a:pPr>
-            <a:r>
-              <a:rPr sz="1600" b="0">
-                <a:solidFill>
-                  <a:srgbClr val="222222"/>
-                </a:solidFill>
-                <a:latin typeface="맑은 고딕"/>
-              </a:rPr>
-              <a:t>•  Q5. PDB를 지운 뒤 Standby에 남는 것은 무엇이며 어떻게 정리하는가?</a:t>
-            </a:r>
-          </a:p>
-          <a:p>
-            <a:pPr algn="l">
-              <a:spcAft>
-                <a:spcPts val="1000"/>
-              </a:spcAft>
-            </a:pPr>
-            <a:r>
-              <a:rPr sz="1600" b="0">
-                <a:solidFill>
-                  <a:srgbClr val="222222"/>
-                </a:solidFill>
-                <a:latin typeface="맑은 고딕"/>
-              </a:rPr>
-              <a:t>•  Q6. 온라인 리두 그룹 추가가 반영되지 않는 이유와, 그것이 언제 문제가 되는가?</a:t>
+                <a:spcPts val="600"/>
+              </a:spcAft>
+            </a:pPr>
+            <a:r>
+              <a:rPr sz="1500" b="0">
+                <a:solidFill>
+                  <a:srgbClr val="5A6672"/>
+                </a:solidFill>
+                <a:latin typeface="맑은 고딕"/>
+              </a:rPr>
+              <a:t>Standby마다 복제할 PDB 고르기</a:t>
+            </a:r>
+          </a:p>
+        </p:txBody>
+      </p:sp>
+      <p:sp>
+        <p:nvSpPr>
+          <p:cNvPr id="5" name="TextBox 4"/>
+          <p:cNvSpPr txBox="1"/>
+          <p:nvPr/>
+        </p:nvSpPr>
+        <p:spPr>
+          <a:xfrm>
+            <a:off x="640080" y="1737360"/>
+            <a:ext cx="10881360" cy="4754880"/>
+          </a:xfrm>
+          <a:prstGeom prst="rect">
+            <a:avLst/>
+          </a:prstGeom>
+          <a:noFill/>
+        </p:spPr>
+        <p:txBody>
+          <a:bodyPr wrap="square">
+            <a:spAutoFit/>
+          </a:bodyPr>
+          <a:lstStyle/>
+          <a:p>
+            <a:pPr algn="l">
+              <a:spcAft>
+                <a:spcPts val="1000"/>
+              </a:spcAft>
+            </a:pPr>
+            <a:r>
+              <a:rPr sz="1700" b="0">
+                <a:solidFill>
+                  <a:srgbClr val="222222"/>
+                </a:solidFill>
+                <a:latin typeface="맑은 고딕"/>
+              </a:rPr>
+              <a:t>•  Standby에 설정, Primary에서는 무시</a:t>
+            </a:r>
+          </a:p>
+          <a:p>
+            <a:pPr algn="l">
+              <a:spcAft>
+                <a:spcPts val="1000"/>
+              </a:spcAft>
+            </a:pPr>
+            <a:r>
+              <a:rPr sz="1700" b="0">
+                <a:solidFill>
+                  <a:srgbClr val="222222"/>
+                </a:solidFill>
+                <a:latin typeface="맑은 고딕"/>
+              </a:rPr>
+              <a:t>•  미지정이면 모든 PDB("*")</a:t>
+            </a:r>
+          </a:p>
+          <a:p>
+            <a:pPr algn="l">
+              <a:spcAft>
+                <a:spcPts val="1000"/>
+              </a:spcAft>
+            </a:pPr>
+            <a:r>
+              <a:rPr sz="1700" b="0">
+                <a:solidFill>
+                  <a:srgbClr val="222222"/>
+                </a:solidFill>
+                <a:latin typeface="맑은 고딕"/>
+              </a:rPr>
+              <a:t>•  와일드카드 *, 앞에 -를 붙이면 제외</a:t>
+            </a:r>
+          </a:p>
+          <a:p>
+            <a:pPr algn="l">
+              <a:spcAft>
+                <a:spcPts val="1000"/>
+              </a:spcAft>
+            </a:pPr>
+            <a:r>
+              <a:rPr sz="1700" b="0">
+                <a:solidFill>
+                  <a:srgbClr val="222222"/>
+                </a:solidFill>
+                <a:latin typeface="맑은 고딕"/>
+              </a:rPr>
+              <a:t>•  여러 패턴이 겹치면 오른쪽이 우선</a:t>
+            </a:r>
+          </a:p>
+          <a:p>
+            <a:pPr algn="l">
+              <a:spcAft>
+                <a:spcPts val="1000"/>
+              </a:spcAft>
+            </a:pPr>
+            <a:r>
+              <a:rPr sz="1700" b="0">
+                <a:solidFill>
+                  <a:srgbClr val="222222"/>
+                </a:solidFill>
+                <a:latin typeface="맑은 고딕"/>
+              </a:rPr>
+              <a:t>•  Primary 쪽 선택: CREATE PLUGGABLE DATABASE ... STANDBYS</a:t>
             </a:r>
           </a:p>
         </p:txBody>
@@ -11747,7 +12812,7 @@
                 </a:solidFill>
                 <a:latin typeface="맑은 고딕"/>
               </a:rPr>
-              <a:t>요약 (Summary)</a:t>
+              <a:t>제외된 PDB와 나중에 포함하기</a:t>
             </a:r>
           </a:p>
         </p:txBody>
@@ -11760,8 +12825,8 @@
         </p:nvSpPr>
         <p:spPr>
           <a:xfrm>
-            <a:off x="640080" y="1371600"/>
-            <a:ext cx="10881360" cy="5120640"/>
+            <a:off x="640080" y="1078992"/>
+            <a:ext cx="10881360" cy="457200"/>
           </a:xfrm>
           <a:prstGeom prst="rect">
             <a:avLst/>
@@ -11776,321 +12841,120 @@
           <a:p>
             <a:pPr algn="l">
               <a:spcAft>
-                <a:spcPts val="1000"/>
-              </a:spcAft>
-            </a:pPr>
-            <a:r>
-              <a:rPr sz="1600" b="0">
-                <a:solidFill>
-                  <a:srgbClr val="222222"/>
-                </a:solidFill>
-                <a:latin typeface="맑은 고딕"/>
-              </a:rPr>
-              <a:t>•  `STANDBY_FILE_MANAGEMENT`는 Standby 쪽 값이 동작을 결정한다. Primary에서 확인하고 안심하면 안 된다.</a:t>
-            </a:r>
-          </a:p>
-          <a:p>
-            <a:pPr algn="l">
-              <a:spcAft>
-                <a:spcPts val="1000"/>
-              </a:spcAft>
-            </a:pPr>
-            <a:r>
-              <a:rPr sz="1600" b="0">
-                <a:solidFill>
-                  <a:srgbClr val="222222"/>
-                </a:solidFill>
-                <a:latin typeface="맑은 고딕"/>
-              </a:rPr>
-              <a:t>•  AUTO이면 테이블스페이스 추가·삭제, 데이터 파일 추가, 크기 변경이 모두 자동 반영된다.</a:t>
-            </a:r>
-          </a:p>
-          <a:p>
-            <a:pPr algn="l">
-              <a:spcAft>
-                <a:spcPts val="1000"/>
-              </a:spcAft>
-            </a:pPr>
-            <a:r>
-              <a:rPr sz="1600" b="0">
-                <a:solidFill>
-                  <a:srgbClr val="222222"/>
-                </a:solidFill>
-                <a:latin typeface="맑은 고딕"/>
-              </a:rPr>
-              <a:t>•  비대칭 구성에서 이름은 각자 규칙을 따른다. Primary `dg_ts1_01.dbf` / Standby `o1_mf_dg_ts1_o8z7v7lh_.dbf`.</a:t>
-            </a:r>
-          </a:p>
-          <a:p>
-            <a:pPr algn="l">
-              <a:spcAft>
-                <a:spcPts val="1000"/>
-              </a:spcAft>
-            </a:pPr>
-            <a:r>
-              <a:rPr sz="1600" b="0">
-                <a:solidFill>
-                  <a:srgbClr val="222222"/>
-                </a:solidFill>
-                <a:latin typeface="맑은 고딕"/>
-              </a:rPr>
-              <a:t>•  대응 관계를 유지하는 것은 이름이 아니라 파일 번호다. 실측에서 양쪽 모두 14번이었다.</a:t>
-            </a:r>
-          </a:p>
-          <a:p>
-            <a:pPr algn="l">
-              <a:spcAft>
-                <a:spcPts val="1000"/>
-              </a:spcAft>
-            </a:pPr>
-            <a:r>
-              <a:rPr sz="1600" b="0">
-                <a:solidFill>
-                  <a:srgbClr val="222222"/>
-                </a:solidFill>
-                <a:latin typeface="맑은 고딕"/>
-              </a:rPr>
-              <a:t>•  Standby에서 직접 파일을 만들 수 없다 — ORA-16000. Standby의 파일은 리두를 통해서만 생긴다.</a:t>
-            </a:r>
-          </a:p>
-          <a:p>
-            <a:pPr algn="l">
-              <a:spcAft>
-                <a:spcPts val="1000"/>
-              </a:spcAft>
-            </a:pPr>
-            <a:r>
-              <a:rPr sz="1600" b="0">
-                <a:solidFill>
-                  <a:srgbClr val="222222"/>
-                </a:solidFill>
-                <a:latin typeface="맑은 고딕"/>
-              </a:rPr>
-              <a:t>•  MANUAL이면 `$ORACLE_HOME/dbs/UNNAMED00016`(0바이트)이 만들어지고 MRP가 죽는다. 오류는 **ORA-1274**.</a:t>
-            </a:r>
-          </a:p>
-          <a:p>
-            <a:pPr algn="l">
-              <a:spcAft>
-                <a:spcPts val="1000"/>
-              </a:spcAft>
-            </a:pPr>
-            <a:r>
-              <a:rPr sz="1600" b="0">
-                <a:solidFill>
-                  <a:srgbClr val="222222"/>
-                </a:solidFill>
-                <a:latin typeface="맑은 고딕"/>
-              </a:rPr>
-              <a:t>•  Primary 쪽에는 아무 신호가 없다. 목적지는 계속 VALID. 전송은 정상이고 적용만 안 되기 때문이다.</a:t>
-            </a:r>
-          </a:p>
-          <a:p>
-            <a:pPr algn="l">
-              <a:spcAft>
-                <a:spcPts val="1000"/>
-              </a:spcAft>
-            </a:pPr>
-            <a:r>
-              <a:rPr sz="1600" b="0">
-                <a:solidFill>
-                  <a:srgbClr val="222222"/>
-                </a:solidFill>
-                <a:latin typeface="맑은 고딕"/>
-              </a:rPr>
-              <a:t>•  AUTO로 되돌려도 저절로 고쳐지지 않는다. 오류가 **ORA-1111**로 바뀔 뿐이다.</a:t>
-            </a:r>
-          </a:p>
-          <a:p>
-            <a:pPr algn="l">
-              <a:spcAft>
-                <a:spcPts val="1000"/>
-              </a:spcAft>
-            </a:pPr>
-            <a:r>
-              <a:rPr sz="1600" b="0">
-                <a:solidFill>
-                  <a:srgbClr val="222222"/>
-                </a:solidFill>
-                <a:latin typeface="맑은 고딕"/>
-              </a:rPr>
-              <a:t>•  증거는 `V$DATAFILE.STATUS=RECOVER`와 `V$DATAFILE_HEADER.ERROR=FILE MISSING`. `V$RECOVER_FILE`은 비어 있다.</a:t>
-            </a:r>
-          </a:p>
-          <a:p>
-            <a:pPr algn="l">
-              <a:spcAft>
-                <a:spcPts val="1000"/>
-              </a:spcAft>
-            </a:pPr>
-            <a:r>
-              <a:rPr sz="1600" b="0">
-                <a:solidFill>
-                  <a:srgbClr val="222222"/>
-                </a:solidFill>
-                <a:latin typeface="맑은 고딕"/>
-              </a:rPr>
-              <a:t>•  복구는 MANUAL → `CREATE DATAFILE ... AS NEW` → AUTO → MRP 재기동 순서다.</a:t>
-            </a:r>
-          </a:p>
-          <a:p>
-            <a:pPr algn="l">
-              <a:spcAft>
-                <a:spcPts val="1000"/>
-              </a:spcAft>
-            </a:pPr>
-            <a:r>
-              <a:rPr sz="1600" b="0">
-                <a:solidFill>
-                  <a:srgbClr val="222222"/>
-                </a:solidFill>
-                <a:latin typeface="맑은 고딕"/>
-              </a:rPr>
-              <a:t>•  `AS NEW`는 리두에서 정보를 읽어 이름·크기를 맞춘다. 실측 `o1_mf_dg_ts2_o8z81hpl_.dbf` 10MB.</a:t>
-            </a:r>
-          </a:p>
-          <a:p>
-            <a:pPr algn="l">
-              <a:spcAft>
-                <a:spcPts val="1000"/>
-              </a:spcAft>
-            </a:pPr>
-            <a:r>
-              <a:rPr sz="1600" b="0">
-                <a:solidFill>
-                  <a:srgbClr val="222222"/>
-                </a:solidFill>
-                <a:latin typeface="맑은 고딕"/>
-              </a:rPr>
-              <a:t>•  파일은 빈 껍데기로 만들어지고 내용은 리두가 채운다. 실측 100행이 그대로 보였다.</a:t>
-            </a:r>
-          </a:p>
-          <a:p>
-            <a:pPr algn="l">
-              <a:spcAft>
-                <a:spcPts val="1000"/>
-              </a:spcAft>
-            </a:pPr>
-            <a:r>
-              <a:rPr sz="1600" b="0">
-                <a:solidFill>
-                  <a:srgbClr val="222222"/>
-                </a:solidFill>
-                <a:latin typeface="맑은 고딕"/>
-              </a:rPr>
-              <a:t>•  PDB 추가는 완전 자동이다. GUID 디렉터리와 datafile 디렉터리까지 만들어지고 GUID는 양쪽이 같다.</a:t>
-            </a:r>
-          </a:p>
-          <a:p>
-            <a:pPr algn="l">
-              <a:spcAft>
-                <a:spcPts val="1000"/>
-              </a:spcAft>
-            </a:pPr>
-            <a:r>
-              <a:rPr sz="1600" b="0">
-                <a:solidFill>
-                  <a:srgbClr val="222222"/>
-                </a:solidFill>
-                <a:latin typeface="맑은 고딕"/>
-              </a:rPr>
-              <a:t>•  새 PDB는 Standby에서 MOUNTED다. 열지 않으면 **ORA-01219**. 기동 스크립트에 ALL 옵션을 넣는다.</a:t>
-            </a:r>
-          </a:p>
-          <a:p>
-            <a:pPr algn="l">
-              <a:spcAft>
-                <a:spcPts val="1000"/>
-              </a:spcAft>
-            </a:pPr>
-            <a:r>
-              <a:rPr sz="1600" b="0">
-                <a:solidFill>
-                  <a:srgbClr val="222222"/>
-                </a:solidFill>
-                <a:latin typeface="맑은 고딕"/>
-              </a:rPr>
-              <a:t>•  PDB를 지우면 파일은 사라지지만 **빈 GUID 디렉터리는 남는다.** `V$PDBS`와 대조해 `rmdir`로 정리한다.</a:t>
-            </a:r>
-          </a:p>
-          <a:p>
-            <a:pPr algn="l">
-              <a:spcAft>
-                <a:spcPts val="1000"/>
-              </a:spcAft>
-            </a:pPr>
-            <a:r>
-              <a:rPr sz="1600" b="0">
-                <a:solidFill>
-                  <a:srgbClr val="222222"/>
-                </a:solidFill>
-                <a:latin typeface="맑은 고딕"/>
-              </a:rPr>
-              <a:t>•  **온라인 리두 로그 그룹 추가는 반영되지 않는다.** 오류도 경고도 없다. 역할 전환 때 구성 차이로 드러난다.</a:t>
-            </a:r>
-          </a:p>
-          <a:p>
-            <a:pPr algn="l">
-              <a:spcAft>
-                <a:spcPts val="1000"/>
-              </a:spcAft>
-            </a:pPr>
-            <a:r>
-              <a:rPr sz="1600" b="0">
-                <a:solidFill>
-                  <a:srgbClr val="222222"/>
-                </a:solidFill>
-                <a:latin typeface="맑은 고딕"/>
-              </a:rPr>
-              <a:t>•  로그 작업 오류 넷: ORA-00301(파일 존재)·ORA-00359(그룹 없음)·ORA-01623(CURRENT)·ORA-00904(V$LOG에 TYPE 없음).</a:t>
-            </a:r>
-          </a:p>
-          <a:p>
-            <a:pPr algn="l">
-              <a:spcAft>
-                <a:spcPts val="1000"/>
-              </a:spcAft>
-            </a:pPr>
-            <a:r>
-              <a:rPr sz="1600" b="0">
-                <a:solidFill>
-                  <a:srgbClr val="222222"/>
-                </a:solidFill>
-                <a:latin typeface="맑은 고딕"/>
-              </a:rPr>
-              <a:t>•  CURRENT 리두 파일을 rm으로 지우면 다음 전환에서 ORA-27041 → ORA-00313 → LG01 사망 → PMON이 인스턴스를 종료한다.</a:t>
-            </a:r>
-          </a:p>
-          <a:p>
-            <a:pPr algn="l">
-              <a:spcAft>
-                <a:spcPts val="1000"/>
-              </a:spcAft>
-            </a:pPr>
-            <a:r>
-              <a:rPr sz="1600" b="0">
-                <a:solidFill>
-                  <a:srgbClr val="222222"/>
-                </a:solidFill>
-                <a:latin typeface="맑은 고딕"/>
-              </a:rPr>
-              <a:t>•  ASYNC 환경에서는 Standby에도 마지막 리두가 없다. 보호 모드가 복구 가능성을 결정한다.</a:t>
-            </a:r>
-          </a:p>
-          <a:p>
-            <a:pPr algn="l">
-              <a:spcAft>
-                <a:spcPts val="1000"/>
-              </a:spcAft>
-            </a:pPr>
-            <a:r>
-              <a:rPr sz="1600" b="0">
-                <a:solidFill>
-                  <a:srgbClr val="222222"/>
-                </a:solidFill>
-                <a:latin typeface="맑은 고딕"/>
-              </a:rPr>
-              <a:t>•  구조 변경 표준 순서: DB에서 제거 → 조회로 확인 → 파일은 `mv`로 정리. `rm`은 되돌릴 수 없다.</a:t>
+                <a:spcPts val="600"/>
+              </a:spcAft>
+            </a:pPr>
+            <a:r>
+              <a:rPr sz="1500" b="0">
+                <a:solidFill>
+                  <a:srgbClr val="5A6672"/>
+                </a:solidFill>
+                <a:latin typeface="맑은 고딕"/>
+              </a:rPr>
+              <a:t>RECOVERY_STATUS로 구분</a:t>
+            </a:r>
+          </a:p>
+        </p:txBody>
+      </p:sp>
+      <p:sp>
+        <p:nvSpPr>
+          <p:cNvPr id="5" name="TextBox 4"/>
+          <p:cNvSpPr txBox="1"/>
+          <p:nvPr/>
+        </p:nvSpPr>
+        <p:spPr>
+          <a:xfrm>
+            <a:off x="640080" y="1737360"/>
+            <a:ext cx="10881360" cy="4754880"/>
+          </a:xfrm>
+          <a:prstGeom prst="rect">
+            <a:avLst/>
+          </a:prstGeom>
+          <a:noFill/>
+        </p:spPr>
+        <p:txBody>
+          <a:bodyPr wrap="square">
+            <a:spAutoFit/>
+          </a:bodyPr>
+          <a:lstStyle/>
+          <a:p>
+            <a:pPr algn="l">
+              <a:spcAft>
+                <a:spcPts val="1000"/>
+              </a:spcAft>
+            </a:pPr>
+            <a:r>
+              <a:rPr sz="1700" b="0">
+                <a:solidFill>
+                  <a:srgbClr val="222222"/>
+                </a:solidFill>
+                <a:latin typeface="맑은 고딕"/>
+              </a:rPr>
+              <a:t>•  제외된 PDB도 이름과 메타데이터는 등록</a:t>
+            </a:r>
+          </a:p>
+          <a:p>
+            <a:pPr algn="l">
+              <a:spcAft>
+                <a:spcPts val="1000"/>
+              </a:spcAft>
+            </a:pPr>
+            <a:r>
+              <a:rPr sz="1700" b="0">
+                <a:solidFill>
+                  <a:srgbClr val="222222"/>
+                </a:solidFill>
+                <a:latin typeface="맑은 고딕"/>
+              </a:rPr>
+              <a:t>•  데이터 파일은 OFFLINE, 리두 적용 대상에서 빠짐</a:t>
+            </a:r>
+          </a:p>
+          <a:p>
+            <a:pPr algn="l">
+              <a:spcAft>
+                <a:spcPts val="1000"/>
+              </a:spcAft>
+            </a:pPr>
+            <a:r>
+              <a:rPr sz="1700" b="0">
+                <a:solidFill>
+                  <a:srgbClr val="222222"/>
+                </a:solidFill>
+                <a:latin typeface="맑은 고딕"/>
+              </a:rPr>
+              <a:t>•  V$PDBS.RECOVERY_STATUS: ENABLED / DISABLED</a:t>
+            </a:r>
+          </a:p>
+          <a:p>
+            <a:pPr algn="l">
+              <a:spcAft>
+                <a:spcPts val="1000"/>
+              </a:spcAft>
+            </a:pPr>
+            <a:r>
+              <a:rPr sz="1700" b="0">
+                <a:solidFill>
+                  <a:srgbClr val="222222"/>
+                </a:solidFill>
+                <a:latin typeface="맑은 고딕"/>
+              </a:rPr>
+              <a:t>•  포함: FROM SERVICE로 파일 복원 → ENABLE RECOVERY</a:t>
+            </a:r>
+          </a:p>
+          <a:p>
+            <a:pPr algn="l">
+              <a:spcAft>
+                <a:spcPts val="1000"/>
+              </a:spcAft>
+            </a:pPr>
+            <a:r>
+              <a:rPr sz="1700" b="0">
+                <a:solidFill>
+                  <a:srgbClr val="222222"/>
+                </a:solidFill>
+                <a:latin typeface="맑은 고딕"/>
+              </a:rPr>
+              <a:t>•  제외된 PDB는 역할 전환 뒤 새 Primary에서 못 엶</a:t>
             </a:r>
           </a:p>
         </p:txBody>
@@ -12191,7 +13055,7 @@
                 </a:solidFill>
                 <a:latin typeface="맑은 고딕"/>
               </a:rPr>
-              <a:t>실습 개요 (Practice Overview)</a:t>
+              <a:t>PDB 삭제와 시나리오</a:t>
             </a:r>
           </a:p>
         </p:txBody>
@@ -12204,8 +13068,8 @@
         </p:nvSpPr>
         <p:spPr>
           <a:xfrm>
-            <a:off x="640080" y="1371600"/>
-            <a:ext cx="10881360" cy="5120640"/>
+            <a:off x="640080" y="1078992"/>
+            <a:ext cx="10881360" cy="457200"/>
           </a:xfrm>
           <a:prstGeom prst="rect">
             <a:avLst/>
@@ -12220,129 +13084,813 @@
           <a:p>
             <a:pPr algn="l">
               <a:spcAft>
-                <a:spcPts val="1000"/>
+                <a:spcPts val="600"/>
+              </a:spcAft>
+            </a:pPr>
+            <a:r>
+              <a:rPr sz="1500" b="0">
+                <a:solidFill>
+                  <a:srgbClr val="5A6672"/>
+                </a:solidFill>
+                <a:latin typeface="맑은 고딕"/>
+              </a:rPr>
+              <a:t>개발 PDB 때문에 멈춘 적용</a:t>
+            </a:r>
+          </a:p>
+        </p:txBody>
+      </p:sp>
+      <p:sp>
+        <p:nvSpPr>
+          <p:cNvPr id="5" name="TextBox 4"/>
+          <p:cNvSpPr txBox="1"/>
+          <p:nvPr/>
+        </p:nvSpPr>
+        <p:spPr>
+          <a:xfrm>
+            <a:off x="640080" y="1737360"/>
+            <a:ext cx="10881360" cy="4754880"/>
+          </a:xfrm>
+          <a:prstGeom prst="rect">
+            <a:avLst/>
+          </a:prstGeom>
+          <a:noFill/>
+        </p:spPr>
+        <p:txBody>
+          <a:bodyPr wrap="square">
+            <a:spAutoFit/>
+          </a:bodyPr>
+          <a:lstStyle/>
+          <a:p>
+            <a:pPr algn="l">
+              <a:spcAft>
+                <a:spcPts val="1000"/>
+              </a:spcAft>
+            </a:pPr>
+            <a:r>
+              <a:rPr sz="1700" b="0">
+                <a:solidFill>
+                  <a:srgbClr val="222222"/>
+                </a:solidFill>
+                <a:latin typeface="맑은 고딕"/>
+              </a:rPr>
+              <a:t>•  DROP PLUGGABLE DATABASE는 Standby에도 반영</a:t>
+            </a:r>
+          </a:p>
+          <a:p>
+            <a:pPr algn="l">
+              <a:spcAft>
+                <a:spcPts val="1000"/>
+              </a:spcAft>
+            </a:pPr>
+            <a:r>
+              <a:rPr sz="1700" b="0">
+                <a:solidFill>
+                  <a:srgbClr val="222222"/>
+                </a:solidFill>
+                <a:latin typeface="맑은 고딕"/>
+              </a:rPr>
+              <a:t>•  OMF는 빈 GUID 디렉터리가 남을 수 있음, rmdir로 정리</a:t>
+            </a:r>
+          </a:p>
+          <a:p>
+            <a:pPr algn="l">
+              <a:spcAft>
+                <a:spcPts val="1000"/>
+              </a:spcAft>
+            </a:pPr>
+            <a:r>
+              <a:rPr sz="1700" b="0">
+                <a:solidFill>
+                  <a:srgbClr val="222222"/>
+                </a:solidFill>
+                <a:latin typeface="맑은 고딕"/>
+              </a:rPr>
+              <a:t>•  시나리오: 원격 클론 개발 PDB에서 적용 중지</a:t>
+            </a:r>
+          </a:p>
+          <a:p>
+            <a:pPr algn="l">
+              <a:spcAft>
+                <a:spcPts val="1000"/>
+              </a:spcAft>
+            </a:pPr>
+            <a:r>
+              <a:rPr sz="1700" b="0">
+                <a:solidFill>
+                  <a:srgbClr val="222222"/>
+                </a:solidFill>
+                <a:latin typeface="맑은 고딕"/>
+              </a:rPr>
+              <a:t>•  대책: '*','-DEV*' 설정과 이름 규칙 통일</a:t>
+            </a:r>
+          </a:p>
+        </p:txBody>
+      </p:sp>
+    </p:spTree>
+  </p:cSld>
+  <p:clrMapOvr>
+    <a:masterClrMapping/>
+  </p:clrMapOvr>
+</p:sld>
+</file>
+
+<file path=ppt/slides/slide37.xml><?xml version="1.0" encoding="utf-8"?>
+<p:sld xmlns:a="http://schemas.openxmlformats.org/drawingml/2006/main" xmlns:p="http://schemas.openxmlformats.org/presentationml/2006/main" xmlns:r="http://schemas.openxmlformats.org/officeDocument/2006/relationships">
+  <p:cSld>
+    <p:spTree>
+      <p:nvGrpSpPr>
+        <p:cNvPr id="1" name=""/>
+        <p:cNvGrpSpPr/>
+        <p:nvPr/>
+      </p:nvGrpSpPr>
+      <p:grpSpPr/>
+      <p:sp>
+        <p:nvSpPr>
+          <p:cNvPr id="2" name="Rectangle 1"/>
+          <p:cNvSpPr/>
+          <p:nvPr/>
+        </p:nvSpPr>
+        <p:spPr>
+          <a:xfrm>
+            <a:off x="0" y="0"/>
+            <a:ext cx="12191695" cy="6858000"/>
+          </a:xfrm>
+          <a:prstGeom prst="rect">
+            <a:avLst/>
+          </a:prstGeom>
+          <a:solidFill>
+            <a:srgbClr val="C0392B"/>
+          </a:solidFill>
+          <a:ln>
+            <a:noFill/>
+          </a:ln>
+          <a:effectLst/>
+        </p:spPr>
+        <p:style>
+          <a:lnRef idx="1">
+            <a:schemeClr val="accent1"/>
+          </a:lnRef>
+          <a:fillRef idx="3">
+            <a:schemeClr val="accent1"/>
+          </a:fillRef>
+          <a:effectRef idx="2">
+            <a:schemeClr val="accent1"/>
+          </a:effectRef>
+          <a:fontRef idx="minor">
+            <a:schemeClr val="lt1"/>
+          </a:fontRef>
+        </p:style>
+        <p:txBody>
+          <a:bodyPr rtlCol="0" anchor="ctr"/>
+          <a:lstStyle/>
+          <a:p>
+            <a:pPr algn="ctr"/>
+          </a:p>
+        </p:txBody>
+      </p:sp>
+      <p:sp>
+        <p:nvSpPr>
+          <p:cNvPr id="3" name="TextBox 2"/>
+          <p:cNvSpPr txBox="1"/>
+          <p:nvPr/>
+        </p:nvSpPr>
+        <p:spPr>
+          <a:xfrm>
+            <a:off x="822960" y="2011680"/>
+            <a:ext cx="10515600" cy="1097280"/>
+          </a:xfrm>
+          <a:prstGeom prst="rect">
+            <a:avLst/>
+          </a:prstGeom>
+          <a:noFill/>
+        </p:spPr>
+        <p:txBody>
+          <a:bodyPr wrap="square">
+            <a:spAutoFit/>
+          </a:bodyPr>
+          <a:lstStyle/>
+          <a:p>
+            <a:pPr algn="l">
+              <a:spcAft>
+                <a:spcPts val="600"/>
+              </a:spcAft>
+            </a:pPr>
+            <a:r>
+              <a:rPr sz="4000" b="1">
+                <a:solidFill>
+                  <a:srgbClr val="FFFFFF"/>
+                </a:solidFill>
+                <a:latin typeface="맑은 고딕"/>
+              </a:rPr>
+              <a:t>8.8</a:t>
+            </a:r>
+          </a:p>
+        </p:txBody>
+      </p:sp>
+      <p:sp>
+        <p:nvSpPr>
+          <p:cNvPr id="4" name="TextBox 3"/>
+          <p:cNvSpPr txBox="1"/>
+          <p:nvPr/>
+        </p:nvSpPr>
+        <p:spPr>
+          <a:xfrm>
+            <a:off x="822960" y="3017520"/>
+            <a:ext cx="10515600" cy="914400"/>
+          </a:xfrm>
+          <a:prstGeom prst="rect">
+            <a:avLst/>
+          </a:prstGeom>
+          <a:noFill/>
+        </p:spPr>
+        <p:txBody>
+          <a:bodyPr wrap="square">
+            <a:spAutoFit/>
+          </a:bodyPr>
+          <a:lstStyle/>
+          <a:p>
+            <a:pPr algn="l">
+              <a:spcAft>
+                <a:spcPts val="600"/>
+              </a:spcAft>
+            </a:pPr>
+            <a:r>
+              <a:rPr sz="2800" b="1">
+                <a:solidFill>
+                  <a:srgbClr val="FFFFFF"/>
+                </a:solidFill>
+                <a:latin typeface="맑은 고딕"/>
+              </a:rPr>
+              <a:t>NOLOGGING 작업과 복구 불가 블록</a:t>
+            </a:r>
+          </a:p>
+        </p:txBody>
+      </p:sp>
+      <p:sp>
+        <p:nvSpPr>
+          <p:cNvPr id="5" name="Rectangle 4"/>
+          <p:cNvSpPr/>
+          <p:nvPr/>
+        </p:nvSpPr>
+        <p:spPr>
+          <a:xfrm>
+            <a:off x="822960" y="4114800"/>
+            <a:ext cx="5486400" cy="54864"/>
+          </a:xfrm>
+          <a:prstGeom prst="rect">
+            <a:avLst/>
+          </a:prstGeom>
+          <a:solidFill>
+            <a:srgbClr val="FFFFFF"/>
+          </a:solidFill>
+          <a:ln>
+            <a:noFill/>
+          </a:ln>
+          <a:effectLst/>
+        </p:spPr>
+        <p:style>
+          <a:lnRef idx="1">
+            <a:schemeClr val="accent1"/>
+          </a:lnRef>
+          <a:fillRef idx="3">
+            <a:schemeClr val="accent1"/>
+          </a:fillRef>
+          <a:effectRef idx="2">
+            <a:schemeClr val="accent1"/>
+          </a:effectRef>
+          <a:fontRef idx="minor">
+            <a:schemeClr val="lt1"/>
+          </a:fontRef>
+        </p:style>
+        <p:txBody>
+          <a:bodyPr rtlCol="0" anchor="ctr"/>
+          <a:lstStyle/>
+          <a:p>
+            <a:pPr algn="ctr"/>
+          </a:p>
+        </p:txBody>
+      </p:sp>
+      <p:sp>
+        <p:nvSpPr>
+          <p:cNvPr id="6" name="TextBox 5"/>
+          <p:cNvSpPr txBox="1"/>
+          <p:nvPr/>
+        </p:nvSpPr>
+        <p:spPr>
+          <a:xfrm>
+            <a:off x="822960" y="4297680"/>
+            <a:ext cx="10058400" cy="2011680"/>
+          </a:xfrm>
+          <a:prstGeom prst="rect">
+            <a:avLst/>
+          </a:prstGeom>
+          <a:noFill/>
+        </p:spPr>
+        <p:txBody>
+          <a:bodyPr wrap="square">
+            <a:spAutoFit/>
+          </a:bodyPr>
+          <a:lstStyle/>
+          <a:p>
+            <a:pPr algn="l">
+              <a:spcAft>
+                <a:spcPts val="800"/>
               </a:spcAft>
             </a:pPr>
             <a:r>
               <a:rPr sz="1600" b="0">
                 <a:solidFill>
-                  <a:srgbClr val="222222"/>
-                </a:solidFill>
-                <a:latin typeface="맑은 고딕"/>
-              </a:rPr>
-              <a:t>•  실습 01 — 자동 반영 확인: 테이블스페이스 추가와 OMF 이름 생성을 확인한다. ORA-16000을 재현한다.</a:t>
-            </a:r>
-          </a:p>
-          <a:p>
-            <a:pPr algn="l">
-              <a:spcAft>
-                <a:spcPts val="1000"/>
+                  <a:srgbClr val="FFFFFF"/>
+                </a:solidFill>
+                <a:latin typeface="맑은 고딕"/>
+              </a:rPr>
+              <a:t>•  Standby에서 일어나는 일</a:t>
+            </a:r>
+          </a:p>
+          <a:p>
+            <a:pPr algn="l">
+              <a:spcAft>
+                <a:spcPts val="800"/>
               </a:spcAft>
             </a:pPr>
             <a:r>
               <a:rPr sz="1600" b="0">
                 <a:solidFill>
-                  <a:srgbClr val="222222"/>
-                </a:solidFill>
-                <a:latin typeface="맑은 고딕"/>
-              </a:rPr>
-              <a:t>•  실습 02 — 파일 추가와 크기 변경: 두 변경의 반영을 확인하고 대조 조회를 익힌다. ORA-00904를 재현한다.</a:t>
-            </a:r>
-          </a:p>
-          <a:p>
-            <a:pPr algn="l">
-              <a:spcAft>
-                <a:spcPts val="1000"/>
+                  <a:srgbClr val="FFFFFF"/>
+                </a:solidFill>
+                <a:latin typeface="맑은 고딕"/>
+              </a:rPr>
+              <a:t>•  영향받은 파일 찾기</a:t>
+            </a:r>
+          </a:p>
+          <a:p>
+            <a:pPr algn="l">
+              <a:spcAft>
+                <a:spcPts val="800"/>
               </a:spcAft>
             </a:pPr>
             <a:r>
               <a:rPr sz="1600" b="0">
                 <a:solidFill>
-                  <a:srgbClr val="222222"/>
-                </a:solidFill>
-                <a:latin typeface="맑은 고딕"/>
-              </a:rPr>
-              <a:t>•  실습 03 — MANUAL 재현: `UNNAMED00016`과 ORA-1274·ORA-1111을 재현하고 진단한다.</a:t>
-            </a:r>
-          </a:p>
-          <a:p>
-            <a:pPr algn="l">
-              <a:spcAft>
-                <a:spcPts val="1000"/>
-              </a:spcAft>
-            </a:pPr>
-            <a:r>
-              <a:rPr sz="1600" b="0">
-                <a:solidFill>
-                  <a:srgbClr val="222222"/>
-                </a:solidFill>
-                <a:latin typeface="맑은 고딕"/>
-              </a:rPr>
-              <a:t>•  실습 04 — UNNAMED 복구: `CREATE DATAFILE ... AS NEW`로 복구하고 데이터까지 검증한다.</a:t>
-            </a:r>
-          </a:p>
-          <a:p>
-            <a:pPr algn="l">
-              <a:spcAft>
-                <a:spcPts val="1000"/>
-              </a:spcAft>
-            </a:pPr>
-            <a:r>
-              <a:rPr sz="1600" b="0">
-                <a:solidFill>
-                  <a:srgbClr val="222222"/>
-                </a:solidFill>
-                <a:latin typeface="맑은 고딕"/>
-              </a:rPr>
-              <a:t>•  실습 05 — PDB 추가와 삭제: GUID 디렉터리 자동 생성과 삭제 후 빈 디렉터리를 확인한다. ORA-01219를 재현한다.</a:t>
-            </a:r>
-          </a:p>
-          <a:p>
-            <a:pPr algn="l">
-              <a:spcAft>
-                <a:spcPts val="1000"/>
-              </a:spcAft>
-            </a:pPr>
-            <a:r>
-              <a:rPr sz="1600" b="0">
-                <a:solidFill>
-                  <a:srgbClr val="222222"/>
-                </a:solidFill>
-                <a:latin typeface="맑은 고딕"/>
-              </a:rPr>
-              <a:t>•  실습 06 — 반영되지 않는 것: 온라인 리두 그룹이 생기지 않음을 확인하고 로그 작업 오류 넷을 재현한다.</a:t>
-            </a:r>
-          </a:p>
-          <a:p>
-            <a:pPr algn="l">
-              <a:spcAft>
-                <a:spcPts val="1000"/>
-              </a:spcAft>
-            </a:pPr>
-            <a:r>
-              <a:rPr sz="1600" b="0">
-                <a:solidFill>
-                  <a:srgbClr val="222222"/>
-                </a:solidFill>
-                <a:latin typeface="맑은 고딕"/>
-              </a:rPr>
-              <a:t>•  실습 07 — 사고 분석: CURRENT 리두 파일 삭제 사고의 오류 스택과 복구 시도를 따라간다. **재현하지 않는다.**</a:t>
-            </a:r>
-          </a:p>
-          <a:p>
-            <a:pPr algn="l">
-              <a:spcAft>
-                <a:spcPts val="1000"/>
-              </a:spcAft>
-            </a:pPr>
-            <a:r>
-              <a:rPr sz="1600" b="0">
-                <a:solidFill>
-                  <a:srgbClr val="222222"/>
-                </a:solidFill>
-                <a:latin typeface="맑은 고딕"/>
-              </a:rPr>
-              <a:t>•  실습 03·05·06은 구성을 실제로 바꾼다. 각 실습 끝에서 반드시 원복한다. 실습 07은 읽기 자료다.</a:t>
+                  <a:srgbClr val="FFFFFF"/>
+                </a:solidFill>
+                <a:latin typeface="맑은 고딕"/>
+              </a:rPr>
+              <a:t>•  복구와 예방</a:t>
+            </a:r>
+          </a:p>
+        </p:txBody>
+      </p:sp>
+    </p:spTree>
+  </p:cSld>
+  <p:clrMapOvr>
+    <a:masterClrMapping/>
+  </p:clrMapOvr>
+</p:sld>
+</file>
+
+<file path=ppt/slides/slide38.xml><?xml version="1.0" encoding="utf-8"?>
+<p:sld xmlns:a="http://schemas.openxmlformats.org/drawingml/2006/main" xmlns:p="http://schemas.openxmlformats.org/presentationml/2006/main" xmlns:r="http://schemas.openxmlformats.org/officeDocument/2006/relationships">
+  <p:cSld>
+    <p:spTree>
+      <p:nvGrpSpPr>
+        <p:cNvPr id="1" name=""/>
+        <p:cNvGrpSpPr/>
+        <p:nvPr/>
+      </p:nvGrpSpPr>
+      <p:grpSpPr/>
+      <p:sp>
+        <p:nvSpPr>
+          <p:cNvPr id="2" name="Rectangle 1"/>
+          <p:cNvSpPr/>
+          <p:nvPr/>
+        </p:nvSpPr>
+        <p:spPr>
+          <a:xfrm>
+            <a:off x="0" y="0"/>
+            <a:ext cx="12191695" cy="1005840"/>
+          </a:xfrm>
+          <a:prstGeom prst="rect">
+            <a:avLst/>
+          </a:prstGeom>
+          <a:solidFill>
+            <a:srgbClr val="C0392B"/>
+          </a:solidFill>
+          <a:ln>
+            <a:noFill/>
+          </a:ln>
+          <a:effectLst/>
+        </p:spPr>
+        <p:style>
+          <a:lnRef idx="1">
+            <a:schemeClr val="accent1"/>
+          </a:lnRef>
+          <a:fillRef idx="3">
+            <a:schemeClr val="accent1"/>
+          </a:fillRef>
+          <a:effectRef idx="2">
+            <a:schemeClr val="accent1"/>
+          </a:effectRef>
+          <a:fontRef idx="minor">
+            <a:schemeClr val="lt1"/>
+          </a:fontRef>
+        </p:style>
+        <p:txBody>
+          <a:bodyPr rtlCol="0" anchor="ctr"/>
+          <a:lstStyle/>
+          <a:p>
+            <a:pPr algn="ctr"/>
+          </a:p>
+        </p:txBody>
+      </p:sp>
+      <p:sp>
+        <p:nvSpPr>
+          <p:cNvPr id="3" name="TextBox 2"/>
+          <p:cNvSpPr txBox="1"/>
+          <p:nvPr/>
+        </p:nvSpPr>
+        <p:spPr>
+          <a:xfrm>
+            <a:off x="548640" y="91440"/>
+            <a:ext cx="10972800" cy="777240"/>
+          </a:xfrm>
+          <a:prstGeom prst="rect">
+            <a:avLst/>
+          </a:prstGeom>
+          <a:noFill/>
+        </p:spPr>
+        <p:txBody>
+          <a:bodyPr wrap="square">
+            <a:spAutoFit/>
+          </a:bodyPr>
+          <a:lstStyle/>
+          <a:p>
+            <a:pPr algn="l">
+              <a:spcAft>
+                <a:spcPts val="600"/>
+              </a:spcAft>
+            </a:pPr>
+            <a:r>
+              <a:rPr sz="2600" b="1">
+                <a:solidFill>
+                  <a:srgbClr val="FFFFFF"/>
+                </a:solidFill>
+                <a:latin typeface="맑은 고딕"/>
+              </a:rPr>
+              <a:t>Standby에서 무엇이 일어나는가</a:t>
+            </a:r>
+          </a:p>
+        </p:txBody>
+      </p:sp>
+      <p:sp>
+        <p:nvSpPr>
+          <p:cNvPr id="4" name="TextBox 3"/>
+          <p:cNvSpPr txBox="1"/>
+          <p:nvPr/>
+        </p:nvSpPr>
+        <p:spPr>
+          <a:xfrm>
+            <a:off x="640080" y="1078992"/>
+            <a:ext cx="10881360" cy="457200"/>
+          </a:xfrm>
+          <a:prstGeom prst="rect">
+            <a:avLst/>
+          </a:prstGeom>
+          <a:noFill/>
+        </p:spPr>
+        <p:txBody>
+          <a:bodyPr wrap="square">
+            <a:spAutoFit/>
+          </a:bodyPr>
+          <a:lstStyle/>
+          <a:p>
+            <a:pPr algn="l">
+              <a:spcAft>
+                <a:spcPts val="600"/>
+              </a:spcAft>
+            </a:pPr>
+            <a:r>
+              <a:rPr sz="1500" b="0">
+                <a:solidFill>
+                  <a:srgbClr val="5A6672"/>
+                </a:solidFill>
+                <a:latin typeface="맑은 고딕"/>
+              </a:rPr>
+              <a:t>적용은 조용히 지나가고 조회에서 터진다</a:t>
+            </a:r>
+          </a:p>
+        </p:txBody>
+      </p:sp>
+      <p:sp>
+        <p:nvSpPr>
+          <p:cNvPr id="5" name="TextBox 4"/>
+          <p:cNvSpPr txBox="1"/>
+          <p:nvPr/>
+        </p:nvSpPr>
+        <p:spPr>
+          <a:xfrm>
+            <a:off x="640080" y="1737360"/>
+            <a:ext cx="10881360" cy="4754880"/>
+          </a:xfrm>
+          <a:prstGeom prst="rect">
+            <a:avLst/>
+          </a:prstGeom>
+          <a:noFill/>
+        </p:spPr>
+        <p:txBody>
+          <a:bodyPr wrap="square">
+            <a:spAutoFit/>
+          </a:bodyPr>
+          <a:lstStyle/>
+          <a:p>
+            <a:pPr algn="l">
+              <a:spcAft>
+                <a:spcPts val="1000"/>
+              </a:spcAft>
+            </a:pPr>
+            <a:r>
+              <a:rPr sz="1700" b="0">
+                <a:solidFill>
+                  <a:srgbClr val="222222"/>
+                </a:solidFill>
+                <a:latin typeface="맑은 고딕"/>
+              </a:rPr>
+              <a:t>•  직접 경로 적재 + NOLOGGING: 블록 내용 없음</a:t>
+            </a:r>
+          </a:p>
+          <a:p>
+            <a:pPr algn="l">
+              <a:spcAft>
+                <a:spcPts val="1000"/>
+              </a:spcAft>
+            </a:pPr>
+            <a:r>
+              <a:rPr sz="1700" b="0">
+                <a:solidFill>
+                  <a:srgbClr val="222222"/>
+                </a:solidFill>
+                <a:latin typeface="맑은 고딕"/>
+              </a:rPr>
+              <a:t>•  Standby는 블록을 복구 불가로 표시하고 진행</a:t>
+            </a:r>
+          </a:p>
+          <a:p>
+            <a:pPr algn="l">
+              <a:spcAft>
+                <a:spcPts val="1000"/>
+              </a:spcAft>
+            </a:pPr>
+            <a:r>
+              <a:rPr sz="1700" b="0">
+                <a:solidFill>
+                  <a:srgbClr val="222222"/>
+                </a:solidFill>
+                <a:latin typeface="맑은 고딕"/>
+              </a:rPr>
+              <a:t>•  조회나 Failover 뒤 업무에서 오류 발생</a:t>
+            </a:r>
+          </a:p>
+          <a:p>
+            <a:pPr algn="l">
+              <a:spcAft>
+                <a:spcPts val="1000"/>
+              </a:spcAft>
+            </a:pPr>
+            <a:r>
+              <a:rPr sz="1700" b="0">
+                <a:solidFill>
+                  <a:srgbClr val="222222"/>
+                </a:solidFill>
+                <a:latin typeface="맑은 고딕"/>
+              </a:rPr>
+              <a:t>•  ORA-01578 + ORA-26040 = NOLOGGING 흔적</a:t>
+            </a:r>
+          </a:p>
+        </p:txBody>
+      </p:sp>
+    </p:spTree>
+  </p:cSld>
+  <p:clrMapOvr>
+    <a:masterClrMapping/>
+  </p:clrMapOvr>
+</p:sld>
+</file>
+
+<file path=ppt/slides/slide39.xml><?xml version="1.0" encoding="utf-8"?>
+<p:sld xmlns:a="http://schemas.openxmlformats.org/drawingml/2006/main" xmlns:p="http://schemas.openxmlformats.org/presentationml/2006/main" xmlns:r="http://schemas.openxmlformats.org/officeDocument/2006/relationships">
+  <p:cSld>
+    <p:spTree>
+      <p:nvGrpSpPr>
+        <p:cNvPr id="1" name=""/>
+        <p:cNvGrpSpPr/>
+        <p:nvPr/>
+      </p:nvGrpSpPr>
+      <p:grpSpPr/>
+      <p:sp>
+        <p:nvSpPr>
+          <p:cNvPr id="2" name="Rectangle 1"/>
+          <p:cNvSpPr/>
+          <p:nvPr/>
+        </p:nvSpPr>
+        <p:spPr>
+          <a:xfrm>
+            <a:off x="0" y="0"/>
+            <a:ext cx="12191695" cy="1005840"/>
+          </a:xfrm>
+          <a:prstGeom prst="rect">
+            <a:avLst/>
+          </a:prstGeom>
+          <a:solidFill>
+            <a:srgbClr val="C0392B"/>
+          </a:solidFill>
+          <a:ln>
+            <a:noFill/>
+          </a:ln>
+          <a:effectLst/>
+        </p:spPr>
+        <p:style>
+          <a:lnRef idx="1">
+            <a:schemeClr val="accent1"/>
+          </a:lnRef>
+          <a:fillRef idx="3">
+            <a:schemeClr val="accent1"/>
+          </a:fillRef>
+          <a:effectRef idx="2">
+            <a:schemeClr val="accent1"/>
+          </a:effectRef>
+          <a:fontRef idx="minor">
+            <a:schemeClr val="lt1"/>
+          </a:fontRef>
+        </p:style>
+        <p:txBody>
+          <a:bodyPr rtlCol="0" anchor="ctr"/>
+          <a:lstStyle/>
+          <a:p>
+            <a:pPr algn="ctr"/>
+          </a:p>
+        </p:txBody>
+      </p:sp>
+      <p:sp>
+        <p:nvSpPr>
+          <p:cNvPr id="3" name="TextBox 2"/>
+          <p:cNvSpPr txBox="1"/>
+          <p:nvPr/>
+        </p:nvSpPr>
+        <p:spPr>
+          <a:xfrm>
+            <a:off x="548640" y="91440"/>
+            <a:ext cx="10972800" cy="777240"/>
+          </a:xfrm>
+          <a:prstGeom prst="rect">
+            <a:avLst/>
+          </a:prstGeom>
+          <a:noFill/>
+        </p:spPr>
+        <p:txBody>
+          <a:bodyPr wrap="square">
+            <a:spAutoFit/>
+          </a:bodyPr>
+          <a:lstStyle/>
+          <a:p>
+            <a:pPr algn="l">
+              <a:spcAft>
+                <a:spcPts val="600"/>
+              </a:spcAft>
+            </a:pPr>
+            <a:r>
+              <a:rPr sz="2600" b="1">
+                <a:solidFill>
+                  <a:srgbClr val="FFFFFF"/>
+                </a:solidFill>
+                <a:latin typeface="맑은 고딕"/>
+              </a:rPr>
+              <a:t>영향받은 파일 찾기</a:t>
+            </a:r>
+          </a:p>
+        </p:txBody>
+      </p:sp>
+      <p:sp>
+        <p:nvSpPr>
+          <p:cNvPr id="4" name="TextBox 3"/>
+          <p:cNvSpPr txBox="1"/>
+          <p:nvPr/>
+        </p:nvSpPr>
+        <p:spPr>
+          <a:xfrm>
+            <a:off x="640080" y="1078992"/>
+            <a:ext cx="10881360" cy="457200"/>
+          </a:xfrm>
+          <a:prstGeom prst="rect">
+            <a:avLst/>
+          </a:prstGeom>
+          <a:noFill/>
+        </p:spPr>
+        <p:txBody>
+          <a:bodyPr wrap="square">
+            <a:spAutoFit/>
+          </a:bodyPr>
+          <a:lstStyle/>
+          <a:p>
+            <a:pPr algn="l">
+              <a:spcAft>
+                <a:spcPts val="600"/>
+              </a:spcAft>
+            </a:pPr>
+            <a:r>
+              <a:rPr sz="1500" b="0">
+                <a:solidFill>
+                  <a:srgbClr val="5A6672"/>
+                </a:solidFill>
+                <a:latin typeface="맑은 고딕"/>
+              </a:rPr>
+              <a:t>UNRECOVERABLE_CHANGE# 비교</a:t>
+            </a:r>
+          </a:p>
+        </p:txBody>
+      </p:sp>
+      <p:sp>
+        <p:nvSpPr>
+          <p:cNvPr id="5" name="TextBox 4"/>
+          <p:cNvSpPr txBox="1"/>
+          <p:nvPr/>
+        </p:nvSpPr>
+        <p:spPr>
+          <a:xfrm>
+            <a:off x="640080" y="1737360"/>
+            <a:ext cx="10881360" cy="4754880"/>
+          </a:xfrm>
+          <a:prstGeom prst="rect">
+            <a:avLst/>
+          </a:prstGeom>
+          <a:noFill/>
+        </p:spPr>
+        <p:txBody>
+          <a:bodyPr wrap="square">
+            <a:spAutoFit/>
+          </a:bodyPr>
+          <a:lstStyle/>
+          <a:p>
+            <a:pPr algn="l">
+              <a:spcAft>
+                <a:spcPts val="1000"/>
+              </a:spcAft>
+            </a:pPr>
+            <a:r>
+              <a:rPr sz="1700" b="0">
+                <a:solidFill>
+                  <a:srgbClr val="222222"/>
+                </a:solidFill>
+                <a:latin typeface="맑은 고딕"/>
+              </a:rPr>
+              <a:t>•  V$DATAFILE.UNRECOVERABLE_CHANGE#, _TIME</a:t>
+            </a:r>
+          </a:p>
+          <a:p>
+            <a:pPr algn="l">
+              <a:spcAft>
+                <a:spcPts val="1000"/>
+              </a:spcAft>
+            </a:pPr>
+            <a:r>
+              <a:rPr sz="1700" b="0">
+                <a:solidFill>
+                  <a:srgbClr val="222222"/>
+                </a:solidFill>
+                <a:latin typeface="맑은 고딕"/>
+              </a:rPr>
+              <a:t>•  양쪽 값을 FILE#별로 비교</a:t>
+            </a:r>
+          </a:p>
+          <a:p>
+            <a:pPr algn="l">
+              <a:spcAft>
+                <a:spcPts val="1000"/>
+              </a:spcAft>
+            </a:pPr>
+            <a:r>
+              <a:rPr sz="1700" b="0">
+                <a:solidFill>
+                  <a:srgbClr val="222222"/>
+                </a:solidFill>
+                <a:latin typeface="맑은 고딕"/>
+              </a:rPr>
+              <a:t>•  Primary 값이 크면 Standby가 내용을 못 가진 파일</a:t>
+            </a:r>
+          </a:p>
+          <a:p>
+            <a:pPr algn="l">
+              <a:spcAft>
+                <a:spcPts val="1000"/>
+              </a:spcAft>
+            </a:pPr>
+            <a:r>
+              <a:rPr sz="1700" b="0">
+                <a:solidFill>
+                  <a:srgbClr val="222222"/>
+                </a:solidFill>
+                <a:latin typeface="맑은 고딕"/>
+              </a:rPr>
+              <a:t>•  12.2 이후 Standby의 V$NONLOGGED_BLOCK</a:t>
             </a:r>
           </a:p>
         </p:txBody>
@@ -12482,7 +14030,7 @@
                 </a:solidFill>
                 <a:latin typeface="맑은 고딕"/>
               </a:rPr>
-              <a:t>STANDBY_FILE_MANAGEMENT</a:t>
+              <a:t>구조 변경이 Standby에 전달되는 원리</a:t>
             </a:r>
           </a:p>
         </p:txBody>
@@ -12565,7 +14113,7 @@
                 </a:solidFill>
                 <a:latin typeface="맑은 고딕"/>
               </a:rPr>
-              <a:t>•  값은 둘뿐</a:t>
+              <a:t>•  리두에 실리는 변경과 실리지 않는 변경</a:t>
             </a:r>
           </a:p>
           <a:p>
@@ -12581,7 +14129,7 @@
                 </a:solidFill>
                 <a:latin typeface="맑은 고딕"/>
               </a:rPr>
-              <a:t>•  어느 쪽 값이 동작을 정하는가</a:t>
+              <a:t>•  Standby에서 직접 바꿀 수 없는 이유</a:t>
             </a:r>
           </a:p>
           <a:p>
@@ -12597,7 +14145,2390 @@
                 </a:solidFill>
                 <a:latin typeface="맑은 고딕"/>
               </a:rPr>
-              <a:t>•  비대칭 구성</a:t>
+              <a:t>•  자동 반영과 수동 개입 분류</a:t>
+            </a:r>
+          </a:p>
+        </p:txBody>
+      </p:sp>
+    </p:spTree>
+  </p:cSld>
+  <p:clrMapOvr>
+    <a:masterClrMapping/>
+  </p:clrMapOvr>
+</p:sld>
+</file>
+
+<file path=ppt/slides/slide40.xml><?xml version="1.0" encoding="utf-8"?>
+<p:sld xmlns:a="http://schemas.openxmlformats.org/drawingml/2006/main" xmlns:p="http://schemas.openxmlformats.org/presentationml/2006/main" xmlns:r="http://schemas.openxmlformats.org/officeDocument/2006/relationships">
+  <p:cSld>
+    <p:spTree>
+      <p:nvGrpSpPr>
+        <p:cNvPr id="1" name=""/>
+        <p:cNvGrpSpPr/>
+        <p:nvPr/>
+      </p:nvGrpSpPr>
+      <p:grpSpPr/>
+      <p:sp>
+        <p:nvSpPr>
+          <p:cNvPr id="2" name="Rectangle 1"/>
+          <p:cNvSpPr/>
+          <p:nvPr/>
+        </p:nvSpPr>
+        <p:spPr>
+          <a:xfrm>
+            <a:off x="0" y="0"/>
+            <a:ext cx="12191695" cy="1005840"/>
+          </a:xfrm>
+          <a:prstGeom prst="rect">
+            <a:avLst/>
+          </a:prstGeom>
+          <a:solidFill>
+            <a:srgbClr val="C0392B"/>
+          </a:solidFill>
+          <a:ln>
+            <a:noFill/>
+          </a:ln>
+          <a:effectLst/>
+        </p:spPr>
+        <p:style>
+          <a:lnRef idx="1">
+            <a:schemeClr val="accent1"/>
+          </a:lnRef>
+          <a:fillRef idx="3">
+            <a:schemeClr val="accent1"/>
+          </a:fillRef>
+          <a:effectRef idx="2">
+            <a:schemeClr val="accent1"/>
+          </a:effectRef>
+          <a:fontRef idx="minor">
+            <a:schemeClr val="lt1"/>
+          </a:fontRef>
+        </p:style>
+        <p:txBody>
+          <a:bodyPr rtlCol="0" anchor="ctr"/>
+          <a:lstStyle/>
+          <a:p>
+            <a:pPr algn="ctr"/>
+          </a:p>
+        </p:txBody>
+      </p:sp>
+      <p:sp>
+        <p:nvSpPr>
+          <p:cNvPr id="3" name="TextBox 2"/>
+          <p:cNvSpPr txBox="1"/>
+          <p:nvPr/>
+        </p:nvSpPr>
+        <p:spPr>
+          <a:xfrm>
+            <a:off x="548640" y="91440"/>
+            <a:ext cx="10972800" cy="777240"/>
+          </a:xfrm>
+          <a:prstGeom prst="rect">
+            <a:avLst/>
+          </a:prstGeom>
+          <a:noFill/>
+        </p:spPr>
+        <p:txBody>
+          <a:bodyPr wrap="square">
+            <a:spAutoFit/>
+          </a:bodyPr>
+          <a:lstStyle/>
+          <a:p>
+            <a:pPr algn="l">
+              <a:spcAft>
+                <a:spcPts val="600"/>
+              </a:spcAft>
+            </a:pPr>
+            <a:r>
+              <a:rPr sz="2600" b="1">
+                <a:solidFill>
+                  <a:srgbClr val="FFFFFF"/>
+                </a:solidFill>
+                <a:latin typeface="맑은 고딕"/>
+              </a:rPr>
+              <a:t>복구 방법</a:t>
+            </a:r>
+          </a:p>
+        </p:txBody>
+      </p:sp>
+      <p:sp>
+        <p:nvSpPr>
+          <p:cNvPr id="4" name="TextBox 3"/>
+          <p:cNvSpPr txBox="1"/>
+          <p:nvPr/>
+        </p:nvSpPr>
+        <p:spPr>
+          <a:xfrm>
+            <a:off x="640080" y="1078992"/>
+            <a:ext cx="10881360" cy="457200"/>
+          </a:xfrm>
+          <a:prstGeom prst="rect">
+            <a:avLst/>
+          </a:prstGeom>
+          <a:noFill/>
+        </p:spPr>
+        <p:txBody>
+          <a:bodyPr wrap="square">
+            <a:spAutoFit/>
+          </a:bodyPr>
+          <a:lstStyle/>
+          <a:p>
+            <a:pPr algn="l">
+              <a:spcAft>
+                <a:spcPts val="600"/>
+              </a:spcAft>
+            </a:pPr>
+            <a:r>
+              <a:rPr sz="1500" b="0">
+                <a:solidFill>
+                  <a:srgbClr val="5A6672"/>
+                </a:solidFill>
+                <a:latin typeface="맑은 고딕"/>
+              </a:rPr>
+              <a:t>파일 전체 또는 블록만</a:t>
+            </a:r>
+          </a:p>
+        </p:txBody>
+      </p:sp>
+      <p:sp>
+        <p:nvSpPr>
+          <p:cNvPr id="5" name="TextBox 4"/>
+          <p:cNvSpPr txBox="1"/>
+          <p:nvPr/>
+        </p:nvSpPr>
+        <p:spPr>
+          <a:xfrm>
+            <a:off x="640080" y="1737360"/>
+            <a:ext cx="10881360" cy="4754880"/>
+          </a:xfrm>
+          <a:prstGeom prst="rect">
+            <a:avLst/>
+          </a:prstGeom>
+          <a:noFill/>
+        </p:spPr>
+        <p:txBody>
+          <a:bodyPr wrap="square">
+            <a:spAutoFit/>
+          </a:bodyPr>
+          <a:lstStyle/>
+          <a:p>
+            <a:pPr algn="l">
+              <a:spcAft>
+                <a:spcPts val="1000"/>
+              </a:spcAft>
+            </a:pPr>
+            <a:r>
+              <a:rPr sz="1700" b="0">
+                <a:solidFill>
+                  <a:srgbClr val="222222"/>
+                </a:solidFill>
+                <a:latin typeface="맑은 고딕"/>
+              </a:rPr>
+              <a:t>•  교재 방식: BEGIN BACKUP 후 파일 복사</a:t>
+            </a:r>
+          </a:p>
+          <a:p>
+            <a:pPr algn="l">
+              <a:spcAft>
+                <a:spcPts val="1000"/>
+              </a:spcAft>
+            </a:pPr>
+            <a:r>
+              <a:rPr sz="1700" b="0">
+                <a:solidFill>
+                  <a:srgbClr val="222222"/>
+                </a:solidFill>
+                <a:latin typeface="맑은 고딕"/>
+              </a:rPr>
+              <a:t>•  RMAN RECOVER DATAFILE n FROM SERVICE (12c 이후)</a:t>
+            </a:r>
+          </a:p>
+          <a:p>
+            <a:pPr algn="l">
+              <a:spcAft>
+                <a:spcPts val="1000"/>
+              </a:spcAft>
+            </a:pPr>
+            <a:r>
+              <a:rPr sz="1700" b="0">
+                <a:solidFill>
+                  <a:srgbClr val="222222"/>
+                </a:solidFill>
+                <a:latin typeface="맑은 고딕"/>
+              </a:rPr>
+              <a:t>•  RMAN NONLOGGED BLOCK 복구 (12.2 이후)</a:t>
+            </a:r>
+          </a:p>
+          <a:p>
+            <a:pPr algn="l">
+              <a:spcAft>
+                <a:spcPts val="1000"/>
+              </a:spcAft>
+            </a:pPr>
+            <a:r>
+              <a:rPr sz="1700" b="0">
+                <a:solidFill>
+                  <a:srgbClr val="222222"/>
+                </a:solidFill>
+                <a:latin typeface="맑은 고딕"/>
+              </a:rPr>
+              <a:t>•  적용 중지 상태에서 진행, 끝나면 재기동</a:t>
+            </a:r>
+          </a:p>
+          <a:p>
+            <a:pPr algn="l">
+              <a:spcAft>
+                <a:spcPts val="1000"/>
+              </a:spcAft>
+            </a:pPr>
+            <a:r>
+              <a:rPr sz="1700" b="0">
+                <a:solidFill>
+                  <a:srgbClr val="222222"/>
+                </a:solidFill>
+                <a:latin typeface="맑은 고딕"/>
+              </a:rPr>
+              <a:t>•  ORA-00308, ORA-01152면 갭부터 해소</a:t>
+            </a:r>
+          </a:p>
+        </p:txBody>
+      </p:sp>
+    </p:spTree>
+  </p:cSld>
+  <p:clrMapOvr>
+    <a:masterClrMapping/>
+  </p:clrMapOvr>
+</p:sld>
+</file>
+
+<file path=ppt/slides/slide41.xml><?xml version="1.0" encoding="utf-8"?>
+<p:sld xmlns:a="http://schemas.openxmlformats.org/drawingml/2006/main" xmlns:p="http://schemas.openxmlformats.org/presentationml/2006/main" xmlns:r="http://schemas.openxmlformats.org/officeDocument/2006/relationships">
+  <p:cSld>
+    <p:spTree>
+      <p:nvGrpSpPr>
+        <p:cNvPr id="1" name=""/>
+        <p:cNvGrpSpPr/>
+        <p:nvPr/>
+      </p:nvGrpSpPr>
+      <p:grpSpPr/>
+      <p:sp>
+        <p:nvSpPr>
+          <p:cNvPr id="2" name="Rectangle 1"/>
+          <p:cNvSpPr/>
+          <p:nvPr/>
+        </p:nvSpPr>
+        <p:spPr>
+          <a:xfrm>
+            <a:off x="0" y="0"/>
+            <a:ext cx="12191695" cy="1005840"/>
+          </a:xfrm>
+          <a:prstGeom prst="rect">
+            <a:avLst/>
+          </a:prstGeom>
+          <a:solidFill>
+            <a:srgbClr val="C0392B"/>
+          </a:solidFill>
+          <a:ln>
+            <a:noFill/>
+          </a:ln>
+          <a:effectLst/>
+        </p:spPr>
+        <p:style>
+          <a:lnRef idx="1">
+            <a:schemeClr val="accent1"/>
+          </a:lnRef>
+          <a:fillRef idx="3">
+            <a:schemeClr val="accent1"/>
+          </a:fillRef>
+          <a:effectRef idx="2">
+            <a:schemeClr val="accent1"/>
+          </a:effectRef>
+          <a:fontRef idx="minor">
+            <a:schemeClr val="lt1"/>
+          </a:fontRef>
+        </p:style>
+        <p:txBody>
+          <a:bodyPr rtlCol="0" anchor="ctr"/>
+          <a:lstStyle/>
+          <a:p>
+            <a:pPr algn="ctr"/>
+          </a:p>
+        </p:txBody>
+      </p:sp>
+      <p:sp>
+        <p:nvSpPr>
+          <p:cNvPr id="3" name="TextBox 2"/>
+          <p:cNvSpPr txBox="1"/>
+          <p:nvPr/>
+        </p:nvSpPr>
+        <p:spPr>
+          <a:xfrm>
+            <a:off x="548640" y="91440"/>
+            <a:ext cx="10972800" cy="777240"/>
+          </a:xfrm>
+          <a:prstGeom prst="rect">
+            <a:avLst/>
+          </a:prstGeom>
+          <a:noFill/>
+        </p:spPr>
+        <p:txBody>
+          <a:bodyPr wrap="square">
+            <a:spAutoFit/>
+          </a:bodyPr>
+          <a:lstStyle/>
+          <a:p>
+            <a:pPr algn="l">
+              <a:spcAft>
+                <a:spcPts val="600"/>
+              </a:spcAft>
+            </a:pPr>
+            <a:r>
+              <a:rPr sz="2600" b="1">
+                <a:solidFill>
+                  <a:srgbClr val="FFFFFF"/>
+                </a:solidFill>
+                <a:latin typeface="맑은 고딕"/>
+              </a:rPr>
+              <a:t>예방</a:t>
+            </a:r>
+          </a:p>
+        </p:txBody>
+      </p:sp>
+      <p:sp>
+        <p:nvSpPr>
+          <p:cNvPr id="4" name="TextBox 3"/>
+          <p:cNvSpPr txBox="1"/>
+          <p:nvPr/>
+        </p:nvSpPr>
+        <p:spPr>
+          <a:xfrm>
+            <a:off x="640080" y="1078992"/>
+            <a:ext cx="10881360" cy="457200"/>
+          </a:xfrm>
+          <a:prstGeom prst="rect">
+            <a:avLst/>
+          </a:prstGeom>
+          <a:noFill/>
+        </p:spPr>
+        <p:txBody>
+          <a:bodyPr wrap="square">
+            <a:spAutoFit/>
+          </a:bodyPr>
+          <a:lstStyle/>
+          <a:p>
+            <a:pPr algn="l">
+              <a:spcAft>
+                <a:spcPts val="600"/>
+              </a:spcAft>
+            </a:pPr>
+            <a:r>
+              <a:rPr sz="1500" b="0">
+                <a:solidFill>
+                  <a:srgbClr val="5A6672"/>
+                </a:solidFill>
+                <a:latin typeface="맑은 고딕"/>
+              </a:rPr>
+              <a:t>FORCE LOGGING이 기본 방어선</a:t>
+            </a:r>
+          </a:p>
+        </p:txBody>
+      </p:sp>
+      <p:sp>
+        <p:nvSpPr>
+          <p:cNvPr id="5" name="TextBox 4"/>
+          <p:cNvSpPr txBox="1"/>
+          <p:nvPr/>
+        </p:nvSpPr>
+        <p:spPr>
+          <a:xfrm>
+            <a:off x="640080" y="1737360"/>
+            <a:ext cx="10881360" cy="4754880"/>
+          </a:xfrm>
+          <a:prstGeom prst="rect">
+            <a:avLst/>
+          </a:prstGeom>
+          <a:noFill/>
+        </p:spPr>
+        <p:txBody>
+          <a:bodyPr wrap="square">
+            <a:spAutoFit/>
+          </a:bodyPr>
+          <a:lstStyle/>
+          <a:p>
+            <a:pPr algn="l">
+              <a:spcAft>
+                <a:spcPts val="1000"/>
+              </a:spcAft>
+            </a:pPr>
+            <a:r>
+              <a:rPr sz="1700" b="0">
+                <a:solidFill>
+                  <a:srgbClr val="222222"/>
+                </a:solidFill>
+                <a:latin typeface="맑은 고딕"/>
+              </a:rPr>
+              <a:t>•  Primary FORCE LOGGING: 객체 설정과 무관하게 리두 생성</a:t>
+            </a:r>
+          </a:p>
+          <a:p>
+            <a:pPr algn="l">
+              <a:spcAft>
+                <a:spcPts val="1000"/>
+              </a:spcAft>
+            </a:pPr>
+            <a:r>
+              <a:rPr sz="1700" b="0">
+                <a:solidFill>
+                  <a:srgbClr val="222222"/>
+                </a:solidFill>
+                <a:latin typeface="맑은 고딕"/>
+              </a:rPr>
+              <a:t>•  켠 이후 작업만 보호, 기존 흔적은 별도 복구</a:t>
+            </a:r>
+          </a:p>
+          <a:p>
+            <a:pPr algn="l">
+              <a:spcAft>
+                <a:spcPts val="1000"/>
+              </a:spcAft>
+            </a:pPr>
+            <a:r>
+              <a:rPr sz="1700" b="0">
+                <a:solidFill>
+                  <a:srgbClr val="222222"/>
+                </a:solidFill>
+                <a:latin typeface="맑은 고딕"/>
+              </a:rPr>
+              <a:t>•  CDB 단위 설정, V$DATABASE.FORCE_LOGGING 확인</a:t>
+            </a:r>
+          </a:p>
+          <a:p>
+            <a:pPr algn="l">
+              <a:spcAft>
+                <a:spcPts val="1000"/>
+              </a:spcAft>
+            </a:pPr>
+            <a:r>
+              <a:rPr sz="1700" b="0">
+                <a:solidFill>
+                  <a:srgbClr val="222222"/>
+                </a:solidFill>
+                <a:latin typeface="맑은 고딕"/>
+              </a:rPr>
+              <a:t>•  18c Standby nologging 모드: ADG 옵션 필요</a:t>
+            </a:r>
+          </a:p>
+        </p:txBody>
+      </p:sp>
+    </p:spTree>
+  </p:cSld>
+  <p:clrMapOvr>
+    <a:masterClrMapping/>
+  </p:clrMapOvr>
+</p:sld>
+</file>
+
+<file path=ppt/slides/slide42.xml><?xml version="1.0" encoding="utf-8"?>
+<p:sld xmlns:a="http://schemas.openxmlformats.org/drawingml/2006/main" xmlns:p="http://schemas.openxmlformats.org/presentationml/2006/main" xmlns:r="http://schemas.openxmlformats.org/officeDocument/2006/relationships">
+  <p:cSld>
+    <p:spTree>
+      <p:nvGrpSpPr>
+        <p:cNvPr id="1" name=""/>
+        <p:cNvGrpSpPr/>
+        <p:nvPr/>
+      </p:nvGrpSpPr>
+      <p:grpSpPr/>
+      <p:sp>
+        <p:nvSpPr>
+          <p:cNvPr id="2" name="Rectangle 1"/>
+          <p:cNvSpPr/>
+          <p:nvPr/>
+        </p:nvSpPr>
+        <p:spPr>
+          <a:xfrm>
+            <a:off x="0" y="0"/>
+            <a:ext cx="12191695" cy="6858000"/>
+          </a:xfrm>
+          <a:prstGeom prst="rect">
+            <a:avLst/>
+          </a:prstGeom>
+          <a:solidFill>
+            <a:srgbClr val="C0392B"/>
+          </a:solidFill>
+          <a:ln>
+            <a:noFill/>
+          </a:ln>
+          <a:effectLst/>
+        </p:spPr>
+        <p:style>
+          <a:lnRef idx="1">
+            <a:schemeClr val="accent1"/>
+          </a:lnRef>
+          <a:fillRef idx="3">
+            <a:schemeClr val="accent1"/>
+          </a:fillRef>
+          <a:effectRef idx="2">
+            <a:schemeClr val="accent1"/>
+          </a:effectRef>
+          <a:fontRef idx="minor">
+            <a:schemeClr val="lt1"/>
+          </a:fontRef>
+        </p:style>
+        <p:txBody>
+          <a:bodyPr rtlCol="0" anchor="ctr"/>
+          <a:lstStyle/>
+          <a:p>
+            <a:pPr algn="ctr"/>
+          </a:p>
+        </p:txBody>
+      </p:sp>
+      <p:sp>
+        <p:nvSpPr>
+          <p:cNvPr id="3" name="TextBox 2"/>
+          <p:cNvSpPr txBox="1"/>
+          <p:nvPr/>
+        </p:nvSpPr>
+        <p:spPr>
+          <a:xfrm>
+            <a:off x="822960" y="2011680"/>
+            <a:ext cx="10515600" cy="1097280"/>
+          </a:xfrm>
+          <a:prstGeom prst="rect">
+            <a:avLst/>
+          </a:prstGeom>
+          <a:noFill/>
+        </p:spPr>
+        <p:txBody>
+          <a:bodyPr wrap="square">
+            <a:spAutoFit/>
+          </a:bodyPr>
+          <a:lstStyle/>
+          <a:p>
+            <a:pPr algn="l">
+              <a:spcAft>
+                <a:spcPts val="600"/>
+              </a:spcAft>
+            </a:pPr>
+            <a:r>
+              <a:rPr sz="4000" b="1">
+                <a:solidFill>
+                  <a:srgbClr val="FFFFFF"/>
+                </a:solidFill>
+                <a:latin typeface="맑은 고딕"/>
+              </a:rPr>
+              <a:t>8.9</a:t>
+            </a:r>
+          </a:p>
+        </p:txBody>
+      </p:sp>
+      <p:sp>
+        <p:nvSpPr>
+          <p:cNvPr id="4" name="TextBox 3"/>
+          <p:cNvSpPr txBox="1"/>
+          <p:nvPr/>
+        </p:nvSpPr>
+        <p:spPr>
+          <a:xfrm>
+            <a:off x="822960" y="3017520"/>
+            <a:ext cx="10515600" cy="914400"/>
+          </a:xfrm>
+          <a:prstGeom prst="rect">
+            <a:avLst/>
+          </a:prstGeom>
+          <a:noFill/>
+        </p:spPr>
+        <p:txBody>
+          <a:bodyPr wrap="square">
+            <a:spAutoFit/>
+          </a:bodyPr>
+          <a:lstStyle/>
+          <a:p>
+            <a:pPr algn="l">
+              <a:spcAft>
+                <a:spcPts val="600"/>
+              </a:spcAft>
+            </a:pPr>
+            <a:r>
+              <a:rPr sz="2800" b="1">
+                <a:solidFill>
+                  <a:srgbClr val="FFFFFF"/>
+                </a:solidFill>
+                <a:latin typeface="맑은 고딕"/>
+              </a:rPr>
+              <a:t>리두로 전달되지 않는 것</a:t>
+            </a:r>
+          </a:p>
+        </p:txBody>
+      </p:sp>
+      <p:sp>
+        <p:nvSpPr>
+          <p:cNvPr id="5" name="Rectangle 4"/>
+          <p:cNvSpPr/>
+          <p:nvPr/>
+        </p:nvSpPr>
+        <p:spPr>
+          <a:xfrm>
+            <a:off x="822960" y="4114800"/>
+            <a:ext cx="5486400" cy="54864"/>
+          </a:xfrm>
+          <a:prstGeom prst="rect">
+            <a:avLst/>
+          </a:prstGeom>
+          <a:solidFill>
+            <a:srgbClr val="FFFFFF"/>
+          </a:solidFill>
+          <a:ln>
+            <a:noFill/>
+          </a:ln>
+          <a:effectLst/>
+        </p:spPr>
+        <p:style>
+          <a:lnRef idx="1">
+            <a:schemeClr val="accent1"/>
+          </a:lnRef>
+          <a:fillRef idx="3">
+            <a:schemeClr val="accent1"/>
+          </a:fillRef>
+          <a:effectRef idx="2">
+            <a:schemeClr val="accent1"/>
+          </a:effectRef>
+          <a:fontRef idx="minor">
+            <a:schemeClr val="lt1"/>
+          </a:fontRef>
+        </p:style>
+        <p:txBody>
+          <a:bodyPr rtlCol="0" anchor="ctr"/>
+          <a:lstStyle/>
+          <a:p>
+            <a:pPr algn="ctr"/>
+          </a:p>
+        </p:txBody>
+      </p:sp>
+      <p:sp>
+        <p:nvSpPr>
+          <p:cNvPr id="6" name="TextBox 5"/>
+          <p:cNvSpPr txBox="1"/>
+          <p:nvPr/>
+        </p:nvSpPr>
+        <p:spPr>
+          <a:xfrm>
+            <a:off x="822960" y="4297680"/>
+            <a:ext cx="10058400" cy="2011680"/>
+          </a:xfrm>
+          <a:prstGeom prst="rect">
+            <a:avLst/>
+          </a:prstGeom>
+          <a:noFill/>
+        </p:spPr>
+        <p:txBody>
+          <a:bodyPr wrap="square">
+            <a:spAutoFit/>
+          </a:bodyPr>
+          <a:lstStyle/>
+          <a:p>
+            <a:pPr algn="l">
+              <a:spcAft>
+                <a:spcPts val="800"/>
+              </a:spcAft>
+            </a:pPr>
+            <a:r>
+              <a:rPr sz="1600" b="0">
+                <a:solidFill>
+                  <a:srgbClr val="FFFFFF"/>
+                </a:solidFill>
+                <a:latin typeface="맑은 고딕"/>
+              </a:rPr>
+              <a:t>•  초기화 파라미터</a:t>
+            </a:r>
+          </a:p>
+          <a:p>
+            <a:pPr algn="l">
+              <a:spcAft>
+                <a:spcPts val="800"/>
+              </a:spcAft>
+            </a:pPr>
+            <a:r>
+              <a:rPr sz="1600" b="0">
+                <a:solidFill>
+                  <a:srgbClr val="FFFFFF"/>
+                </a:solidFill>
+                <a:latin typeface="맑은 고딕"/>
+              </a:rPr>
+              <a:t>•  패스워드 파일과 Far Sync</a:t>
+            </a:r>
+          </a:p>
+          <a:p>
+            <a:pPr algn="l">
+              <a:spcAft>
+                <a:spcPts val="800"/>
+              </a:spcAft>
+            </a:pPr>
+            <a:r>
+              <a:rPr sz="1600" b="0">
+                <a:solidFill>
+                  <a:srgbClr val="FFFFFF"/>
+                </a:solidFill>
+                <a:latin typeface="맑은 고딕"/>
+              </a:rPr>
+              <a:t>•  TDE 키스토어와 그 밖의 항목</a:t>
+            </a:r>
+          </a:p>
+        </p:txBody>
+      </p:sp>
+    </p:spTree>
+  </p:cSld>
+  <p:clrMapOvr>
+    <a:masterClrMapping/>
+  </p:clrMapOvr>
+</p:sld>
+</file>
+
+<file path=ppt/slides/slide43.xml><?xml version="1.0" encoding="utf-8"?>
+<p:sld xmlns:a="http://schemas.openxmlformats.org/drawingml/2006/main" xmlns:p="http://schemas.openxmlformats.org/presentationml/2006/main" xmlns:r="http://schemas.openxmlformats.org/officeDocument/2006/relationships">
+  <p:cSld>
+    <p:spTree>
+      <p:nvGrpSpPr>
+        <p:cNvPr id="1" name=""/>
+        <p:cNvGrpSpPr/>
+        <p:nvPr/>
+      </p:nvGrpSpPr>
+      <p:grpSpPr/>
+      <p:sp>
+        <p:nvSpPr>
+          <p:cNvPr id="2" name="Rectangle 1"/>
+          <p:cNvSpPr/>
+          <p:nvPr/>
+        </p:nvSpPr>
+        <p:spPr>
+          <a:xfrm>
+            <a:off x="0" y="0"/>
+            <a:ext cx="12191695" cy="1005840"/>
+          </a:xfrm>
+          <a:prstGeom prst="rect">
+            <a:avLst/>
+          </a:prstGeom>
+          <a:solidFill>
+            <a:srgbClr val="C0392B"/>
+          </a:solidFill>
+          <a:ln>
+            <a:noFill/>
+          </a:ln>
+          <a:effectLst/>
+        </p:spPr>
+        <p:style>
+          <a:lnRef idx="1">
+            <a:schemeClr val="accent1"/>
+          </a:lnRef>
+          <a:fillRef idx="3">
+            <a:schemeClr val="accent1"/>
+          </a:fillRef>
+          <a:effectRef idx="2">
+            <a:schemeClr val="accent1"/>
+          </a:effectRef>
+          <a:fontRef idx="minor">
+            <a:schemeClr val="lt1"/>
+          </a:fontRef>
+        </p:style>
+        <p:txBody>
+          <a:bodyPr rtlCol="0" anchor="ctr"/>
+          <a:lstStyle/>
+          <a:p>
+            <a:pPr algn="ctr"/>
+          </a:p>
+        </p:txBody>
+      </p:sp>
+      <p:sp>
+        <p:nvSpPr>
+          <p:cNvPr id="3" name="TextBox 2"/>
+          <p:cNvSpPr txBox="1"/>
+          <p:nvPr/>
+        </p:nvSpPr>
+        <p:spPr>
+          <a:xfrm>
+            <a:off x="548640" y="91440"/>
+            <a:ext cx="10972800" cy="777240"/>
+          </a:xfrm>
+          <a:prstGeom prst="rect">
+            <a:avLst/>
+          </a:prstGeom>
+          <a:noFill/>
+        </p:spPr>
+        <p:txBody>
+          <a:bodyPr wrap="square">
+            <a:spAutoFit/>
+          </a:bodyPr>
+          <a:lstStyle/>
+          <a:p>
+            <a:pPr algn="l">
+              <a:spcAft>
+                <a:spcPts val="600"/>
+              </a:spcAft>
+            </a:pPr>
+            <a:r>
+              <a:rPr sz="2600" b="1">
+                <a:solidFill>
+                  <a:srgbClr val="FFFFFF"/>
+                </a:solidFill>
+                <a:latin typeface="맑은 고딕"/>
+              </a:rPr>
+              <a:t>초기화 파라미터</a:t>
+            </a:r>
+          </a:p>
+        </p:txBody>
+      </p:sp>
+      <p:sp>
+        <p:nvSpPr>
+          <p:cNvPr id="4" name="TextBox 3"/>
+          <p:cNvSpPr txBox="1"/>
+          <p:nvPr/>
+        </p:nvSpPr>
+        <p:spPr>
+          <a:xfrm>
+            <a:off x="640080" y="1078992"/>
+            <a:ext cx="10881360" cy="457200"/>
+          </a:xfrm>
+          <a:prstGeom prst="rect">
+            <a:avLst/>
+          </a:prstGeom>
+          <a:noFill/>
+        </p:spPr>
+        <p:txBody>
+          <a:bodyPr wrap="square">
+            <a:spAutoFit/>
+          </a:bodyPr>
+          <a:lstStyle/>
+          <a:p>
+            <a:pPr algn="l">
+              <a:spcAft>
+                <a:spcPts val="600"/>
+              </a:spcAft>
+            </a:pPr>
+            <a:r>
+              <a:rPr sz="1500" b="0">
+                <a:solidFill>
+                  <a:srgbClr val="5A6672"/>
+                </a:solidFill>
+                <a:latin typeface="맑은 고딕"/>
+              </a:rPr>
+              <a:t>spfile 변경은 리두에 없다</a:t>
+            </a:r>
+          </a:p>
+        </p:txBody>
+      </p:sp>
+      <p:sp>
+        <p:nvSpPr>
+          <p:cNvPr id="5" name="TextBox 4"/>
+          <p:cNvSpPr txBox="1"/>
+          <p:nvPr/>
+        </p:nvSpPr>
+        <p:spPr>
+          <a:xfrm>
+            <a:off x="640080" y="1737360"/>
+            <a:ext cx="10881360" cy="4754880"/>
+          </a:xfrm>
+          <a:prstGeom prst="rect">
+            <a:avLst/>
+          </a:prstGeom>
+          <a:noFill/>
+        </p:spPr>
+        <p:txBody>
+          <a:bodyPr wrap="square">
+            <a:spAutoFit/>
+          </a:bodyPr>
+          <a:lstStyle/>
+          <a:p>
+            <a:pPr algn="l">
+              <a:spcAft>
+                <a:spcPts val="1000"/>
+              </a:spcAft>
+            </a:pPr>
+            <a:r>
+              <a:rPr sz="1700" b="0">
+                <a:solidFill>
+                  <a:srgbClr val="222222"/>
+                </a:solidFill>
+                <a:latin typeface="맑은 고딕"/>
+              </a:rPr>
+              <a:t>•  Primary의 ALTER SYSTEM은 Standby에 반영 안 됨</a:t>
+            </a:r>
+          </a:p>
+          <a:p>
+            <a:pPr algn="l">
+              <a:spcAft>
+                <a:spcPts val="1000"/>
+              </a:spcAft>
+            </a:pPr>
+            <a:r>
+              <a:rPr sz="1700" b="0">
+                <a:solidFill>
+                  <a:srgbClr val="222222"/>
+                </a:solidFill>
+                <a:latin typeface="맑은 고딕"/>
+              </a:rPr>
+              <a:t>•  같아야 할 값: 메모리, PROCESSES, 옵티마이저</a:t>
+            </a:r>
+          </a:p>
+          <a:p>
+            <a:pPr algn="l">
+              <a:spcAft>
+                <a:spcPts val="1000"/>
+              </a:spcAft>
+            </a:pPr>
+            <a:r>
+              <a:rPr sz="1700" b="0">
+                <a:solidFill>
+                  <a:srgbClr val="222222"/>
+                </a:solidFill>
+                <a:latin typeface="맑은 고딕"/>
+              </a:rPr>
+              <a:t>•  달라야 할 값: DB_UNIQUE_NAME, FAL_SERVER, 목적지</a:t>
+            </a:r>
+          </a:p>
+          <a:p>
+            <a:pPr algn="l">
+              <a:spcAft>
+                <a:spcPts val="1000"/>
+              </a:spcAft>
+            </a:pPr>
+            <a:r>
+              <a:rPr sz="1700" b="0">
+                <a:solidFill>
+                  <a:srgbClr val="222222"/>
+                </a:solidFill>
+                <a:latin typeface="맑은 고딕"/>
+              </a:rPr>
+              <a:t>•  COMPATIBLE은 Standby 먼저, Primary 나중</a:t>
+            </a:r>
+          </a:p>
+        </p:txBody>
+      </p:sp>
+    </p:spTree>
+  </p:cSld>
+  <p:clrMapOvr>
+    <a:masterClrMapping/>
+  </p:clrMapOvr>
+</p:sld>
+</file>
+
+<file path=ppt/slides/slide44.xml><?xml version="1.0" encoding="utf-8"?>
+<p:sld xmlns:a="http://schemas.openxmlformats.org/drawingml/2006/main" xmlns:p="http://schemas.openxmlformats.org/presentationml/2006/main" xmlns:r="http://schemas.openxmlformats.org/officeDocument/2006/relationships">
+  <p:cSld>
+    <p:spTree>
+      <p:nvGrpSpPr>
+        <p:cNvPr id="1" name=""/>
+        <p:cNvGrpSpPr/>
+        <p:nvPr/>
+      </p:nvGrpSpPr>
+      <p:grpSpPr/>
+      <p:sp>
+        <p:nvSpPr>
+          <p:cNvPr id="2" name="Rectangle 1"/>
+          <p:cNvSpPr/>
+          <p:nvPr/>
+        </p:nvSpPr>
+        <p:spPr>
+          <a:xfrm>
+            <a:off x="0" y="0"/>
+            <a:ext cx="12191695" cy="1005840"/>
+          </a:xfrm>
+          <a:prstGeom prst="rect">
+            <a:avLst/>
+          </a:prstGeom>
+          <a:solidFill>
+            <a:srgbClr val="C0392B"/>
+          </a:solidFill>
+          <a:ln>
+            <a:noFill/>
+          </a:ln>
+          <a:effectLst/>
+        </p:spPr>
+        <p:style>
+          <a:lnRef idx="1">
+            <a:schemeClr val="accent1"/>
+          </a:lnRef>
+          <a:fillRef idx="3">
+            <a:schemeClr val="accent1"/>
+          </a:fillRef>
+          <a:effectRef idx="2">
+            <a:schemeClr val="accent1"/>
+          </a:effectRef>
+          <a:fontRef idx="minor">
+            <a:schemeClr val="lt1"/>
+          </a:fontRef>
+        </p:style>
+        <p:txBody>
+          <a:bodyPr rtlCol="0" anchor="ctr"/>
+          <a:lstStyle/>
+          <a:p>
+            <a:pPr algn="ctr"/>
+          </a:p>
+        </p:txBody>
+      </p:sp>
+      <p:sp>
+        <p:nvSpPr>
+          <p:cNvPr id="3" name="TextBox 2"/>
+          <p:cNvSpPr txBox="1"/>
+          <p:nvPr/>
+        </p:nvSpPr>
+        <p:spPr>
+          <a:xfrm>
+            <a:off x="548640" y="91440"/>
+            <a:ext cx="10972800" cy="777240"/>
+          </a:xfrm>
+          <a:prstGeom prst="rect">
+            <a:avLst/>
+          </a:prstGeom>
+          <a:noFill/>
+        </p:spPr>
+        <p:txBody>
+          <a:bodyPr wrap="square">
+            <a:spAutoFit/>
+          </a:bodyPr>
+          <a:lstStyle/>
+          <a:p>
+            <a:pPr algn="l">
+              <a:spcAft>
+                <a:spcPts val="600"/>
+              </a:spcAft>
+            </a:pPr>
+            <a:r>
+              <a:rPr sz="2600" b="1">
+                <a:solidFill>
+                  <a:srgbClr val="FFFFFF"/>
+                </a:solidFill>
+                <a:latin typeface="맑은 고딕"/>
+              </a:rPr>
+              <a:t>패스워드 파일</a:t>
+            </a:r>
+          </a:p>
+        </p:txBody>
+      </p:sp>
+      <p:sp>
+        <p:nvSpPr>
+          <p:cNvPr id="4" name="TextBox 3"/>
+          <p:cNvSpPr txBox="1"/>
+          <p:nvPr/>
+        </p:nvSpPr>
+        <p:spPr>
+          <a:xfrm>
+            <a:off x="640080" y="1078992"/>
+            <a:ext cx="10881360" cy="457200"/>
+          </a:xfrm>
+          <a:prstGeom prst="rect">
+            <a:avLst/>
+          </a:prstGeom>
+          <a:noFill/>
+        </p:spPr>
+        <p:txBody>
+          <a:bodyPr wrap="square">
+            <a:spAutoFit/>
+          </a:bodyPr>
+          <a:lstStyle/>
+          <a:p>
+            <a:pPr algn="l">
+              <a:spcAft>
+                <a:spcPts val="600"/>
+              </a:spcAft>
+            </a:pPr>
+            <a:r>
+              <a:rPr sz="1500" b="0">
+                <a:solidFill>
+                  <a:srgbClr val="5A6672"/>
+                </a:solidFill>
+                <a:latin typeface="맑은 고딕"/>
+              </a:rPr>
+              <a:t>12.2부터 리두로 갱신, Far Sync는 예외</a:t>
+            </a:r>
+          </a:p>
+        </p:txBody>
+      </p:sp>
+      <p:sp>
+        <p:nvSpPr>
+          <p:cNvPr id="5" name="TextBox 4"/>
+          <p:cNvSpPr txBox="1"/>
+          <p:nvPr/>
+        </p:nvSpPr>
+        <p:spPr>
+          <a:xfrm>
+            <a:off x="640080" y="1737360"/>
+            <a:ext cx="10881360" cy="4754880"/>
+          </a:xfrm>
+          <a:prstGeom prst="rect">
+            <a:avLst/>
+          </a:prstGeom>
+          <a:noFill/>
+        </p:spPr>
+        <p:txBody>
+          <a:bodyPr wrap="square">
+            <a:spAutoFit/>
+          </a:bodyPr>
+          <a:lstStyle/>
+          <a:p>
+            <a:pPr algn="l">
+              <a:spcAft>
+                <a:spcPts val="1000"/>
+              </a:spcAft>
+            </a:pPr>
+            <a:r>
+              <a:rPr sz="1700" b="0">
+                <a:solidFill>
+                  <a:srgbClr val="222222"/>
+                </a:solidFill>
+                <a:latin typeface="맑은 고딕"/>
+              </a:rPr>
+              <a:t>•  리두 전송 인증에 패스워드 파일 사용</a:t>
+            </a:r>
+          </a:p>
+          <a:p>
+            <a:pPr algn="l">
+              <a:spcAft>
+                <a:spcPts val="1000"/>
+              </a:spcAft>
+            </a:pPr>
+            <a:r>
+              <a:rPr sz="1700" b="0">
+                <a:solidFill>
+                  <a:srgbClr val="222222"/>
+                </a:solidFill>
+                <a:latin typeface="맑은 고딕"/>
+              </a:rPr>
+              <a:t>•  12.2+: 권한 부여·회수, 암호 변경이 리두로 전달</a:t>
+            </a:r>
+          </a:p>
+          <a:p>
+            <a:pPr algn="l">
+              <a:spcAft>
+                <a:spcPts val="1000"/>
+              </a:spcAft>
+            </a:pPr>
+            <a:r>
+              <a:rPr sz="1700" b="0">
+                <a:solidFill>
+                  <a:srgbClr val="222222"/>
+                </a:solidFill>
+                <a:latin typeface="맑은 고딕"/>
+              </a:rPr>
+              <a:t>•  Far Sync는 적용하지 않으므로 수동 복사</a:t>
+            </a:r>
+          </a:p>
+          <a:p>
+            <a:pPr algn="l">
+              <a:spcAft>
+                <a:spcPts val="1000"/>
+              </a:spcAft>
+            </a:pPr>
+            <a:r>
+              <a:rPr sz="1700" b="0">
+                <a:solidFill>
+                  <a:srgbClr val="222222"/>
+                </a:solidFill>
+                <a:latin typeface="맑은 고딕"/>
+              </a:rPr>
+              <a:t>•  적용이 밀린 Standby는 변경을 아직 모름</a:t>
+            </a:r>
+          </a:p>
+        </p:txBody>
+      </p:sp>
+    </p:spTree>
+  </p:cSld>
+  <p:clrMapOvr>
+    <a:masterClrMapping/>
+  </p:clrMapOvr>
+</p:sld>
+</file>
+
+<file path=ppt/slides/slide45.xml><?xml version="1.0" encoding="utf-8"?>
+<p:sld xmlns:a="http://schemas.openxmlformats.org/drawingml/2006/main" xmlns:p="http://schemas.openxmlformats.org/presentationml/2006/main" xmlns:r="http://schemas.openxmlformats.org/officeDocument/2006/relationships">
+  <p:cSld>
+    <p:spTree>
+      <p:nvGrpSpPr>
+        <p:cNvPr id="1" name=""/>
+        <p:cNvGrpSpPr/>
+        <p:nvPr/>
+      </p:nvGrpSpPr>
+      <p:grpSpPr/>
+      <p:sp>
+        <p:nvSpPr>
+          <p:cNvPr id="2" name="Rectangle 1"/>
+          <p:cNvSpPr/>
+          <p:nvPr/>
+        </p:nvSpPr>
+        <p:spPr>
+          <a:xfrm>
+            <a:off x="0" y="0"/>
+            <a:ext cx="12191695" cy="1005840"/>
+          </a:xfrm>
+          <a:prstGeom prst="rect">
+            <a:avLst/>
+          </a:prstGeom>
+          <a:solidFill>
+            <a:srgbClr val="C0392B"/>
+          </a:solidFill>
+          <a:ln>
+            <a:noFill/>
+          </a:ln>
+          <a:effectLst/>
+        </p:spPr>
+        <p:style>
+          <a:lnRef idx="1">
+            <a:schemeClr val="accent1"/>
+          </a:lnRef>
+          <a:fillRef idx="3">
+            <a:schemeClr val="accent1"/>
+          </a:fillRef>
+          <a:effectRef idx="2">
+            <a:schemeClr val="accent1"/>
+          </a:effectRef>
+          <a:fontRef idx="minor">
+            <a:schemeClr val="lt1"/>
+          </a:fontRef>
+        </p:style>
+        <p:txBody>
+          <a:bodyPr rtlCol="0" anchor="ctr"/>
+          <a:lstStyle/>
+          <a:p>
+            <a:pPr algn="ctr"/>
+          </a:p>
+        </p:txBody>
+      </p:sp>
+      <p:sp>
+        <p:nvSpPr>
+          <p:cNvPr id="3" name="TextBox 2"/>
+          <p:cNvSpPr txBox="1"/>
+          <p:nvPr/>
+        </p:nvSpPr>
+        <p:spPr>
+          <a:xfrm>
+            <a:off x="548640" y="91440"/>
+            <a:ext cx="10972800" cy="777240"/>
+          </a:xfrm>
+          <a:prstGeom prst="rect">
+            <a:avLst/>
+          </a:prstGeom>
+          <a:noFill/>
+        </p:spPr>
+        <p:txBody>
+          <a:bodyPr wrap="square">
+            <a:spAutoFit/>
+          </a:bodyPr>
+          <a:lstStyle/>
+          <a:p>
+            <a:pPr algn="l">
+              <a:spcAft>
+                <a:spcPts val="600"/>
+              </a:spcAft>
+            </a:pPr>
+            <a:r>
+              <a:rPr sz="2600" b="1">
+                <a:solidFill>
+                  <a:srgbClr val="FFFFFF"/>
+                </a:solidFill>
+                <a:latin typeface="맑은 고딕"/>
+              </a:rPr>
+              <a:t>TDE 키스토어</a:t>
+            </a:r>
+          </a:p>
+        </p:txBody>
+      </p:sp>
+      <p:sp>
+        <p:nvSpPr>
+          <p:cNvPr id="4" name="TextBox 3"/>
+          <p:cNvSpPr txBox="1"/>
+          <p:nvPr/>
+        </p:nvSpPr>
+        <p:spPr>
+          <a:xfrm>
+            <a:off x="640080" y="1078992"/>
+            <a:ext cx="10881360" cy="457200"/>
+          </a:xfrm>
+          <a:prstGeom prst="rect">
+            <a:avLst/>
+          </a:prstGeom>
+          <a:noFill/>
+        </p:spPr>
+        <p:txBody>
+          <a:bodyPr wrap="square">
+            <a:spAutoFit/>
+          </a:bodyPr>
+          <a:lstStyle/>
+          <a:p>
+            <a:pPr algn="l">
+              <a:spcAft>
+                <a:spcPts val="600"/>
+              </a:spcAft>
+            </a:pPr>
+            <a:r>
+              <a:rPr sz="1500" b="0">
+                <a:solidFill>
+                  <a:srgbClr val="5A6672"/>
+                </a:solidFill>
+                <a:latin typeface="맑은 고딕"/>
+              </a:rPr>
+              <a:t>암호화된 리두는 가지만 키는 가지 않는다</a:t>
+            </a:r>
+          </a:p>
+        </p:txBody>
+      </p:sp>
+      <p:sp>
+        <p:nvSpPr>
+          <p:cNvPr id="5" name="TextBox 4"/>
+          <p:cNvSpPr txBox="1"/>
+          <p:nvPr/>
+        </p:nvSpPr>
+        <p:spPr>
+          <a:xfrm>
+            <a:off x="640080" y="1737360"/>
+            <a:ext cx="10881360" cy="4754880"/>
+          </a:xfrm>
+          <a:prstGeom prst="rect">
+            <a:avLst/>
+          </a:prstGeom>
+          <a:noFill/>
+        </p:spPr>
+        <p:txBody>
+          <a:bodyPr wrap="square">
+            <a:spAutoFit/>
+          </a:bodyPr>
+          <a:lstStyle/>
+          <a:p>
+            <a:pPr algn="l">
+              <a:spcAft>
+                <a:spcPts val="1000"/>
+              </a:spcAft>
+            </a:pPr>
+            <a:r>
+              <a:rPr sz="1700" b="0">
+                <a:solidFill>
+                  <a:srgbClr val="222222"/>
+                </a:solidFill>
+                <a:latin typeface="맑은 고딕"/>
+              </a:rPr>
+              <a:t>•  암호화 데이터는 리두에도 암호화된 채 전달</a:t>
+            </a:r>
+          </a:p>
+          <a:p>
+            <a:pPr algn="l">
+              <a:spcAft>
+                <a:spcPts val="1000"/>
+              </a:spcAft>
+            </a:pPr>
+            <a:r>
+              <a:rPr sz="1700" b="0">
+                <a:solidFill>
+                  <a:srgbClr val="222222"/>
+                </a:solidFill>
+                <a:latin typeface="맑은 고딕"/>
+              </a:rPr>
+              <a:t>•  마스터 키는 데이터베이스 밖 키스토어 파일에</a:t>
+            </a:r>
+          </a:p>
+          <a:p>
+            <a:pPr algn="l">
+              <a:spcAft>
+                <a:spcPts val="1000"/>
+              </a:spcAft>
+            </a:pPr>
+            <a:r>
+              <a:rPr sz="1700" b="0">
+                <a:solidFill>
+                  <a:srgbClr val="222222"/>
+                </a:solidFill>
+                <a:latin typeface="맑은 고딕"/>
+              </a:rPr>
+              <a:t>•  SET KEY로 키 재설정 후 Standby에 키스토어 복사</a:t>
+            </a:r>
+          </a:p>
+          <a:p>
+            <a:pPr algn="l">
+              <a:spcAft>
+                <a:spcPts val="1000"/>
+              </a:spcAft>
+            </a:pPr>
+            <a:r>
+              <a:rPr sz="1700" b="0">
+                <a:solidFill>
+                  <a:srgbClr val="222222"/>
+                </a:solidFill>
+                <a:latin typeface="맑은 고딕"/>
+              </a:rPr>
+              <a:t>•  자동 로그인 키스토어(cwallet.sso)도 함께</a:t>
+            </a:r>
+          </a:p>
+          <a:p>
+            <a:pPr algn="l">
+              <a:spcAft>
+                <a:spcPts val="1000"/>
+              </a:spcAft>
+            </a:pPr>
+            <a:r>
+              <a:rPr sz="1700" b="0">
+                <a:solidFill>
+                  <a:srgbClr val="222222"/>
+                </a:solidFill>
+                <a:latin typeface="맑은 고딕"/>
+              </a:rPr>
+              <a:t>•  외부 키 관리(OKV)면 복사 불필요</a:t>
+            </a:r>
+          </a:p>
+        </p:txBody>
+      </p:sp>
+    </p:spTree>
+  </p:cSld>
+  <p:clrMapOvr>
+    <a:masterClrMapping/>
+  </p:clrMapOvr>
+</p:sld>
+</file>
+
+<file path=ppt/slides/slide46.xml><?xml version="1.0" encoding="utf-8"?>
+<p:sld xmlns:a="http://schemas.openxmlformats.org/drawingml/2006/main" xmlns:p="http://schemas.openxmlformats.org/presentationml/2006/main" xmlns:r="http://schemas.openxmlformats.org/officeDocument/2006/relationships">
+  <p:cSld>
+    <p:spTree>
+      <p:nvGrpSpPr>
+        <p:cNvPr id="1" name=""/>
+        <p:cNvGrpSpPr/>
+        <p:nvPr/>
+      </p:nvGrpSpPr>
+      <p:grpSpPr/>
+      <p:sp>
+        <p:nvSpPr>
+          <p:cNvPr id="2" name="Rectangle 1"/>
+          <p:cNvSpPr/>
+          <p:nvPr/>
+        </p:nvSpPr>
+        <p:spPr>
+          <a:xfrm>
+            <a:off x="0" y="0"/>
+            <a:ext cx="12191695" cy="1005840"/>
+          </a:xfrm>
+          <a:prstGeom prst="rect">
+            <a:avLst/>
+          </a:prstGeom>
+          <a:solidFill>
+            <a:srgbClr val="C0392B"/>
+          </a:solidFill>
+          <a:ln>
+            <a:noFill/>
+          </a:ln>
+          <a:effectLst/>
+        </p:spPr>
+        <p:style>
+          <a:lnRef idx="1">
+            <a:schemeClr val="accent1"/>
+          </a:lnRef>
+          <a:fillRef idx="3">
+            <a:schemeClr val="accent1"/>
+          </a:fillRef>
+          <a:effectRef idx="2">
+            <a:schemeClr val="accent1"/>
+          </a:effectRef>
+          <a:fontRef idx="minor">
+            <a:schemeClr val="lt1"/>
+          </a:fontRef>
+        </p:style>
+        <p:txBody>
+          <a:bodyPr rtlCol="0" anchor="ctr"/>
+          <a:lstStyle/>
+          <a:p>
+            <a:pPr algn="ctr"/>
+          </a:p>
+        </p:txBody>
+      </p:sp>
+      <p:sp>
+        <p:nvSpPr>
+          <p:cNvPr id="3" name="TextBox 2"/>
+          <p:cNvSpPr txBox="1"/>
+          <p:nvPr/>
+        </p:nvSpPr>
+        <p:spPr>
+          <a:xfrm>
+            <a:off x="548640" y="91440"/>
+            <a:ext cx="10972800" cy="777240"/>
+          </a:xfrm>
+          <a:prstGeom prst="rect">
+            <a:avLst/>
+          </a:prstGeom>
+          <a:noFill/>
+        </p:spPr>
+        <p:txBody>
+          <a:bodyPr wrap="square">
+            <a:spAutoFit/>
+          </a:bodyPr>
+          <a:lstStyle/>
+          <a:p>
+            <a:pPr algn="l">
+              <a:spcAft>
+                <a:spcPts val="600"/>
+              </a:spcAft>
+            </a:pPr>
+            <a:r>
+              <a:rPr sz="2600" b="1">
+                <a:solidFill>
+                  <a:srgbClr val="FFFFFF"/>
+                </a:solidFill>
+                <a:latin typeface="맑은 고딕"/>
+              </a:rPr>
+              <a:t>그 밖의 항목과 점검표</a:t>
+            </a:r>
+          </a:p>
+        </p:txBody>
+      </p:sp>
+      <p:sp>
+        <p:nvSpPr>
+          <p:cNvPr id="4" name="TextBox 3"/>
+          <p:cNvSpPr txBox="1"/>
+          <p:nvPr/>
+        </p:nvSpPr>
+        <p:spPr>
+          <a:xfrm>
+            <a:off x="640080" y="1078992"/>
+            <a:ext cx="10881360" cy="457200"/>
+          </a:xfrm>
+          <a:prstGeom prst="rect">
+            <a:avLst/>
+          </a:prstGeom>
+          <a:noFill/>
+        </p:spPr>
+        <p:txBody>
+          <a:bodyPr wrap="square">
+            <a:spAutoFit/>
+          </a:bodyPr>
+          <a:lstStyle/>
+          <a:p>
+            <a:pPr algn="l">
+              <a:spcAft>
+                <a:spcPts val="600"/>
+              </a:spcAft>
+            </a:pPr>
+            <a:r>
+              <a:rPr sz="1500" b="0">
+                <a:solidFill>
+                  <a:srgbClr val="5A6672"/>
+                </a:solidFill>
+                <a:latin typeface="맑은 고딕"/>
+              </a:rPr>
+              <a:t>역할 전환 연습 때마다 비교</a:t>
+            </a:r>
+          </a:p>
+        </p:txBody>
+      </p:sp>
+      <p:sp>
+        <p:nvSpPr>
+          <p:cNvPr id="5" name="TextBox 4"/>
+          <p:cNvSpPr txBox="1"/>
+          <p:nvPr/>
+        </p:nvSpPr>
+        <p:spPr>
+          <a:xfrm>
+            <a:off x="640080" y="1737360"/>
+            <a:ext cx="10881360" cy="4754880"/>
+          </a:xfrm>
+          <a:prstGeom prst="rect">
+            <a:avLst/>
+          </a:prstGeom>
+          <a:noFill/>
+        </p:spPr>
+        <p:txBody>
+          <a:bodyPr wrap="square">
+            <a:spAutoFit/>
+          </a:bodyPr>
+          <a:lstStyle/>
+          <a:p>
+            <a:pPr algn="l">
+              <a:spcAft>
+                <a:spcPts val="1000"/>
+              </a:spcAft>
+            </a:pPr>
+            <a:r>
+              <a:rPr sz="1700" b="0">
+                <a:solidFill>
+                  <a:srgbClr val="222222"/>
+                </a:solidFill>
+                <a:latin typeface="맑은 고딕"/>
+              </a:rPr>
+              <a:t>•  CREATE CONTROLFILE 후 Standby 컨트롤 파일 재생성</a:t>
+            </a:r>
+          </a:p>
+          <a:p>
+            <a:pPr algn="l">
+              <a:spcAft>
+                <a:spcPts val="1000"/>
+              </a:spcAft>
+            </a:pPr>
+            <a:r>
+              <a:rPr sz="1700" b="0">
+                <a:solidFill>
+                  <a:srgbClr val="222222"/>
+                </a:solidFill>
+                <a:latin typeface="맑은 고딕"/>
+              </a:rPr>
+              <a:t>•  tnsnames.ora, listener.ora, OS 사용자와 권한</a:t>
+            </a:r>
+          </a:p>
+          <a:p>
+            <a:pPr algn="l">
+              <a:spcAft>
+                <a:spcPts val="1000"/>
+              </a:spcAft>
+            </a:pPr>
+            <a:r>
+              <a:rPr sz="1700" b="0">
+                <a:solidFill>
+                  <a:srgbClr val="222222"/>
+                </a:solidFill>
+                <a:latin typeface="맑은 고딕"/>
+              </a:rPr>
+              <a:t>•  점검: 성능 파라미터, COMPATIBLE</a:t>
+            </a:r>
+          </a:p>
+          <a:p>
+            <a:pPr algn="l">
+              <a:spcAft>
+                <a:spcPts val="1000"/>
+              </a:spcAft>
+            </a:pPr>
+            <a:r>
+              <a:rPr sz="1700" b="0">
+                <a:solidFill>
+                  <a:srgbClr val="222222"/>
+                </a:solidFill>
+                <a:latin typeface="맑은 고딕"/>
+              </a:rPr>
+              <a:t>•  점검: V$PWFILE_USERS, 키스토어 갱신 시각</a:t>
+            </a:r>
+          </a:p>
+          <a:p>
+            <a:pPr algn="l">
+              <a:spcAft>
+                <a:spcPts val="1000"/>
+              </a:spcAft>
+            </a:pPr>
+            <a:r>
+              <a:rPr sz="1700" b="0">
+                <a:solidFill>
+                  <a:srgbClr val="222222"/>
+                </a:solidFill>
+                <a:latin typeface="맑은 고딕"/>
+              </a:rPr>
+              <a:t>•  점검: ORL·SRL 구성, 임시 파일</a:t>
+            </a:r>
+          </a:p>
+        </p:txBody>
+      </p:sp>
+    </p:spTree>
+  </p:cSld>
+  <p:clrMapOvr>
+    <a:masterClrMapping/>
+  </p:clrMapOvr>
+</p:sld>
+</file>
+
+<file path=ppt/slides/slide47.xml><?xml version="1.0" encoding="utf-8"?>
+<p:sld xmlns:a="http://schemas.openxmlformats.org/drawingml/2006/main" xmlns:p="http://schemas.openxmlformats.org/presentationml/2006/main" xmlns:r="http://schemas.openxmlformats.org/officeDocument/2006/relationships">
+  <p:cSld>
+    <p:spTree>
+      <p:nvGrpSpPr>
+        <p:cNvPr id="1" name=""/>
+        <p:cNvGrpSpPr/>
+        <p:nvPr/>
+      </p:nvGrpSpPr>
+      <p:grpSpPr/>
+      <p:sp>
+        <p:nvSpPr>
+          <p:cNvPr id="2" name="Rectangle 1"/>
+          <p:cNvSpPr/>
+          <p:nvPr/>
+        </p:nvSpPr>
+        <p:spPr>
+          <a:xfrm>
+            <a:off x="0" y="0"/>
+            <a:ext cx="12191695" cy="6858000"/>
+          </a:xfrm>
+          <a:prstGeom prst="rect">
+            <a:avLst/>
+          </a:prstGeom>
+          <a:solidFill>
+            <a:srgbClr val="C0392B"/>
+          </a:solidFill>
+          <a:ln>
+            <a:noFill/>
+          </a:ln>
+          <a:effectLst/>
+        </p:spPr>
+        <p:style>
+          <a:lnRef idx="1">
+            <a:schemeClr val="accent1"/>
+          </a:lnRef>
+          <a:fillRef idx="3">
+            <a:schemeClr val="accent1"/>
+          </a:fillRef>
+          <a:effectRef idx="2">
+            <a:schemeClr val="accent1"/>
+          </a:effectRef>
+          <a:fontRef idx="minor">
+            <a:schemeClr val="lt1"/>
+          </a:fontRef>
+        </p:style>
+        <p:txBody>
+          <a:bodyPr rtlCol="0" anchor="ctr"/>
+          <a:lstStyle/>
+          <a:p>
+            <a:pPr algn="ctr"/>
+          </a:p>
+        </p:txBody>
+      </p:sp>
+      <p:sp>
+        <p:nvSpPr>
+          <p:cNvPr id="3" name="TextBox 2"/>
+          <p:cNvSpPr txBox="1"/>
+          <p:nvPr/>
+        </p:nvSpPr>
+        <p:spPr>
+          <a:xfrm>
+            <a:off x="822960" y="2011680"/>
+            <a:ext cx="10515600" cy="1097280"/>
+          </a:xfrm>
+          <a:prstGeom prst="rect">
+            <a:avLst/>
+          </a:prstGeom>
+          <a:noFill/>
+        </p:spPr>
+        <p:txBody>
+          <a:bodyPr wrap="square">
+            <a:spAutoFit/>
+          </a:bodyPr>
+          <a:lstStyle/>
+          <a:p>
+            <a:pPr algn="l">
+              <a:spcAft>
+                <a:spcPts val="600"/>
+              </a:spcAft>
+            </a:pPr>
+            <a:r>
+              <a:rPr sz="4000" b="1">
+                <a:solidFill>
+                  <a:srgbClr val="FFFFFF"/>
+                </a:solidFill>
+                <a:latin typeface="맑은 고딕"/>
+              </a:rPr>
+              <a:t>8.10</a:t>
+            </a:r>
+          </a:p>
+        </p:txBody>
+      </p:sp>
+      <p:sp>
+        <p:nvSpPr>
+          <p:cNvPr id="4" name="TextBox 3"/>
+          <p:cNvSpPr txBox="1"/>
+          <p:nvPr/>
+        </p:nvSpPr>
+        <p:spPr>
+          <a:xfrm>
+            <a:off x="822960" y="3017520"/>
+            <a:ext cx="10515600" cy="914400"/>
+          </a:xfrm>
+          <a:prstGeom prst="rect">
+            <a:avLst/>
+          </a:prstGeom>
+          <a:noFill/>
+        </p:spPr>
+        <p:txBody>
+          <a:bodyPr wrap="square">
+            <a:spAutoFit/>
+          </a:bodyPr>
+          <a:lstStyle/>
+          <a:p>
+            <a:pPr algn="l">
+              <a:spcAft>
+                <a:spcPts val="600"/>
+              </a:spcAft>
+            </a:pPr>
+            <a:r>
+              <a:rPr sz="2800" b="1">
+                <a:solidFill>
+                  <a:srgbClr val="FFFFFF"/>
+                </a:solidFill>
+                <a:latin typeface="맑은 고딕"/>
+              </a:rPr>
+              <a:t>운영 시 주의점</a:t>
+            </a:r>
+          </a:p>
+        </p:txBody>
+      </p:sp>
+      <p:sp>
+        <p:nvSpPr>
+          <p:cNvPr id="5" name="Rectangle 4"/>
+          <p:cNvSpPr/>
+          <p:nvPr/>
+        </p:nvSpPr>
+        <p:spPr>
+          <a:xfrm>
+            <a:off x="822960" y="4114800"/>
+            <a:ext cx="5486400" cy="54864"/>
+          </a:xfrm>
+          <a:prstGeom prst="rect">
+            <a:avLst/>
+          </a:prstGeom>
+          <a:solidFill>
+            <a:srgbClr val="FFFFFF"/>
+          </a:solidFill>
+          <a:ln>
+            <a:noFill/>
+          </a:ln>
+          <a:effectLst/>
+        </p:spPr>
+        <p:style>
+          <a:lnRef idx="1">
+            <a:schemeClr val="accent1"/>
+          </a:lnRef>
+          <a:fillRef idx="3">
+            <a:schemeClr val="accent1"/>
+          </a:fillRef>
+          <a:effectRef idx="2">
+            <a:schemeClr val="accent1"/>
+          </a:effectRef>
+          <a:fontRef idx="minor">
+            <a:schemeClr val="lt1"/>
+          </a:fontRef>
+        </p:style>
+        <p:txBody>
+          <a:bodyPr rtlCol="0" anchor="ctr"/>
+          <a:lstStyle/>
+          <a:p>
+            <a:pPr algn="ctr"/>
+          </a:p>
+        </p:txBody>
+      </p:sp>
+      <p:sp>
+        <p:nvSpPr>
+          <p:cNvPr id="6" name="TextBox 5"/>
+          <p:cNvSpPr txBox="1"/>
+          <p:nvPr/>
+        </p:nvSpPr>
+        <p:spPr>
+          <a:xfrm>
+            <a:off x="822960" y="4297680"/>
+            <a:ext cx="10058400" cy="2011680"/>
+          </a:xfrm>
+          <a:prstGeom prst="rect">
+            <a:avLst/>
+          </a:prstGeom>
+          <a:noFill/>
+        </p:spPr>
+        <p:txBody>
+          <a:bodyPr wrap="square">
+            <a:spAutoFit/>
+          </a:bodyPr>
+          <a:lstStyle/>
+          <a:p>
+            <a:pPr algn="l">
+              <a:spcAft>
+                <a:spcPts val="800"/>
+              </a:spcAft>
+            </a:pPr>
+            <a:r>
+              <a:rPr sz="1600" b="0">
+                <a:solidFill>
+                  <a:srgbClr val="FFFFFF"/>
+                </a:solidFill>
+                <a:latin typeface="맑은 고딕"/>
+              </a:rPr>
+              <a:t>•  구조 변경 계획서에 Standby 단계</a:t>
+            </a:r>
+          </a:p>
+          <a:p>
+            <a:pPr algn="l">
+              <a:spcAft>
+                <a:spcPts val="800"/>
+              </a:spcAft>
+            </a:pPr>
+            <a:r>
+              <a:rPr sz="1600" b="0">
+                <a:solidFill>
+                  <a:srgbClr val="FFFFFF"/>
+                </a:solidFill>
+                <a:latin typeface="맑은 고딕"/>
+              </a:rPr>
+              <a:t>•  양쪽 AUTO, Standby에서 확인</a:t>
+            </a:r>
+          </a:p>
+          <a:p>
+            <a:pPr algn="l">
+              <a:spcAft>
+                <a:spcPts val="800"/>
+              </a:spcAft>
+            </a:pPr>
+            <a:r>
+              <a:rPr sz="1600" b="0">
+                <a:solidFill>
+                  <a:srgbClr val="FFFFFF"/>
+                </a:solidFill>
+                <a:latin typeface="맑은 고딕"/>
+              </a:rPr>
+              <a:t>•  리두 밖 항목은 전환 연습 때 비교</a:t>
+            </a:r>
+          </a:p>
+        </p:txBody>
+      </p:sp>
+    </p:spTree>
+  </p:cSld>
+  <p:clrMapOvr>
+    <a:masterClrMapping/>
+  </p:clrMapOvr>
+</p:sld>
+</file>
+
+<file path=ppt/slides/slide48.xml><?xml version="1.0" encoding="utf-8"?>
+<p:sld xmlns:a="http://schemas.openxmlformats.org/drawingml/2006/main" xmlns:p="http://schemas.openxmlformats.org/presentationml/2006/main" xmlns:r="http://schemas.openxmlformats.org/officeDocument/2006/relationships">
+  <p:cSld>
+    <p:spTree>
+      <p:nvGrpSpPr>
+        <p:cNvPr id="1" name=""/>
+        <p:cNvGrpSpPr/>
+        <p:nvPr/>
+      </p:nvGrpSpPr>
+      <p:grpSpPr/>
+      <p:sp>
+        <p:nvSpPr>
+          <p:cNvPr id="2" name="Rectangle 1"/>
+          <p:cNvSpPr/>
+          <p:nvPr/>
+        </p:nvSpPr>
+        <p:spPr>
+          <a:xfrm>
+            <a:off x="0" y="0"/>
+            <a:ext cx="12191695" cy="1005840"/>
+          </a:xfrm>
+          <a:prstGeom prst="rect">
+            <a:avLst/>
+          </a:prstGeom>
+          <a:solidFill>
+            <a:srgbClr val="C0392B"/>
+          </a:solidFill>
+          <a:ln>
+            <a:noFill/>
+          </a:ln>
+          <a:effectLst/>
+        </p:spPr>
+        <p:style>
+          <a:lnRef idx="1">
+            <a:schemeClr val="accent1"/>
+          </a:lnRef>
+          <a:fillRef idx="3">
+            <a:schemeClr val="accent1"/>
+          </a:fillRef>
+          <a:effectRef idx="2">
+            <a:schemeClr val="accent1"/>
+          </a:effectRef>
+          <a:fontRef idx="minor">
+            <a:schemeClr val="lt1"/>
+          </a:fontRef>
+        </p:style>
+        <p:txBody>
+          <a:bodyPr rtlCol="0" anchor="ctr"/>
+          <a:lstStyle/>
+          <a:p>
+            <a:pPr algn="ctr"/>
+          </a:p>
+        </p:txBody>
+      </p:sp>
+      <p:sp>
+        <p:nvSpPr>
+          <p:cNvPr id="3" name="TextBox 2"/>
+          <p:cNvSpPr txBox="1"/>
+          <p:nvPr/>
+        </p:nvSpPr>
+        <p:spPr>
+          <a:xfrm>
+            <a:off x="548640" y="91440"/>
+            <a:ext cx="10972800" cy="777240"/>
+          </a:xfrm>
+          <a:prstGeom prst="rect">
+            <a:avLst/>
+          </a:prstGeom>
+          <a:noFill/>
+        </p:spPr>
+        <p:txBody>
+          <a:bodyPr wrap="square">
+            <a:spAutoFit/>
+          </a:bodyPr>
+          <a:lstStyle/>
+          <a:p>
+            <a:pPr algn="l">
+              <a:spcAft>
+                <a:spcPts val="600"/>
+              </a:spcAft>
+            </a:pPr>
+            <a:r>
+              <a:rPr sz="2600" b="1">
+                <a:solidFill>
+                  <a:srgbClr val="FFFFFF"/>
+                </a:solidFill>
+                <a:latin typeface="맑은 고딕"/>
+              </a:rPr>
+              <a:t>운영 시 주의점</a:t>
+            </a:r>
+          </a:p>
+        </p:txBody>
+      </p:sp>
+      <p:sp>
+        <p:nvSpPr>
+          <p:cNvPr id="4" name="TextBox 3"/>
+          <p:cNvSpPr txBox="1"/>
+          <p:nvPr/>
+        </p:nvSpPr>
+        <p:spPr>
+          <a:xfrm>
+            <a:off x="640080" y="1078992"/>
+            <a:ext cx="10881360" cy="457200"/>
+          </a:xfrm>
+          <a:prstGeom prst="rect">
+            <a:avLst/>
+          </a:prstGeom>
+          <a:noFill/>
+        </p:spPr>
+        <p:txBody>
+          <a:bodyPr wrap="square">
+            <a:spAutoFit/>
+          </a:bodyPr>
+          <a:lstStyle/>
+          <a:p>
+            <a:pPr algn="l">
+              <a:spcAft>
+                <a:spcPts val="600"/>
+              </a:spcAft>
+            </a:pPr>
+            <a:r>
+              <a:rPr sz="1500" b="0">
+                <a:solidFill>
+                  <a:srgbClr val="5A6672"/>
+                </a:solidFill>
+                <a:latin typeface="맑은 고딕"/>
+              </a:rPr>
+              <a:t>자동 반영에도 사람의 확인이 필요하다</a:t>
+            </a:r>
+          </a:p>
+        </p:txBody>
+      </p:sp>
+      <p:sp>
+        <p:nvSpPr>
+          <p:cNvPr id="5" name="TextBox 4"/>
+          <p:cNvSpPr txBox="1"/>
+          <p:nvPr/>
+        </p:nvSpPr>
+        <p:spPr>
+          <a:xfrm>
+            <a:off x="640080" y="1737360"/>
+            <a:ext cx="10881360" cy="4754880"/>
+          </a:xfrm>
+          <a:prstGeom prst="rect">
+            <a:avLst/>
+          </a:prstGeom>
+          <a:noFill/>
+        </p:spPr>
+        <p:txBody>
+          <a:bodyPr wrap="square">
+            <a:spAutoFit/>
+          </a:bodyPr>
+          <a:lstStyle/>
+          <a:p>
+            <a:pPr algn="l">
+              <a:spcAft>
+                <a:spcPts val="1000"/>
+              </a:spcAft>
+            </a:pPr>
+            <a:r>
+              <a:rPr sz="1700" b="0">
+                <a:solidFill>
+                  <a:srgbClr val="222222"/>
+                </a:solidFill>
+                <a:latin typeface="맑은 고딕"/>
+              </a:rPr>
+              <a:t>•  구조 변경 계획서에 Standby 확인 단계 포함</a:t>
+            </a:r>
+          </a:p>
+          <a:p>
+            <a:pPr algn="l">
+              <a:spcAft>
+                <a:spcPts val="1000"/>
+              </a:spcAft>
+            </a:pPr>
+            <a:r>
+              <a:rPr sz="1700" b="0">
+                <a:solidFill>
+                  <a:srgbClr val="222222"/>
+                </a:solidFill>
+                <a:latin typeface="맑은 고딕"/>
+              </a:rPr>
+              <a:t>•  양쪽 AUTO, 값은 Standby에서 조회</a:t>
+            </a:r>
+          </a:p>
+          <a:p>
+            <a:pPr algn="l">
+              <a:spcAft>
+                <a:spcPts val="1000"/>
+              </a:spcAft>
+            </a:pPr>
+            <a:r>
+              <a:rPr sz="1700" b="0">
+                <a:solidFill>
+                  <a:srgbClr val="222222"/>
+                </a:solidFill>
+                <a:latin typeface="맑은 고딕"/>
+              </a:rPr>
+              <a:t>•  경로 방식 Standby는 새 디렉터리마다 규칙 점검</a:t>
+            </a:r>
+          </a:p>
+          <a:p>
+            <a:pPr algn="l">
+              <a:spcAft>
+                <a:spcPts val="1000"/>
+              </a:spcAft>
+            </a:pPr>
+            <a:r>
+              <a:rPr sz="1700" b="0">
+                <a:solidFill>
+                  <a:srgbClr val="222222"/>
+                </a:solidFill>
+                <a:latin typeface="맑은 고딕"/>
+              </a:rPr>
+              <a:t>•  로그 구성 변경은 네 군데를 한 작업으로</a:t>
+            </a:r>
+          </a:p>
+          <a:p>
+            <a:pPr algn="l">
+              <a:spcAft>
+                <a:spcPts val="1000"/>
+              </a:spcAft>
+            </a:pPr>
+            <a:r>
+              <a:rPr sz="1700" b="0">
+                <a:solidFill>
+                  <a:srgbClr val="222222"/>
+                </a:solidFill>
+                <a:latin typeface="맑은 고딕"/>
+              </a:rPr>
+              <a:t>•  FORCE LOGGING과 UNRECOVERABLE_CHANGE# 정기 점검</a:t>
+            </a:r>
+          </a:p>
+        </p:txBody>
+      </p:sp>
+    </p:spTree>
+  </p:cSld>
+  <p:clrMapOvr>
+    <a:masterClrMapping/>
+  </p:clrMapOvr>
+</p:sld>
+</file>
+
+<file path=ppt/slides/slide49.xml><?xml version="1.0" encoding="utf-8"?>
+<p:sld xmlns:a="http://schemas.openxmlformats.org/drawingml/2006/main" xmlns:p="http://schemas.openxmlformats.org/presentationml/2006/main" xmlns:r="http://schemas.openxmlformats.org/officeDocument/2006/relationships">
+  <p:cSld>
+    <p:spTree>
+      <p:nvGrpSpPr>
+        <p:cNvPr id="1" name=""/>
+        <p:cNvGrpSpPr/>
+        <p:nvPr/>
+      </p:nvGrpSpPr>
+      <p:grpSpPr/>
+      <p:sp>
+        <p:nvSpPr>
+          <p:cNvPr id="2" name="Rectangle 1"/>
+          <p:cNvSpPr/>
+          <p:nvPr/>
+        </p:nvSpPr>
+        <p:spPr>
+          <a:xfrm>
+            <a:off x="0" y="0"/>
+            <a:ext cx="12191695" cy="1005840"/>
+          </a:xfrm>
+          <a:prstGeom prst="rect">
+            <a:avLst/>
+          </a:prstGeom>
+          <a:solidFill>
+            <a:srgbClr val="C0392B"/>
+          </a:solidFill>
+          <a:ln>
+            <a:noFill/>
+          </a:ln>
+          <a:effectLst/>
+        </p:spPr>
+        <p:style>
+          <a:lnRef idx="1">
+            <a:schemeClr val="accent1"/>
+          </a:lnRef>
+          <a:fillRef idx="3">
+            <a:schemeClr val="accent1"/>
+          </a:fillRef>
+          <a:effectRef idx="2">
+            <a:schemeClr val="accent1"/>
+          </a:effectRef>
+          <a:fontRef idx="minor">
+            <a:schemeClr val="lt1"/>
+          </a:fontRef>
+        </p:style>
+        <p:txBody>
+          <a:bodyPr rtlCol="0" anchor="ctr"/>
+          <a:lstStyle/>
+          <a:p>
+            <a:pPr algn="ctr"/>
+          </a:p>
+        </p:txBody>
+      </p:sp>
+      <p:sp>
+        <p:nvSpPr>
+          <p:cNvPr id="3" name="TextBox 2"/>
+          <p:cNvSpPr txBox="1"/>
+          <p:nvPr/>
+        </p:nvSpPr>
+        <p:spPr>
+          <a:xfrm>
+            <a:off x="548640" y="91440"/>
+            <a:ext cx="10972800" cy="777240"/>
+          </a:xfrm>
+          <a:prstGeom prst="rect">
+            <a:avLst/>
+          </a:prstGeom>
+          <a:noFill/>
+        </p:spPr>
+        <p:txBody>
+          <a:bodyPr wrap="square">
+            <a:spAutoFit/>
+          </a:bodyPr>
+          <a:lstStyle/>
+          <a:p>
+            <a:pPr algn="l">
+              <a:spcAft>
+                <a:spcPts val="600"/>
+              </a:spcAft>
+            </a:pPr>
+            <a:r>
+              <a:rPr sz="2600" b="1">
+                <a:solidFill>
+                  <a:srgbClr val="FFFFFF"/>
+                </a:solidFill>
+                <a:latin typeface="맑은 고딕"/>
+              </a:rPr>
+              <a:t>요약</a:t>
+            </a:r>
+          </a:p>
+        </p:txBody>
+      </p:sp>
+      <p:sp>
+        <p:nvSpPr>
+          <p:cNvPr id="4" name="TextBox 3"/>
+          <p:cNvSpPr txBox="1"/>
+          <p:nvPr/>
+        </p:nvSpPr>
+        <p:spPr>
+          <a:xfrm>
+            <a:off x="640080" y="1371600"/>
+            <a:ext cx="10881360" cy="5120640"/>
+          </a:xfrm>
+          <a:prstGeom prst="rect">
+            <a:avLst/>
+          </a:prstGeom>
+          <a:noFill/>
+        </p:spPr>
+        <p:txBody>
+          <a:bodyPr wrap="square">
+            <a:spAutoFit/>
+          </a:bodyPr>
+          <a:lstStyle/>
+          <a:p>
+            <a:pPr algn="l">
+              <a:spcAft>
+                <a:spcPts val="1000"/>
+              </a:spcAft>
+            </a:pPr>
+            <a:r>
+              <a:rPr sz="1600" b="0">
+                <a:solidFill>
+                  <a:srgbClr val="222222"/>
+                </a:solidFill>
+                <a:latin typeface="맑은 고딕"/>
+              </a:rPr>
+              <a:t>•  구조 변경은 리두로 전달, 파일 위치는 Standby 설정이 결정</a:t>
+            </a:r>
+          </a:p>
+          <a:p>
+            <a:pPr algn="l">
+              <a:spcAft>
+                <a:spcPts val="1000"/>
+              </a:spcAft>
+            </a:pPr>
+            <a:r>
+              <a:rPr sz="1600" b="0">
+                <a:solidFill>
+                  <a:srgbClr val="222222"/>
+                </a:solidFill>
+                <a:latin typeface="맑은 고딕"/>
+              </a:rPr>
+              <a:t>•  AUTO면 파일 생성·삭제 자동, MANUAL이면 UNNAMED와 적용 중지</a:t>
+            </a:r>
+          </a:p>
+          <a:p>
+            <a:pPr algn="l">
+              <a:spcAft>
+                <a:spcPts val="1000"/>
+              </a:spcAft>
+            </a:pPr>
+            <a:r>
+              <a:rPr sz="1600" b="0">
+                <a:solidFill>
+                  <a:srgbClr val="222222"/>
+                </a:solidFill>
+                <a:latin typeface="맑은 고딕"/>
+              </a:rPr>
+              <a:t>•  이름 변경, 로그 그룹, TTS·플러그인 파일은 수동</a:t>
+            </a:r>
+          </a:p>
+          <a:p>
+            <a:pPr algn="l">
+              <a:spcAft>
+                <a:spcPts val="1000"/>
+              </a:spcAft>
+            </a:pPr>
+            <a:r>
+              <a:rPr sz="1600" b="0">
+                <a:solidFill>
+                  <a:srgbClr val="222222"/>
+                </a:solidFill>
+                <a:latin typeface="맑은 고딕"/>
+              </a:rPr>
+              <a:t>•  UNNAMED: ORA-01274 → ORA-01111, MANUAL에서 CREATE DATAFILE</a:t>
+            </a:r>
+          </a:p>
+          <a:p>
+            <a:pPr algn="l">
+              <a:spcAft>
+                <a:spcPts val="1000"/>
+              </a:spcAft>
+            </a:pPr>
+            <a:r>
+              <a:rPr sz="1600" b="0">
+                <a:solidFill>
+                  <a:srgbClr val="222222"/>
+                </a:solidFill>
+                <a:latin typeface="맑은 고딕"/>
+              </a:rPr>
+              <a:t>•  PDB 복제 대상은 ENABLED_PDBS_ON_STANDBY, STANDBYS 절</a:t>
+            </a:r>
+          </a:p>
+          <a:p>
+            <a:pPr algn="l">
+              <a:spcAft>
+                <a:spcPts val="1000"/>
+              </a:spcAft>
+            </a:pPr>
+            <a:r>
+              <a:rPr sz="1600" b="0">
+                <a:solidFill>
+                  <a:srgbClr val="222222"/>
+                </a:solidFill>
+                <a:latin typeface="맑은 고딕"/>
+              </a:rPr>
+              <a:t>•  NOLOGGING은 FORCE LOGGING으로 예방, 파라미터·TDE는 리두 밖</a:t>
             </a:r>
           </a:p>
         </p:txBody>
@@ -12698,7 +16629,7 @@
                 </a:solidFill>
                 <a:latin typeface="맑은 고딕"/>
               </a:rPr>
-              <a:t>운영은 멈추지 않는다</a:t>
+              <a:t>리두에 실리는 구조 변경</a:t>
             </a:r>
           </a:p>
         </p:txBody>
@@ -12737,7 +16668,7 @@
                 </a:solidFill>
                 <a:latin typeface="맑은 고딕"/>
               </a:rPr>
-              <a:t>구조는 계속 바뀐다</a:t>
+              <a:t>지시는 리두가, 파일 위치는 Standby가</a:t>
             </a:r>
           </a:p>
         </p:txBody>
@@ -12776,7 +16707,7 @@
                 </a:solidFill>
                 <a:latin typeface="맑은 고딕"/>
               </a:rPr>
-              <a:t>•  테이블스페이스가 추가되고 데이터 파일이 늘어난다</a:t>
+              <a:t>•  CREATE TABLESPACE, ADD DATAFILE, RESIZE, DROP</a:t>
             </a:r>
           </a:p>
           <a:p>
@@ -12792,7 +16723,7 @@
                 </a:solidFill>
                 <a:latin typeface="맑은 고딕"/>
               </a:rPr>
-              <a:t>•  PDB가 생겼다 없어진다</a:t>
+              <a:t>•  MRP0가 Standby 컨트롤 파일에 같은 변경을 가함</a:t>
             </a:r>
           </a:p>
           <a:p>
@@ -12808,7 +16739,7 @@
                 </a:solidFill>
                 <a:latin typeface="맑은 고딕"/>
               </a:rPr>
-              <a:t>•  그때마다 Standby는 어떻게 되는가</a:t>
+              <a:t>•  필요하면 Standby 서버에 실제 파일을 만듦</a:t>
             </a:r>
           </a:p>
           <a:p>
@@ -12824,7 +16755,571 @@
                 </a:solidFill>
                 <a:latin typeface="맑은 고딕"/>
               </a:rPr>
-              <a:t>•  답의 핵심은 파라미터 하나 — `STANDBY_FILE_MANAGEMENT`</a:t>
+              <a:t>•  리두에는 파일 번호와 크기만, 경로는 Standby가 정함</a:t>
+            </a:r>
+          </a:p>
+        </p:txBody>
+      </p:sp>
+    </p:spTree>
+  </p:cSld>
+  <p:clrMapOvr>
+    <a:masterClrMapping/>
+  </p:clrMapOvr>
+</p:sld>
+</file>
+
+<file path=ppt/slides/slide50.xml><?xml version="1.0" encoding="utf-8"?>
+<p:sld xmlns:a="http://schemas.openxmlformats.org/drawingml/2006/main" xmlns:p="http://schemas.openxmlformats.org/presentationml/2006/main" xmlns:r="http://schemas.openxmlformats.org/officeDocument/2006/relationships">
+  <p:cSld>
+    <p:spTree>
+      <p:nvGrpSpPr>
+        <p:cNvPr id="1" name=""/>
+        <p:cNvGrpSpPr/>
+        <p:nvPr/>
+      </p:nvGrpSpPr>
+      <p:grpSpPr/>
+      <p:sp>
+        <p:nvSpPr>
+          <p:cNvPr id="2" name="Rectangle 1"/>
+          <p:cNvSpPr/>
+          <p:nvPr/>
+        </p:nvSpPr>
+        <p:spPr>
+          <a:xfrm>
+            <a:off x="0" y="0"/>
+            <a:ext cx="12191695" cy="1005840"/>
+          </a:xfrm>
+          <a:prstGeom prst="rect">
+            <a:avLst/>
+          </a:prstGeom>
+          <a:solidFill>
+            <a:srgbClr val="C0392B"/>
+          </a:solidFill>
+          <a:ln>
+            <a:noFill/>
+          </a:ln>
+          <a:effectLst/>
+        </p:spPr>
+        <p:style>
+          <a:lnRef idx="1">
+            <a:schemeClr val="accent1"/>
+          </a:lnRef>
+          <a:fillRef idx="3">
+            <a:schemeClr val="accent1"/>
+          </a:fillRef>
+          <a:effectRef idx="2">
+            <a:schemeClr val="accent1"/>
+          </a:effectRef>
+          <a:fontRef idx="minor">
+            <a:schemeClr val="lt1"/>
+          </a:fontRef>
+        </p:style>
+        <p:txBody>
+          <a:bodyPr rtlCol="0" anchor="ctr"/>
+          <a:lstStyle/>
+          <a:p>
+            <a:pPr algn="ctr"/>
+          </a:p>
+        </p:txBody>
+      </p:sp>
+      <p:sp>
+        <p:nvSpPr>
+          <p:cNvPr id="3" name="TextBox 2"/>
+          <p:cNvSpPr txBox="1"/>
+          <p:nvPr/>
+        </p:nvSpPr>
+        <p:spPr>
+          <a:xfrm>
+            <a:off x="548640" y="91440"/>
+            <a:ext cx="10972800" cy="777240"/>
+          </a:xfrm>
+          <a:prstGeom prst="rect">
+            <a:avLst/>
+          </a:prstGeom>
+          <a:noFill/>
+        </p:spPr>
+        <p:txBody>
+          <a:bodyPr wrap="square">
+            <a:spAutoFit/>
+          </a:bodyPr>
+          <a:lstStyle/>
+          <a:p>
+            <a:pPr algn="l">
+              <a:spcAft>
+                <a:spcPts val="600"/>
+              </a:spcAft>
+            </a:pPr>
+            <a:r>
+              <a:rPr sz="2600" b="1">
+                <a:solidFill>
+                  <a:srgbClr val="FFFFFF"/>
+                </a:solidFill>
+                <a:latin typeface="맑은 고딕"/>
+              </a:rPr>
+              <a:t>퀴즈 (1/2)</a:t>
+            </a:r>
+          </a:p>
+        </p:txBody>
+      </p:sp>
+      <p:sp>
+        <p:nvSpPr>
+          <p:cNvPr id="4" name="TextBox 3"/>
+          <p:cNvSpPr txBox="1"/>
+          <p:nvPr/>
+        </p:nvSpPr>
+        <p:spPr>
+          <a:xfrm>
+            <a:off x="640080" y="1371600"/>
+            <a:ext cx="10881360" cy="5120640"/>
+          </a:xfrm>
+          <a:prstGeom prst="rect">
+            <a:avLst/>
+          </a:prstGeom>
+          <a:noFill/>
+        </p:spPr>
+        <p:txBody>
+          <a:bodyPr wrap="square">
+            <a:spAutoFit/>
+          </a:bodyPr>
+          <a:lstStyle/>
+          <a:p>
+            <a:pPr algn="l">
+              <a:spcAft>
+                <a:spcPts val="1000"/>
+              </a:spcAft>
+            </a:pPr>
+            <a:r>
+              <a:rPr sz="1600" b="0">
+                <a:solidFill>
+                  <a:srgbClr val="222222"/>
+                </a:solidFill>
+                <a:latin typeface="맑은 고딕"/>
+              </a:rPr>
+              <a:t>•  Q1. Primary만 AUTO, Standby는 MANUAL이면? → UNNAMED와 적용 중지</a:t>
+            </a:r>
+          </a:p>
+          <a:p>
+            <a:pPr algn="l">
+              <a:spcAft>
+                <a:spcPts val="1000"/>
+              </a:spcAft>
+            </a:pPr>
+            <a:r>
+              <a:rPr sz="1600" b="0">
+                <a:solidFill>
+                  <a:srgbClr val="222222"/>
+                </a:solidFill>
+                <a:latin typeface="맑은 고딕"/>
+              </a:rPr>
+              <a:t>•  Q2. AUTO Standby에서 RENAME FILE 오류는? → ORA-01275</a:t>
+            </a:r>
+          </a:p>
+          <a:p>
+            <a:pPr algn="l">
+              <a:spcAft>
+                <a:spcPts val="1000"/>
+              </a:spcAft>
+            </a:pPr>
+            <a:r>
+              <a:rPr sz="1600" b="0">
+                <a:solidFill>
+                  <a:srgbClr val="222222"/>
+                </a:solidFill>
+                <a:latin typeface="맑은 고딕"/>
+              </a:rPr>
+              <a:t>•  Q3. Primary에서 MOVE DATAFILE 후 Standby는? → 원래 경로, 적용 계속</a:t>
+            </a:r>
+          </a:p>
+        </p:txBody>
+      </p:sp>
+    </p:spTree>
+  </p:cSld>
+  <p:clrMapOvr>
+    <a:masterClrMapping/>
+  </p:clrMapOvr>
+</p:sld>
+</file>
+
+<file path=ppt/slides/slide51.xml><?xml version="1.0" encoding="utf-8"?>
+<p:sld xmlns:a="http://schemas.openxmlformats.org/drawingml/2006/main" xmlns:p="http://schemas.openxmlformats.org/presentationml/2006/main" xmlns:r="http://schemas.openxmlformats.org/officeDocument/2006/relationships">
+  <p:cSld>
+    <p:spTree>
+      <p:nvGrpSpPr>
+        <p:cNvPr id="1" name=""/>
+        <p:cNvGrpSpPr/>
+        <p:nvPr/>
+      </p:nvGrpSpPr>
+      <p:grpSpPr/>
+      <p:sp>
+        <p:nvSpPr>
+          <p:cNvPr id="2" name="Rectangle 1"/>
+          <p:cNvSpPr/>
+          <p:nvPr/>
+        </p:nvSpPr>
+        <p:spPr>
+          <a:xfrm>
+            <a:off x="0" y="0"/>
+            <a:ext cx="12191695" cy="1005840"/>
+          </a:xfrm>
+          <a:prstGeom prst="rect">
+            <a:avLst/>
+          </a:prstGeom>
+          <a:solidFill>
+            <a:srgbClr val="C0392B"/>
+          </a:solidFill>
+          <a:ln>
+            <a:noFill/>
+          </a:ln>
+          <a:effectLst/>
+        </p:spPr>
+        <p:style>
+          <a:lnRef idx="1">
+            <a:schemeClr val="accent1"/>
+          </a:lnRef>
+          <a:fillRef idx="3">
+            <a:schemeClr val="accent1"/>
+          </a:fillRef>
+          <a:effectRef idx="2">
+            <a:schemeClr val="accent1"/>
+          </a:effectRef>
+          <a:fontRef idx="minor">
+            <a:schemeClr val="lt1"/>
+          </a:fontRef>
+        </p:style>
+        <p:txBody>
+          <a:bodyPr rtlCol="0" anchor="ctr"/>
+          <a:lstStyle/>
+          <a:p>
+            <a:pPr algn="ctr"/>
+          </a:p>
+        </p:txBody>
+      </p:sp>
+      <p:sp>
+        <p:nvSpPr>
+          <p:cNvPr id="3" name="TextBox 2"/>
+          <p:cNvSpPr txBox="1"/>
+          <p:nvPr/>
+        </p:nvSpPr>
+        <p:spPr>
+          <a:xfrm>
+            <a:off x="548640" y="91440"/>
+            <a:ext cx="10972800" cy="777240"/>
+          </a:xfrm>
+          <a:prstGeom prst="rect">
+            <a:avLst/>
+          </a:prstGeom>
+          <a:noFill/>
+        </p:spPr>
+        <p:txBody>
+          <a:bodyPr wrap="square">
+            <a:spAutoFit/>
+          </a:bodyPr>
+          <a:lstStyle/>
+          <a:p>
+            <a:pPr algn="l">
+              <a:spcAft>
+                <a:spcPts val="600"/>
+              </a:spcAft>
+            </a:pPr>
+            <a:r>
+              <a:rPr sz="2600" b="1">
+                <a:solidFill>
+                  <a:srgbClr val="FFFFFF"/>
+                </a:solidFill>
+                <a:latin typeface="맑은 고딕"/>
+              </a:rPr>
+              <a:t>퀴즈 (2/2)</a:t>
+            </a:r>
+          </a:p>
+        </p:txBody>
+      </p:sp>
+      <p:sp>
+        <p:nvSpPr>
+          <p:cNvPr id="4" name="TextBox 3"/>
+          <p:cNvSpPr txBox="1"/>
+          <p:nvPr/>
+        </p:nvSpPr>
+        <p:spPr>
+          <a:xfrm>
+            <a:off x="640080" y="1371600"/>
+            <a:ext cx="10881360" cy="5120640"/>
+          </a:xfrm>
+          <a:prstGeom prst="rect">
+            <a:avLst/>
+          </a:prstGeom>
+          <a:noFill/>
+        </p:spPr>
+        <p:txBody>
+          <a:bodyPr wrap="square">
+            <a:spAutoFit/>
+          </a:bodyPr>
+          <a:lstStyle/>
+          <a:p>
+            <a:pPr algn="l">
+              <a:spcAft>
+                <a:spcPts val="1000"/>
+              </a:spcAft>
+            </a:pPr>
+            <a:r>
+              <a:rPr sz="1600" b="0">
+                <a:solidFill>
+                  <a:srgbClr val="222222"/>
+                </a:solidFill>
+                <a:latin typeface="맑은 고딕"/>
+              </a:rPr>
+              <a:t>•  Q4. Primary에 로그 그룹 추가 후 Standby는? → MANUAL로 직접 추가</a:t>
+            </a:r>
+          </a:p>
+          <a:p>
+            <a:pPr algn="l">
+              <a:spcAft>
+                <a:spcPts val="1000"/>
+              </a:spcAft>
+            </a:pPr>
+            <a:r>
+              <a:rPr sz="1600" b="0">
+                <a:solidFill>
+                  <a:srgbClr val="222222"/>
+                </a:solidFill>
+                <a:latin typeface="맑은 고딕"/>
+              </a:rPr>
+              <a:t>•  Q5. "*","-PDB*A","PDB2A"의 결과는? → PDB1B, PDB2A</a:t>
+            </a:r>
+          </a:p>
+          <a:p>
+            <a:pPr algn="l">
+              <a:spcAft>
+                <a:spcPts val="1000"/>
+              </a:spcAft>
+            </a:pPr>
+            <a:r>
+              <a:rPr sz="1600" b="0">
+                <a:solidFill>
+                  <a:srgbClr val="222222"/>
+                </a:solidFill>
+                <a:latin typeface="맑은 고딕"/>
+              </a:rPr>
+              <a:t>•  Q6. ORA-01578 + ORA-26040이면? → NOLOGGING 흔적, 다시 가져옴</a:t>
+            </a:r>
+          </a:p>
+        </p:txBody>
+      </p:sp>
+    </p:spTree>
+  </p:cSld>
+  <p:clrMapOvr>
+    <a:masterClrMapping/>
+  </p:clrMapOvr>
+</p:sld>
+</file>
+
+<file path=ppt/slides/slide52.xml><?xml version="1.0" encoding="utf-8"?>
+<p:sld xmlns:a="http://schemas.openxmlformats.org/drawingml/2006/main" xmlns:p="http://schemas.openxmlformats.org/presentationml/2006/main" xmlns:r="http://schemas.openxmlformats.org/officeDocument/2006/relationships">
+  <p:cSld>
+    <p:spTree>
+      <p:nvGrpSpPr>
+        <p:cNvPr id="1" name=""/>
+        <p:cNvGrpSpPr/>
+        <p:nvPr/>
+      </p:nvGrpSpPr>
+      <p:grpSpPr/>
+      <p:sp>
+        <p:nvSpPr>
+          <p:cNvPr id="2" name="Rectangle 1"/>
+          <p:cNvSpPr/>
+          <p:nvPr/>
+        </p:nvSpPr>
+        <p:spPr>
+          <a:xfrm>
+            <a:off x="0" y="0"/>
+            <a:ext cx="12191695" cy="1005840"/>
+          </a:xfrm>
+          <a:prstGeom prst="rect">
+            <a:avLst/>
+          </a:prstGeom>
+          <a:solidFill>
+            <a:srgbClr val="C0392B"/>
+          </a:solidFill>
+          <a:ln>
+            <a:noFill/>
+          </a:ln>
+          <a:effectLst/>
+        </p:spPr>
+        <p:style>
+          <a:lnRef idx="1">
+            <a:schemeClr val="accent1"/>
+          </a:lnRef>
+          <a:fillRef idx="3">
+            <a:schemeClr val="accent1"/>
+          </a:fillRef>
+          <a:effectRef idx="2">
+            <a:schemeClr val="accent1"/>
+          </a:effectRef>
+          <a:fontRef idx="minor">
+            <a:schemeClr val="lt1"/>
+          </a:fontRef>
+        </p:style>
+        <p:txBody>
+          <a:bodyPr rtlCol="0" anchor="ctr"/>
+          <a:lstStyle/>
+          <a:p>
+            <a:pPr algn="ctr"/>
+          </a:p>
+        </p:txBody>
+      </p:sp>
+      <p:sp>
+        <p:nvSpPr>
+          <p:cNvPr id="3" name="TextBox 2"/>
+          <p:cNvSpPr txBox="1"/>
+          <p:nvPr/>
+        </p:nvSpPr>
+        <p:spPr>
+          <a:xfrm>
+            <a:off x="548640" y="91440"/>
+            <a:ext cx="10972800" cy="777240"/>
+          </a:xfrm>
+          <a:prstGeom prst="rect">
+            <a:avLst/>
+          </a:prstGeom>
+          <a:noFill/>
+        </p:spPr>
+        <p:txBody>
+          <a:bodyPr wrap="square">
+            <a:spAutoFit/>
+          </a:bodyPr>
+          <a:lstStyle/>
+          <a:p>
+            <a:pPr algn="l">
+              <a:spcAft>
+                <a:spcPts val="600"/>
+              </a:spcAft>
+            </a:pPr>
+            <a:r>
+              <a:rPr sz="2600" b="1">
+                <a:solidFill>
+                  <a:srgbClr val="FFFFFF"/>
+                </a:solidFill>
+                <a:latin typeface="맑은 고딕"/>
+              </a:rPr>
+              <a:t>실습 개요</a:t>
+            </a:r>
+          </a:p>
+        </p:txBody>
+      </p:sp>
+      <p:sp>
+        <p:nvSpPr>
+          <p:cNvPr id="4" name="TextBox 3"/>
+          <p:cNvSpPr txBox="1"/>
+          <p:nvPr/>
+        </p:nvSpPr>
+        <p:spPr>
+          <a:xfrm>
+            <a:off x="640080" y="1371600"/>
+            <a:ext cx="10881360" cy="5120640"/>
+          </a:xfrm>
+          <a:prstGeom prst="rect">
+            <a:avLst/>
+          </a:prstGeom>
+          <a:noFill/>
+        </p:spPr>
+        <p:txBody>
+          <a:bodyPr wrap="square">
+            <a:spAutoFit/>
+          </a:bodyPr>
+          <a:lstStyle/>
+          <a:p>
+            <a:pPr algn="l">
+              <a:spcAft>
+                <a:spcPts val="1000"/>
+              </a:spcAft>
+            </a:pPr>
+            <a:r>
+              <a:rPr sz="1600" b="0">
+                <a:solidFill>
+                  <a:srgbClr val="222222"/>
+                </a:solidFill>
+                <a:latin typeface="맑은 고딕"/>
+              </a:rPr>
+              <a:t>•  01 자동 반영 확인 / 02 파일 추가와 크기 변경 (8.3, 8.4)</a:t>
+            </a:r>
+          </a:p>
+          <a:p>
+            <a:pPr algn="l">
+              <a:spcAft>
+                <a:spcPts val="1000"/>
+              </a:spcAft>
+            </a:pPr>
+            <a:r>
+              <a:rPr sz="1600" b="0">
+                <a:solidFill>
+                  <a:srgbClr val="222222"/>
+                </a:solidFill>
+                <a:latin typeface="맑은 고딕"/>
+              </a:rPr>
+              <a:t>•  03 MANUAL과 UNNAMED 파일 (8.3, 8.5)</a:t>
+            </a:r>
+          </a:p>
+          <a:p>
+            <a:pPr algn="l">
+              <a:spcAft>
+                <a:spcPts val="1000"/>
+              </a:spcAft>
+            </a:pPr>
+            <a:r>
+              <a:rPr sz="1600" b="0">
+                <a:solidFill>
+                  <a:srgbClr val="222222"/>
+                </a:solidFill>
+                <a:latin typeface="맑은 고딕"/>
+              </a:rPr>
+              <a:t>•  04 UNNAMED 파일 복구 (8.5)</a:t>
+            </a:r>
+          </a:p>
+          <a:p>
+            <a:pPr algn="l">
+              <a:spcAft>
+                <a:spcPts val="1000"/>
+              </a:spcAft>
+            </a:pPr>
+            <a:r>
+              <a:rPr sz="1600" b="0">
+                <a:solidFill>
+                  <a:srgbClr val="222222"/>
+                </a:solidFill>
+                <a:latin typeface="맑은 고딕"/>
+              </a:rPr>
+              <a:t>•  05 PDB 추가와 삭제 (8.7)</a:t>
+            </a:r>
+          </a:p>
+          <a:p>
+            <a:pPr algn="l">
+              <a:spcAft>
+                <a:spcPts val="1000"/>
+              </a:spcAft>
+            </a:pPr>
+            <a:r>
+              <a:rPr sz="1600" b="0">
+                <a:solidFill>
+                  <a:srgbClr val="222222"/>
+                </a:solidFill>
+                <a:latin typeface="맑은 고딕"/>
+              </a:rPr>
+              <a:t>•  06 반영되지 않는 것: 온라인 리두 로그 (8.6)</a:t>
+            </a:r>
+          </a:p>
+          <a:p>
+            <a:pPr algn="l">
+              <a:spcAft>
+                <a:spcPts val="1000"/>
+              </a:spcAft>
+            </a:pPr>
+            <a:r>
+              <a:rPr sz="1600" b="0">
+                <a:solidFill>
+                  <a:srgbClr val="222222"/>
+                </a:solidFill>
+                <a:latin typeface="맑은 고딕"/>
+              </a:rPr>
+              <a:t>•  07 사고 분석: CURRENT 리두 삭제, 읽기 자료 (8.6)</a:t>
             </a:r>
           </a:p>
         </p:txBody>
@@ -12925,7 +17420,7 @@
                 </a:solidFill>
                 <a:latin typeface="맑은 고딕"/>
               </a:rPr>
-              <a:t>어느 쪽 값이 동작을 정하는가</a:t>
+              <a:t>리두에 실리지 않는 변경</a:t>
             </a:r>
           </a:p>
         </p:txBody>
@@ -12964,7 +17459,7 @@
                 </a:solidFill>
                 <a:latin typeface="맑은 고딕"/>
               </a:rPr>
-              <a:t>Standby 쪽이다</a:t>
+              <a:t>데이터베이스 밖의 파일과 설정</a:t>
             </a:r>
           </a:p>
         </p:txBody>
@@ -13003,7 +17498,7 @@
                 </a:solidFill>
                 <a:latin typeface="맑은 고딕"/>
               </a:rPr>
-              <a:t>•  파일을 따라 만드는 주체는 Standby의 MRP</a:t>
+              <a:t>•  초기화 파라미터(spfile), Oracle Net 설정</a:t>
             </a:r>
           </a:p>
           <a:p>
@@ -13019,7 +17514,7 @@
                 </a:solidFill>
                 <a:latin typeface="맑은 고딕"/>
               </a:rPr>
-              <a:t>•  실측 : Standby만 MANUAL, Primary는 AUTO → **문제 발생**</a:t>
+              <a:t>•  TDE 키스토어, 운영체제 디렉터리</a:t>
             </a:r>
           </a:p>
           <a:p>
@@ -13035,7 +17530,7 @@
                 </a:solidFill>
                 <a:latin typeface="맑은 고딕"/>
               </a:rPr>
-              <a:t>•  Primary 쪽 값은 역할 전환 대비용</a:t>
+              <a:t>•  패스워드 파일은 12.2부터 리두로 갱신</a:t>
             </a:r>
           </a:p>
           <a:p>
@@ -13051,7 +17546,23 @@
                 </a:solidFill>
                 <a:latin typeface="맑은 고딕"/>
               </a:rPr>
-              <a:t>•  **확인은 반드시 Standby에서**</a:t>
+              <a:t>•  이름 변경은 Standby 쪽 이름에 손대지 않음</a:t>
+            </a:r>
+          </a:p>
+          <a:p>
+            <a:pPr algn="l">
+              <a:spcAft>
+                <a:spcPts val="1000"/>
+              </a:spcAft>
+            </a:pPr>
+            <a:r>
+              <a:rPr sz="1700" b="0">
+                <a:solidFill>
+                  <a:srgbClr val="222222"/>
+                </a:solidFill>
+                <a:latin typeface="맑은 고딕"/>
+              </a:rPr>
+              <a:t>•  NOLOGGING은 블록 내용 없이 표시만 남김</a:t>
             </a:r>
           </a:p>
         </p:txBody>
@@ -13083,7 +17594,7 @@
         <p:spPr>
           <a:xfrm>
             <a:off x="0" y="0"/>
-            <a:ext cx="12191695" cy="6858000"/>
+            <a:ext cx="12191695" cy="1005840"/>
           </a:xfrm>
           <a:prstGeom prst="rect">
             <a:avLst/>
@@ -13126,8 +17637,8 @@
         </p:nvSpPr>
         <p:spPr>
           <a:xfrm>
-            <a:off x="822960" y="2011680"/>
-            <a:ext cx="10515600" cy="1097280"/>
+            <a:off x="548640" y="91440"/>
+            <a:ext cx="10972800" cy="777240"/>
           </a:xfrm>
           <a:prstGeom prst="rect">
             <a:avLst/>
@@ -13146,13 +17657,13 @@
               </a:spcAft>
             </a:pPr>
             <a:r>
-              <a:rPr sz="4000" b="1">
+              <a:rPr sz="2600" b="1">
                 <a:solidFill>
                   <a:srgbClr val="FFFFFF"/>
                 </a:solidFill>
                 <a:latin typeface="맑은 고딕"/>
               </a:rPr>
-              <a:t>8.3</a:t>
+              <a:t>Standby에서 직접 바꿀 수 없는 이유</a:t>
             </a:r>
           </a:p>
         </p:txBody>
@@ -13165,8 +17676,8 @@
         </p:nvSpPr>
         <p:spPr>
           <a:xfrm>
-            <a:off x="822960" y="3017520"/>
-            <a:ext cx="10515600" cy="914400"/>
+            <a:off x="640080" y="1078992"/>
+            <a:ext cx="10881360" cy="457200"/>
           </a:xfrm>
           <a:prstGeom prst="rect">
             <a:avLst/>
@@ -13185,71 +17696,27 @@
               </a:spcAft>
             </a:pPr>
             <a:r>
-              <a:rPr sz="2800" b="1">
-                <a:solidFill>
-                  <a:srgbClr val="FFFFFF"/>
-                </a:solidFill>
-                <a:latin typeface="맑은 고딕"/>
-              </a:rPr>
-              <a:t>자동 반영</a:t>
-            </a:r>
-          </a:p>
-        </p:txBody>
-      </p:sp>
-      <p:sp>
-        <p:nvSpPr>
-          <p:cNvPr id="5" name="Rectangle 4"/>
-          <p:cNvSpPr/>
-          <p:nvPr/>
-        </p:nvSpPr>
-        <p:spPr>
-          <a:xfrm>
-            <a:off x="822960" y="4114800"/>
-            <a:ext cx="5486400" cy="54864"/>
-          </a:xfrm>
-          <a:prstGeom prst="rect">
-            <a:avLst/>
-          </a:prstGeom>
-          <a:solidFill>
-            <a:srgbClr val="FFFFFF"/>
-          </a:solidFill>
-          <a:ln>
-            <a:noFill/>
-          </a:ln>
-          <a:effectLst/>
-        </p:spPr>
-        <p:style>
-          <a:lnRef idx="1">
-            <a:schemeClr val="accent1"/>
-          </a:lnRef>
-          <a:fillRef idx="3">
-            <a:schemeClr val="accent1"/>
-          </a:fillRef>
-          <a:effectRef idx="2">
-            <a:schemeClr val="accent1"/>
-          </a:effectRef>
-          <a:fontRef idx="minor">
-            <a:schemeClr val="lt1"/>
-          </a:fontRef>
-        </p:style>
-        <p:txBody>
-          <a:bodyPr rtlCol="0" anchor="ctr"/>
-          <a:lstStyle/>
-          <a:p>
-            <a:pPr algn="ctr"/>
-          </a:p>
-        </p:txBody>
-      </p:sp>
-      <p:sp>
-        <p:nvSpPr>
-          <p:cNvPr id="6" name="TextBox 5"/>
+              <a:rPr sz="1500" b="0">
+                <a:solidFill>
+                  <a:srgbClr val="5A6672"/>
+                </a:solidFill>
+                <a:latin typeface="맑은 고딕"/>
+              </a:rPr>
+              <a:t>구조 변경은 Primary에서 한 방향으로</a:t>
+            </a:r>
+          </a:p>
+        </p:txBody>
+      </p:sp>
+      <p:sp>
+        <p:nvSpPr>
+          <p:cNvPr id="5" name="TextBox 4"/>
           <p:cNvSpPr txBox="1"/>
           <p:nvPr/>
         </p:nvSpPr>
         <p:spPr>
           <a:xfrm>
-            <a:off x="822960" y="4297680"/>
-            <a:ext cx="10058400" cy="2011680"/>
+            <a:off x="640080" y="1737360"/>
+            <a:ext cx="10881360" cy="4754880"/>
           </a:xfrm>
           <a:prstGeom prst="rect">
             <a:avLst/>
@@ -13264,49 +17731,65 @@
           <a:p>
             <a:pPr algn="l">
               <a:spcAft>
-                <a:spcPts val="800"/>
-              </a:spcAft>
-            </a:pPr>
-            <a:r>
-              <a:rPr sz="1600" b="0">
-                <a:solidFill>
-                  <a:srgbClr val="FFFFFF"/>
-                </a:solidFill>
-                <a:latin typeface="맑은 고딕"/>
-              </a:rPr>
-              <a:t>•  무엇이 되는가</a:t>
-            </a:r>
-          </a:p>
-          <a:p>
-            <a:pPr algn="l">
-              <a:spcAft>
-                <a:spcPts val="800"/>
-              </a:spcAft>
-            </a:pPr>
-            <a:r>
-              <a:rPr sz="1600" b="0">
-                <a:solidFill>
-                  <a:srgbClr val="FFFFFF"/>
-                </a:solidFill>
-                <a:latin typeface="맑은 고딕"/>
-              </a:rPr>
-              <a:t>•  비대칭 구성의 이름</a:t>
-            </a:r>
-          </a:p>
-          <a:p>
-            <a:pPr algn="l">
-              <a:spcAft>
-                <a:spcPts val="800"/>
-              </a:spcAft>
-            </a:pPr>
-            <a:r>
-              <a:rPr sz="1600" b="0">
-                <a:solidFill>
-                  <a:srgbClr val="FFFFFF"/>
-                </a:solidFill>
-                <a:latin typeface="맑은 고딕"/>
-              </a:rPr>
-              <a:t>•  대응은 번호가 유지한다</a:t>
+                <a:spcPts val="1000"/>
+              </a:spcAft>
+            </a:pPr>
+            <a:r>
+              <a:rPr sz="1700" b="0">
+                <a:solidFill>
+                  <a:srgbClr val="222222"/>
+                </a:solidFill>
+                <a:latin typeface="맑은 고딕"/>
+              </a:rPr>
+              <a:t>•  MOUNT 또는 READ ONLY 상태라 쓰기 불가</a:t>
+            </a:r>
+          </a:p>
+          <a:p>
+            <a:pPr algn="l">
+              <a:spcAft>
+                <a:spcPts val="1000"/>
+              </a:spcAft>
+            </a:pPr>
+            <a:r>
+              <a:rPr sz="1700" b="0">
+                <a:solidFill>
+                  <a:srgbClr val="222222"/>
+                </a:solidFill>
+                <a:latin typeface="맑은 고딕"/>
+              </a:rPr>
+              <a:t>•  열린 Standby에서 ADD DATAFILE은 ORA-16000</a:t>
+            </a:r>
+          </a:p>
+          <a:p>
+            <a:pPr algn="l">
+              <a:spcAft>
+                <a:spcPts val="1000"/>
+              </a:spcAft>
+            </a:pPr>
+            <a:r>
+              <a:rPr sz="1700" b="0">
+                <a:solidFill>
+                  <a:srgbClr val="222222"/>
+                </a:solidFill>
+                <a:latin typeface="맑은 고딕"/>
+              </a:rPr>
+              <a:t>•  블록 단위 동일성을 지키려면 Primary가 원천</a:t>
+            </a:r>
+          </a:p>
+          <a:p>
+            <a:pPr algn="l">
+              <a:spcAft>
+                <a:spcPts val="1000"/>
+              </a:spcAft>
+            </a:pPr>
+            <a:r>
+              <a:rPr sz="1700" b="0">
+                <a:solidFill>
+                  <a:srgbClr val="222222"/>
+                </a:solidFill>
+                <a:latin typeface="맑은 고딕"/>
+              </a:rPr>
+              <a:t>•  예외: 로그 그룹, SRL, 파일 이름은 Standby에서</a:t>
             </a:r>
           </a:p>
         </p:txBody>
@@ -13407,7 +17890,7 @@
                 </a:solidFill>
                 <a:latin typeface="맑은 고딕"/>
               </a:rPr>
-              <a:t>자동으로 되는 것</a:t>
+              <a:t>자동 반영과 수동 개입 분류</a:t>
             </a:r>
           </a:p>
         </p:txBody>
@@ -13446,7 +17929,7 @@
                 </a:solidFill>
                 <a:latin typeface="맑은 고딕"/>
               </a:rPr>
-              <a:t>네 가지</a:t>
+              <a:t>이 장 전체의 지도</a:t>
             </a:r>
           </a:p>
         </p:txBody>
@@ -13485,7 +17968,7 @@
                 </a:solidFill>
                 <a:latin typeface="맑은 고딕"/>
               </a:rPr>
-              <a:t>•  테이블스페이스 추가 — 실측 25초 뒤 반영</a:t>
+              <a:t>•  자동: 파일 생성·추가·크기 변경, PDB 생성·삭제</a:t>
             </a:r>
           </a:p>
           <a:p>
@@ -13501,7 +17984,7 @@
                 </a:solidFill>
                 <a:latin typeface="맑은 고딕"/>
               </a:rPr>
-              <a:t>•  데이터 파일 추가</a:t>
+              <a:t>•  일부 수동: 테이블스페이스 삭제 후 비OMF 파일 정리</a:t>
             </a:r>
           </a:p>
           <a:p>
@@ -13517,7 +18000,7 @@
                 </a:solidFill>
                 <a:latin typeface="맑은 고딕"/>
               </a:rPr>
-              <a:t>•  데이터 파일 크기 변경(resize)</a:t>
+              <a:t>•  수동: 파일 이름 변경, 로그 그룹, TTS, 플러그인</a:t>
             </a:r>
           </a:p>
           <a:p>
@@ -13533,7 +18016,23 @@
                 </a:solidFill>
                 <a:latin typeface="맑은 고딕"/>
               </a:rPr>
-              <a:t>•  테이블스페이스 삭제 — 파일까지 사라진다</a:t>
+              <a:t>•  수동: NOLOGGING 복구, 파라미터, TDE 키스토어</a:t>
+            </a:r>
+          </a:p>
+          <a:p>
+            <a:pPr algn="l">
+              <a:spcAft>
+                <a:spcPts val="1000"/>
+              </a:spcAft>
+            </a:pPr>
+            <a:r>
+              <a:rPr sz="1700" b="0">
+                <a:solidFill>
+                  <a:srgbClr val="222222"/>
+                </a:solidFill>
+                <a:latin typeface="맑은 고딕"/>
+              </a:rPr>
+              <a:t>•  자동이라도 적용이 돌고 있어야 반영됨</a:t>
             </a:r>
           </a:p>
         </p:txBody>
@@ -13565,7 +18064,7 @@
         <p:spPr>
           <a:xfrm>
             <a:off x="0" y="0"/>
-            <a:ext cx="12191695" cy="1005840"/>
+            <a:ext cx="12191695" cy="6858000"/>
           </a:xfrm>
           <a:prstGeom prst="rect">
             <a:avLst/>
@@ -13608,8 +18107,8 @@
         </p:nvSpPr>
         <p:spPr>
           <a:xfrm>
-            <a:off x="548640" y="91440"/>
-            <a:ext cx="10972800" cy="777240"/>
+            <a:off x="822960" y="2011680"/>
+            <a:ext cx="10515600" cy="1097280"/>
           </a:xfrm>
           <a:prstGeom prst="rect">
             <a:avLst/>
@@ -13628,13 +18127,13 @@
               </a:spcAft>
             </a:pPr>
             <a:r>
-              <a:rPr sz="2600" b="1">
+              <a:rPr sz="4000" b="1">
                 <a:solidFill>
                   <a:srgbClr val="FFFFFF"/>
                 </a:solidFill>
                 <a:latin typeface="맑은 고딕"/>
               </a:rPr>
-              <a:t>이름이 다르다</a:t>
+              <a:t>8.3</a:t>
             </a:r>
           </a:p>
         </p:txBody>
@@ -13647,8 +18146,8 @@
         </p:nvSpPr>
         <p:spPr>
           <a:xfrm>
-            <a:off x="640080" y="1078992"/>
-            <a:ext cx="10881360" cy="457200"/>
+            <a:off x="822960" y="3017520"/>
+            <a:ext cx="10515600" cy="914400"/>
           </a:xfrm>
           <a:prstGeom prst="rect">
             <a:avLst/>
@@ -13667,27 +18166,71 @@
               </a:spcAft>
             </a:pPr>
             <a:r>
-              <a:rPr sz="1500" b="0">
-                <a:solidFill>
-                  <a:srgbClr val="5A6672"/>
-                </a:solidFill>
-                <a:latin typeface="맑은 고딕"/>
-              </a:rPr>
-              <a:t>그래도 문제가 없다</a:t>
-            </a:r>
-          </a:p>
-        </p:txBody>
-      </p:sp>
-      <p:sp>
-        <p:nvSpPr>
-          <p:cNvPr id="5" name="TextBox 4"/>
+              <a:rPr sz="2800" b="1">
+                <a:solidFill>
+                  <a:srgbClr val="FFFFFF"/>
+                </a:solidFill>
+                <a:latin typeface="맑은 고딕"/>
+              </a:rPr>
+              <a:t>STANDBY_FILE_MANAGEMENT와 파일 이름 결정</a:t>
+            </a:r>
+          </a:p>
+        </p:txBody>
+      </p:sp>
+      <p:sp>
+        <p:nvSpPr>
+          <p:cNvPr id="5" name="Rectangle 4"/>
+          <p:cNvSpPr/>
+          <p:nvPr/>
+        </p:nvSpPr>
+        <p:spPr>
+          <a:xfrm>
+            <a:off x="822960" y="4114800"/>
+            <a:ext cx="5486400" cy="54864"/>
+          </a:xfrm>
+          <a:prstGeom prst="rect">
+            <a:avLst/>
+          </a:prstGeom>
+          <a:solidFill>
+            <a:srgbClr val="FFFFFF"/>
+          </a:solidFill>
+          <a:ln>
+            <a:noFill/>
+          </a:ln>
+          <a:effectLst/>
+        </p:spPr>
+        <p:style>
+          <a:lnRef idx="1">
+            <a:schemeClr val="accent1"/>
+          </a:lnRef>
+          <a:fillRef idx="3">
+            <a:schemeClr val="accent1"/>
+          </a:fillRef>
+          <a:effectRef idx="2">
+            <a:schemeClr val="accent1"/>
+          </a:effectRef>
+          <a:fontRef idx="minor">
+            <a:schemeClr val="lt1"/>
+          </a:fontRef>
+        </p:style>
+        <p:txBody>
+          <a:bodyPr rtlCol="0" anchor="ctr"/>
+          <a:lstStyle/>
+          <a:p>
+            <a:pPr algn="ctr"/>
+          </a:p>
+        </p:txBody>
+      </p:sp>
+      <p:sp>
+        <p:nvSpPr>
+          <p:cNvPr id="6" name="TextBox 5"/>
           <p:cNvSpPr txBox="1"/>
           <p:nvPr/>
         </p:nvSpPr>
         <p:spPr>
           <a:xfrm>
-            <a:off x="640080" y="1737360"/>
-            <a:ext cx="10881360" cy="4754880"/>
+            <a:off x="822960" y="4297680"/>
+            <a:ext cx="10058400" cy="2011680"/>
           </a:xfrm>
           <a:prstGeom prst="rect">
             <a:avLst/>
@@ -13702,65 +18245,49 @@
           <a:p>
             <a:pPr algn="l">
               <a:spcAft>
-                <a:spcPts val="1000"/>
-              </a:spcAft>
-            </a:pPr>
-            <a:r>
-              <a:rPr sz="1700" b="0">
-                <a:solidFill>
-                  <a:srgbClr val="222222"/>
-                </a:solidFill>
-                <a:latin typeface="맑은 고딕"/>
-              </a:rPr>
-              <a:t>•  Primary : `dg_ts1_01.dbf` (비OMF, 사람이 지정)</a:t>
-            </a:r>
-          </a:p>
-          <a:p>
-            <a:pPr algn="l">
-              <a:spcAft>
-                <a:spcPts val="1000"/>
-              </a:spcAft>
-            </a:pPr>
-            <a:r>
-              <a:rPr sz="1700" b="0">
-                <a:solidFill>
-                  <a:srgbClr val="222222"/>
-                </a:solidFill>
-                <a:latin typeface="맑은 고딕"/>
-              </a:rPr>
-              <a:t>•  Standby : `o1_mf_dg_ts1_o8z7v7lh_.dbf` (OMF, 오라클이 지정)</a:t>
-            </a:r>
-          </a:p>
-          <a:p>
-            <a:pPr algn="l">
-              <a:spcAft>
-                <a:spcPts val="1000"/>
-              </a:spcAft>
-            </a:pPr>
-            <a:r>
-              <a:rPr sz="1700" b="0">
-                <a:solidFill>
-                  <a:srgbClr val="222222"/>
-                </a:solidFill>
-                <a:latin typeface="맑은 고딕"/>
-              </a:rPr>
-              <a:t>•  파일 번호는 양쪽 모두 **14**, 크기도 20MB로 같다</a:t>
-            </a:r>
-          </a:p>
-          <a:p>
-            <a:pPr algn="l">
-              <a:spcAft>
-                <a:spcPts val="1000"/>
-              </a:spcAft>
-            </a:pPr>
-            <a:r>
-              <a:rPr sz="1700" b="0">
-                <a:solidFill>
-                  <a:srgbClr val="222222"/>
-                </a:solidFill>
-                <a:latin typeface="맑은 고딕"/>
-              </a:rPr>
-              <a:t>•  **대응을 유지하는 것은 이름이 아니라 파일 번호**</a:t>
+                <a:spcPts val="800"/>
+              </a:spcAft>
+            </a:pPr>
+            <a:r>
+              <a:rPr sz="1600" b="0">
+                <a:solidFill>
+                  <a:srgbClr val="FFFFFF"/>
+                </a:solidFill>
+                <a:latin typeface="맑은 고딕"/>
+              </a:rPr>
+              <a:t>•  AUTO와 MANUAL의 차이</a:t>
+            </a:r>
+          </a:p>
+          <a:p>
+            <a:pPr algn="l">
+              <a:spcAft>
+                <a:spcPts val="800"/>
+              </a:spcAft>
+            </a:pPr>
+            <a:r>
+              <a:rPr sz="1600" b="0">
+                <a:solidFill>
+                  <a:srgbClr val="FFFFFF"/>
+                </a:solidFill>
+                <a:latin typeface="맑은 고딕"/>
+              </a:rPr>
+              <a:t>•  새 파일 이름이 정해지는 순서</a:t>
+            </a:r>
+          </a:p>
+          <a:p>
+            <a:pPr algn="l">
+              <a:spcAft>
+                <a:spcPts val="800"/>
+              </a:spcAft>
+            </a:pPr>
+            <a:r>
+              <a:rPr sz="1600" b="0">
+                <a:solidFill>
+                  <a:srgbClr val="FFFFFF"/>
+                </a:solidFill>
+                <a:latin typeface="맑은 고딕"/>
+              </a:rPr>
+              <a:t>•  AUTO에서 막히는 명령</a:t>
             </a:r>
           </a:p>
         </p:txBody>
